--- a/app/docs/발표자료_EBS_요구자료대응에이전트.pptx
+++ b/app/docs/발표자료_EBS_요구자료대응에이전트.pptx
@@ -124,14 +124,14 @@
   <p:extLst>
     <p:ext uri="{521415D9-36F7-43E2-AB2F-B90AF26B5E84}">
       <p14:sectionLst xmlns:p14="http://schemas.microsoft.com/office/powerpoint/2010/main">
-        <p14:section name="개요" id="{d4239c64-a291-43ed-3d8d-cba57531e0cf}">
+        <p14:section name="개요" id="{619a8434-a44e-4794-a71b-a4cfdd0648b3}">
           <p14:sldIdLst>
             <p14:sldId id="256"/>
             <p14:sldId id="257"/>
             <p14:sldId id="258"/>
           </p14:sldIdLst>
         </p14:section>
-        <p14:section name="해결" id="{696b42e0-dbe2-6105-a563-c8921b858069}">
+        <p14:section name="해결" id="{5c32e4b7-7240-ca47-a63e-0be8dd3abd49}">
           <p14:sldIdLst>
             <p14:sldId id="259"/>
             <p14:sldId id="260"/>
@@ -139,7 +139,7 @@
             <p14:sldId id="262"/>
           </p14:sldIdLst>
         </p14:section>
-        <p14:section name="시연" id="{490ddc6b-5adc-3a03-0d30-5400c3362c2c}">
+        <p14:section name="시연" id="{0819b502-4553-d81e-69ac-a7a7c5d7934a}">
           <p14:sldIdLst>
             <p14:sldId id="263"/>
             <p14:sldId id="264"/>
@@ -149,14 +149,14 @@
             <p14:sldId id="268"/>
           </p14:sldIdLst>
         </p14:section>
-        <p14:section name="구현" id="{a7bcae9f-7699-d4b8-f08c-ae198a1b4adc}">
+        <p14:section name="구현" id="{12905801-aaf8-c6ad-0e1b-fb343b4f5df3}">
           <p14:sldIdLst>
             <p14:sldId id="269"/>
             <p14:sldId id="270"/>
             <p14:sldId id="271"/>
           </p14:sldIdLst>
         </p14:section>
-        <p14:section name="마무리" id="{26cc1195-3759-85a0-6d51-28619ca26811}">
+        <p14:section name="마무리" id="{ddb4d5dc-58e2-21db-431c-8b507748adb0}">
           <p14:sldIdLst>
             <p14:sldId id="272"/>
             <p14:sldId id="273"/>
@@ -3591,7 +3591,7 @@
                   <a:schemeClr val="accent5"/>
                 </a:solidFill>
               </a:rPr>
-              <a:t>화면 캡처(규칙 경로, 2026-10-04)</a:t>
+              <a:t>화면 캡처(Claude 경로 · claude-sonnet-4-6, 2026-10-04)</a:t>
             </a:r>
             <a:endParaRPr lang="en-US" sz="1000" dirty="0"/>
           </a:p>
@@ -5176,7 +5176,7 @@
                   <a:schemeClr val="accent5"/>
                 </a:solidFill>
               </a:rPr>
-              <a:t>화면 캡처(규칙 경로, 2026-10-04)</a:t>
+              <a:t>화면 캡처(Claude 경로 · claude-sonnet-4-6, 2026-10-04)</a:t>
             </a:r>
             <a:endParaRPr lang="en-US" sz="1000" dirty="0"/>
           </a:p>
@@ -7164,7 +7164,7 @@
                   <a:schemeClr val="accent5"/>
                 </a:solidFill>
               </a:rPr>
-              <a:t>화면 캡처(규칙 경로, 2026-10-04)</a:t>
+              <a:t>화면 캡처(Claude 경로 · claude-sonnet-4-6, 2026-10-04)</a:t>
             </a:r>
             <a:endParaRPr lang="en-US" sz="1000" dirty="0"/>
           </a:p>
@@ -7258,7 +7258,7 @@
                   <a:schemeClr val="tx1"/>
                 </a:solidFill>
               </a:rPr>
-              <a:t>API 키가 없으면 키워드 검색으로 동작(캡처는 키 없는 상태)</a:t>
+              <a:t>실호출: '감사실' 이력이 없음을 먼저 밝히고, 두 제출본 값을 나란히 보여 주며 차이 사유 기록을 인용(차이값 계산·추정 표현 없음)</a:t>
             </a:r>
             <a:endParaRPr lang="en-US" sz="1250" dirty="0"/>
           </a:p>
@@ -8712,7 +8712,7 @@
       </p:sp>
       <p:sp>
         <p:nvSpPr>
-          <p:cNvPr id="3" name="stat-요구서 추출 필수 쌍 재현 Claude 경로 · 9사례 · 초과·오탐 0 (2026-09-28, claude-sonnet-4-6)"/>
+          <p:cNvPr id="3" name="stat-요구서 추출 필수 쌍 재현 Claude 경로 · 9사례 · 초과·오탐 0 (9/28·10/04 두 차례, sonnet-4-6)"/>
           <p:cNvSpPr txBox="1"/>
           <p:nvPr/>
         </p:nvSpPr>
@@ -8748,7 +8748,7 @@
       </p:sp>
       <p:sp>
         <p:nvSpPr>
-          <p:cNvPr id="4" name="stat-label-요구서 추출 필수 쌍 재현 Claude 경로 · 9사례 · 초과·오탐 0 (2026-09-28, claude-sonnet-4-6)"/>
+          <p:cNvPr id="4" name="stat-label-요구서 추출 필수 쌍 재현 Claude 경로 · 9사례 · 초과·오탐 0 (9/28·10/04 두 차례, sonnet-4-6)"/>
           <p:cNvSpPr txBox="1"/>
           <p:nvPr/>
         </p:nvSpPr>
@@ -8804,7 +8804,7 @@
                   <a:schemeClr val="accent5"/>
                 </a:solidFill>
               </a:rPr>
-              <a:t>(2026-09-28, claude-sonnet-4-6)</a:t>
+              <a:t>(9/28·10/04 두 차례, sonnet-4-6)</a:t>
             </a:r>
             <a:endParaRPr lang="en-US" sz="1200" dirty="0"/>
           </a:p>
@@ -8812,7 +8812,7 @@
       </p:sp>
       <p:sp>
         <p:nvSpPr>
-          <p:cNvPr id="5" name="stat-요구서 1건 추출 평균 지연 (9건, 입력 10,872 · 출력 2,711 토큰)"/>
+          <p:cNvPr id="5" name="stat-요구서 1건 추출 평균 지연 (10/04, 9건, JSON 스키마 포함)"/>
           <p:cNvSpPr txBox="1"/>
           <p:nvPr/>
         </p:nvSpPr>
@@ -8840,7 +8840,7 @@
                   <a:schemeClr val="accent1"/>
                 </a:solidFill>
               </a:rPr>
-              <a:t>3.8초</a:t>
+              <a:t>4.6초</a:t>
             </a:r>
             <a:endParaRPr lang="en-US" sz="4000" dirty="0"/>
           </a:p>
@@ -8848,7 +8848,7 @@
       </p:sp>
       <p:sp>
         <p:nvSpPr>
-          <p:cNvPr id="6" name="stat-label-요구서 1건 추출 평균 지연 (9건, 입력 10,872 · 출력 2,711 토큰)"/>
+          <p:cNvPr id="6" name="stat-label-요구서 1건 추출 평균 지연 (10/04, 9건, JSON 스키마 포함)"/>
           <p:cNvSpPr txBox="1"/>
           <p:nvPr/>
         </p:nvSpPr>
@@ -8890,7 +8890,7 @@
                   <a:schemeClr val="accent5"/>
                 </a:solidFill>
               </a:rPr>
-              <a:t>(9건, 입력 10,872 · 출력 2,711 토큰)</a:t>
+              <a:t>(10/04, 9건, JSON 스키마 포함)</a:t>
             </a:r>
             <a:endParaRPr lang="en-US" sz="1200" dirty="0"/>
           </a:p>
@@ -9541,7 +9541,7 @@
                             <a:srgbClr val="1B2A41"/>
                           </a:solidFill>
                         </a:rPr>
-                        <a:t>1차 24/25 → 연도 보완 규칙 후 2차 25/25</a:t>
+                        <a:t>9/28 24/25 → 연도 규칙 보완 후 25/25 · 10/04 구조화 출력 적용 후 25/25(sonnet-5-5도 25/25)</a:t>
                       </a:r>
                       <a:endParaRPr lang="en-US" sz="1000" dirty="0"/>
                     </a:p>
@@ -10220,7 +10220,7 @@
                             <a:srgbClr val="1B2A41"/>
                           </a:solidFill>
                         </a:rPr>
-                        <a:t>AI 보조 3종</a:t>
+                        <a:t>AI 보조 3종 실호출</a:t>
                       </a:r>
                       <a:endParaRPr lang="en-US" sz="1000" dirty="0"/>
                     </a:p>
@@ -10281,7 +10281,7 @@
                             <a:srgbClr val="1B2A41"/>
                           </a:solidFill>
                         </a:rPr>
-                        <a:t>규칙 경로 동작 확인, 도구 루프는 가짜 클라이언트로 다중 호출·오류·한도·모델 대체 검증</a:t>
+                        <a:t>③ 후보 전부 단서·과거 사유 인용 · ④ 1순위 질문 '타 기관 제출값과의 차이' · ⑧ 요구번호·제출일 명시, 없는 이력은 '없음'</a:t>
                       </a:r>
                       <a:endParaRPr lang="en-US" sz="1000" dirty="0"/>
                     </a:p>
@@ -10342,7 +10342,7 @@
                             <a:srgbClr val="1B2A41"/>
                           </a:solidFill>
                         </a:rPr>
-                        <a:t>실제 모델 호출 결과는 키 넣고 확인 [확인 필요]</a:t>
+                        <a:t>2026-10-04 claude-sonnet-4-6. 지연: 후보 15초·초안 12초·후속 질문 23~28초·질의 6~25초</a:t>
                       </a:r>
                       <a:endParaRPr lang="en-US" sz="1000" dirty="0"/>
                     </a:p>
@@ -10742,7 +10742,7 @@
       </p:sp>
       <p:sp>
         <p:nvSpPr>
-          <p:cNvPr id="8" name="stat-요구서 1건 추출 (입력 1.2k · 출력 0.3k 토큰)"/>
+          <p:cNvPr id="8" name="stat-요구서 1건 추출 (입력 2.0k · 출력 0.3k 토큰, 스키마 포함)"/>
           <p:cNvSpPr txBox="1"/>
           <p:nvPr/>
         </p:nvSpPr>
@@ -10770,7 +10770,7 @@
                   <a:schemeClr val="accent1"/>
                 </a:solidFill>
               </a:rPr>
-              <a:t>≈ $0.008</a:t>
+              <a:t>≈ $0.011</a:t>
             </a:r>
             <a:endParaRPr lang="en-US" sz="3000" dirty="0"/>
           </a:p>
@@ -10778,7 +10778,7 @@
       </p:sp>
       <p:sp>
         <p:nvSpPr>
-          <p:cNvPr id="9" name="stat-label-요구서 1건 추출 (입력 1.2k · 출력 0.3k 토큰)"/>
+          <p:cNvPr id="9" name="stat-label-요구서 1건 추출 (입력 2.0k · 출력 0.3k 토큰, 스키마 포함)"/>
           <p:cNvSpPr txBox="1"/>
           <p:nvPr/>
         </p:nvSpPr>
@@ -10820,7 +10820,7 @@
                   <a:schemeClr val="accent5"/>
                 </a:solidFill>
               </a:rPr>
-              <a:t>(입력 1.2k · 출력 0.3k 토큰)</a:t>
+              <a:t>(입력 2.0k · 출력 0.3k 토큰, 스키마 포함)</a:t>
             </a:r>
             <a:endParaRPr lang="en-US" sz="1200" dirty="0"/>
           </a:p>
@@ -10828,7 +10828,7 @@
       </p:sp>
       <p:sp>
         <p:nvSpPr>
-          <p:cNvPr id="10" name="stat-시연 1회(호출 약 20회, 입력 3만 · 출력 8천 토큰)"/>
+          <p:cNvPr id="10" name="stat-시연 1회(14회 호출, 입력 37.5k · 출력 6.7k 토큰 실측)"/>
           <p:cNvSpPr txBox="1"/>
           <p:nvPr/>
         </p:nvSpPr>
@@ -10864,7 +10864,7 @@
       </p:sp>
       <p:sp>
         <p:nvSpPr>
-          <p:cNvPr id="11" name="stat-label-시연 1회(호출 약 20회, 입력 3만 · 출력 8천 토큰)"/>
+          <p:cNvPr id="11" name="stat-label-시연 1회(14회 호출, 입력 37.5k · 출력 6.7k 토큰 실측)"/>
           <p:cNvSpPr txBox="1"/>
           <p:nvPr/>
         </p:nvSpPr>
@@ -10892,7 +10892,7 @@
                   <a:schemeClr val="accent5"/>
                 </a:solidFill>
               </a:rPr>
-              <a:t>시연 1회(호출 약 20회,</a:t>
+              <a:t>시연 1회(14회 호출,</a:t>
             </a:r>
             <a:endParaRPr lang="en-US" sz="1200" dirty="0"/>
           </a:p>
@@ -10906,7 +10906,7 @@
                   <a:schemeClr val="accent5"/>
                 </a:solidFill>
               </a:rPr>
-              <a:t>입력 3만 · 출력 8천 토큰)</a:t>
+              <a:t>입력 37.5k · 출력 6.7k 토큰 실측)</a:t>
             </a:r>
             <a:endParaRPr lang="en-US" sz="1200" dirty="0"/>
           </a:p>
@@ -10964,7 +10964,7 @@
                   <a:schemeClr val="tx1"/>
                 </a:solidFill>
               </a:rPr>
-              <a:t>설정 화면 연결 테스트에서 모델별 단가와 세션 누적 추정 비용을 바로 확인</a:t>
+              <a:t>설정 화면에서 모델별 단가·호출별 추정 비용 확인. sonnet-5-5도 25/25였으나 지연·출력 토큰이 커서 기본은 sonnet-4-6</a:t>
             </a:r>
             <a:endParaRPr lang="en-US" sz="1150" dirty="0"/>
           </a:p>
@@ -16662,7 +16662,7 @@
                   <a:schemeClr val="accent5"/>
                 </a:solidFill>
               </a:rPr>
-              <a:t>화면 캡처(규칙 경로, 2026-10-04)</a:t>
+              <a:t>화면 캡처(Claude 경로 · claude-sonnet-4-6, 2026-10-04)</a:t>
             </a:r>
             <a:endParaRPr lang="en-US" sz="1000" dirty="0"/>
           </a:p>

--- a/app/docs/발표자료_EBS_요구자료대응에이전트.pptx
+++ b/app/docs/발표자료_EBS_요구자료대응에이전트.pptx
@@ -124,14 +124,14 @@
   <p:extLst>
     <p:ext uri="{521415D9-36F7-43E2-AB2F-B90AF26B5E84}">
       <p14:sectionLst xmlns:p14="http://schemas.microsoft.com/office/powerpoint/2010/main">
-        <p14:section name="개요" id="{619a8434-a44e-4794-a71b-a4cfdd0648b3}">
+        <p14:section name="개요" id="{e2ee04eb-d44f-80f0-cd3d-73ec3240d160}">
           <p14:sldIdLst>
             <p14:sldId id="256"/>
             <p14:sldId id="257"/>
             <p14:sldId id="258"/>
           </p14:sldIdLst>
         </p14:section>
-        <p14:section name="해결" id="{5c32e4b7-7240-ca47-a63e-0be8dd3abd49}">
+        <p14:section name="해결" id="{4c57d932-fc2b-eaed-9163-2d163325a020}">
           <p14:sldIdLst>
             <p14:sldId id="259"/>
             <p14:sldId id="260"/>
@@ -139,7 +139,7 @@
             <p14:sldId id="262"/>
           </p14:sldIdLst>
         </p14:section>
-        <p14:section name="시연" id="{0819b502-4553-d81e-69ac-a7a7c5d7934a}">
+        <p14:section name="시연" id="{99afd00f-22fc-5ee6-7caf-1cea6ebd7e58}">
           <p14:sldIdLst>
             <p14:sldId id="263"/>
             <p14:sldId id="264"/>
@@ -149,14 +149,14 @@
             <p14:sldId id="268"/>
           </p14:sldIdLst>
         </p14:section>
-        <p14:section name="구현" id="{12905801-aaf8-c6ad-0e1b-fb343b4f5df3}">
+        <p14:section name="구현" id="{db75f334-db58-ed06-a492-84be1e9e6821}">
           <p14:sldIdLst>
             <p14:sldId id="269"/>
             <p14:sldId id="270"/>
             <p14:sldId id="271"/>
           </p14:sldIdLst>
         </p14:section>
-        <p14:section name="마무리" id="{ddb4d5dc-58e2-21db-431c-8b507748adb0}">
+        <p14:section name="마무리" id="{33a92a68-2533-4850-d7fe-f52c0c322e8a}">
           <p14:sldIdLst>
             <p14:sldId id="272"/>
             <p14:sldId id="273"/>
@@ -8206,7 +8206,7 @@
                   <a:schemeClr val="tx1"/>
                 </a:solidFill>
               </a:rPr>
-              <a:t>run_checks.py: ruff → pytest 45건 → 추출 품질 점검(규칙/Claude) → 화면 흐름 ①~⑧  ·  make_submission_zip.py  ·  capture_screens.py</a:t>
+              <a:t>run_checks.py: ruff → pytest 55건 → 추출 품질 점검(규칙/Claude) → 화면 흐름 ①~⑧  ·  make_submission_zip.py  ·  capture_screens.py</a:t>
             </a:r>
             <a:endParaRPr lang="en-US" sz="1050" dirty="0"/>
           </a:p>
@@ -8898,7 +8898,7 @@
       </p:sp>
       <p:sp>
         <p:nvSpPr>
-          <p:cNvPr id="7" name="stat-pytest 단위 테스트 통과 (추출·대조·HWPX·초안·LLM·도구 루프·사유 후보·후속 질문)"/>
+          <p:cNvPr id="7" name="stat-pytest 단위 테스트 통과 (모듈 테스트 45 + 코드 리뷰 회귀 10)"/>
           <p:cNvSpPr txBox="1"/>
           <p:nvPr/>
         </p:nvSpPr>
@@ -8926,7 +8926,7 @@
                   <a:schemeClr val="accent1"/>
                 </a:solidFill>
               </a:rPr>
-              <a:t>45</a:t>
+              <a:t>55</a:t>
             </a:r>
             <a:endParaRPr lang="en-US" sz="4000" dirty="0"/>
           </a:p>
@@ -8934,7 +8934,7 @@
       </p:sp>
       <p:sp>
         <p:nvSpPr>
-          <p:cNvPr id="8" name="stat-label-pytest 단위 테스트 통과 (추출·대조·HWPX·초안·LLM·도구 루프·사유 후보·후속 질문)"/>
+          <p:cNvPr id="8" name="stat-label-pytest 단위 테스트 통과 (모듈 테스트 45 + 코드 리뷰 회귀 10)"/>
           <p:cNvSpPr txBox="1"/>
           <p:nvPr/>
         </p:nvSpPr>
@@ -8976,7 +8976,7 @@
                   <a:schemeClr val="accent5"/>
                 </a:solidFill>
               </a:rPr>
-              <a:t>(추출·대조·HWPX·초안·LLM·도구 루프·사유 후보·후속 질문)</a:t>
+              <a:t>(모듈 테스트 45 + 코드 리뷰 회귀 10)</a:t>
             </a:r>
             <a:endParaRPr lang="en-US" sz="1200" dirty="0"/>
           </a:p>
@@ -9083,7 +9083,7 @@
           </p:nvPr>
         </p:nvGraphicFramePr>
         <p:xfrm>
-          <a:off x="548640" y="3017520"/>
+          <a:off x="548640" y="2926080"/>
           <a:ext cx="11064240" cy="914400"/>
         </p:xfrm>
         <a:graphic>
@@ -9105,14 +9105,14 @@
                         <a:buNone/>
                       </a:pPr>
                       <a:r>
-                        <a:rPr lang="en-US" sz="1000" b="1" dirty="0">
+                        <a:rPr lang="en-US" sz="950" b="1" dirty="0">
                           <a:solidFill>
                             <a:srgbClr val="FFFFFF"/>
                           </a:solidFill>
                         </a:rPr>
                         <a:t>항목</a:t>
                       </a:r>
-                      <a:endParaRPr lang="en-US" sz="1000" dirty="0"/>
+                      <a:endParaRPr lang="en-US" sz="950" dirty="0"/>
                     </a:p>
                   </a:txBody>
                   <a:tcPr marL="54864" marR="54864" marT="54864" marB="54864" anchor="ctr">
@@ -9166,14 +9166,14 @@
                         <a:buNone/>
                       </a:pPr>
                       <a:r>
-                        <a:rPr lang="en-US" sz="1000" b="1" dirty="0">
+                        <a:rPr lang="en-US" sz="950" b="1" dirty="0">
                           <a:solidFill>
                             <a:srgbClr val="FFFFFF"/>
                           </a:solidFill>
                         </a:rPr>
                         <a:t>결과</a:t>
                       </a:r>
-                      <a:endParaRPr lang="en-US" sz="1000" dirty="0"/>
+                      <a:endParaRPr lang="en-US" sz="950" dirty="0"/>
                     </a:p>
                   </a:txBody>
                   <a:tcPr marL="54864" marR="54864" marT="54864" marB="54864" anchor="ctr">
@@ -9227,14 +9227,14 @@
                         <a:buNone/>
                       </a:pPr>
                       <a:r>
-                        <a:rPr lang="en-US" sz="1000" b="1" dirty="0">
+                        <a:rPr lang="en-US" sz="950" b="1" dirty="0">
                           <a:solidFill>
                             <a:srgbClr val="FFFFFF"/>
                           </a:solidFill>
                         </a:rPr>
                         <a:t>비고</a:t>
                       </a:r>
-                      <a:endParaRPr lang="en-US" sz="1000" dirty="0"/>
+                      <a:endParaRPr lang="en-US" sz="950" dirty="0"/>
                     </a:p>
                   </a:txBody>
                   <a:tcPr marL="54864" marR="54864" marT="54864" marB="54864" anchor="ctr">
@@ -9290,14 +9290,14 @@
                         <a:buNone/>
                       </a:pPr>
                       <a:r>
-                        <a:rPr lang="en-US" sz="1000" dirty="0">
+                        <a:rPr lang="en-US" sz="950" dirty="0">
                           <a:solidFill>
                             <a:srgbClr val="1B2A41"/>
                           </a:solidFill>
                         </a:rPr>
                         <a:t>추출 품질(규칙 경로)</a:t>
                       </a:r>
-                      <a:endParaRPr lang="en-US" sz="1000" dirty="0"/>
+                      <a:endParaRPr lang="en-US" sz="950" dirty="0"/>
                     </a:p>
                   </a:txBody>
                   <a:tcPr marL="54864" marR="54864" marT="54864" marB="54864" anchor="ctr">
@@ -9351,14 +9351,14 @@
                         <a:buNone/>
                       </a:pPr>
                       <a:r>
-                        <a:rPr lang="en-US" sz="1000" dirty="0">
+                        <a:rPr lang="en-US" sz="950" dirty="0">
                           <a:solidFill>
                             <a:srgbClr val="1B2A41"/>
                           </a:solidFill>
                         </a:rPr>
                         <a:t>9사례 25/25, 초과·오탐 0</a:t>
                       </a:r>
-                      <a:endParaRPr lang="en-US" sz="1000" dirty="0"/>
+                      <a:endParaRPr lang="en-US" sz="950" dirty="0"/>
                     </a:p>
                   </a:txBody>
                   <a:tcPr marL="54864" marR="54864" marT="54864" marB="54864" anchor="ctr">
@@ -9412,14 +9412,14 @@
                         <a:buNone/>
                       </a:pPr>
                       <a:r>
-                        <a:rPr lang="en-US" sz="1000" dirty="0">
+                        <a:rPr lang="en-US" sz="950" dirty="0">
                           <a:solidFill>
                             <a:srgbClr val="1B2A41"/>
                           </a:solidFill>
                         </a:rPr>
                         <a:t>규칙을 사례에 맞춰 조정했으므로 참고치</a:t>
                       </a:r>
-                      <a:endParaRPr lang="en-US" sz="1000" dirty="0"/>
+                      <a:endParaRPr lang="en-US" sz="950" dirty="0"/>
                     </a:p>
                   </a:txBody>
                   <a:tcPr marL="54864" marR="54864" marT="54864" marB="54864" anchor="ctr">
@@ -9475,14 +9475,14 @@
                         <a:buNone/>
                       </a:pPr>
                       <a:r>
-                        <a:rPr lang="en-US" sz="1000" dirty="0">
+                        <a:rPr lang="en-US" sz="950" dirty="0">
                           <a:solidFill>
                             <a:srgbClr val="1B2A41"/>
                           </a:solidFill>
                         </a:rPr>
                         <a:t>추출 품질(Claude 경로)</a:t>
                       </a:r>
-                      <a:endParaRPr lang="en-US" sz="1000" dirty="0"/>
+                      <a:endParaRPr lang="en-US" sz="950" dirty="0"/>
                     </a:p>
                   </a:txBody>
                   <a:tcPr marL="54864" marR="54864" marT="54864" marB="54864" anchor="ctr">
@@ -9536,14 +9536,14 @@
                         <a:buNone/>
                       </a:pPr>
                       <a:r>
-                        <a:rPr lang="en-US" sz="1000" dirty="0">
+                        <a:rPr lang="en-US" sz="950" dirty="0">
                           <a:solidFill>
                             <a:srgbClr val="1B2A41"/>
                           </a:solidFill>
                         </a:rPr>
                         <a:t>9/28 24/25 → 연도 규칙 보완 후 25/25 · 10/04 구조화 출력 적용 후 25/25(sonnet-5-5도 25/25)</a:t>
                       </a:r>
-                      <a:endParaRPr lang="en-US" sz="1000" dirty="0"/>
+                      <a:endParaRPr lang="en-US" sz="950" dirty="0"/>
                     </a:p>
                   </a:txBody>
                   <a:tcPr marL="54864" marR="54864" marT="54864" marB="54864" anchor="ctr">
@@ -9597,14 +9597,14 @@
                         <a:buNone/>
                       </a:pPr>
                       <a:r>
-                        <a:rPr lang="en-US" sz="1000" dirty="0">
+                        <a:rPr lang="en-US" sz="950" dirty="0">
                           <a:solidFill>
                             <a:srgbClr val="1B2A41"/>
                           </a:solidFill>
                         </a:rPr>
                         <a:t>실전형 5건 포함(국감 표 형식·감사 공문체·메일체·설명형·사전 밖 지표)</a:t>
                       </a:r>
-                      <a:endParaRPr lang="en-US" sz="1000" dirty="0"/>
+                      <a:endParaRPr lang="en-US" sz="950" dirty="0"/>
                     </a:p>
                   </a:txBody>
                   <a:tcPr marL="54864" marR="54864" marT="54864" marB="54864" anchor="ctr">
@@ -9660,14 +9660,14 @@
                         <a:buNone/>
                       </a:pPr>
                       <a:r>
-                        <a:rPr lang="en-US" sz="1000" dirty="0">
+                        <a:rPr lang="en-US" sz="950" dirty="0">
                           <a:solidFill>
                             <a:srgbClr val="1B2A41"/>
                           </a:solidFill>
                         </a:rPr>
                         <a:t>초안 원칙 준수</a:t>
                       </a:r>
-                      <a:endParaRPr lang="en-US" sz="1000" dirty="0"/>
+                      <a:endParaRPr lang="en-US" sz="950" dirty="0"/>
                     </a:p>
                   </a:txBody>
                   <a:tcPr marL="54864" marR="54864" marT="54864" marB="54864" anchor="ctr">
@@ -9721,14 +9721,14 @@
                         <a:buNone/>
                       </a:pPr>
                       <a:r>
-                        <a:rPr lang="en-US" sz="1000" dirty="0">
+                        <a:rPr lang="en-US" sz="950" dirty="0">
                           <a:solidFill>
                             <a:srgbClr val="1B2A41"/>
                           </a:solidFill>
                         </a:rPr>
                         <a:t>평균·증감 계산 없음, 12개 센터 값 표와 일치, 없는 항목 [확인 필요]</a:t>
                       </a:r>
-                      <a:endParaRPr lang="en-US" sz="1000" dirty="0"/>
+                      <a:endParaRPr lang="en-US" sz="950" dirty="0"/>
                     </a:p>
                   </a:txBody>
                   <a:tcPr marL="54864" marR="54864" marT="54864" marB="54864" anchor="ctr">
@@ -9782,14 +9782,14 @@
                         <a:buNone/>
                       </a:pPr>
                       <a:r>
-                        <a:rPr lang="en-US" sz="1000" dirty="0">
+                        <a:rPr lang="en-US" sz="950" dirty="0">
                           <a:solidFill>
                             <a:srgbClr val="1B2A41"/>
                           </a:solidFill>
                         </a:rPr>
                         <a:t>2026-09-28 육안 확인, 초안·추가 점검 각 약 8초</a:t>
                       </a:r>
-                      <a:endParaRPr lang="en-US" sz="1000" dirty="0"/>
+                      <a:endParaRPr lang="en-US" sz="950" dirty="0"/>
                     </a:p>
                   </a:txBody>
                   <a:tcPr marL="54864" marR="54864" marT="54864" marB="54864" anchor="ctr">
@@ -9845,14 +9845,14 @@
                         <a:buNone/>
                       </a:pPr>
                       <a:r>
-                        <a:rPr lang="en-US" sz="1000" dirty="0">
+                        <a:rPr lang="en-US" sz="950" dirty="0">
                           <a:solidFill>
                             <a:srgbClr val="1B2A41"/>
                           </a:solidFill>
                         </a:rPr>
                         <a:t>HWPX 출력</a:t>
                       </a:r>
-                      <a:endParaRPr lang="en-US" sz="1000" dirty="0"/>
+                      <a:endParaRPr lang="en-US" sz="950" dirty="0"/>
                     </a:p>
                   </a:txBody>
                   <a:tcPr marL="54864" marR="54864" marT="54864" marB="54864" anchor="ctr">
@@ -9906,14 +9906,14 @@
                         <a:buNone/>
                       </a:pPr>
                       <a:r>
-                        <a:rPr lang="en-US" sz="1000" dirty="0">
+                        <a:rPr lang="en-US" sz="950" dirty="0">
                           <a:solidFill>
                             <a:srgbClr val="1B2A41"/>
                           </a:solidFill>
                         </a:rPr>
                         <a:t>12행 표 확장, XML 정형성, 자리표시자 잔존 0</a:t>
                       </a:r>
-                      <a:endParaRPr lang="en-US" sz="1000" dirty="0"/>
+                      <a:endParaRPr lang="en-US" sz="950" dirty="0"/>
                     </a:p>
                   </a:txBody>
                   <a:tcPr marL="54864" marR="54864" marT="54864" marB="54864" anchor="ctr">
@@ -9967,14 +9967,14 @@
                         <a:buNone/>
                       </a:pPr>
                       <a:r>
-                        <a:rPr lang="en-US" sz="1000" dirty="0">
+                        <a:rPr lang="en-US" sz="950" dirty="0">
                           <a:solidFill>
                             <a:srgbClr val="1B2A41"/>
                           </a:solidFill>
                         </a:rPr>
                         <a:t>한글에서 타이핑해 run이 쪼개진 자리표시자도 치환(10-04 보강)</a:t>
                       </a:r>
-                      <a:endParaRPr lang="en-US" sz="1000" dirty="0"/>
+                      <a:endParaRPr lang="en-US" sz="950" dirty="0"/>
                     </a:p>
                   </a:txBody>
                   <a:tcPr marL="54864" marR="54864" marT="54864" marB="54864" anchor="ctr">
@@ -10030,14 +10030,14 @@
                         <a:buNone/>
                       </a:pPr>
                       <a:r>
-                        <a:rPr lang="en-US" sz="1000" dirty="0">
+                        <a:rPr lang="en-US" sz="950" dirty="0">
                           <a:solidFill>
                             <a:srgbClr val="1B2A41"/>
                           </a:solidFill>
                         </a:rPr>
                         <a:t>입력 견고성</a:t>
                       </a:r>
-                      <a:endParaRPr lang="en-US" sz="1000" dirty="0"/>
+                      <a:endParaRPr lang="en-US" sz="950" dirty="0"/>
                     </a:p>
                   </a:txBody>
                   <a:tcPr marL="54864" marR="54864" marT="54864" marB="54864" anchor="ctr">
@@ -10091,14 +10091,14 @@
                         <a:buNone/>
                       </a:pPr>
                       <a:r>
-                        <a:rPr lang="en-US" sz="1000" dirty="0">
+                        <a:rPr lang="en-US" sz="950" dirty="0">
                           <a:solidFill>
                             <a:srgbClr val="1B2A41"/>
                           </a:solidFill>
                         </a:rPr>
                         <a:t>cp949 CSV, '2026. 6. 30.', '67.8%', '1,234', 빈 행, 다중 시트</a:t>
                       </a:r>
-                      <a:endParaRPr lang="en-US" sz="1000" dirty="0"/>
+                      <a:endParaRPr lang="en-US" sz="950" dirty="0"/>
                     </a:p>
                   </a:txBody>
                   <a:tcPr marL="54864" marR="54864" marT="54864" marB="54864" anchor="ctr">
@@ -10152,14 +10152,14 @@
                         <a:buNone/>
                       </a:pPr>
                       <a:r>
-                        <a:rPr lang="en-US" sz="1000" dirty="0">
+                        <a:rPr lang="en-US" sz="950" dirty="0">
                           <a:solidFill>
                             <a:srgbClr val="1B2A41"/>
                           </a:solidFill>
                         </a:rPr>
                         <a:t>오류는 행 번호·허용 컬럼명과 함께 표시</a:t>
                       </a:r>
-                      <a:endParaRPr lang="en-US" sz="1000" dirty="0"/>
+                      <a:endParaRPr lang="en-US" sz="950" dirty="0"/>
                     </a:p>
                   </a:txBody>
                   <a:tcPr marL="54864" marR="54864" marT="54864" marB="54864" anchor="ctr">
@@ -10215,14 +10215,14 @@
                         <a:buNone/>
                       </a:pPr>
                       <a:r>
-                        <a:rPr lang="en-US" sz="1000" dirty="0">
+                        <a:rPr lang="en-US" sz="950" dirty="0">
                           <a:solidFill>
                             <a:srgbClr val="1B2A41"/>
                           </a:solidFill>
                         </a:rPr>
                         <a:t>AI 보조 3종 실호출</a:t>
                       </a:r>
-                      <a:endParaRPr lang="en-US" sz="1000" dirty="0"/>
+                      <a:endParaRPr lang="en-US" sz="950" dirty="0"/>
                     </a:p>
                   </a:txBody>
                   <a:tcPr marL="54864" marR="54864" marT="54864" marB="54864" anchor="ctr">
@@ -10276,14 +10276,14 @@
                         <a:buNone/>
                       </a:pPr>
                       <a:r>
-                        <a:rPr lang="en-US" sz="1000" dirty="0">
+                        <a:rPr lang="en-US" sz="950" dirty="0">
                           <a:solidFill>
                             <a:srgbClr val="1B2A41"/>
                           </a:solidFill>
                         </a:rPr>
                         <a:t>③ 후보 전부 단서·과거 사유 인용 · ④ 1순위 질문 '타 기관 제출값과의 차이' · ⑧ 요구번호·제출일 명시, 없는 이력은 '없음'</a:t>
                       </a:r>
-                      <a:endParaRPr lang="en-US" sz="1000" dirty="0"/>
+                      <a:endParaRPr lang="en-US" sz="950" dirty="0"/>
                     </a:p>
                   </a:txBody>
                   <a:tcPr marL="54864" marR="54864" marT="54864" marB="54864" anchor="ctr">
@@ -10337,14 +10337,199 @@
                         <a:buNone/>
                       </a:pPr>
                       <a:r>
-                        <a:rPr lang="en-US" sz="1000" dirty="0">
+                        <a:rPr lang="en-US" sz="950" dirty="0">
                           <a:solidFill>
                             <a:srgbClr val="1B2A41"/>
                           </a:solidFill>
                         </a:rPr>
                         <a:t>2026-10-04 claude-sonnet-4-6. 지연: 후보 15초·초안 12초·후속 질문 23~28초·질의 6~25초</a:t>
                       </a:r>
-                      <a:endParaRPr lang="en-US" sz="1000" dirty="0"/>
+                      <a:endParaRPr lang="en-US" sz="950" dirty="0"/>
+                    </a:p>
+                  </a:txBody>
+                  <a:tcPr marL="54864" marR="54864" marT="54864" marB="54864" anchor="ctr">
+                    <a:lnL w="9525" cap="flat" cmpd="sng" algn="ctr">
+                      <a:solidFill>
+                        <a:srgbClr val="D5E6EA"/>
+                      </a:solidFill>
+                      <a:prstDash val="solid"/>
+                      <a:round/>
+                      <a:headEnd type="none" w="med" len="med"/>
+                      <a:tailEnd type="none" w="med" len="med"/>
+                    </a:lnL>
+                    <a:lnR w="9525" cap="flat" cmpd="sng" algn="ctr">
+                      <a:solidFill>
+                        <a:srgbClr val="D5E6EA"/>
+                      </a:solidFill>
+                      <a:prstDash val="solid"/>
+                      <a:round/>
+                      <a:headEnd type="none" w="med" len="med"/>
+                      <a:tailEnd type="none" w="med" len="med"/>
+                    </a:lnR>
+                    <a:lnT w="9525" cap="flat" cmpd="sng" algn="ctr">
+                      <a:solidFill>
+                        <a:srgbClr val="D5E6EA"/>
+                      </a:solidFill>
+                      <a:prstDash val="solid"/>
+                      <a:round/>
+                      <a:headEnd type="none" w="med" len="med"/>
+                      <a:tailEnd type="none" w="med" len="med"/>
+                    </a:lnT>
+                    <a:lnB w="9525" cap="flat" cmpd="sng" algn="ctr">
+                      <a:solidFill>
+                        <a:srgbClr val="D5E6EA"/>
+                      </a:solidFill>
+                      <a:prstDash val="solid"/>
+                      <a:round/>
+                      <a:headEnd type="none" w="med" len="med"/>
+                      <a:tailEnd type="none" w="med" len="med"/>
+                    </a:lnB>
+                    <a:solidFill>
+                      <a:srgbClr val="FFFFFF"/>
+                    </a:solidFill>
+                  </a:tcPr>
+                </a:tc>
+              </a:tr>
+              <a:tr h="0">
+                <a:tc>
+                  <a:txBody>
+                    <a:bodyPr/>
+                    <a:lstStyle/>
+                    <a:p>
+                      <a:pPr indent="0" marL="0">
+                        <a:buNone/>
+                      </a:pPr>
+                      <a:r>
+                        <a:rPr lang="en-US" sz="950" dirty="0">
+                          <a:solidFill>
+                            <a:srgbClr val="1B2A41"/>
+                          </a:solidFill>
+                        </a:rPr>
+                        <a:t>독립 코드 리뷰</a:t>
+                      </a:r>
+                      <a:endParaRPr lang="en-US" sz="950" dirty="0"/>
+                    </a:p>
+                  </a:txBody>
+                  <a:tcPr marL="54864" marR="54864" marT="54864" marB="54864" anchor="ctr">
+                    <a:lnL w="9525" cap="flat" cmpd="sng" algn="ctr">
+                      <a:solidFill>
+                        <a:srgbClr val="D5E6EA"/>
+                      </a:solidFill>
+                      <a:prstDash val="solid"/>
+                      <a:round/>
+                      <a:headEnd type="none" w="med" len="med"/>
+                      <a:tailEnd type="none" w="med" len="med"/>
+                    </a:lnL>
+                    <a:lnR w="9525" cap="flat" cmpd="sng" algn="ctr">
+                      <a:solidFill>
+                        <a:srgbClr val="D5E6EA"/>
+                      </a:solidFill>
+                      <a:prstDash val="solid"/>
+                      <a:round/>
+                      <a:headEnd type="none" w="med" len="med"/>
+                      <a:tailEnd type="none" w="med" len="med"/>
+                    </a:lnR>
+                    <a:lnT w="9525" cap="flat" cmpd="sng" algn="ctr">
+                      <a:solidFill>
+                        <a:srgbClr val="D5E6EA"/>
+                      </a:solidFill>
+                      <a:prstDash val="solid"/>
+                      <a:round/>
+                      <a:headEnd type="none" w="med" len="med"/>
+                      <a:tailEnd type="none" w="med" len="med"/>
+                    </a:lnT>
+                    <a:lnB w="9525" cap="flat" cmpd="sng" algn="ctr">
+                      <a:solidFill>
+                        <a:srgbClr val="D5E6EA"/>
+                      </a:solidFill>
+                      <a:prstDash val="solid"/>
+                      <a:round/>
+                      <a:headEnd type="none" w="med" len="med"/>
+                      <a:tailEnd type="none" w="med" len="med"/>
+                    </a:lnB>
+                    <a:solidFill>
+                      <a:srgbClr val="FFFFFF"/>
+                    </a:solidFill>
+                  </a:tcPr>
+                </a:tc>
+                <a:tc>
+                  <a:txBody>
+                    <a:bodyPr/>
+                    <a:lstStyle/>
+                    <a:p>
+                      <a:pPr indent="0" marL="0">
+                        <a:buNone/>
+                      </a:pPr>
+                      <a:r>
+                        <a:rPr lang="en-US" sz="950" dirty="0">
+                          <a:solidFill>
+                            <a:srgbClr val="1B2A41"/>
+                          </a:solidFill>
+                        </a:rPr>
+                        <a:t>결함 15건 중 14건 수정(DB 잠금 오판·빈 항목 크래시·모델 설정 미반영·중복 행·엑셀 날짜 단서 등), 회귀 테스트 10건</a:t>
+                      </a:r>
+                      <a:endParaRPr lang="en-US" sz="950" dirty="0"/>
+                    </a:p>
+                  </a:txBody>
+                  <a:tcPr marL="54864" marR="54864" marT="54864" marB="54864" anchor="ctr">
+                    <a:lnL w="9525" cap="flat" cmpd="sng" algn="ctr">
+                      <a:solidFill>
+                        <a:srgbClr val="D5E6EA"/>
+                      </a:solidFill>
+                      <a:prstDash val="solid"/>
+                      <a:round/>
+                      <a:headEnd type="none" w="med" len="med"/>
+                      <a:tailEnd type="none" w="med" len="med"/>
+                    </a:lnL>
+                    <a:lnR w="9525" cap="flat" cmpd="sng" algn="ctr">
+                      <a:solidFill>
+                        <a:srgbClr val="D5E6EA"/>
+                      </a:solidFill>
+                      <a:prstDash val="solid"/>
+                      <a:round/>
+                      <a:headEnd type="none" w="med" len="med"/>
+                      <a:tailEnd type="none" w="med" len="med"/>
+                    </a:lnR>
+                    <a:lnT w="9525" cap="flat" cmpd="sng" algn="ctr">
+                      <a:solidFill>
+                        <a:srgbClr val="D5E6EA"/>
+                      </a:solidFill>
+                      <a:prstDash val="solid"/>
+                      <a:round/>
+                      <a:headEnd type="none" w="med" len="med"/>
+                      <a:tailEnd type="none" w="med" len="med"/>
+                    </a:lnT>
+                    <a:lnB w="9525" cap="flat" cmpd="sng" algn="ctr">
+                      <a:solidFill>
+                        <a:srgbClr val="D5E6EA"/>
+                      </a:solidFill>
+                      <a:prstDash val="solid"/>
+                      <a:round/>
+                      <a:headEnd type="none" w="med" len="med"/>
+                      <a:tailEnd type="none" w="med" len="med"/>
+                    </a:lnB>
+                    <a:solidFill>
+                      <a:srgbClr val="FFFFFF"/>
+                    </a:solidFill>
+                  </a:tcPr>
+                </a:tc>
+                <a:tc>
+                  <a:txBody>
+                    <a:bodyPr/>
+                    <a:lstStyle/>
+                    <a:p>
+                      <a:pPr indent="0" marL="0">
+                        <a:buNone/>
+                      </a:pPr>
+                      <a:r>
+                        <a:rPr lang="en-US" sz="950" dirty="0">
+                          <a:solidFill>
+                            <a:srgbClr val="1B2A41"/>
+                          </a:solidFill>
+                        </a:rPr>
+                        <a:t>미수정 1건: 키를 프로세스 환경변수에 두는 구조(한 PC 한 사람 전제로 명시)</a:t>
+                      </a:r>
+                      <a:endParaRPr lang="en-US" sz="950" dirty="0"/>
                     </a:p>
                   </a:txBody>
                   <a:tcPr marL="54864" marR="54864" marT="54864" marB="54864" anchor="ctr">
@@ -10599,7 +10784,7 @@
                   <a:schemeClr val="tx1"/>
                 </a:solidFill>
               </a:rPr>
-              <a:t>API 키는 환경변수 또는 설정 화면 세션 한정 입력 — 파일에 저장하지 않음</a:t>
+              <a:t>API 키는 환경변수 또는 설정 화면에 이 실행 동안만 입력 — 파일에 저장하지 않음</a:t>
             </a:r>
             <a:endParaRPr lang="en-US" sz="1250" dirty="0"/>
           </a:p>
@@ -10635,7 +10820,7 @@
                   <a:schemeClr val="tx1"/>
                 </a:solidFill>
               </a:rPr>
-              <a:t>개인 단위 원자료(출결 명단)는 올리지 않음. ③ 집계값·④ 초안에서 개인정보 패턴 검사(주민번호·전화·이메일·학생 식별어)</a:t>
+              <a:t>요구서 원문의 전화·이메일·주민번호·계좌 패턴은 Claude 전송 전 자동 마스킹. ⑧ 도구 결과에서 직원 이름 제거. ③ 집계값·④ 초안도 개인정보 패턴 검사</a:t>
             </a:r>
             <a:endParaRPr lang="en-US" sz="1250" dirty="0"/>
           </a:p>

--- a/app/docs/발표자료_EBS_요구자료대응에이전트.pptx
+++ b/app/docs/발표자료_EBS_요구자료대응에이전트.pptx
@@ -124,14 +124,14 @@
   <p:extLst>
     <p:ext uri="{521415D9-36F7-43E2-AB2F-B90AF26B5E84}">
       <p14:sectionLst xmlns:p14="http://schemas.microsoft.com/office/powerpoint/2010/main">
-        <p14:section name="개요" id="{e2ee04eb-d44f-80f0-cd3d-73ec3240d160}">
+        <p14:section name="개요" id="{78dcbfc2-c3cc-d460-eaf3-80cd5d9488d3}">
           <p14:sldIdLst>
             <p14:sldId id="256"/>
             <p14:sldId id="257"/>
             <p14:sldId id="258"/>
           </p14:sldIdLst>
         </p14:section>
-        <p14:section name="해결" id="{4c57d932-fc2b-eaed-9163-2d163325a020}">
+        <p14:section name="해결" id="{4fb9e2bd-54fa-144c-ffc1-9e78b2cfcfda}">
           <p14:sldIdLst>
             <p14:sldId id="259"/>
             <p14:sldId id="260"/>
@@ -139,7 +139,7 @@
             <p14:sldId id="262"/>
           </p14:sldIdLst>
         </p14:section>
-        <p14:section name="시연" id="{99afd00f-22fc-5ee6-7caf-1cea6ebd7e58}">
+        <p14:section name="시연" id="{e1e06635-4c47-ef58-2f42-ca8d4b68f5f2}">
           <p14:sldIdLst>
             <p14:sldId id="263"/>
             <p14:sldId id="264"/>
@@ -149,14 +149,14 @@
             <p14:sldId id="268"/>
           </p14:sldIdLst>
         </p14:section>
-        <p14:section name="구현" id="{db75f334-db58-ed06-a492-84be1e9e6821}">
+        <p14:section name="구현" id="{38fdaddf-ea81-1d3c-8502-3c177348218f}">
           <p14:sldIdLst>
             <p14:sldId id="269"/>
             <p14:sldId id="270"/>
             <p14:sldId id="271"/>
           </p14:sldIdLst>
         </p14:section>
-        <p14:section name="마무리" id="{33a92a68-2533-4850-d7fe-f52c0c322e8a}">
+        <p14:section name="마무리" id="{a6109435-db4b-0245-5c86-ecea5b905c81}">
           <p14:sldIdLst>
             <p14:sldId id="272"/>
             <p14:sldId id="273"/>
@@ -8206,7 +8206,7 @@
                   <a:schemeClr val="tx1"/>
                 </a:solidFill>
               </a:rPr>
-              <a:t>run_checks.py: ruff → pytest 55건 → 추출 품질 점검(규칙/Claude) → 화면 흐름 ①~⑧  ·  make_submission_zip.py  ·  capture_screens.py</a:t>
+              <a:t>run_checks.py: ruff → pytest 58건 → 추출 품질 점검(규칙/Claude) → 화면 흐름 ①~⑧  ·  make_submission_zip.py  ·  capture_screens.py</a:t>
             </a:r>
             <a:endParaRPr lang="en-US" sz="1050" dirty="0"/>
           </a:p>
@@ -8898,7 +8898,7 @@
       </p:sp>
       <p:sp>
         <p:nvSpPr>
-          <p:cNvPr id="7" name="stat-pytest 단위 테스트 통과 (모듈 테스트 45 + 코드 리뷰 회귀 10)"/>
+          <p:cNvPr id="7" name="stat-pytest 단위 테스트 통과 (모듈 45 + 코드 리뷰 회귀 10 + 보안 3)"/>
           <p:cNvSpPr txBox="1"/>
           <p:nvPr/>
         </p:nvSpPr>
@@ -8926,7 +8926,7 @@
                   <a:schemeClr val="accent1"/>
                 </a:solidFill>
               </a:rPr>
-              <a:t>55</a:t>
+              <a:t>58</a:t>
             </a:r>
             <a:endParaRPr lang="en-US" sz="4000" dirty="0"/>
           </a:p>
@@ -8934,7 +8934,7 @@
       </p:sp>
       <p:sp>
         <p:nvSpPr>
-          <p:cNvPr id="8" name="stat-label-pytest 단위 테스트 통과 (모듈 테스트 45 + 코드 리뷰 회귀 10)"/>
+          <p:cNvPr id="8" name="stat-label-pytest 단위 테스트 통과 (모듈 45 + 코드 리뷰 회귀 10 + 보안 3)"/>
           <p:cNvSpPr txBox="1"/>
           <p:nvPr/>
         </p:nvSpPr>
@@ -8976,7 +8976,7 @@
                   <a:schemeClr val="accent5"/>
                 </a:solidFill>
               </a:rPr>
-              <a:t>(모듈 테스트 45 + 코드 리뷰 회귀 10)</a:t>
+              <a:t>(모듈 45 + 코드 리뷰 회귀 10 + 보안 3)</a:t>
             </a:r>
             <a:endParaRPr lang="en-US" sz="1200" dirty="0"/>
           </a:p>

--- a/app/docs/발표자료_EBS_요구자료대응에이전트.pptx
+++ b/app/docs/발표자료_EBS_요구자료대응에이전트.pptx
@@ -124,14 +124,14 @@
   <p:extLst>
     <p:ext uri="{521415D9-36F7-43E2-AB2F-B90AF26B5E84}">
       <p14:sectionLst xmlns:p14="http://schemas.microsoft.com/office/powerpoint/2010/main">
-        <p14:section name="개요" id="{78dcbfc2-c3cc-d460-eaf3-80cd5d9488d3}">
+        <p14:section name="개요" id="{0fa5e062-2ba7-1369-b460-d6f5f85aa796}">
           <p14:sldIdLst>
             <p14:sldId id="256"/>
             <p14:sldId id="257"/>
             <p14:sldId id="258"/>
           </p14:sldIdLst>
         </p14:section>
-        <p14:section name="해결" id="{4fb9e2bd-54fa-144c-ffc1-9e78b2cfcfda}">
+        <p14:section name="해결" id="{5db1d8ca-87b5-e514-b974-980daa56a2b5}">
           <p14:sldIdLst>
             <p14:sldId id="259"/>
             <p14:sldId id="260"/>
@@ -139,7 +139,7 @@
             <p14:sldId id="262"/>
           </p14:sldIdLst>
         </p14:section>
-        <p14:section name="시연" id="{e1e06635-4c47-ef58-2f42-ca8d4b68f5f2}">
+        <p14:section name="시연" id="{57d2e76b-a3ac-2513-df9c-4ecfd1142b63}">
           <p14:sldIdLst>
             <p14:sldId id="263"/>
             <p14:sldId id="264"/>
@@ -149,14 +149,14 @@
             <p14:sldId id="268"/>
           </p14:sldIdLst>
         </p14:section>
-        <p14:section name="구현" id="{38fdaddf-ea81-1d3c-8502-3c177348218f}">
+        <p14:section name="구현" id="{45af5262-431c-3eb2-1ea5-4786c7a2259c}">
           <p14:sldIdLst>
             <p14:sldId id="269"/>
             <p14:sldId id="270"/>
             <p14:sldId id="271"/>
           </p14:sldIdLst>
         </p14:section>
-        <p14:section name="마무리" id="{a6109435-db4b-0245-5c86-ecea5b905c81}">
+        <p14:section name="마무리" id="{dbb47243-9a41-ee9e-e52e-21428fdf25a1}">
           <p14:sldIdLst>
             <p14:sldId id="272"/>
             <p14:sldId id="273"/>
@@ -1006,7 +1006,7 @@
           <a:p>
             <a:r>
               <a:rPr lang="en-US" dirty="0"/>
-              <a:t>서버가 없습니다. SQLite 파일 하나가 이력 전부라서 백업이 곧 운영입니다. API는 설정 화면에서 세션 한정으로 켜고 끕니다.</a:t>
+              <a:t>별도 서버 없이 부서 공용 PC에서 run_server.bat로 열면 같은 망의 PC가 접속합니다. 접속자마다 설정 화면에 자기 키를 넣고, 키는 그 브라우저 세션에만 있습니다. SQLite 파일 하나가 이력 전부라서 백업이 곧 운영입니다. 공급자는 파일 하나로 갈아끼웁니다.</a:t>
             </a:r>
             <a:endParaRPr lang="en-US" dirty="0"/>
           </a:p>
@@ -7366,7 +7366,7 @@
                   <a:schemeClr val="tx1"/>
                 </a:solidFill>
               </a:rPr>
-              <a:t>구조 — PC 한 대에서 끝나고, API는 선택</a:t>
+              <a:t>구조 — 부서 PC 한 대에서 끝나고, AI는 갈아끼우는 모듈</a:t>
             </a:r>
             <a:endParaRPr lang="en-US" sz="2800" dirty="0"/>
           </a:p>
@@ -7429,7 +7429,7 @@
                   <a:schemeClr val="tx2"/>
                 </a:solidFill>
               </a:rPr>
-              <a:t>담당자 PC (Windows) — run.bat 한 번</a:t>
+              <a:t>담당자 PC 또는 부서 공용 PC — run.bat(혼자) / run_server.bat(여럿)</a:t>
             </a:r>
             <a:endParaRPr lang="en-US" sz="1300" dirty="0"/>
           </a:p>
@@ -7542,7 +7542,7 @@
                   <a:schemeClr val="tx1"/>
                 </a:solidFill>
               </a:rPr>
-              <a:t>브라우저 로컬 실행</a:t>
+              <a:t>접속자(브라우저 세션)별 키·모델·호출 기록</a:t>
             </a:r>
             <a:endParaRPr lang="en-US" sz="1050" dirty="0"/>
           </a:p>
@@ -8002,7 +8002,7 @@
       </p:sp>
       <p:sp>
         <p:nvSpPr>
-          <p:cNvPr id="20" name="arch-이력 DB (SQLite 1파일)"/>
+          <p:cNvPr id="20" name="arch-이력 DB (SQLite 1파일, 공유)"/>
           <p:cNvSpPr/>
           <p:nvPr/>
         </p:nvSpPr>
@@ -8029,7 +8029,7 @@
       </p:sp>
       <p:sp>
         <p:nvSpPr>
-          <p:cNvPr id="21" name="arch-t-이력 DB (SQLite 1파일)"/>
+          <p:cNvPr id="21" name="arch-t-이력 DB (SQLite 1파일, 공유)"/>
           <p:cNvSpPr txBox="1"/>
           <p:nvPr/>
         </p:nvSpPr>
@@ -8057,7 +8057,7 @@
                   <a:schemeClr val="tx1"/>
                 </a:solidFill>
               </a:rPr>
-              <a:t>이력 DB (SQLite 1파일)</a:t>
+              <a:t>이력 DB (SQLite 1파일, 공유)</a:t>
             </a:r>
             <a:endParaRPr lang="en-US" sz="1300" dirty="0"/>
           </a:p>
@@ -8065,7 +8065,7 @@
       </p:sp>
       <p:sp>
         <p:nvSpPr>
-          <p:cNvPr id="22" name="arch-b-이력 DB (SQLite 1파일)"/>
+          <p:cNvPr id="22" name="arch-b-이력 DB (SQLite 1파일, 공유)"/>
           <p:cNvSpPr txBox="1"/>
           <p:nvPr/>
         </p:nvSpPr>
@@ -8108,6 +8108,20 @@
                 </a:solidFill>
               </a:rPr>
               <a:t>submission_values(출처) · diff_reasons · drafts · reviews</a:t>
+            </a:r>
+            <a:endParaRPr lang="en-US" sz="1050" dirty="0"/>
+          </a:p>
+          <a:p>
+            <a:pPr indent="0" marL="0">
+              <a:buNone/>
+            </a:pPr>
+            <a:r>
+              <a:rPr lang="en-US" sz="1050" dirty="0">
+                <a:solidFill>
+                  <a:schemeClr val="tx1"/>
+                </a:solidFill>
+              </a:rPr>
+              <a:t>WAL 모드(동시 접속)</a:t>
             </a:r>
             <a:endParaRPr lang="en-US" sz="1050" dirty="0"/>
           </a:p>
@@ -8206,7 +8220,7 @@
                   <a:schemeClr val="tx1"/>
                 </a:solidFill>
               </a:rPr>
-              <a:t>run_checks.py: ruff → pytest 58건 → 추출 품질 점검(규칙/Claude) → 화면 흐름 ①~⑧  ·  make_submission_zip.py  ·  capture_screens.py</a:t>
+              <a:t>run_checks.py: ruff → pytest 64건 → 추출 품질 점검(규칙/Claude) → 화면 흐름 ①~⑧  ·  make_submission_zip.py  ·  capture_screens.py</a:t>
             </a:r>
             <a:endParaRPr lang="en-US" sz="1050" dirty="0"/>
           </a:p>
@@ -8214,7 +8228,7 @@
       </p:sp>
       <p:sp>
         <p:nvSpPr>
-          <p:cNvPr id="26" name="arch-Claude API (선택)"/>
+          <p:cNvPr id="26" name="arch-LLM 공급자 모듈 (선택)"/>
           <p:cNvSpPr/>
           <p:nvPr/>
         </p:nvSpPr>
@@ -8241,7 +8255,7 @@
       </p:sp>
       <p:sp>
         <p:nvSpPr>
-          <p:cNvPr id="27" name="arch-t-Claude API (선택)"/>
+          <p:cNvPr id="27" name="arch-t-LLM 공급자 모듈 (선택)"/>
           <p:cNvSpPr txBox="1"/>
           <p:nvPr/>
         </p:nvSpPr>
@@ -8269,7 +8283,7 @@
                   <a:schemeClr val="bg1"/>
                 </a:solidFill>
               </a:rPr>
-              <a:t>Claude API (선택)</a:t>
+              <a:t>LLM 공급자 모듈 (선택)</a:t>
             </a:r>
             <a:endParaRPr lang="en-US" sz="1300" dirty="0"/>
           </a:p>
@@ -8277,7 +8291,7 @@
       </p:sp>
       <p:sp>
         <p:nvSpPr>
-          <p:cNvPr id="28" name="arch-b-Claude API (선택)"/>
+          <p:cNvPr id="28" name="arch-b-LLM 공급자 모듈 (선택)"/>
           <p:cNvSpPr txBox="1"/>
           <p:nvPr/>
         </p:nvSpPr>
@@ -8305,7 +8319,7 @@
                   <a:schemeClr val="bg1"/>
                 </a:solidFill>
               </a:rPr>
-              <a:t>llm.py 공통 호출</a:t>
+              <a:t>llm.py 공통 호출 → providers.py 플러그인</a:t>
             </a:r>
             <a:endParaRPr lang="en-US" sz="1050" dirty="0"/>
           </a:p>
@@ -8319,7 +8333,7 @@
                   <a:schemeClr val="bg1"/>
                 </a:solidFill>
               </a:rPr>
-              <a:t>· 모델 자동 대체(404 → 다음 후보)</a:t>
+              <a:t>· 기본 Anthropic Claude, provider_*.py 파일 하나로 사내 게이트웨이 등 교체</a:t>
             </a:r>
             <a:endParaRPr lang="en-US" sz="1050" dirty="0"/>
           </a:p>
@@ -8333,7 +8347,7 @@
                   <a:schemeClr val="bg1"/>
                 </a:solidFill>
               </a:rPr>
-              <a:t>· 구조화 출력(JSON 스키마) + 미지원 시 텍스트 파싱</a:t>
+              <a:t>· 모델 자동 대체, 구조화 출력 + 텍스트 파싱 대체</a:t>
             </a:r>
             <a:endParaRPr lang="en-US" sz="1050" dirty="0"/>
           </a:p>
@@ -8347,7 +8361,7 @@
                   <a:schemeClr val="bg1"/>
                 </a:solidFill>
               </a:rPr>
-              <a:t>· 도구 호출 루프(⑧), 429·5xx 재시도, 타임아웃</a:t>
+              <a:t>· 도구 호출 루프(⑧), 재시도·타임아웃</a:t>
             </a:r>
             <a:endParaRPr lang="en-US" sz="1050" dirty="0"/>
           </a:p>
@@ -8361,7 +8375,7 @@
                   <a:schemeClr val="bg1"/>
                 </a:solidFill>
               </a:rPr>
-              <a:t>· 호출별 모델·지연·토큰·추정 비용 기록</a:t>
+              <a:t>· 호출별 모델·지연·토큰·추정 비용(세션별)</a:t>
             </a:r>
             <a:endParaRPr lang="en-US" sz="1050" dirty="0"/>
           </a:p>
@@ -8898,7 +8912,7 @@
       </p:sp>
       <p:sp>
         <p:nvSpPr>
-          <p:cNvPr id="7" name="stat-pytest 단위 테스트 통과 (모듈 45 + 코드 리뷰 회귀 10 + 보안 3)"/>
+          <p:cNvPr id="7" name="stat-pytest 단위 테스트 통과 (모듈 45 + 리뷰 회귀 10 + 보안 3 + 세션·공급자 6)"/>
           <p:cNvSpPr txBox="1"/>
           <p:nvPr/>
         </p:nvSpPr>
@@ -8926,7 +8940,7 @@
                   <a:schemeClr val="accent1"/>
                 </a:solidFill>
               </a:rPr>
-              <a:t>58</a:t>
+              <a:t>64</a:t>
             </a:r>
             <a:endParaRPr lang="en-US" sz="4000" dirty="0"/>
           </a:p>
@@ -8934,7 +8948,7 @@
       </p:sp>
       <p:sp>
         <p:nvSpPr>
-          <p:cNvPr id="8" name="stat-label-pytest 단위 테스트 통과 (모듈 45 + 코드 리뷰 회귀 10 + 보안 3)"/>
+          <p:cNvPr id="8" name="stat-label-pytest 단위 테스트 통과 (모듈 45 + 리뷰 회귀 10 + 보안 3 + 세션·공급자 6)"/>
           <p:cNvSpPr txBox="1"/>
           <p:nvPr/>
         </p:nvSpPr>
@@ -8976,7 +8990,7 @@
                   <a:schemeClr val="accent5"/>
                 </a:solidFill>
               </a:rPr>
-              <a:t>(모듈 45 + 코드 리뷰 회귀 10 + 보안 3)</a:t>
+              <a:t>(모듈 45 + 리뷰 회귀 10 + 보안 3 + 세션·공급자 6)</a:t>
             </a:r>
             <a:endParaRPr lang="en-US" sz="1200" dirty="0"/>
           </a:p>
@@ -10527,7 +10541,7 @@
                             <a:srgbClr val="1B2A41"/>
                           </a:solidFill>
                         </a:rPr>
-                        <a:t>미수정 1건: 키를 프로세스 환경변수에 두는 구조(한 PC 한 사람 전제로 명시)</a:t>
+                        <a:t>남은 1건(키를 프로세스 환경변수에 두는 구조)은 세션별 자격증명으로 바꿔 해소</a:t>
                       </a:r>
                       <a:endParaRPr lang="en-US" sz="950" dirty="0"/>
                     </a:p>
@@ -10784,7 +10798,7 @@
                   <a:schemeClr val="tx1"/>
                 </a:solidFill>
               </a:rPr>
-              <a:t>API 키는 환경변수 또는 설정 화면에 이 실행 동안만 입력 — 파일에 저장하지 않음</a:t>
+              <a:t>API 키는 접속자가 설정 화면에 입력, 그 브라우저 세션에만 보관 — 서버 파일 저장·다른 접속자 공유 없음(운영자 공통 키는 서버 환경변수)</a:t>
             </a:r>
             <a:endParaRPr lang="en-US" sz="1250" dirty="0"/>
           </a:p>
@@ -10802,7 +10816,7 @@
                   <a:schemeClr val="tx1"/>
                 </a:solidFill>
               </a:rPr>
-              <a:t>이력 DB는 PC 로컬 SQLite. 외부로는 요구서 문안·센터 단위 확정값·입력 사유·근거 메타, ⑧은 질문과 조회된 레코드만 전송. 조회 도구는 읽기 전용</a:t>
+              <a:t>이력 DB는 사내 PC의 SQLite. 외부로는 요구서 문안·센터 단위 확정값·입력 사유·근거 메타, ⑧은 질문과 조회된 레코드만 전송. 조회 도구는 읽기 전용</a:t>
             </a:r>
             <a:endParaRPr lang="en-US" sz="1250" dirty="0"/>
           </a:p>
@@ -10856,7 +10870,7 @@
                   <a:schemeClr val="tx1"/>
                 </a:solidFill>
               </a:rPr>
-              <a:t>API가 막힌 망에서도 규칙 경로로 전 기능 동작</a:t>
+              <a:t>API가 막힌 망에서도 규칙 경로로 전 기능 동작. 공급자 모듈로 사내 LLM 게이트웨이 교체 가능</a:t>
             </a:r>
             <a:endParaRPr lang="en-US" sz="1250" dirty="0"/>
           </a:p>
@@ -12165,7 +12179,7 @@
                   <a:schemeClr val="tx1"/>
                 </a:solidFill>
               </a:rPr>
-              <a:t>단일 PC·SQLite</a:t>
+              <a:t>서버 모드에 접속자 인증 없음</a:t>
             </a:r>
             <a:endParaRPr lang="en-US" sz="1200" dirty="0"/>
           </a:p>
@@ -12253,7 +12267,7 @@
                   <a:schemeClr val="tx1"/>
                 </a:solidFill>
               </a:rPr>
-              <a:t>부서 공유가 필요하면 공유 폴더 DB 또는 소형 서버 검토</a:t>
+              <a:t>사내망 안에서만 운영. 필요 시 사내 SSO·역방향 프록시 인증 앞단 검토</a:t>
             </a:r>
             <a:endParaRPr lang="en-US" sz="1200" dirty="0"/>
           </a:p>

--- a/app/docs/발표자료_EBS_요구자료대응에이전트.pptx
+++ b/app/docs/발표자료_EBS_요구자료대응에이전트.pptx
@@ -23,9 +23,10 @@
     <p:sldId id="271" r:id="rId17"/>
     <p:sldId id="272" r:id="rId18"/>
     <p:sldId id="273" r:id="rId19"/>
+    <p:sldId id="274" r:id="rId20"/>
   </p:sldIdLst>
   <p:notesMasterIdLst>
-    <p:notesMasterId r:id="rId20"/>
+    <p:notesMasterId r:id="rId21"/>
   </p:notesMasterIdLst>
   <p:sldSz cx="12192000" cy="6858000"/>
   <p:notesSz cx="6858000" cy="12192000"/>
@@ -124,14 +125,14 @@
   <p:extLst>
     <p:ext uri="{521415D9-36F7-43E2-AB2F-B90AF26B5E84}">
       <p14:sectionLst xmlns:p14="http://schemas.microsoft.com/office/powerpoint/2010/main">
-        <p14:section name="개요" id="{0fa5e062-2ba7-1369-b460-d6f5f85aa796}">
+        <p14:section name="개요" id="{3d9ae879-01e7-d6a9-962e-84be895a243b}">
           <p14:sldIdLst>
             <p14:sldId id="256"/>
             <p14:sldId id="257"/>
             <p14:sldId id="258"/>
           </p14:sldIdLst>
         </p14:section>
-        <p14:section name="해결" id="{5db1d8ca-87b5-e514-b974-980daa56a2b5}">
+        <p14:section name="해결" id="{623200e1-0b8f-aa1c-f3d5-94547fe88a6f}">
           <p14:sldIdLst>
             <p14:sldId id="259"/>
             <p14:sldId id="260"/>
@@ -139,7 +140,7 @@
             <p14:sldId id="262"/>
           </p14:sldIdLst>
         </p14:section>
-        <p14:section name="시연" id="{57d2e76b-a3ac-2513-df9c-4ecfd1142b63}">
+        <p14:section name="시연" id="{24b49c87-ffdb-3f7d-61e3-19cdfcb0e640}">
           <p14:sldIdLst>
             <p14:sldId id="263"/>
             <p14:sldId id="264"/>
@@ -147,19 +148,20 @@
             <p14:sldId id="266"/>
             <p14:sldId id="267"/>
             <p14:sldId id="268"/>
+            <p14:sldId id="269"/>
           </p14:sldIdLst>
         </p14:section>
-        <p14:section name="구현" id="{45af5262-431c-3eb2-1ea5-4786c7a2259c}">
+        <p14:section name="구현" id="{46ce627f-43c9-2b96-c228-3394a94f0cee}">
           <p14:sldIdLst>
-            <p14:sldId id="269"/>
             <p14:sldId id="270"/>
             <p14:sldId id="271"/>
+            <p14:sldId id="272"/>
           </p14:sldIdLst>
         </p14:section>
-        <p14:section name="마무리" id="{dbb47243-9a41-ee9e-e52e-21428fdf25a1}">
+        <p14:section name="마무리" id="{ed54d5d0-7035-03e0-9008-82a1c56a3bac}">
           <p14:sldIdLst>
-            <p14:sldId id="272"/>
             <p14:sldId id="273"/>
+            <p14:sldId id="274"/>
           </p14:sldIdLst>
         </p14:section>
       </p14:sectionLst>
@@ -654,7 +656,7 @@
           <a:p>
             <a:r>
               <a:rPr lang="en-US" dirty="0"/>
-              <a:t>대조에는 AI를 쓰지 않습니다. 단서는 제출값과 함께 저장한 근거 필드의 차이에서 나옵니다.</a:t>
+              <a:t>담당자가 바뀌어도 과거 답변이 항목 단위로 따라옵니다.</a:t>
             </a:r>
             <a:endParaRPr lang="en-US" dirty="0"/>
           </a:p>
@@ -742,7 +744,7 @@
           <a:p>
             <a:r>
               <a:rPr lang="en-US" dirty="0"/>
-              <a:t>초안의 숫자는 확정 수치 표에서만 인용됩니다. 데이터가 없는 항목은 지어내지 않고 [확인 필요]로 남깁니다.</a:t>
+              <a:t>대조에는 AI를 쓰지 않습니다. 단서는 제출값과 함께 저장한 근거 필드의 차이에서 나옵니다.</a:t>
             </a:r>
             <a:endParaRPr lang="en-US" dirty="0"/>
           </a:p>
@@ -830,7 +832,7 @@
           <a:p>
             <a:r>
               <a:rPr lang="en-US" dirty="0"/>
-              <a:t/>
+              <a:t>초안의 숫자는 확정 수치 표에서만 인용됩니다. 데이터가 없는 항목은 지어내지 않고 [확인 필요]로 남깁니다.</a:t>
             </a:r>
             <a:endParaRPr lang="en-US" dirty="0"/>
           </a:p>
@@ -918,7 +920,7 @@
           <a:p>
             <a:r>
               <a:rPr lang="en-US" dirty="0"/>
-              <a:t>도구 루프는 수동 구현이라 베타 의존이 없습니다. 도구는 전부 읽기 전용 DB 함수입니다.</a:t>
+              <a:t/>
             </a:r>
             <a:endParaRPr lang="en-US" dirty="0"/>
           </a:p>
@@ -1006,7 +1008,7 @@
           <a:p>
             <a:r>
               <a:rPr lang="en-US" dirty="0"/>
-              <a:t>별도 서버 없이 부서 공용 PC에서 run_server.bat로 열면 같은 망의 PC가 접속합니다. 접속자마다 설정 화면에 자기 키를 넣고, 키는 그 브라우저 세션에만 있습니다. SQLite 파일 하나가 이력 전부라서 백업이 곧 운영입니다. 공급자는 파일 하나로 갈아끼웁니다.</a:t>
+              <a:t>도구 루프는 수동 구현이라 베타 의존이 없습니다. 도구는 전부 읽기 전용 DB 함수입니다.</a:t>
             </a:r>
             <a:endParaRPr lang="en-US" dirty="0"/>
           </a:p>
@@ -1094,7 +1096,7 @@
           <a:p>
             <a:r>
               <a:rPr lang="en-US" dirty="0"/>
-              <a:t>규칙 경로 100%는 사례에 맞춘 결과라 자랑거리가 아닙니다. Claude 경로가 실제 점검 대상이고, 1차에서 놓친 연도 없는 날짜를 프롬프트 규칙으로 보완했습니다.</a:t>
+              <a:t>별도 서버 없이 부서 공용 PC에서 run_server.bat로 열면 같은 망의 PC가 접속합니다. 접속자마다 설정 화면에 자기 키를 넣고, 키는 그 브라우저 세션에만 있습니다. SQLite 파일 하나가 이력 전부라서 백업이 곧 운영입니다. 공급자는 파일 하나로 갈아끼웁니다.</a:t>
             </a:r>
             <a:endParaRPr lang="en-US" dirty="0"/>
           </a:p>
@@ -1182,7 +1184,7 @@
           <a:p>
             <a:r>
               <a:rPr lang="en-US" dirty="0"/>
-              <a:t>비용은 공개 단가표로 추정한 값입니다. 실제 청구는 콘솔에서 확인해야 하며, 월 호출량이 정해지면 다시 계산합니다.</a:t>
+              <a:t>규칙 경로 100%는 사례에 맞춘 결과라 자랑거리가 아닙니다. Claude 경로가 실제 점검 대상이고, 1차에서 놓친 연도 없는 날짜를 프롬프트 규칙으로 보완했습니다.</a:t>
             </a:r>
             <a:endParaRPr lang="en-US" dirty="0"/>
           </a:p>
@@ -1270,7 +1272,7 @@
           <a:p>
             <a:r>
               <a:rPr lang="en-US" dirty="0"/>
-              <a:t/>
+              <a:t>비용은 공개 단가표로 추정한 값입니다. 실제 청구는 콘솔에서 확인해야 하며, 월 호출량이 정해지면 다시 계산합니다.</a:t>
             </a:r>
             <a:endParaRPr lang="en-US" dirty="0"/>
           </a:p>
@@ -1358,7 +1360,7 @@
           <a:p>
             <a:r>
               <a:rPr lang="en-US" dirty="0"/>
-              <a:t>마지막으로 요청 사항 세 가지를 명확히 말합니다. 실데이터 1개 지표부터 시작하면 2주 안에 실사용 검증이 가능합니다.</a:t>
+              <a:t/>
             </a:r>
             <a:endParaRPr lang="en-US" dirty="0"/>
           </a:p>
@@ -1382,6 +1384,94 @@
             <a:fld id="{F7021451-1387-4CA6-816F-3879F97B5CBC}" type="slidenum">
               <a:rPr lang="en-US"/>
               <a:t>18</a:t>
+            </a:fld>
+            <a:endParaRPr lang="en-US"/>
+          </a:p>
+        </p:txBody>
+      </p:sp>
+    </p:spTree>
+    <p:extLst>
+      <p:ext uri="{BB962C8B-B14F-4D97-AF65-F5344CB8AC3E}">
+        <p14:creationId xmlns:p14="http://schemas.microsoft.com/office/powerpoint/2010/main" val="1024086991"/>
+      </p:ext>
+    </p:extLst>
+  </p:cSld>
+  <p:clrMapOvr>
+    <a:masterClrMapping/>
+  </p:clrMapOvr>
+</p:notes>
+</file>
+
+<file path=ppt/notesSlides/notesSlide19.xml><?xml version="1.0" encoding="utf-8"?>
+<p:notes xmlns:a="http://schemas.openxmlformats.org/drawingml/2006/main" xmlns:r="http://schemas.openxmlformats.org/officeDocument/2006/relationships" xmlns:p="http://schemas.openxmlformats.org/presentationml/2006/main">
+  <p:cSld>
+    <p:spTree>
+      <p:nvGrpSpPr>
+        <p:cNvPr id="1" name=""/>
+        <p:cNvGrpSpPr/>
+        <p:nvPr/>
+      </p:nvGrpSpPr>
+      <p:grpSpPr>
+        <a:xfrm>
+          <a:off x="0" y="0"/>
+          <a:ext cx="0" cy="0"/>
+          <a:chOff x="0" y="0"/>
+          <a:chExt cx="0" cy="0"/>
+        </a:xfrm>
+      </p:grpSpPr>
+      <p:sp>
+        <p:nvSpPr>
+          <p:cNvPr id="2" name="Slide Image Placeholder 1"/>
+          <p:cNvSpPr>
+            <a:spLocks noGrp="1" noRot="1" noChangeAspect="1"/>
+          </p:cNvSpPr>
+          <p:nvPr>
+            <p:ph type="sldImg"/>
+          </p:nvPr>
+        </p:nvSpPr>
+        <p:spPr/>
+      </p:sp>
+      <p:sp>
+        <p:nvSpPr>
+          <p:cNvPr id="3" name="Notes Placeholder 2"/>
+          <p:cNvSpPr>
+            <a:spLocks noGrp="1"/>
+          </p:cNvSpPr>
+          <p:nvPr>
+            <p:ph type="body" idx="1"/>
+          </p:nvPr>
+        </p:nvSpPr>
+        <p:spPr/>
+        <p:txBody>
+          <a:bodyPr/>
+          <a:lstStyle/>
+          <a:p>
+            <a:r>
+              <a:rPr lang="en-US" dirty="0"/>
+              <a:t>마지막으로 요청 사항 세 가지를 명확히 말합니다. 실데이터 1개 지표부터 시작하면 2주 안에 실사용 검증이 가능합니다.</a:t>
+            </a:r>
+            <a:endParaRPr lang="en-US" dirty="0"/>
+          </a:p>
+        </p:txBody>
+      </p:sp>
+      <p:sp>
+        <p:nvSpPr>
+          <p:cNvPr id="4" name="Slide Number Placeholder 3"/>
+          <p:cNvSpPr>
+            <a:spLocks noGrp="1"/>
+          </p:cNvSpPr>
+          <p:nvPr>
+            <p:ph type="sldNum" sz="quarter" idx="10"/>
+          </p:nvPr>
+        </p:nvSpPr>
+        <p:spPr/>
+        <p:txBody>
+          <a:bodyPr/>
+          <a:lstStyle/>
+          <a:p>
+            <a:fld id="{F7021451-1387-4CA6-816F-3879F97B5CBC}" type="slidenum">
+              <a:rPr lang="en-US"/>
+              <a:t>19</a:t>
             </a:fld>
             <a:endParaRPr lang="en-US"/>
           </a:p>
@@ -2062,7 +2152,7 @@
           <a:p>
             <a:r>
               <a:rPr lang="en-US" dirty="0"/>
-              <a:t>담당자가 바뀌어도 과거 답변이 항목 단위로 따라옵니다.</a:t>
+              <a:t>실제 과거 제출값은 집계 엑셀보다 한글 공문의 표로 남아 있는 경우가 많습니다. 그래서 집계 엑셀을 따로 만들지 않아도 실적표나 회신 공문을 그대로 넣게 했습니다. 열 매핑은 담당자가 확인하고, 값은 계산하지 않습니다.</a:t>
             </a:r>
             <a:endParaRPr lang="en-US" dirty="0"/>
           </a:p>
@@ -3505,7 +3595,7 @@
                   <a:schemeClr val="tx1"/>
                 </a:solidFill>
               </a:rPr>
-              <a:t>③ 수치 대조 — 12개 센터 중 3곳이 다르고, 단서가 보인다</a:t>
+              <a:t>② 새 요구서 분석 — '7월에 의원실에 이 값으로 답했다'가 붙는다</a:t>
             </a:r>
             <a:endParaRPr lang="en-US" sz="2800" dirty="0"/>
           </a:p>
@@ -3513,7 +3603,7 @@
       </p:sp>
       <p:sp>
         <p:nvSpPr>
-          <p:cNvPr id="3" name="frame-03_수치대조_점검표.png"/>
+          <p:cNvPr id="3" name="frame-02_새요구서분석.png"/>
           <p:cNvSpPr/>
           <p:nvPr/>
         </p:nvSpPr>
@@ -3540,7 +3630,7 @@
       </p:sp>
       <p:pic>
         <p:nvPicPr>
-          <p:cNvPr id="4" name="shot-03_수치대조_점검표.png" descr="/tmp/claude-0/-home-user-ebsjajucenter/339b2177-8504-5831-abfe-1ed2cf264c84/scratchpad/deck/img/03_수치대조_점검표.png">    </p:cNvPr>
+          <p:cNvPr id="4" name="shot-02_새요구서분석.png" descr="/tmp/claude-0/-home-user-ebsjajucenter/339b2177-8504-5831-abfe-1ed2cf264c84/scratchpad/deck/img/02_새요구서분석.png">    </p:cNvPr>
           <p:cNvPicPr>
             <a:picLocks noChangeAspect="1"/>
           </p:cNvPicPr>
@@ -3563,7 +3653,7 @@
       </p:pic>
       <p:sp>
         <p:nvSpPr>
-          <p:cNvPr id="5" name="cap-03_수치대조_점검표.png"/>
+          <p:cNvPr id="5" name="cap-02_새요구서분석.png"/>
           <p:cNvSpPr txBox="1"/>
           <p:nvPr/>
         </p:nvSpPr>
@@ -3631,7 +3721,7 @@
                   <a:schemeClr val="tx1"/>
                 </a:solidFill>
               </a:rPr>
-              <a:t>새 집계값(9월 재산출) vs 과거 제출값(7월 제출본)을 코드로 대조</a:t>
+              <a:t>접수일·기한·제목·항목을 구조화하고 유사한 과거 요구서(#1, 유사도 0.81)를 찾음</a:t>
             </a:r>
             <a:endParaRPr lang="en-US" sz="1250" dirty="0"/>
           </a:p>
@@ -3649,7 +3739,7 @@
                   <a:schemeClr val="tx1"/>
                 </a:solidFill>
               </a:rPr>
-              <a:t>센터C·G·K 차이, 단서: 추출시점·원자료 버전 변경(v1 → v2 사후 보정)</a:t>
+              <a:t>'6/30 기준 등원율' 항목에 2026-07-08 제출 12건과 산출 근거(정의·집계기간·추출시점·원자료 v1)가 붙음</a:t>
             </a:r>
             <a:endParaRPr lang="en-US" sz="1250" dirty="0"/>
           </a:p>
@@ -3667,7 +3757,7 @@
                   <a:schemeClr val="tx1"/>
                 </a:solidFill>
               </a:rPr>
-              <a:t>'사유 문구 후보 제안' → 단서·과거 입력 사유를 근거로 후보 제시, 담당자가 적용 또는 직접 입력</a:t>
+              <a:t>'등록 학생 수'는 같은 기준일 이력 없음 → 신규 산출·근거 기록 필요로 제안</a:t>
             </a:r>
             <a:endParaRPr lang="en-US" sz="1250" dirty="0"/>
           </a:p>
@@ -3685,6 +3775,980 @@
                   <a:schemeClr val="tx1"/>
                 </a:solidFill>
               </a:rPr>
+              <a:t>'최근 3년 운영 예산·집행률'은 지표 2개로 분리, 기준일 없음 → 확인 필요</a:t>
+            </a:r>
+            <a:endParaRPr lang="en-US" sz="1250" dirty="0"/>
+          </a:p>
+        </p:txBody>
+      </p:sp>
+      <p:sp>
+        <p:nvSpPr>
+          <p:cNvPr id="7" name="tbl-title-항목별 데이터 제안 판단(코드)"/>
+          <p:cNvSpPr txBox="1"/>
+          <p:nvPr/>
+        </p:nvSpPr>
+        <p:spPr>
+          <a:xfrm>
+            <a:off x="7863840" y="4069080"/>
+            <a:ext cx="3794760" cy="274320"/>
+          </a:xfrm>
+          <a:prstGeom prst="rect">
+            <a:avLst/>
+          </a:prstGeom>
+          <a:noFill/>
+          <a:ln/>
+        </p:spPr>
+        <p:txBody>
+          <a:bodyPr wrap="square" lIns="0" tIns="0" rIns="0" bIns="0" rtlCol="0" anchor="ctr"/>
+          <a:lstStyle/>
+          <a:p>
+            <a:pPr indent="0" marL="0">
+              <a:buNone/>
+            </a:pPr>
+            <a:r>
+              <a:rPr lang="en-US" sz="1100" b="1" dirty="0">
+                <a:solidFill>
+                  <a:schemeClr val="tx2"/>
+                </a:solidFill>
+              </a:rPr>
+              <a:t>항목별 데이터 제안 판단(코드)</a:t>
+            </a:r>
+            <a:endParaRPr lang="en-US" sz="1100" dirty="0"/>
+          </a:p>
+        </p:txBody>
+      </p:sp>
+      <p:graphicFrame>
+        <p:nvGraphicFramePr>
+          <p:cNvPr id="11" name="tbl-항목별 데이터 제안 판단(코드)"/>
+          <p:cNvGraphicFramePr>
+            <a:graphicFrameLocks noGrp="1"/>
+          </p:cNvGraphicFramePr>
+          <p:nvPr>
+            <p:extLst>
+              <p:ext uri="{D42A27DB-BD31-4B8C-83A1-F6EECF244321}">
+                <p14:modId xmlns:p14="http://schemas.microsoft.com/office/powerpoint/2010/main" val="1579011935"/>
+              </p:ext>
+            </p:extLst>
+          </p:nvPr>
+        </p:nvGraphicFramePr>
+        <p:xfrm>
+          <a:off x="7863840" y="4389120"/>
+          <a:ext cx="3794760" cy="914400"/>
+        </p:xfrm>
+        <a:graphic>
+          <a:graphicData uri="http://schemas.openxmlformats.org/drawingml/2006/table">
+            <a:tbl>
+              <a:tblPr/>
+              <a:tblGrid>
+                <a:gridCol w="1737360"/>
+                <a:gridCol w="2057400"/>
+              </a:tblGrid>
+              <a:tr h="0">
+                <a:tc>
+                  <a:txBody>
+                    <a:bodyPr/>
+                    <a:lstStyle/>
+                    <a:p>
+                      <a:pPr indent="0" marL="0">
+                        <a:buNone/>
+                      </a:pPr>
+                      <a:r>
+                        <a:rPr lang="en-US" sz="950" b="1" dirty="0">
+                          <a:solidFill>
+                            <a:srgbClr val="FFFFFF"/>
+                          </a:solidFill>
+                        </a:rPr>
+                        <a:t>상황</a:t>
+                      </a:r>
+                      <a:endParaRPr lang="en-US" sz="950" dirty="0"/>
+                    </a:p>
+                  </a:txBody>
+                  <a:tcPr marL="36576" marR="36576" marT="36576" marB="36576" anchor="ctr">
+                    <a:lnL w="9525" cap="flat" cmpd="sng" algn="ctr">
+                      <a:solidFill>
+                        <a:srgbClr val="D5E6EA"/>
+                      </a:solidFill>
+                      <a:prstDash val="solid"/>
+                      <a:round/>
+                      <a:headEnd type="none" w="med" len="med"/>
+                      <a:tailEnd type="none" w="med" len="med"/>
+                    </a:lnL>
+                    <a:lnR w="9525" cap="flat" cmpd="sng" algn="ctr">
+                      <a:solidFill>
+                        <a:srgbClr val="D5E6EA"/>
+                      </a:solidFill>
+                      <a:prstDash val="solid"/>
+                      <a:round/>
+                      <a:headEnd type="none" w="med" len="med"/>
+                      <a:tailEnd type="none" w="med" len="med"/>
+                    </a:lnR>
+                    <a:lnT w="9525" cap="flat" cmpd="sng" algn="ctr">
+                      <a:solidFill>
+                        <a:srgbClr val="D5E6EA"/>
+                      </a:solidFill>
+                      <a:prstDash val="solid"/>
+                      <a:round/>
+                      <a:headEnd type="none" w="med" len="med"/>
+                      <a:tailEnd type="none" w="med" len="med"/>
+                    </a:lnT>
+                    <a:lnB w="9525" cap="flat" cmpd="sng" algn="ctr">
+                      <a:solidFill>
+                        <a:srgbClr val="D5E6EA"/>
+                      </a:solidFill>
+                      <a:prstDash val="solid"/>
+                      <a:round/>
+                      <a:headEnd type="none" w="med" len="med"/>
+                      <a:tailEnd type="none" w="med" len="med"/>
+                    </a:lnB>
+                    <a:solidFill>
+                      <a:srgbClr val="0F5C6E"/>
+                    </a:solidFill>
+                  </a:tcPr>
+                </a:tc>
+                <a:tc>
+                  <a:txBody>
+                    <a:bodyPr/>
+                    <a:lstStyle/>
+                    <a:p>
+                      <a:pPr indent="0" marL="0">
+                        <a:buNone/>
+                      </a:pPr>
+                      <a:r>
+                        <a:rPr lang="en-US" sz="950" b="1" dirty="0">
+                          <a:solidFill>
+                            <a:srgbClr val="FFFFFF"/>
+                          </a:solidFill>
+                        </a:rPr>
+                        <a:t>제안</a:t>
+                      </a:r>
+                      <a:endParaRPr lang="en-US" sz="950" dirty="0"/>
+                    </a:p>
+                  </a:txBody>
+                  <a:tcPr marL="36576" marR="36576" marT="36576" marB="36576" anchor="ctr">
+                    <a:lnL w="9525" cap="flat" cmpd="sng" algn="ctr">
+                      <a:solidFill>
+                        <a:srgbClr val="D5E6EA"/>
+                      </a:solidFill>
+                      <a:prstDash val="solid"/>
+                      <a:round/>
+                      <a:headEnd type="none" w="med" len="med"/>
+                      <a:tailEnd type="none" w="med" len="med"/>
+                    </a:lnL>
+                    <a:lnR w="9525" cap="flat" cmpd="sng" algn="ctr">
+                      <a:solidFill>
+                        <a:srgbClr val="D5E6EA"/>
+                      </a:solidFill>
+                      <a:prstDash val="solid"/>
+                      <a:round/>
+                      <a:headEnd type="none" w="med" len="med"/>
+                      <a:tailEnd type="none" w="med" len="med"/>
+                    </a:lnR>
+                    <a:lnT w="9525" cap="flat" cmpd="sng" algn="ctr">
+                      <a:solidFill>
+                        <a:srgbClr val="D5E6EA"/>
+                      </a:solidFill>
+                      <a:prstDash val="solid"/>
+                      <a:round/>
+                      <a:headEnd type="none" w="med" len="med"/>
+                      <a:tailEnd type="none" w="med" len="med"/>
+                    </a:lnT>
+                    <a:lnB w="9525" cap="flat" cmpd="sng" algn="ctr">
+                      <a:solidFill>
+                        <a:srgbClr val="D5E6EA"/>
+                      </a:solidFill>
+                      <a:prstDash val="solid"/>
+                      <a:round/>
+                      <a:headEnd type="none" w="med" len="med"/>
+                      <a:tailEnd type="none" w="med" len="med"/>
+                    </a:lnB>
+                    <a:solidFill>
+                      <a:srgbClr val="0F5C6E"/>
+                    </a:solidFill>
+                  </a:tcPr>
+                </a:tc>
+              </a:tr>
+              <a:tr h="0">
+                <a:tc>
+                  <a:txBody>
+                    <a:bodyPr/>
+                    <a:lstStyle/>
+                    <a:p>
+                      <a:pPr indent="0" marL="0">
+                        <a:buNone/>
+                      </a:pPr>
+                      <a:r>
+                        <a:rPr lang="en-US" sz="950" dirty="0">
+                          <a:solidFill>
+                            <a:srgbClr val="1B2A41"/>
+                          </a:solidFill>
+                        </a:rPr>
+                        <a:t>같은 지표·기준일 제출 이력 있음</a:t>
+                      </a:r>
+                      <a:endParaRPr lang="en-US" sz="950" dirty="0"/>
+                    </a:p>
+                  </a:txBody>
+                  <a:tcPr marL="36576" marR="36576" marT="36576" marB="36576" anchor="ctr">
+                    <a:lnL w="9525" cap="flat" cmpd="sng" algn="ctr">
+                      <a:solidFill>
+                        <a:srgbClr val="D5E6EA"/>
+                      </a:solidFill>
+                      <a:prstDash val="solid"/>
+                      <a:round/>
+                      <a:headEnd type="none" w="med" len="med"/>
+                      <a:tailEnd type="none" w="med" len="med"/>
+                    </a:lnL>
+                    <a:lnR w="9525" cap="flat" cmpd="sng" algn="ctr">
+                      <a:solidFill>
+                        <a:srgbClr val="D5E6EA"/>
+                      </a:solidFill>
+                      <a:prstDash val="solid"/>
+                      <a:round/>
+                      <a:headEnd type="none" w="med" len="med"/>
+                      <a:tailEnd type="none" w="med" len="med"/>
+                    </a:lnR>
+                    <a:lnT w="9525" cap="flat" cmpd="sng" algn="ctr">
+                      <a:solidFill>
+                        <a:srgbClr val="D5E6EA"/>
+                      </a:solidFill>
+                      <a:prstDash val="solid"/>
+                      <a:round/>
+                      <a:headEnd type="none" w="med" len="med"/>
+                      <a:tailEnd type="none" w="med" len="med"/>
+                    </a:lnT>
+                    <a:lnB w="9525" cap="flat" cmpd="sng" algn="ctr">
+                      <a:solidFill>
+                        <a:srgbClr val="D5E6EA"/>
+                      </a:solidFill>
+                      <a:prstDash val="solid"/>
+                      <a:round/>
+                      <a:headEnd type="none" w="med" len="med"/>
+                      <a:tailEnd type="none" w="med" len="med"/>
+                    </a:lnB>
+                    <a:solidFill>
+                      <a:srgbClr val="FFFFFF"/>
+                    </a:solidFill>
+                  </a:tcPr>
+                </a:tc>
+                <a:tc>
+                  <a:txBody>
+                    <a:bodyPr/>
+                    <a:lstStyle/>
+                    <a:p>
+                      <a:pPr indent="0" marL="0">
+                        <a:buNone/>
+                      </a:pPr>
+                      <a:r>
+                        <a:rPr lang="en-US" sz="950" dirty="0">
+                          <a:solidFill>
+                            <a:srgbClr val="1B2A41"/>
+                          </a:solidFill>
+                        </a:rPr>
+                        <a:t>새 집계값과 대조 후 재사용</a:t>
+                      </a:r>
+                      <a:endParaRPr lang="en-US" sz="950" dirty="0"/>
+                    </a:p>
+                  </a:txBody>
+                  <a:tcPr marL="36576" marR="36576" marT="36576" marB="36576" anchor="ctr">
+                    <a:lnL w="9525" cap="flat" cmpd="sng" algn="ctr">
+                      <a:solidFill>
+                        <a:srgbClr val="D5E6EA"/>
+                      </a:solidFill>
+                      <a:prstDash val="solid"/>
+                      <a:round/>
+                      <a:headEnd type="none" w="med" len="med"/>
+                      <a:tailEnd type="none" w="med" len="med"/>
+                    </a:lnL>
+                    <a:lnR w="9525" cap="flat" cmpd="sng" algn="ctr">
+                      <a:solidFill>
+                        <a:srgbClr val="D5E6EA"/>
+                      </a:solidFill>
+                      <a:prstDash val="solid"/>
+                      <a:round/>
+                      <a:headEnd type="none" w="med" len="med"/>
+                      <a:tailEnd type="none" w="med" len="med"/>
+                    </a:lnR>
+                    <a:lnT w="9525" cap="flat" cmpd="sng" algn="ctr">
+                      <a:solidFill>
+                        <a:srgbClr val="D5E6EA"/>
+                      </a:solidFill>
+                      <a:prstDash val="solid"/>
+                      <a:round/>
+                      <a:headEnd type="none" w="med" len="med"/>
+                      <a:tailEnd type="none" w="med" len="med"/>
+                    </a:lnT>
+                    <a:lnB w="9525" cap="flat" cmpd="sng" algn="ctr">
+                      <a:solidFill>
+                        <a:srgbClr val="D5E6EA"/>
+                      </a:solidFill>
+                      <a:prstDash val="solid"/>
+                      <a:round/>
+                      <a:headEnd type="none" w="med" len="med"/>
+                      <a:tailEnd type="none" w="med" len="med"/>
+                    </a:lnB>
+                    <a:solidFill>
+                      <a:srgbClr val="FFFFFF"/>
+                    </a:solidFill>
+                  </a:tcPr>
+                </a:tc>
+              </a:tr>
+              <a:tr h="0">
+                <a:tc>
+                  <a:txBody>
+                    <a:bodyPr/>
+                    <a:lstStyle/>
+                    <a:p>
+                      <a:pPr indent="0" marL="0">
+                        <a:buNone/>
+                      </a:pPr>
+                      <a:r>
+                        <a:rPr lang="en-US" sz="950" dirty="0">
+                          <a:solidFill>
+                            <a:srgbClr val="1B2A41"/>
+                          </a:solidFill>
+                        </a:rPr>
+                        <a:t>같은 기준일 이력 없음</a:t>
+                      </a:r>
+                      <a:endParaRPr lang="en-US" sz="950" dirty="0"/>
+                    </a:p>
+                  </a:txBody>
+                  <a:tcPr marL="36576" marR="36576" marT="36576" marB="36576" anchor="ctr">
+                    <a:lnL w="9525" cap="flat" cmpd="sng" algn="ctr">
+                      <a:solidFill>
+                        <a:srgbClr val="D5E6EA"/>
+                      </a:solidFill>
+                      <a:prstDash val="solid"/>
+                      <a:round/>
+                      <a:headEnd type="none" w="med" len="med"/>
+                      <a:tailEnd type="none" w="med" len="med"/>
+                    </a:lnL>
+                    <a:lnR w="9525" cap="flat" cmpd="sng" algn="ctr">
+                      <a:solidFill>
+                        <a:srgbClr val="D5E6EA"/>
+                      </a:solidFill>
+                      <a:prstDash val="solid"/>
+                      <a:round/>
+                      <a:headEnd type="none" w="med" len="med"/>
+                      <a:tailEnd type="none" w="med" len="med"/>
+                    </a:lnR>
+                    <a:lnT w="9525" cap="flat" cmpd="sng" algn="ctr">
+                      <a:solidFill>
+                        <a:srgbClr val="D5E6EA"/>
+                      </a:solidFill>
+                      <a:prstDash val="solid"/>
+                      <a:round/>
+                      <a:headEnd type="none" w="med" len="med"/>
+                      <a:tailEnd type="none" w="med" len="med"/>
+                    </a:lnT>
+                    <a:lnB w="9525" cap="flat" cmpd="sng" algn="ctr">
+                      <a:solidFill>
+                        <a:srgbClr val="D5E6EA"/>
+                      </a:solidFill>
+                      <a:prstDash val="solid"/>
+                      <a:round/>
+                      <a:headEnd type="none" w="med" len="med"/>
+                      <a:tailEnd type="none" w="med" len="med"/>
+                    </a:lnB>
+                    <a:solidFill>
+                      <a:srgbClr val="FFFFFF"/>
+                    </a:solidFill>
+                  </a:tcPr>
+                </a:tc>
+                <a:tc>
+                  <a:txBody>
+                    <a:bodyPr/>
+                    <a:lstStyle/>
+                    <a:p>
+                      <a:pPr indent="0" marL="0">
+                        <a:buNone/>
+                      </a:pPr>
+                      <a:r>
+                        <a:rPr lang="en-US" sz="950" dirty="0">
+                          <a:solidFill>
+                            <a:srgbClr val="1B2A41"/>
+                          </a:solidFill>
+                        </a:rPr>
+                        <a:t>신규 산출, 산출 근거 기록 필요</a:t>
+                      </a:r>
+                      <a:endParaRPr lang="en-US" sz="950" dirty="0"/>
+                    </a:p>
+                  </a:txBody>
+                  <a:tcPr marL="36576" marR="36576" marT="36576" marB="36576" anchor="ctr">
+                    <a:lnL w="9525" cap="flat" cmpd="sng" algn="ctr">
+                      <a:solidFill>
+                        <a:srgbClr val="D5E6EA"/>
+                      </a:solidFill>
+                      <a:prstDash val="solid"/>
+                      <a:round/>
+                      <a:headEnd type="none" w="med" len="med"/>
+                      <a:tailEnd type="none" w="med" len="med"/>
+                    </a:lnL>
+                    <a:lnR w="9525" cap="flat" cmpd="sng" algn="ctr">
+                      <a:solidFill>
+                        <a:srgbClr val="D5E6EA"/>
+                      </a:solidFill>
+                      <a:prstDash val="solid"/>
+                      <a:round/>
+                      <a:headEnd type="none" w="med" len="med"/>
+                      <a:tailEnd type="none" w="med" len="med"/>
+                    </a:lnR>
+                    <a:lnT w="9525" cap="flat" cmpd="sng" algn="ctr">
+                      <a:solidFill>
+                        <a:srgbClr val="D5E6EA"/>
+                      </a:solidFill>
+                      <a:prstDash val="solid"/>
+                      <a:round/>
+                      <a:headEnd type="none" w="med" len="med"/>
+                      <a:tailEnd type="none" w="med" len="med"/>
+                    </a:lnT>
+                    <a:lnB w="9525" cap="flat" cmpd="sng" algn="ctr">
+                      <a:solidFill>
+                        <a:srgbClr val="D5E6EA"/>
+                      </a:solidFill>
+                      <a:prstDash val="solid"/>
+                      <a:round/>
+                      <a:headEnd type="none" w="med" len="med"/>
+                      <a:tailEnd type="none" w="med" len="med"/>
+                    </a:lnB>
+                    <a:solidFill>
+                      <a:srgbClr val="FFFFFF"/>
+                    </a:solidFill>
+                  </a:tcPr>
+                </a:tc>
+              </a:tr>
+              <a:tr h="0">
+                <a:tc>
+                  <a:txBody>
+                    <a:bodyPr/>
+                    <a:lstStyle/>
+                    <a:p>
+                      <a:pPr indent="0" marL="0">
+                        <a:buNone/>
+                      </a:pPr>
+                      <a:r>
+                        <a:rPr lang="en-US" sz="950" dirty="0">
+                          <a:solidFill>
+                            <a:srgbClr val="1B2A41"/>
+                          </a:solidFill>
+                        </a:rPr>
+                        <a:t>기준일 없음</a:t>
+                      </a:r>
+                      <a:endParaRPr lang="en-US" sz="950" dirty="0"/>
+                    </a:p>
+                  </a:txBody>
+                  <a:tcPr marL="36576" marR="36576" marT="36576" marB="36576" anchor="ctr">
+                    <a:lnL w="9525" cap="flat" cmpd="sng" algn="ctr">
+                      <a:solidFill>
+                        <a:srgbClr val="D5E6EA"/>
+                      </a:solidFill>
+                      <a:prstDash val="solid"/>
+                      <a:round/>
+                      <a:headEnd type="none" w="med" len="med"/>
+                      <a:tailEnd type="none" w="med" len="med"/>
+                    </a:lnL>
+                    <a:lnR w="9525" cap="flat" cmpd="sng" algn="ctr">
+                      <a:solidFill>
+                        <a:srgbClr val="D5E6EA"/>
+                      </a:solidFill>
+                      <a:prstDash val="solid"/>
+                      <a:round/>
+                      <a:headEnd type="none" w="med" len="med"/>
+                      <a:tailEnd type="none" w="med" len="med"/>
+                    </a:lnR>
+                    <a:lnT w="9525" cap="flat" cmpd="sng" algn="ctr">
+                      <a:solidFill>
+                        <a:srgbClr val="D5E6EA"/>
+                      </a:solidFill>
+                      <a:prstDash val="solid"/>
+                      <a:round/>
+                      <a:headEnd type="none" w="med" len="med"/>
+                      <a:tailEnd type="none" w="med" len="med"/>
+                    </a:lnT>
+                    <a:lnB w="9525" cap="flat" cmpd="sng" algn="ctr">
+                      <a:solidFill>
+                        <a:srgbClr val="D5E6EA"/>
+                      </a:solidFill>
+                      <a:prstDash val="solid"/>
+                      <a:round/>
+                      <a:headEnd type="none" w="med" len="med"/>
+                      <a:tailEnd type="none" w="med" len="med"/>
+                    </a:lnB>
+                    <a:solidFill>
+                      <a:srgbClr val="FFFFFF"/>
+                    </a:solidFill>
+                  </a:tcPr>
+                </a:tc>
+                <a:tc>
+                  <a:txBody>
+                    <a:bodyPr/>
+                    <a:lstStyle/>
+                    <a:p>
+                      <a:pPr indent="0" marL="0">
+                        <a:buNone/>
+                      </a:pPr>
+                      <a:r>
+                        <a:rPr lang="en-US" sz="950" dirty="0">
+                          <a:solidFill>
+                            <a:srgbClr val="1B2A41"/>
+                          </a:solidFill>
+                        </a:rPr>
+                        <a:t>요구서에서 기준일 확인 필요</a:t>
+                      </a:r>
+                      <a:endParaRPr lang="en-US" sz="950" dirty="0"/>
+                    </a:p>
+                  </a:txBody>
+                  <a:tcPr marL="36576" marR="36576" marT="36576" marB="36576" anchor="ctr">
+                    <a:lnL w="9525" cap="flat" cmpd="sng" algn="ctr">
+                      <a:solidFill>
+                        <a:srgbClr val="D5E6EA"/>
+                      </a:solidFill>
+                      <a:prstDash val="solid"/>
+                      <a:round/>
+                      <a:headEnd type="none" w="med" len="med"/>
+                      <a:tailEnd type="none" w="med" len="med"/>
+                    </a:lnL>
+                    <a:lnR w="9525" cap="flat" cmpd="sng" algn="ctr">
+                      <a:solidFill>
+                        <a:srgbClr val="D5E6EA"/>
+                      </a:solidFill>
+                      <a:prstDash val="solid"/>
+                      <a:round/>
+                      <a:headEnd type="none" w="med" len="med"/>
+                      <a:tailEnd type="none" w="med" len="med"/>
+                    </a:lnR>
+                    <a:lnT w="9525" cap="flat" cmpd="sng" algn="ctr">
+                      <a:solidFill>
+                        <a:srgbClr val="D5E6EA"/>
+                      </a:solidFill>
+                      <a:prstDash val="solid"/>
+                      <a:round/>
+                      <a:headEnd type="none" w="med" len="med"/>
+                      <a:tailEnd type="none" w="med" len="med"/>
+                    </a:lnT>
+                    <a:lnB w="9525" cap="flat" cmpd="sng" algn="ctr">
+                      <a:solidFill>
+                        <a:srgbClr val="D5E6EA"/>
+                      </a:solidFill>
+                      <a:prstDash val="solid"/>
+                      <a:round/>
+                      <a:headEnd type="none" w="med" len="med"/>
+                      <a:tailEnd type="none" w="med" len="med"/>
+                    </a:lnB>
+                    <a:solidFill>
+                      <a:srgbClr val="FFFFFF"/>
+                    </a:solidFill>
+                  </a:tcPr>
+                </a:tc>
+              </a:tr>
+              <a:tr h="0">
+                <a:tc>
+                  <a:txBody>
+                    <a:bodyPr/>
+                    <a:lstStyle/>
+                    <a:p>
+                      <a:pPr indent="0" marL="0">
+                        <a:buNone/>
+                      </a:pPr>
+                      <a:r>
+                        <a:rPr lang="en-US" sz="950" dirty="0">
+                          <a:solidFill>
+                            <a:srgbClr val="1B2A41"/>
+                          </a:solidFill>
+                        </a:rPr>
+                        <a:t>지표 미인식(사전에 없음)</a:t>
+                      </a:r>
+                      <a:endParaRPr lang="en-US" sz="950" dirty="0"/>
+                    </a:p>
+                  </a:txBody>
+                  <a:tcPr marL="36576" marR="36576" marT="36576" marB="36576" anchor="ctr">
+                    <a:lnL w="9525" cap="flat" cmpd="sng" algn="ctr">
+                      <a:solidFill>
+                        <a:srgbClr val="D5E6EA"/>
+                      </a:solidFill>
+                      <a:prstDash val="solid"/>
+                      <a:round/>
+                      <a:headEnd type="none" w="med" len="med"/>
+                      <a:tailEnd type="none" w="med" len="med"/>
+                    </a:lnL>
+                    <a:lnR w="9525" cap="flat" cmpd="sng" algn="ctr">
+                      <a:solidFill>
+                        <a:srgbClr val="D5E6EA"/>
+                      </a:solidFill>
+                      <a:prstDash val="solid"/>
+                      <a:round/>
+                      <a:headEnd type="none" w="med" len="med"/>
+                      <a:tailEnd type="none" w="med" len="med"/>
+                    </a:lnR>
+                    <a:lnT w="9525" cap="flat" cmpd="sng" algn="ctr">
+                      <a:solidFill>
+                        <a:srgbClr val="D5E6EA"/>
+                      </a:solidFill>
+                      <a:prstDash val="solid"/>
+                      <a:round/>
+                      <a:headEnd type="none" w="med" len="med"/>
+                      <a:tailEnd type="none" w="med" len="med"/>
+                    </a:lnT>
+                    <a:lnB w="9525" cap="flat" cmpd="sng" algn="ctr">
+                      <a:solidFill>
+                        <a:srgbClr val="D5E6EA"/>
+                      </a:solidFill>
+                      <a:prstDash val="solid"/>
+                      <a:round/>
+                      <a:headEnd type="none" w="med" len="med"/>
+                      <a:tailEnd type="none" w="med" len="med"/>
+                    </a:lnB>
+                    <a:solidFill>
+                      <a:srgbClr val="FFFFFF"/>
+                    </a:solidFill>
+                  </a:tcPr>
+                </a:tc>
+                <a:tc>
+                  <a:txBody>
+                    <a:bodyPr/>
+                    <a:lstStyle/>
+                    <a:p>
+                      <a:pPr indent="0" marL="0">
+                        <a:buNone/>
+                      </a:pPr>
+                      <a:r>
+                        <a:rPr lang="en-US" sz="950" dirty="0">
+                          <a:solidFill>
+                            <a:srgbClr val="1B2A41"/>
+                          </a:solidFill>
+                        </a:rPr>
+                        <a:t>항목 문구 확인 또는 지표 사전 추가</a:t>
+                      </a:r>
+                      <a:endParaRPr lang="en-US" sz="950" dirty="0"/>
+                    </a:p>
+                  </a:txBody>
+                  <a:tcPr marL="36576" marR="36576" marT="36576" marB="36576" anchor="ctr">
+                    <a:lnL w="9525" cap="flat" cmpd="sng" algn="ctr">
+                      <a:solidFill>
+                        <a:srgbClr val="D5E6EA"/>
+                      </a:solidFill>
+                      <a:prstDash val="solid"/>
+                      <a:round/>
+                      <a:headEnd type="none" w="med" len="med"/>
+                      <a:tailEnd type="none" w="med" len="med"/>
+                    </a:lnL>
+                    <a:lnR w="9525" cap="flat" cmpd="sng" algn="ctr">
+                      <a:solidFill>
+                        <a:srgbClr val="D5E6EA"/>
+                      </a:solidFill>
+                      <a:prstDash val="solid"/>
+                      <a:round/>
+                      <a:headEnd type="none" w="med" len="med"/>
+                      <a:tailEnd type="none" w="med" len="med"/>
+                    </a:lnR>
+                    <a:lnT w="9525" cap="flat" cmpd="sng" algn="ctr">
+                      <a:solidFill>
+                        <a:srgbClr val="D5E6EA"/>
+                      </a:solidFill>
+                      <a:prstDash val="solid"/>
+                      <a:round/>
+                      <a:headEnd type="none" w="med" len="med"/>
+                      <a:tailEnd type="none" w="med" len="med"/>
+                    </a:lnT>
+                    <a:lnB w="9525" cap="flat" cmpd="sng" algn="ctr">
+                      <a:solidFill>
+                        <a:srgbClr val="D5E6EA"/>
+                      </a:solidFill>
+                      <a:prstDash val="solid"/>
+                      <a:round/>
+                      <a:headEnd type="none" w="med" len="med"/>
+                      <a:tailEnd type="none" w="med" len="med"/>
+                    </a:lnB>
+                    <a:solidFill>
+                      <a:srgbClr val="FFFFFF"/>
+                    </a:solidFill>
+                  </a:tcPr>
+                </a:tc>
+              </a:tr>
+            </a:tbl>
+          </a:graphicData>
+        </a:graphic>
+      </p:graphicFrame>
+      <p:sp>
+        <p:nvSpPr>
+          <p:cNvPr id="25" name="Slide Number Placeholder 0"/>
+          <p:cNvSpPr>
+            <a:spLocks noGrp="1"/>
+          </p:cNvSpPr>
+          <p:nvPr>
+            <p:ph type="sldNum" sz="quarter" idx="4294967295"/>
+          </p:nvPr>
+        </p:nvSpPr>
+        <p:spPr>
+          <a:xfrm>
+            <a:off x="11247120" y="6400800"/>
+            <a:ext cx="548640" cy="274320"/>
+          </a:xfrm>
+          <a:prstGeom prst="rect">
+            <a:avLst/>
+          </a:prstGeom>
+          <a:extLst>
+            <a:ext uri="{C572A759-6A51-4108-AA02-DFA0A04FC94B}">
+              <ma14:wrappingTextBoxFlag xmlns:ma14="http://schemas.microsoft.com/office/mac/drawingml/2011/main" val="0"/>
+            </a:ext>
+          </a:extLst>
+        </p:spPr>
+        <p:txBody>
+          <a:bodyPr/>
+          <a:lstStyle>
+            <a:lvl1pPr>
+              <a:defRPr sz="900">
+                <a:solidFill>
+                  <a:srgbClr val="6B7A8F"/>
+                </a:solidFill>
+              </a:defRPr>
+            </a:lvl1pPr>
+          </a:lstStyle>
+          <a:p>
+            <a:pPr algn="l"/>
+            <a:fld id="{F7021451-1387-4CA6-816F-3879F97B5CBC}" type="slidenum">
+              <a:rPr b="0" lang="en-US"/>
+              <a:t>10</a:t>
+            </a:fld>
+            <a:endParaRPr lang="en-US"/>
+          </a:p>
+        </p:txBody>
+      </p:sp>
+    </p:spTree>
+  </p:cSld>
+  <p:clrMapOvr>
+    <a:masterClrMapping/>
+  </p:clrMapOvr>
+</p:sld>
+</file>
+
+<file path=ppt/slides/slide11.xml><?xml version="1.0" encoding="utf-8"?>
+<p:sld xmlns:a="http://schemas.openxmlformats.org/drawingml/2006/main" xmlns:r="http://schemas.openxmlformats.org/officeDocument/2006/relationships" xmlns:p="http://schemas.openxmlformats.org/presentationml/2006/main">
+  <p:cSld name="Slide 11">
+    <p:spTree>
+      <p:nvGrpSpPr>
+        <p:cNvPr id="1" name=""/>
+        <p:cNvGrpSpPr/>
+        <p:nvPr/>
+      </p:nvGrpSpPr>
+      <p:grpSpPr>
+        <a:xfrm>
+          <a:off x="0" y="0"/>
+          <a:ext cx="0" cy="0"/>
+          <a:chOff x="0" y="0"/>
+          <a:chExt cx="0" cy="0"/>
+        </a:xfrm>
+      </p:grpSpPr>
+      <p:sp>
+        <p:nvSpPr>
+          <p:cNvPr id="2" name="Text 0"/>
+          <p:cNvSpPr/>
+          <p:nvPr>
+            <p:ph idx="100" type="title" hasCustomPrompt="1"/>
+          </p:nvPr>
+        </p:nvSpPr>
+        <p:spPr>
+          <a:xfrm>
+            <a:off x="548640" y="365760"/>
+            <a:ext cx="11064240" cy="731520"/>
+          </a:xfrm>
+          <a:prstGeom prst="rect">
+            <a:avLst/>
+          </a:prstGeom>
+          <a:noFill/>
+          <a:ln/>
+        </p:spPr>
+        <p:txBody>
+          <a:bodyPr wrap="square" lIns="0" tIns="0" rIns="0" bIns="0" rtlCol="0"/>
+          <a:lstStyle/>
+          <a:p>
+            <a:pPr algn="l" indent="0" marL="0">
+              <a:buNone/>
+            </a:pPr>
+            <a:r>
+              <a:rPr lang="en-US" sz="2800" b="1" dirty="0">
+                <a:solidFill>
+                  <a:schemeClr val="tx1"/>
+                </a:solidFill>
+              </a:rPr>
+              <a:t>③ 수치 대조 — 12개 센터 중 3곳이 다르고, 단서가 보인다</a:t>
+            </a:r>
+            <a:endParaRPr lang="en-US" sz="2800" dirty="0"/>
+          </a:p>
+        </p:txBody>
+      </p:sp>
+      <p:sp>
+        <p:nvSpPr>
+          <p:cNvPr id="3" name="frame-03_수치대조_점검표.png"/>
+          <p:cNvSpPr/>
+          <p:nvPr/>
+        </p:nvSpPr>
+        <p:spPr>
+          <a:xfrm>
+            <a:off x="475488" y="1298448"/>
+            <a:ext cx="7095744" cy="4581144"/>
+          </a:xfrm>
+          <a:prstGeom prst="roundRect">
+            <a:avLst>
+              <a:gd name="adj" fmla="val 1996"/>
+            </a:avLst>
+          </a:prstGeom>
+          <a:solidFill>
+            <a:schemeClr val="bg2"/>
+          </a:solidFill>
+          <a:ln w="12700">
+            <a:solidFill>
+              <a:schemeClr val="bg2"/>
+            </a:solidFill>
+            <a:prstDash val="solid"/>
+          </a:ln>
+        </p:spPr>
+      </p:sp>
+      <p:pic>
+        <p:nvPicPr>
+          <p:cNvPr id="4" name="shot-03_수치대조_점검표.png" descr="/tmp/claude-0/-home-user-ebsjajucenter/339b2177-8504-5831-abfe-1ed2cf264c84/scratchpad/deck/img/03_수치대조_점검표.png">    </p:cNvPr>
+          <p:cNvPicPr>
+            <a:picLocks noChangeAspect="1"/>
+          </p:cNvPicPr>
+          <p:nvPr/>
+        </p:nvPicPr>
+        <p:blipFill>
+          <a:blip r:embed="rId1"/>
+          <a:srcRect l="0" r="0" t="0" b="0"/>
+          <a:stretch/>
+        </p:blipFill>
+        <p:spPr>
+          <a:xfrm>
+            <a:off x="548640" y="1371600"/>
+            <a:ext cx="6949440" cy="4434840"/>
+          </a:xfrm>
+          <a:prstGeom prst="rect">
+            <a:avLst/>
+          </a:prstGeom>
+        </p:spPr>
+      </p:pic>
+      <p:sp>
+        <p:nvSpPr>
+          <p:cNvPr id="5" name="cap-03_수치대조_점검표.png"/>
+          <p:cNvSpPr txBox="1"/>
+          <p:nvPr/>
+        </p:nvSpPr>
+        <p:spPr>
+          <a:xfrm>
+            <a:off x="548640" y="5916168"/>
+            <a:ext cx="6949440" cy="274320"/>
+          </a:xfrm>
+          <a:prstGeom prst="rect">
+            <a:avLst/>
+          </a:prstGeom>
+          <a:noFill/>
+          <a:ln/>
+        </p:spPr>
+        <p:txBody>
+          <a:bodyPr wrap="square" lIns="0" tIns="0" rIns="0" bIns="0" rtlCol="0" anchor="ctr"/>
+          <a:lstStyle/>
+          <a:p>
+            <a:pPr indent="0" marL="0">
+              <a:buNone/>
+            </a:pPr>
+            <a:r>
+              <a:rPr lang="en-US" sz="1000" dirty="0">
+                <a:solidFill>
+                  <a:schemeClr val="accent5"/>
+                </a:solidFill>
+              </a:rPr>
+              <a:t>화면 캡처(Claude 경로 · claude-sonnet-4-6, 2026-10-04)</a:t>
+            </a:r>
+            <a:endParaRPr lang="en-US" sz="1000" dirty="0"/>
+          </a:p>
+        </p:txBody>
+      </p:sp>
+      <p:sp>
+        <p:nvSpPr>
+          <p:cNvPr id="6" name="bullets"/>
+          <p:cNvSpPr txBox="1"/>
+          <p:nvPr/>
+        </p:nvSpPr>
+        <p:spPr>
+          <a:xfrm>
+            <a:off x="7863840" y="1371600"/>
+            <a:ext cx="3794760" cy="2651760"/>
+          </a:xfrm>
+          <a:prstGeom prst="rect">
+            <a:avLst/>
+          </a:prstGeom>
+          <a:noFill/>
+          <a:ln/>
+        </p:spPr>
+        <p:txBody>
+          <a:bodyPr wrap="square" lIns="0" tIns="0" rIns="0" bIns="0" rtlCol="0" anchor="t"/>
+          <a:lstStyle/>
+          <a:p>
+            <a:pPr marL="342900" indent="-342900">
+              <a:spcAft>
+                <a:spcPts val="800"/>
+              </a:spcAft>
+              <a:buSzPct val="100000"/>
+              <a:buChar char="•"/>
+            </a:pPr>
+            <a:r>
+              <a:rPr lang="en-US" sz="1250" dirty="0">
+                <a:solidFill>
+                  <a:schemeClr val="tx1"/>
+                </a:solidFill>
+              </a:rPr>
+              <a:t>새 집계값(9월 재산출) vs 과거 제출값(7월 제출본)을 코드로 대조</a:t>
+            </a:r>
+            <a:endParaRPr lang="en-US" sz="1250" dirty="0"/>
+          </a:p>
+          <a:p>
+            <a:pPr marL="342900" indent="-342900">
+              <a:spcAft>
+                <a:spcPts val="800"/>
+              </a:spcAft>
+              <a:buSzPct val="100000"/>
+              <a:buChar char="•"/>
+            </a:pPr>
+            <a:r>
+              <a:rPr lang="en-US" sz="1250" dirty="0">
+                <a:solidFill>
+                  <a:schemeClr val="tx1"/>
+                </a:solidFill>
+              </a:rPr>
+              <a:t>센터C·G·K 차이, 단서: 추출시점·원자료 버전 변경(v1 → v2 사후 보정)</a:t>
+            </a:r>
+            <a:endParaRPr lang="en-US" sz="1250" dirty="0"/>
+          </a:p>
+          <a:p>
+            <a:pPr marL="342900" indent="-342900">
+              <a:spcAft>
+                <a:spcPts val="800"/>
+              </a:spcAft>
+              <a:buSzPct val="100000"/>
+              <a:buChar char="•"/>
+            </a:pPr>
+            <a:r>
+              <a:rPr lang="en-US" sz="1250" dirty="0">
+                <a:solidFill>
+                  <a:schemeClr val="tx1"/>
+                </a:solidFill>
+              </a:rPr>
+              <a:t>'사유 문구 후보 제안' → 단서·과거 입력 사유를 근거로 후보 제시, 담당자가 적용 또는 직접 입력</a:t>
+            </a:r>
+            <a:endParaRPr lang="en-US" sz="1250" dirty="0"/>
+          </a:p>
+          <a:p>
+            <a:pPr marL="342900" indent="-342900">
+              <a:spcAft>
+                <a:spcPts val="800"/>
+              </a:spcAft>
+              <a:buSzPct val="100000"/>
+              <a:buChar char="•"/>
+            </a:pPr>
+            <a:r>
+              <a:rPr lang="en-US" sz="1250" dirty="0">
+                <a:solidFill>
+                  <a:schemeClr val="tx1"/>
+                </a:solidFill>
+              </a:rPr>
               <a:t>정합성 점검표에 과거·신규 출처(파일명·행 번호) 기록, 개인정보 패턴 검사 후 확정</a:t>
             </a:r>
             <a:endParaRPr lang="en-US" sz="1250" dirty="0"/>
@@ -3729,7 +4793,7 @@
       </p:sp>
       <p:graphicFrame>
         <p:nvGraphicFramePr>
-          <p:cNvPr id="11" name="tbl-차이 3건(값은 가상)"/>
+          <p:cNvPr id="12" name="tbl-차이 3건(값은 가상)"/>
           <p:cNvGraphicFramePr>
             <a:graphicFrameLocks noGrp="1"/>
           </p:cNvGraphicFramePr>
@@ -5027,7 +6091,7 @@
             <a:pPr algn="l"/>
             <a:fld id="{F7021451-1387-4CA6-816F-3879F97B5CBC}" type="slidenum">
               <a:rPr b="0" lang="en-US"/>
-              <a:t>10</a:t>
+              <a:t>11</a:t>
             </a:fld>
             <a:endParaRPr lang="en-US"/>
           </a:p>
@@ -5041,9 +6105,9 @@
 </p:sld>
 </file>
 
-<file path=ppt/slides/slide11.xml><?xml version="1.0" encoding="utf-8"?>
+<file path=ppt/slides/slide12.xml><?xml version="1.0" encoding="utf-8"?>
 <p:sld xmlns:a="http://schemas.openxmlformats.org/drawingml/2006/main" xmlns:r="http://schemas.openxmlformats.org/officeDocument/2006/relationships" xmlns:p="http://schemas.openxmlformats.org/presentationml/2006/main">
-  <p:cSld name="Slide 11">
+  <p:cSld name="Slide 12">
     <p:spTree>
       <p:nvGrpSpPr>
         <p:cNvPr id="1" name=""/>
@@ -5314,7 +6378,7 @@
       </p:sp>
       <p:graphicFrame>
         <p:nvGraphicFramePr>
-          <p:cNvPr id="12" name="tbl-요구 항목 충족 검사(코드)"/>
+          <p:cNvPr id="13" name="tbl-요구 항목 충족 검사(코드)"/>
           <p:cNvGraphicFramePr>
             <a:graphicFrameLocks noGrp="1"/>
           </p:cNvGraphicFramePr>
@@ -6613,408 +7677,6 @@
             <a:pPr algn="l"/>
             <a:fld id="{F7021451-1387-4CA6-816F-3879F97B5CBC}" type="slidenum">
               <a:rPr b="0" lang="en-US"/>
-              <a:t>11</a:t>
-            </a:fld>
-            <a:endParaRPr lang="en-US"/>
-          </a:p>
-        </p:txBody>
-      </p:sp>
-    </p:spTree>
-  </p:cSld>
-  <p:clrMapOvr>
-    <a:masterClrMapping/>
-  </p:clrMapOvr>
-</p:sld>
-</file>
-
-<file path=ppt/slides/slide12.xml><?xml version="1.0" encoding="utf-8"?>
-<p:sld xmlns:a="http://schemas.openxmlformats.org/drawingml/2006/main" xmlns:r="http://schemas.openxmlformats.org/officeDocument/2006/relationships" xmlns:p="http://schemas.openxmlformats.org/presentationml/2006/main">
-  <p:cSld name="Slide 12">
-    <p:spTree>
-      <p:nvGrpSpPr>
-        <p:cNvPr id="1" name=""/>
-        <p:cNvGrpSpPr/>
-        <p:nvPr/>
-      </p:nvGrpSpPr>
-      <p:grpSpPr>
-        <a:xfrm>
-          <a:off x="0" y="0"/>
-          <a:ext cx="0" cy="0"/>
-          <a:chOff x="0" y="0"/>
-          <a:chExt cx="0" cy="0"/>
-        </a:xfrm>
-      </p:grpSpPr>
-      <p:sp>
-        <p:nvSpPr>
-          <p:cNvPr id="2" name="Text 0"/>
-          <p:cNvSpPr/>
-          <p:nvPr>
-            <p:ph idx="100" type="title" hasCustomPrompt="1"/>
-          </p:nvPr>
-        </p:nvSpPr>
-        <p:spPr>
-          <a:xfrm>
-            <a:off x="548640" y="365760"/>
-            <a:ext cx="11064240" cy="731520"/>
-          </a:xfrm>
-          <a:prstGeom prst="rect">
-            <a:avLst/>
-          </a:prstGeom>
-          <a:noFill/>
-          <a:ln/>
-        </p:spPr>
-        <p:txBody>
-          <a:bodyPr wrap="square" lIns="0" tIns="0" rIns="0" bIns="0" rtlCol="0"/>
-          <a:lstStyle/>
-          <a:p>
-            <a:pPr algn="l" indent="0" marL="0">
-              <a:buNone/>
-            </a:pPr>
-            <a:r>
-              <a:rPr lang="en-US" sz="2800" b="1" dirty="0">
-                <a:solidFill>
-                  <a:schemeClr val="tx1"/>
-                </a:solidFill>
-              </a:rPr>
-              <a:t>⑤ 승인 → ⑥ 이력 → ⑦ 현황: 한 줄로 이어지는 기록</a:t>
-            </a:r>
-            <a:endParaRPr lang="en-US" sz="2800" dirty="0"/>
-          </a:p>
-        </p:txBody>
-      </p:sp>
-      <p:sp>
-        <p:nvSpPr>
-          <p:cNvPr id="3" name="frame-05_검토승인.png"/>
-          <p:cNvSpPr/>
-          <p:nvPr/>
-        </p:nvSpPr>
-        <p:spPr>
-          <a:xfrm>
-            <a:off x="475488" y="1344168"/>
-            <a:ext cx="3758184" cy="3386869"/>
-          </a:xfrm>
-          <a:prstGeom prst="roundRect">
-            <a:avLst>
-              <a:gd name="adj" fmla="val 2700"/>
-            </a:avLst>
-          </a:prstGeom>
-          <a:solidFill>
-            <a:schemeClr val="bg2"/>
-          </a:solidFill>
-          <a:ln w="12700">
-            <a:solidFill>
-              <a:schemeClr val="bg2"/>
-            </a:solidFill>
-            <a:prstDash val="solid"/>
-          </a:ln>
-        </p:spPr>
-      </p:sp>
-      <p:pic>
-        <p:nvPicPr>
-          <p:cNvPr id="4" name="shot-05_검토승인.png" descr="/tmp/claude-0/-home-user-ebsjajucenter/339b2177-8504-5831-abfe-1ed2cf264c84/scratchpad/deck/img/05_검토승인.png">    </p:cNvPr>
-          <p:cNvPicPr>
-            <a:picLocks noChangeAspect="1"/>
-          </p:cNvPicPr>
-          <p:nvPr/>
-        </p:nvPicPr>
-        <p:blipFill>
-          <a:blip r:embed="rId1"/>
-          <a:srcRect l="0" r="0" t="0" b="0"/>
-          <a:stretch/>
-        </p:blipFill>
-        <p:spPr>
-          <a:xfrm>
-            <a:off x="548640" y="1417320"/>
-            <a:ext cx="3611880" cy="3240565"/>
-          </a:xfrm>
-          <a:prstGeom prst="rect">
-            <a:avLst/>
-          </a:prstGeom>
-        </p:spPr>
-      </p:pic>
-      <p:sp>
-        <p:nvSpPr>
-          <p:cNvPr id="5" name="cap-05_검토승인.png"/>
-          <p:cNvSpPr txBox="1"/>
-          <p:nvPr/>
-        </p:nvSpPr>
-        <p:spPr>
-          <a:xfrm>
-            <a:off x="548640" y="4767613"/>
-            <a:ext cx="3611880" cy="274320"/>
-          </a:xfrm>
-          <a:prstGeom prst="rect">
-            <a:avLst/>
-          </a:prstGeom>
-          <a:noFill/>
-          <a:ln/>
-        </p:spPr>
-        <p:txBody>
-          <a:bodyPr wrap="square" lIns="0" tIns="0" rIns="0" bIns="0" rtlCol="0" anchor="ctr"/>
-          <a:lstStyle/>
-          <a:p>
-            <a:pPr indent="0" marL="0">
-              <a:buNone/>
-            </a:pPr>
-            <a:r>
-              <a:rPr lang="en-US" sz="1000" dirty="0">
-                <a:solidFill>
-                  <a:schemeClr val="accent5"/>
-                </a:solidFill>
-              </a:rPr>
-              <a:t>⑤ 팀장 검토·승인(의견 기록)</a:t>
-            </a:r>
-            <a:endParaRPr lang="en-US" sz="1000" dirty="0"/>
-          </a:p>
-        </p:txBody>
-      </p:sp>
-      <p:sp>
-        <p:nvSpPr>
-          <p:cNvPr id="6" name="frame-06_이력조회.png"/>
-          <p:cNvSpPr/>
-          <p:nvPr/>
-        </p:nvSpPr>
-        <p:spPr>
-          <a:xfrm>
-            <a:off x="4224528" y="1344168"/>
-            <a:ext cx="3758184" cy="2576728"/>
-          </a:xfrm>
-          <a:prstGeom prst="roundRect">
-            <a:avLst>
-              <a:gd name="adj" fmla="val 3549"/>
-            </a:avLst>
-          </a:prstGeom>
-          <a:solidFill>
-            <a:schemeClr val="bg2"/>
-          </a:solidFill>
-          <a:ln w="12700">
-            <a:solidFill>
-              <a:schemeClr val="bg2"/>
-            </a:solidFill>
-            <a:prstDash val="solid"/>
-          </a:ln>
-        </p:spPr>
-      </p:sp>
-      <p:pic>
-        <p:nvPicPr>
-          <p:cNvPr id="7" name="shot-06_이력조회.png" descr="/tmp/claude-0/-home-user-ebsjajucenter/339b2177-8504-5831-abfe-1ed2cf264c84/scratchpad/deck/img/06_이력조회.png">    </p:cNvPr>
-          <p:cNvPicPr>
-            <a:picLocks noChangeAspect="1"/>
-          </p:cNvPicPr>
-          <p:nvPr/>
-        </p:nvPicPr>
-        <p:blipFill>
-          <a:blip r:embed="rId2"/>
-          <a:srcRect l="0" r="0" t="0" b="0"/>
-          <a:stretch/>
-        </p:blipFill>
-        <p:spPr>
-          <a:xfrm>
-            <a:off x="4297680" y="1417320"/>
-            <a:ext cx="3611880" cy="2430424"/>
-          </a:xfrm>
-          <a:prstGeom prst="rect">
-            <a:avLst/>
-          </a:prstGeom>
-        </p:spPr>
-      </p:pic>
-      <p:sp>
-        <p:nvSpPr>
-          <p:cNvPr id="8" name="cap-06_이력조회.png"/>
-          <p:cNvSpPr txBox="1"/>
-          <p:nvPr/>
-        </p:nvSpPr>
-        <p:spPr>
-          <a:xfrm>
-            <a:off x="4297680" y="3957472"/>
-            <a:ext cx="3611880" cy="274320"/>
-          </a:xfrm>
-          <a:prstGeom prst="rect">
-            <a:avLst/>
-          </a:prstGeom>
-          <a:noFill/>
-          <a:ln/>
-        </p:spPr>
-        <p:txBody>
-          <a:bodyPr wrap="square" lIns="0" tIns="0" rIns="0" bIns="0" rtlCol="0" anchor="ctr"/>
-          <a:lstStyle/>
-          <a:p>
-            <a:pPr indent="0" marL="0">
-              <a:buNone/>
-            </a:pPr>
-            <a:r>
-              <a:rPr lang="en-US" sz="1000" dirty="0">
-                <a:solidFill>
-                  <a:schemeClr val="accent5"/>
-                </a:solidFill>
-              </a:rPr>
-              <a:t>⑥ 요구→항목→제출본→초안→승인</a:t>
-            </a:r>
-            <a:endParaRPr lang="en-US" sz="1000" dirty="0"/>
-          </a:p>
-        </p:txBody>
-      </p:sp>
-      <p:sp>
-        <p:nvSpPr>
-          <p:cNvPr id="9" name="frame-07_현황통계.png"/>
-          <p:cNvSpPr/>
-          <p:nvPr/>
-        </p:nvSpPr>
-        <p:spPr>
-          <a:xfrm>
-            <a:off x="7973568" y="1344168"/>
-            <a:ext cx="3758184" cy="3116822"/>
-          </a:xfrm>
-          <a:prstGeom prst="roundRect">
-            <a:avLst>
-              <a:gd name="adj" fmla="val 2934"/>
-            </a:avLst>
-          </a:prstGeom>
-          <a:solidFill>
-            <a:schemeClr val="bg2"/>
-          </a:solidFill>
-          <a:ln w="12700">
-            <a:solidFill>
-              <a:schemeClr val="bg2"/>
-            </a:solidFill>
-            <a:prstDash val="solid"/>
-          </a:ln>
-        </p:spPr>
-      </p:sp>
-      <p:pic>
-        <p:nvPicPr>
-          <p:cNvPr id="10" name="shot-07_현황통계.png" descr="/tmp/claude-0/-home-user-ebsjajucenter/339b2177-8504-5831-abfe-1ed2cf264c84/scratchpad/deck/img/07_현황통계.png">    </p:cNvPr>
-          <p:cNvPicPr>
-            <a:picLocks noChangeAspect="1"/>
-          </p:cNvPicPr>
-          <p:nvPr/>
-        </p:nvPicPr>
-        <p:blipFill>
-          <a:blip r:embed="rId3"/>
-          <a:srcRect l="0" r="0" t="0" b="0"/>
-          <a:stretch/>
-        </p:blipFill>
-        <p:spPr>
-          <a:xfrm>
-            <a:off x="8046720" y="1417320"/>
-            <a:ext cx="3611880" cy="2970518"/>
-          </a:xfrm>
-          <a:prstGeom prst="rect">
-            <a:avLst/>
-          </a:prstGeom>
-        </p:spPr>
-      </p:pic>
-      <p:sp>
-        <p:nvSpPr>
-          <p:cNvPr id="11" name="cap-07_현황통계.png"/>
-          <p:cNvSpPr txBox="1"/>
-          <p:nvPr/>
-        </p:nvSpPr>
-        <p:spPr>
-          <a:xfrm>
-            <a:off x="8046720" y="4497566"/>
-            <a:ext cx="3611880" cy="274320"/>
-          </a:xfrm>
-          <a:prstGeom prst="rect">
-            <a:avLst/>
-          </a:prstGeom>
-          <a:noFill/>
-          <a:ln/>
-        </p:spPr>
-        <p:txBody>
-          <a:bodyPr wrap="square" lIns="0" tIns="0" rIns="0" bIns="0" rtlCol="0" anchor="ctr"/>
-          <a:lstStyle/>
-          <a:p>
-            <a:pPr indent="0" marL="0">
-              <a:buNone/>
-            </a:pPr>
-            <a:r>
-              <a:rPr lang="en-US" sz="1000" dirty="0">
-                <a:solidFill>
-                  <a:schemeClr val="accent5"/>
-                </a:solidFill>
-              </a:rPr>
-              <a:t>⑦ D-day·기한 임박·반복 요구 지표</a:t>
-            </a:r>
-            <a:endParaRPr lang="en-US" sz="1000" dirty="0"/>
-          </a:p>
-        </p:txBody>
-      </p:sp>
-      <p:sp>
-        <p:nvSpPr>
-          <p:cNvPr id="12" name="wrap-note"/>
-          <p:cNvSpPr txBox="1"/>
-          <p:nvPr/>
-        </p:nvSpPr>
-        <p:spPr>
-          <a:xfrm>
-            <a:off x="548640" y="5394960"/>
-            <a:ext cx="11064240" cy="548640"/>
-          </a:xfrm>
-          <a:prstGeom prst="rect">
-            <a:avLst/>
-          </a:prstGeom>
-          <a:noFill/>
-          <a:ln/>
-        </p:spPr>
-        <p:txBody>
-          <a:bodyPr wrap="square" lIns="0" tIns="0" rIns="0" bIns="0" rtlCol="0" anchor="ctr"/>
-          <a:lstStyle/>
-          <a:p>
-            <a:pPr indent="0" marL="0">
-              <a:buNone/>
-            </a:pPr>
-            <a:r>
-              <a:rPr lang="en-US" sz="1250" dirty="0">
-                <a:solidFill>
-                  <a:schemeClr val="tx1"/>
-                </a:solidFill>
-              </a:rPr>
-              <a:t>반복 요구 지표(등원율 2회·요청 주체 2곳)는 사전 산출·표준 답변 후보가 됩니다. 관리대장은 엑셀로 내보냅니다.</a:t>
-            </a:r>
-            <a:endParaRPr lang="en-US" sz="1250" dirty="0"/>
-          </a:p>
-        </p:txBody>
-      </p:sp>
-      <p:sp>
-        <p:nvSpPr>
-          <p:cNvPr id="25" name="Slide Number Placeholder 0"/>
-          <p:cNvSpPr>
-            <a:spLocks noGrp="1"/>
-          </p:cNvSpPr>
-          <p:nvPr>
-            <p:ph type="sldNum" sz="quarter" idx="4294967295"/>
-          </p:nvPr>
-        </p:nvSpPr>
-        <p:spPr>
-          <a:xfrm>
-            <a:off x="11247120" y="6400800"/>
-            <a:ext cx="548640" cy="274320"/>
-          </a:xfrm>
-          <a:prstGeom prst="rect">
-            <a:avLst/>
-          </a:prstGeom>
-          <a:extLst>
-            <a:ext uri="{C572A759-6A51-4108-AA02-DFA0A04FC94B}">
-              <ma14:wrappingTextBoxFlag xmlns:ma14="http://schemas.microsoft.com/office/mac/drawingml/2011/main" val="0"/>
-            </a:ext>
-          </a:extLst>
-        </p:spPr>
-        <p:txBody>
-          <a:bodyPr/>
-          <a:lstStyle>
-            <a:lvl1pPr>
-              <a:defRPr sz="900">
-                <a:solidFill>
-                  <a:srgbClr val="6B7A8F"/>
-                </a:solidFill>
-              </a:defRPr>
-            </a:lvl1pPr>
-          </a:lstStyle>
-          <a:p>
-            <a:pPr algn="l"/>
-            <a:fld id="{F7021451-1387-4CA6-816F-3879F97B5CBC}" type="slidenum">
-              <a:rPr b="0" lang="en-US"/>
               <a:t>12</a:t>
             </a:fld>
             <a:endParaRPr lang="en-US"/>
@@ -7078,7 +7740,7 @@
                   <a:schemeClr val="tx1"/>
                 </a:solidFill>
               </a:rPr>
-              <a:t>⑧ 이력에 묻기 — 7개 화면을 돌아다니지 않아도 된다</a:t>
+              <a:t>⑤ 승인 → ⑥ 이력 → ⑦ 현황: 한 줄로 이어지는 기록</a:t>
             </a:r>
             <a:endParaRPr lang="en-US" sz="2800" dirty="0"/>
           </a:p>
@@ -7086,18 +7748,18 @@
       </p:sp>
       <p:sp>
         <p:nvSpPr>
-          <p:cNvPr id="3" name="frame-08_이력에묻기.png"/>
+          <p:cNvPr id="3" name="frame-05_검토승인.png"/>
           <p:cNvSpPr/>
           <p:nvPr/>
         </p:nvSpPr>
         <p:spPr>
           <a:xfrm>
-            <a:off x="475488" y="1298448"/>
-            <a:ext cx="7095744" cy="4581144"/>
+            <a:off x="475488" y="1344168"/>
+            <a:ext cx="3758184" cy="3386869"/>
           </a:xfrm>
           <a:prstGeom prst="roundRect">
             <a:avLst>
-              <a:gd name="adj" fmla="val 1996"/>
+              <a:gd name="adj" fmla="val 2700"/>
             </a:avLst>
           </a:prstGeom>
           <a:solidFill>
@@ -7113,7 +7775,7 @@
       </p:sp>
       <p:pic>
         <p:nvPicPr>
-          <p:cNvPr id="4" name="shot-08_이력에묻기.png" descr="/tmp/claude-0/-home-user-ebsjajucenter/339b2177-8504-5831-abfe-1ed2cf264c84/scratchpad/deck/img/08_이력에묻기.png">    </p:cNvPr>
+          <p:cNvPr id="4" name="shot-05_검토승인.png" descr="/tmp/claude-0/-home-user-ebsjajucenter/339b2177-8504-5831-abfe-1ed2cf264c84/scratchpad/deck/img/05_검토승인.png">    </p:cNvPr>
           <p:cNvPicPr>
             <a:picLocks noChangeAspect="1"/>
           </p:cNvPicPr>
@@ -7126,8 +7788,8 @@
         </p:blipFill>
         <p:spPr>
           <a:xfrm>
-            <a:off x="548640" y="1371600"/>
-            <a:ext cx="6949440" cy="4434840"/>
+            <a:off x="548640" y="1417320"/>
+            <a:ext cx="3611880" cy="3240565"/>
           </a:xfrm>
           <a:prstGeom prst="rect">
             <a:avLst/>
@@ -7136,14 +7798,14 @@
       </p:pic>
       <p:sp>
         <p:nvSpPr>
-          <p:cNvPr id="5" name="cap-08_이력에묻기.png"/>
+          <p:cNvPr id="5" name="cap-05_검토승인.png"/>
           <p:cNvSpPr txBox="1"/>
           <p:nvPr/>
         </p:nvSpPr>
         <p:spPr>
           <a:xfrm>
-            <a:off x="548640" y="5916168"/>
-            <a:ext cx="6949440" cy="274320"/>
+            <a:off x="548640" y="4767613"/>
+            <a:ext cx="3611880" cy="274320"/>
           </a:xfrm>
           <a:prstGeom prst="rect">
             <a:avLst/>
@@ -7164,7 +7826,7 @@
                   <a:schemeClr val="accent5"/>
                 </a:solidFill>
               </a:rPr>
-              <a:t>화면 캡처(Claude 경로 · claude-sonnet-4-6, 2026-10-04)</a:t>
+              <a:t>⑤ 팀장 검토·승인(의견 기록)</a:t>
             </a:r>
             <a:endParaRPr lang="en-US" sz="1000" dirty="0"/>
           </a:p>
@@ -7172,14 +7834,64 @@
       </p:sp>
       <p:sp>
         <p:nvSpPr>
-          <p:cNvPr id="6" name="bullets"/>
+          <p:cNvPr id="6" name="frame-06_이력조회.png"/>
+          <p:cNvSpPr/>
+          <p:nvPr/>
+        </p:nvSpPr>
+        <p:spPr>
+          <a:xfrm>
+            <a:off x="4224528" y="1344168"/>
+            <a:ext cx="3758184" cy="2576728"/>
+          </a:xfrm>
+          <a:prstGeom prst="roundRect">
+            <a:avLst>
+              <a:gd name="adj" fmla="val 3549"/>
+            </a:avLst>
+          </a:prstGeom>
+          <a:solidFill>
+            <a:schemeClr val="bg2"/>
+          </a:solidFill>
+          <a:ln w="12700">
+            <a:solidFill>
+              <a:schemeClr val="bg2"/>
+            </a:solidFill>
+            <a:prstDash val="solid"/>
+          </a:ln>
+        </p:spPr>
+      </p:sp>
+      <p:pic>
+        <p:nvPicPr>
+          <p:cNvPr id="7" name="shot-06_이력조회.png" descr="/tmp/claude-0/-home-user-ebsjajucenter/339b2177-8504-5831-abfe-1ed2cf264c84/scratchpad/deck/img/06_이력조회.png">    </p:cNvPr>
+          <p:cNvPicPr>
+            <a:picLocks noChangeAspect="1"/>
+          </p:cNvPicPr>
+          <p:nvPr/>
+        </p:nvPicPr>
+        <p:blipFill>
+          <a:blip r:embed="rId2"/>
+          <a:srcRect l="0" r="0" t="0" b="0"/>
+          <a:stretch/>
+        </p:blipFill>
+        <p:spPr>
+          <a:xfrm>
+            <a:off x="4297680" y="1417320"/>
+            <a:ext cx="3611880" cy="2430424"/>
+          </a:xfrm>
+          <a:prstGeom prst="rect">
+            <a:avLst/>
+          </a:prstGeom>
+        </p:spPr>
+      </p:pic>
+      <p:sp>
+        <p:nvSpPr>
+          <p:cNvPr id="8" name="cap-06_이력조회.png"/>
           <p:cNvSpPr txBox="1"/>
           <p:nvPr/>
         </p:nvSpPr>
         <p:spPr>
           <a:xfrm>
-            <a:off x="7863840" y="1371600"/>
-            <a:ext cx="3794760" cy="4206240"/>
+            <a:off x="4297680" y="3957472"/>
+            <a:ext cx="3611880" cy="274320"/>
           </a:xfrm>
           <a:prstGeom prst="rect">
             <a:avLst/>
@@ -7188,15 +7900,133 @@
           <a:ln/>
         </p:spPr>
         <p:txBody>
-          <a:bodyPr wrap="square" lIns="0" tIns="0" rIns="0" bIns="0" rtlCol="0" anchor="t"/>
-          <a:lstStyle/>
-          <a:p>
-            <a:pPr marL="342900" indent="-342900">
-              <a:spcAft>
-                <a:spcPts val="800"/>
-              </a:spcAft>
-              <a:buSzPct val="100000"/>
-              <a:buChar char="•"/>
+          <a:bodyPr wrap="square" lIns="0" tIns="0" rIns="0" bIns="0" rtlCol="0" anchor="ctr"/>
+          <a:lstStyle/>
+          <a:p>
+            <a:pPr indent="0" marL="0">
+              <a:buNone/>
+            </a:pPr>
+            <a:r>
+              <a:rPr lang="en-US" sz="1000" dirty="0">
+                <a:solidFill>
+                  <a:schemeClr val="accent5"/>
+                </a:solidFill>
+              </a:rPr>
+              <a:t>⑥ 요구→항목→제출본→초안→승인</a:t>
+            </a:r>
+            <a:endParaRPr lang="en-US" sz="1000" dirty="0"/>
+          </a:p>
+        </p:txBody>
+      </p:sp>
+      <p:sp>
+        <p:nvSpPr>
+          <p:cNvPr id="9" name="frame-07_현황통계.png"/>
+          <p:cNvSpPr/>
+          <p:nvPr/>
+        </p:nvSpPr>
+        <p:spPr>
+          <a:xfrm>
+            <a:off x="7973568" y="1344168"/>
+            <a:ext cx="3758184" cy="3116822"/>
+          </a:xfrm>
+          <a:prstGeom prst="roundRect">
+            <a:avLst>
+              <a:gd name="adj" fmla="val 2934"/>
+            </a:avLst>
+          </a:prstGeom>
+          <a:solidFill>
+            <a:schemeClr val="bg2"/>
+          </a:solidFill>
+          <a:ln w="12700">
+            <a:solidFill>
+              <a:schemeClr val="bg2"/>
+            </a:solidFill>
+            <a:prstDash val="solid"/>
+          </a:ln>
+        </p:spPr>
+      </p:sp>
+      <p:pic>
+        <p:nvPicPr>
+          <p:cNvPr id="10" name="shot-07_현황통계.png" descr="/tmp/claude-0/-home-user-ebsjajucenter/339b2177-8504-5831-abfe-1ed2cf264c84/scratchpad/deck/img/07_현황통계.png">    </p:cNvPr>
+          <p:cNvPicPr>
+            <a:picLocks noChangeAspect="1"/>
+          </p:cNvPicPr>
+          <p:nvPr/>
+        </p:nvPicPr>
+        <p:blipFill>
+          <a:blip r:embed="rId3"/>
+          <a:srcRect l="0" r="0" t="0" b="0"/>
+          <a:stretch/>
+        </p:blipFill>
+        <p:spPr>
+          <a:xfrm>
+            <a:off x="8046720" y="1417320"/>
+            <a:ext cx="3611880" cy="2970518"/>
+          </a:xfrm>
+          <a:prstGeom prst="rect">
+            <a:avLst/>
+          </a:prstGeom>
+        </p:spPr>
+      </p:pic>
+      <p:sp>
+        <p:nvSpPr>
+          <p:cNvPr id="11" name="cap-07_현황통계.png"/>
+          <p:cNvSpPr txBox="1"/>
+          <p:nvPr/>
+        </p:nvSpPr>
+        <p:spPr>
+          <a:xfrm>
+            <a:off x="8046720" y="4497566"/>
+            <a:ext cx="3611880" cy="274320"/>
+          </a:xfrm>
+          <a:prstGeom prst="rect">
+            <a:avLst/>
+          </a:prstGeom>
+          <a:noFill/>
+          <a:ln/>
+        </p:spPr>
+        <p:txBody>
+          <a:bodyPr wrap="square" lIns="0" tIns="0" rIns="0" bIns="0" rtlCol="0" anchor="ctr"/>
+          <a:lstStyle/>
+          <a:p>
+            <a:pPr indent="0" marL="0">
+              <a:buNone/>
+            </a:pPr>
+            <a:r>
+              <a:rPr lang="en-US" sz="1000" dirty="0">
+                <a:solidFill>
+                  <a:schemeClr val="accent5"/>
+                </a:solidFill>
+              </a:rPr>
+              <a:t>⑦ D-day·기한 임박·반복 요구 지표</a:t>
+            </a:r>
+            <a:endParaRPr lang="en-US" sz="1000" dirty="0"/>
+          </a:p>
+        </p:txBody>
+      </p:sp>
+      <p:sp>
+        <p:nvSpPr>
+          <p:cNvPr id="12" name="wrap-note"/>
+          <p:cNvSpPr txBox="1"/>
+          <p:nvPr/>
+        </p:nvSpPr>
+        <p:spPr>
+          <a:xfrm>
+            <a:off x="548640" y="5394960"/>
+            <a:ext cx="11064240" cy="548640"/>
+          </a:xfrm>
+          <a:prstGeom prst="rect">
+            <a:avLst/>
+          </a:prstGeom>
+          <a:noFill/>
+          <a:ln/>
+        </p:spPr>
+        <p:txBody>
+          <a:bodyPr wrap="square" lIns="0" tIns="0" rIns="0" bIns="0" rtlCol="0" anchor="ctr"/>
+          <a:lstStyle/>
+          <a:p>
+            <a:pPr indent="0" marL="0">
+              <a:buNone/>
             </a:pPr>
             <a:r>
               <a:rPr lang="en-US" sz="1250" dirty="0">
@@ -7204,61 +8034,7 @@
                   <a:schemeClr val="tx1"/>
                 </a:solidFill>
               </a:rPr>
-              <a:t>자연어 질문 → Claude가 조회 도구(요구서 검색·상세·제출값·과거 제출·차이 사유·현황·지표 사전)를 골라 호출</a:t>
-            </a:r>
-            <a:endParaRPr lang="en-US" sz="1250" dirty="0"/>
-          </a:p>
-          <a:p>
-            <a:pPr marL="342900" indent="-342900">
-              <a:spcAft>
-                <a:spcPts val="800"/>
-              </a:spcAft>
-              <a:buSzPct val="100000"/>
-              <a:buChar char="•"/>
-            </a:pPr>
-            <a:r>
-              <a:rPr lang="en-US" sz="1250" dirty="0">
-                <a:solidFill>
-                  <a:schemeClr val="tx1"/>
-                </a:solidFill>
-              </a:rPr>
-              <a:t>조회된 레코드만 근거로 답하고 요구번호·제출본·제출일·기관을 명시. 평균·증감 가공 금지</a:t>
-            </a:r>
-            <a:endParaRPr lang="en-US" sz="1250" dirty="0"/>
-          </a:p>
-          <a:p>
-            <a:pPr marL="342900" indent="-342900">
-              <a:spcAft>
-                <a:spcPts val="800"/>
-              </a:spcAft>
-              <a:buSzPct val="100000"/>
-              <a:buChar char="•"/>
-            </a:pPr>
-            <a:r>
-              <a:rPr lang="en-US" sz="1250" dirty="0">
-                <a:solidFill>
-                  <a:schemeClr val="tx1"/>
-                </a:solidFill>
-              </a:rPr>
-              <a:t>'근거 레코드' 펼침에 어떤 도구를 어떤 입력으로 호출했는지 전부 표시</a:t>
-            </a:r>
-            <a:endParaRPr lang="en-US" sz="1250" dirty="0"/>
-          </a:p>
-          <a:p>
-            <a:pPr marL="342900" indent="-342900">
-              <a:spcAft>
-                <a:spcPts val="800"/>
-              </a:spcAft>
-              <a:buSzPct val="100000"/>
-              <a:buChar char="•"/>
-            </a:pPr>
-            <a:r>
-              <a:rPr lang="en-US" sz="1250" dirty="0">
-                <a:solidFill>
-                  <a:schemeClr val="tx1"/>
-                </a:solidFill>
-              </a:rPr>
-              <a:t>실호출: '감사실' 이력이 없음을 먼저 밝히고, 두 제출본 값을 나란히 보여 주며 차이 사유 기록을 인용(차이값 계산·추정 표현 없음)</a:t>
+              <a:t>반복 요구 지표(등원율 2회·요청 주체 2곳)는 사전 산출·표준 답변 후보가 됩니다. 관리대장은 엑셀로 내보냅니다.</a:t>
             </a:r>
             <a:endParaRPr lang="en-US" sz="1250" dirty="0"/>
           </a:p>
@@ -7366,7 +8142,7 @@
                   <a:schemeClr val="tx1"/>
                 </a:solidFill>
               </a:rPr>
-              <a:t>구조 — 부서 PC 한 대에서 끝나고, AI는 갈아끼우는 모듈</a:t>
+              <a:t>⑧ 이력에 묻기 — 7개 화면을 돌아다니지 않아도 된다</a:t>
             </a:r>
             <a:endParaRPr lang="en-US" sz="2800" dirty="0"/>
           </a:p>
@@ -7374,81 +8150,18 @@
       </p:sp>
       <p:sp>
         <p:nvSpPr>
-          <p:cNvPr id="3" name="arch-pc"/>
+          <p:cNvPr id="3" name="frame-08_이력에묻기.png"/>
           <p:cNvSpPr/>
           <p:nvPr/>
         </p:nvSpPr>
         <p:spPr>
           <a:xfrm>
-            <a:off x="548640" y="1371600"/>
-            <a:ext cx="7680960" cy="4754880"/>
+            <a:off x="475488" y="1298448"/>
+            <a:ext cx="7095744" cy="4581144"/>
           </a:xfrm>
           <a:prstGeom prst="roundRect">
             <a:avLst>
-              <a:gd name="adj" fmla="val 2885"/>
-            </a:avLst>
-          </a:prstGeom>
-          <a:solidFill>
-            <a:schemeClr val="bg1"/>
-          </a:solidFill>
-          <a:ln w="25400">
-            <a:solidFill>
-              <a:schemeClr val="accent6"/>
-            </a:solidFill>
-            <a:prstDash val="solid"/>
-          </a:ln>
-        </p:spPr>
-      </p:sp>
-      <p:sp>
-        <p:nvSpPr>
-          <p:cNvPr id="4" name="arch-pc-title"/>
-          <p:cNvSpPr txBox="1"/>
-          <p:nvPr/>
-        </p:nvSpPr>
-        <p:spPr>
-          <a:xfrm>
-            <a:off x="731520" y="1463040"/>
-            <a:ext cx="7315200" cy="365760"/>
-          </a:xfrm>
-          <a:prstGeom prst="rect">
-            <a:avLst/>
-          </a:prstGeom>
-          <a:noFill/>
-          <a:ln/>
-        </p:spPr>
-        <p:txBody>
-          <a:bodyPr wrap="square" lIns="0" tIns="0" rIns="0" bIns="0" rtlCol="0" anchor="ctr"/>
-          <a:lstStyle/>
-          <a:p>
-            <a:pPr indent="0" marL="0">
-              <a:buNone/>
-            </a:pPr>
-            <a:r>
-              <a:rPr lang="en-US" sz="1300" b="1" dirty="0">
-                <a:solidFill>
-                  <a:schemeClr val="tx2"/>
-                </a:solidFill>
-              </a:rPr>
-              <a:t>담당자 PC 또는 부서 공용 PC — run.bat(혼자) / run_server.bat(여럿)</a:t>
-            </a:r>
-            <a:endParaRPr lang="en-US" sz="1300" dirty="0"/>
-          </a:p>
-        </p:txBody>
-      </p:sp>
-      <p:sp>
-        <p:nvSpPr>
-          <p:cNvPr id="5" name="arch-화면 (Streamlit)"/>
-          <p:cNvSpPr/>
-          <p:nvPr/>
-        </p:nvSpPr>
-        <p:spPr>
-          <a:xfrm>
-            <a:off x="731520" y="1920240"/>
-            <a:ext cx="2286000" cy="1371600"/>
-          </a:xfrm>
-          <a:prstGeom prst="roundRect">
-            <a:avLst>
-              <a:gd name="adj" fmla="val 6667"/>
+              <a:gd name="adj" fmla="val 1996"/>
             </a:avLst>
           </a:prstGeom>
           <a:solidFill>
@@ -7462,16 +8175,39 @@
           </a:ln>
         </p:spPr>
       </p:sp>
-      <p:sp>
-        <p:nvSpPr>
-          <p:cNvPr id="6" name="arch-t-화면 (Streamlit)"/>
+      <p:pic>
+        <p:nvPicPr>
+          <p:cNvPr id="4" name="shot-08_이력에묻기.png" descr="/tmp/claude-0/-home-user-ebsjajucenter/339b2177-8504-5831-abfe-1ed2cf264c84/scratchpad/deck/img/08_이력에묻기.png">    </p:cNvPr>
+          <p:cNvPicPr>
+            <a:picLocks noChangeAspect="1"/>
+          </p:cNvPicPr>
+          <p:nvPr/>
+        </p:nvPicPr>
+        <p:blipFill>
+          <a:blip r:embed="rId1"/>
+          <a:srcRect l="0" r="0" t="0" b="0"/>
+          <a:stretch/>
+        </p:blipFill>
+        <p:spPr>
+          <a:xfrm>
+            <a:off x="548640" y="1371600"/>
+            <a:ext cx="6949440" cy="4434840"/>
+          </a:xfrm>
+          <a:prstGeom prst="rect">
+            <a:avLst/>
+          </a:prstGeom>
+        </p:spPr>
+      </p:pic>
+      <p:sp>
+        <p:nvSpPr>
+          <p:cNvPr id="5" name="cap-08_이력에묻기.png"/>
           <p:cNvSpPr txBox="1"/>
           <p:nvPr/>
         </p:nvSpPr>
         <p:spPr>
           <a:xfrm>
-            <a:off x="868680" y="2011680"/>
-            <a:ext cx="2011680" cy="365760"/>
+            <a:off x="548640" y="5916168"/>
+            <a:ext cx="6949440" cy="274320"/>
           </a:xfrm>
           <a:prstGeom prst="rect">
             <a:avLst/>
@@ -7487,27 +8223,27 @@
               <a:buNone/>
             </a:pPr>
             <a:r>
-              <a:rPr lang="en-US" sz="1300" b="1" dirty="0">
-                <a:solidFill>
-                  <a:schemeClr val="tx1"/>
-                </a:solidFill>
-              </a:rPr>
-              <a:t>화면 (Streamlit)</a:t>
-            </a:r>
-            <a:endParaRPr lang="en-US" sz="1300" dirty="0"/>
-          </a:p>
-        </p:txBody>
-      </p:sp>
-      <p:sp>
-        <p:nvSpPr>
-          <p:cNvPr id="7" name="arch-b-화면 (Streamlit)"/>
+              <a:rPr lang="en-US" sz="1000" dirty="0">
+                <a:solidFill>
+                  <a:schemeClr val="accent5"/>
+                </a:solidFill>
+              </a:rPr>
+              <a:t>화면 캡처(Claude 경로 · claude-sonnet-4-6, 2026-10-04)</a:t>
+            </a:r>
+            <a:endParaRPr lang="en-US" sz="1000" dirty="0"/>
+          </a:p>
+        </p:txBody>
+      </p:sp>
+      <p:sp>
+        <p:nvSpPr>
+          <p:cNvPr id="6" name="bullets"/>
           <p:cNvSpPr txBox="1"/>
           <p:nvPr/>
         </p:nvSpPr>
         <p:spPr>
           <a:xfrm>
-            <a:off x="868680" y="2377440"/>
-            <a:ext cx="2011680" cy="822960"/>
+            <a:off x="7863840" y="1371600"/>
+            <a:ext cx="3794760" cy="4206240"/>
           </a:xfrm>
           <a:prstGeom prst="rect">
             <a:avLst/>
@@ -7519,1102 +8255,78 @@
           <a:bodyPr wrap="square" lIns="0" tIns="0" rIns="0" bIns="0" rtlCol="0" anchor="t"/>
           <a:lstStyle/>
           <a:p>
-            <a:pPr indent="0" marL="0">
-              <a:buNone/>
-            </a:pPr>
-            <a:r>
-              <a:rPr lang="en-US" sz="1050" dirty="0">
+            <a:pPr marL="342900" indent="-342900">
+              <a:spcAft>
+                <a:spcPts val="800"/>
+              </a:spcAft>
+              <a:buSzPct val="100000"/>
+              <a:buChar char="•"/>
+            </a:pPr>
+            <a:r>
+              <a:rPr lang="en-US" sz="1250" dirty="0">
                 <a:solidFill>
                   <a:schemeClr val="tx1"/>
                 </a:solidFill>
               </a:rPr>
-              <a:t>8개 화면 + 설정</a:t>
-            </a:r>
-            <a:endParaRPr lang="en-US" sz="1050" dirty="0"/>
-          </a:p>
-          <a:p>
-            <a:pPr indent="0" marL="0">
-              <a:buNone/>
-            </a:pPr>
-            <a:r>
-              <a:rPr lang="en-US" sz="1050" dirty="0">
+              <a:t>자연어 질문 → Claude가 조회 도구(요구서 검색·상세·제출값·과거 제출·차이 사유·현황·지표 사전)를 골라 호출</a:t>
+            </a:r>
+            <a:endParaRPr lang="en-US" sz="1250" dirty="0"/>
+          </a:p>
+          <a:p>
+            <a:pPr marL="342900" indent="-342900">
+              <a:spcAft>
+                <a:spcPts val="800"/>
+              </a:spcAft>
+              <a:buSzPct val="100000"/>
+              <a:buChar char="•"/>
+            </a:pPr>
+            <a:r>
+              <a:rPr lang="en-US" sz="1250" dirty="0">
                 <a:solidFill>
                   <a:schemeClr val="tx1"/>
                 </a:solidFill>
               </a:rPr>
-              <a:t>접속자(브라우저 세션)별 키·모델·호출 기록</a:t>
-            </a:r>
-            <a:endParaRPr lang="en-US" sz="1050" dirty="0"/>
-          </a:p>
-        </p:txBody>
-      </p:sp>
-      <p:sp>
-        <p:nvSpPr>
-          <p:cNvPr id="8" name="arch-추출·정규화"/>
-          <p:cNvSpPr/>
-          <p:nvPr/>
-        </p:nvSpPr>
-        <p:spPr>
-          <a:xfrm>
-            <a:off x="3200400" y="1920240"/>
-            <a:ext cx="2286000" cy="1371600"/>
-          </a:xfrm>
-          <a:prstGeom prst="roundRect">
-            <a:avLst>
-              <a:gd name="adj" fmla="val 6667"/>
-            </a:avLst>
-          </a:prstGeom>
-          <a:solidFill>
-            <a:schemeClr val="bg2"/>
-          </a:solidFill>
-          <a:ln w="12700">
-            <a:solidFill>
-              <a:schemeClr val="bg2"/>
-            </a:solidFill>
-            <a:prstDash val="solid"/>
-          </a:ln>
-        </p:spPr>
-      </p:sp>
-      <p:sp>
-        <p:nvSpPr>
-          <p:cNvPr id="9" name="arch-t-추출·정규화"/>
-          <p:cNvSpPr txBox="1"/>
-          <p:nvPr/>
-        </p:nvSpPr>
-        <p:spPr>
-          <a:xfrm>
-            <a:off x="3337560" y="2011680"/>
-            <a:ext cx="2011680" cy="365760"/>
-          </a:xfrm>
-          <a:prstGeom prst="rect">
-            <a:avLst/>
-          </a:prstGeom>
-          <a:noFill/>
-          <a:ln/>
-        </p:spPr>
-        <p:txBody>
-          <a:bodyPr wrap="square" lIns="0" tIns="0" rIns="0" bIns="0" rtlCol="0" anchor="ctr"/>
-          <a:lstStyle/>
-          <a:p>
-            <a:pPr indent="0" marL="0">
-              <a:buNone/>
-            </a:pPr>
-            <a:r>
-              <a:rPr lang="en-US" sz="1300" b="1" dirty="0">
+              <a:t>조회된 레코드만 근거로 답하고 요구번호·제출본·제출일·기관을 명시. 평균·증감 가공 금지</a:t>
+            </a:r>
+            <a:endParaRPr lang="en-US" sz="1250" dirty="0"/>
+          </a:p>
+          <a:p>
+            <a:pPr marL="342900" indent="-342900">
+              <a:spcAft>
+                <a:spcPts val="800"/>
+              </a:spcAft>
+              <a:buSzPct val="100000"/>
+              <a:buChar char="•"/>
+            </a:pPr>
+            <a:r>
+              <a:rPr lang="en-US" sz="1250" dirty="0">
                 <a:solidFill>
                   <a:schemeClr val="tx1"/>
                 </a:solidFill>
               </a:rPr>
-              <a:t>추출·정규화</a:t>
-            </a:r>
-            <a:endParaRPr lang="en-US" sz="1300" dirty="0"/>
-          </a:p>
-        </p:txBody>
-      </p:sp>
-      <p:sp>
-        <p:nvSpPr>
-          <p:cNvPr id="10" name="arch-b-추출·정규화"/>
-          <p:cNvSpPr txBox="1"/>
-          <p:nvPr/>
-        </p:nvSpPr>
-        <p:spPr>
-          <a:xfrm>
-            <a:off x="3337560" y="2377440"/>
-            <a:ext cx="2011680" cy="822960"/>
-          </a:xfrm>
-          <a:prstGeom prst="rect">
-            <a:avLst/>
-          </a:prstGeom>
-          <a:noFill/>
-          <a:ln/>
-        </p:spPr>
-        <p:txBody>
-          <a:bodyPr wrap="square" lIns="0" tIns="0" rIns="0" bIns="0" rtlCol="0" anchor="t"/>
-          <a:lstStyle/>
-          <a:p>
-            <a:pPr indent="0" marL="0">
-              <a:buNone/>
-            </a:pPr>
-            <a:r>
-              <a:rPr lang="en-US" sz="1050" dirty="0">
+              <a:t>'근거 레코드' 펼침에 어떤 도구를 어떤 입력으로 호출했는지 전부 표시</a:t>
+            </a:r>
+            <a:endParaRPr lang="en-US" sz="1250" dirty="0"/>
+          </a:p>
+          <a:p>
+            <a:pPr marL="342900" indent="-342900">
+              <a:spcAft>
+                <a:spcPts val="800"/>
+              </a:spcAft>
+              <a:buSzPct val="100000"/>
+              <a:buChar char="•"/>
+            </a:pPr>
+            <a:r>
+              <a:rPr lang="en-US" sz="1250" dirty="0">
                 <a:solidFill>
                   <a:schemeClr val="tx1"/>
                 </a:solidFill>
               </a:rPr>
-              <a:t>extract · normalize(지표 사전)</a:t>
-            </a:r>
-            <a:endParaRPr lang="en-US" sz="1050" dirty="0"/>
-          </a:p>
-          <a:p>
-            <a:pPr indent="0" marL="0">
-              <a:buNone/>
-            </a:pPr>
-            <a:r>
-              <a:rPr lang="en-US" sz="1050" dirty="0">
-                <a:solidFill>
-                  <a:schemeClr val="tx1"/>
-                </a:solidFill>
-              </a:rPr>
-              <a:t>docread(txt·HWPX·PDF·DOCX)</a:t>
-            </a:r>
-            <a:endParaRPr lang="en-US" sz="1050" dirty="0"/>
-          </a:p>
-        </p:txBody>
-      </p:sp>
-      <p:sp>
-        <p:nvSpPr>
-          <p:cNvPr id="11" name="arch-검색·제안"/>
-          <p:cNvSpPr/>
-          <p:nvPr/>
-        </p:nvSpPr>
-        <p:spPr>
-          <a:xfrm>
-            <a:off x="5669280" y="1920240"/>
-            <a:ext cx="2377440" cy="1371600"/>
-          </a:xfrm>
-          <a:prstGeom prst="roundRect">
-            <a:avLst>
-              <a:gd name="adj" fmla="val 6667"/>
-            </a:avLst>
-          </a:prstGeom>
-          <a:solidFill>
-            <a:schemeClr val="bg2"/>
-          </a:solidFill>
-          <a:ln w="12700">
-            <a:solidFill>
-              <a:schemeClr val="bg2"/>
-            </a:solidFill>
-            <a:prstDash val="solid"/>
-          </a:ln>
-        </p:spPr>
-      </p:sp>
-      <p:sp>
-        <p:nvSpPr>
-          <p:cNvPr id="12" name="arch-t-검색·제안"/>
-          <p:cNvSpPr txBox="1"/>
-          <p:nvPr/>
-        </p:nvSpPr>
-        <p:spPr>
-          <a:xfrm>
-            <a:off x="5806440" y="2011680"/>
-            <a:ext cx="2103120" cy="365760"/>
-          </a:xfrm>
-          <a:prstGeom prst="rect">
-            <a:avLst/>
-          </a:prstGeom>
-          <a:noFill/>
-          <a:ln/>
-        </p:spPr>
-        <p:txBody>
-          <a:bodyPr wrap="square" lIns="0" tIns="0" rIns="0" bIns="0" rtlCol="0" anchor="ctr"/>
-          <a:lstStyle/>
-          <a:p>
-            <a:pPr indent="0" marL="0">
-              <a:buNone/>
-            </a:pPr>
-            <a:r>
-              <a:rPr lang="en-US" sz="1300" b="1" dirty="0">
-                <a:solidFill>
-                  <a:schemeClr val="tx1"/>
-                </a:solidFill>
-              </a:rPr>
-              <a:t>검색·제안</a:t>
-            </a:r>
-            <a:endParaRPr lang="en-US" sz="1300" dirty="0"/>
-          </a:p>
-        </p:txBody>
-      </p:sp>
-      <p:sp>
-        <p:nvSpPr>
-          <p:cNvPr id="13" name="arch-b-검색·제안"/>
-          <p:cNvSpPr txBox="1"/>
-          <p:nvPr/>
-        </p:nvSpPr>
-        <p:spPr>
-          <a:xfrm>
-            <a:off x="5806440" y="2377440"/>
-            <a:ext cx="2103120" cy="822960"/>
-          </a:xfrm>
-          <a:prstGeom prst="rect">
-            <a:avLst/>
-          </a:prstGeom>
-          <a:noFill/>
-          <a:ln/>
-        </p:spPr>
-        <p:txBody>
-          <a:bodyPr wrap="square" lIns="0" tIns="0" rIns="0" bIns="0" rtlCol="0" anchor="t"/>
-          <a:lstStyle/>
-          <a:p>
-            <a:pPr indent="0" marL="0">
-              <a:buNone/>
-            </a:pPr>
-            <a:r>
-              <a:rPr lang="en-US" sz="1050" dirty="0">
-                <a:solidFill>
-                  <a:schemeClr val="tx1"/>
-                </a:solidFill>
-              </a:rPr>
-              <a:t>search(문자 n-gram, 외부 API 없음)</a:t>
-            </a:r>
-            <a:endParaRPr lang="en-US" sz="1050" dirty="0"/>
-          </a:p>
-          <a:p>
-            <a:pPr indent="0" marL="0">
-              <a:buNone/>
-            </a:pPr>
-            <a:r>
-              <a:rPr lang="en-US" sz="1050" dirty="0">
-                <a:solidFill>
-                  <a:schemeClr val="tx1"/>
-                </a:solidFill>
-              </a:rPr>
-              <a:t>suggest(데이터 카탈로그)</a:t>
-            </a:r>
-            <a:endParaRPr lang="en-US" sz="1050" dirty="0"/>
-          </a:p>
-        </p:txBody>
-      </p:sp>
-      <p:sp>
-        <p:nvSpPr>
-          <p:cNvPr id="14" name="arch-대조·점검 (코드)"/>
-          <p:cNvSpPr/>
-          <p:nvPr/>
-        </p:nvSpPr>
-        <p:spPr>
-          <a:xfrm>
-            <a:off x="731520" y="3474720"/>
-            <a:ext cx="2286000" cy="1371600"/>
-          </a:xfrm>
-          <a:prstGeom prst="roundRect">
-            <a:avLst>
-              <a:gd name="adj" fmla="val 6667"/>
-            </a:avLst>
-          </a:prstGeom>
-          <a:solidFill>
-            <a:schemeClr val="bg2"/>
-          </a:solidFill>
-          <a:ln w="12700">
-            <a:solidFill>
-              <a:schemeClr val="bg2"/>
-            </a:solidFill>
-            <a:prstDash val="solid"/>
-          </a:ln>
-        </p:spPr>
-      </p:sp>
-      <p:sp>
-        <p:nvSpPr>
-          <p:cNvPr id="15" name="arch-t-대조·점검 (코드)"/>
-          <p:cNvSpPr txBox="1"/>
-          <p:nvPr/>
-        </p:nvSpPr>
-        <p:spPr>
-          <a:xfrm>
-            <a:off x="868680" y="3566160"/>
-            <a:ext cx="2011680" cy="365760"/>
-          </a:xfrm>
-          <a:prstGeom prst="rect">
-            <a:avLst/>
-          </a:prstGeom>
-          <a:noFill/>
-          <a:ln/>
-        </p:spPr>
-        <p:txBody>
-          <a:bodyPr wrap="square" lIns="0" tIns="0" rIns="0" bIns="0" rtlCol="0" anchor="ctr"/>
-          <a:lstStyle/>
-          <a:p>
-            <a:pPr indent="0" marL="0">
-              <a:buNone/>
-            </a:pPr>
-            <a:r>
-              <a:rPr lang="en-US" sz="1300" b="1" dirty="0">
-                <a:solidFill>
-                  <a:schemeClr val="tx1"/>
-                </a:solidFill>
-              </a:rPr>
-              <a:t>대조·점검 (코드)</a:t>
-            </a:r>
-            <a:endParaRPr lang="en-US" sz="1300" dirty="0"/>
-          </a:p>
-        </p:txBody>
-      </p:sp>
-      <p:sp>
-        <p:nvSpPr>
-          <p:cNvPr id="16" name="arch-b-대조·점검 (코드)"/>
-          <p:cNvSpPr txBox="1"/>
-          <p:nvPr/>
-        </p:nvSpPr>
-        <p:spPr>
-          <a:xfrm>
-            <a:off x="868680" y="3931920"/>
-            <a:ext cx="2011680" cy="822960"/>
-          </a:xfrm>
-          <a:prstGeom prst="rect">
-            <a:avLst/>
-          </a:prstGeom>
-          <a:noFill/>
-          <a:ln/>
-        </p:spPr>
-        <p:txBody>
-          <a:bodyPr wrap="square" lIns="0" tIns="0" rIns="0" bIns="0" rtlCol="0" anchor="t"/>
-          <a:lstStyle/>
-          <a:p>
-            <a:pPr indent="0" marL="0">
-              <a:buNone/>
-            </a:pPr>
-            <a:r>
-              <a:rPr lang="en-US" sz="1050" dirty="0">
-                <a:solidFill>
-                  <a:schemeClr val="tx1"/>
-                </a:solidFill>
-              </a:rPr>
-              <a:t>compare(pandas) · pii</a:t>
-            </a:r>
-            <a:endParaRPr lang="en-US" sz="1050" dirty="0"/>
-          </a:p>
-          <a:p>
-            <a:pPr indent="0" marL="0">
-              <a:buNone/>
-            </a:pPr>
-            <a:r>
-              <a:rPr lang="en-US" sz="1050" dirty="0">
-                <a:solidFill>
-                  <a:schemeClr val="tx1"/>
-                </a:solidFill>
-              </a:rPr>
-              <a:t>차이·단서·점검표·출처</a:t>
-            </a:r>
-            <a:endParaRPr lang="en-US" sz="1050" dirty="0"/>
-          </a:p>
-        </p:txBody>
-      </p:sp>
-      <p:sp>
-        <p:nvSpPr>
-          <p:cNvPr id="17" name="arch-초안·출력·보조"/>
-          <p:cNvSpPr/>
-          <p:nvPr/>
-        </p:nvSpPr>
-        <p:spPr>
-          <a:xfrm>
-            <a:off x="3200400" y="3474720"/>
-            <a:ext cx="2286000" cy="1371600"/>
-          </a:xfrm>
-          <a:prstGeom prst="roundRect">
-            <a:avLst>
-              <a:gd name="adj" fmla="val 6667"/>
-            </a:avLst>
-          </a:prstGeom>
-          <a:solidFill>
-            <a:schemeClr val="bg2"/>
-          </a:solidFill>
-          <a:ln w="12700">
-            <a:solidFill>
-              <a:schemeClr val="bg2"/>
-            </a:solidFill>
-            <a:prstDash val="solid"/>
-          </a:ln>
-        </p:spPr>
-      </p:sp>
-      <p:sp>
-        <p:nvSpPr>
-          <p:cNvPr id="18" name="arch-t-초안·출력·보조"/>
-          <p:cNvSpPr txBox="1"/>
-          <p:nvPr/>
-        </p:nvSpPr>
-        <p:spPr>
-          <a:xfrm>
-            <a:off x="3337560" y="3566160"/>
-            <a:ext cx="2011680" cy="365760"/>
-          </a:xfrm>
-          <a:prstGeom prst="rect">
-            <a:avLst/>
-          </a:prstGeom>
-          <a:noFill/>
-          <a:ln/>
-        </p:spPr>
-        <p:txBody>
-          <a:bodyPr wrap="square" lIns="0" tIns="0" rIns="0" bIns="0" rtlCol="0" anchor="ctr"/>
-          <a:lstStyle/>
-          <a:p>
-            <a:pPr indent="0" marL="0">
-              <a:buNone/>
-            </a:pPr>
-            <a:r>
-              <a:rPr lang="en-US" sz="1300" b="1" dirty="0">
-                <a:solidFill>
-                  <a:schemeClr val="tx1"/>
-                </a:solidFill>
-              </a:rPr>
-              <a:t>초안·출력·보조</a:t>
-            </a:r>
-            <a:endParaRPr lang="en-US" sz="1300" dirty="0"/>
-          </a:p>
-        </p:txBody>
-      </p:sp>
-      <p:sp>
-        <p:nvSpPr>
-          <p:cNvPr id="19" name="arch-b-초안·출력·보조"/>
-          <p:cNvSpPr txBox="1"/>
-          <p:nvPr/>
-        </p:nvSpPr>
-        <p:spPr>
-          <a:xfrm>
-            <a:off x="3337560" y="3931920"/>
-            <a:ext cx="2011680" cy="822960"/>
-          </a:xfrm>
-          <a:prstGeom prst="rect">
-            <a:avLst/>
-          </a:prstGeom>
-          <a:noFill/>
-          <a:ln/>
-        </p:spPr>
-        <p:txBody>
-          <a:bodyPr wrap="square" lIns="0" tIns="0" rIns="0" bIns="0" rtlCol="0" anchor="t"/>
-          <a:lstStyle/>
-          <a:p>
-            <a:pPr indent="0" marL="0">
-              <a:buNone/>
-            </a:pPr>
-            <a:r>
-              <a:rPr lang="en-US" sz="1050" dirty="0">
-                <a:solidFill>
-                  <a:schemeClr val="tx1"/>
-                </a:solidFill>
-              </a:rPr>
-              <a:t>draft · hwpx_out</a:t>
-            </a:r>
-            <a:endParaRPr lang="en-US" sz="1050" dirty="0"/>
-          </a:p>
-          <a:p>
-            <a:pPr indent="0" marL="0">
-              <a:buNone/>
-            </a:pPr>
-            <a:r>
-              <a:rPr lang="en-US" sz="1050" dirty="0">
-                <a:solidFill>
-                  <a:schemeClr val="tx1"/>
-                </a:solidFill>
-              </a:rPr>
-              <a:t>assist(사유 후보·후속 질문) · history_qa(조회 도구 7종)</a:t>
-            </a:r>
-            <a:endParaRPr lang="en-US" sz="1050" dirty="0"/>
-          </a:p>
-        </p:txBody>
-      </p:sp>
-      <p:sp>
-        <p:nvSpPr>
-          <p:cNvPr id="20" name="arch-이력 DB (SQLite 1파일, 공유)"/>
-          <p:cNvSpPr/>
-          <p:nvPr/>
-        </p:nvSpPr>
-        <p:spPr>
-          <a:xfrm>
-            <a:off x="5669280" y="3474720"/>
-            <a:ext cx="2377440" cy="1371600"/>
-          </a:xfrm>
-          <a:prstGeom prst="roundRect">
-            <a:avLst>
-              <a:gd name="adj" fmla="val 6667"/>
-            </a:avLst>
-          </a:prstGeom>
-          <a:solidFill>
-            <a:schemeClr val="bg2"/>
-          </a:solidFill>
-          <a:ln w="12700">
-            <a:solidFill>
-              <a:schemeClr val="bg2"/>
-            </a:solidFill>
-            <a:prstDash val="solid"/>
-          </a:ln>
-        </p:spPr>
-      </p:sp>
-      <p:sp>
-        <p:nvSpPr>
-          <p:cNvPr id="21" name="arch-t-이력 DB (SQLite 1파일, 공유)"/>
-          <p:cNvSpPr txBox="1"/>
-          <p:nvPr/>
-        </p:nvSpPr>
-        <p:spPr>
-          <a:xfrm>
-            <a:off x="5806440" y="3566160"/>
-            <a:ext cx="2103120" cy="365760"/>
-          </a:xfrm>
-          <a:prstGeom prst="rect">
-            <a:avLst/>
-          </a:prstGeom>
-          <a:noFill/>
-          <a:ln/>
-        </p:spPr>
-        <p:txBody>
-          <a:bodyPr wrap="square" lIns="0" tIns="0" rIns="0" bIns="0" rtlCol="0" anchor="ctr"/>
-          <a:lstStyle/>
-          <a:p>
-            <a:pPr indent="0" marL="0">
-              <a:buNone/>
-            </a:pPr>
-            <a:r>
-              <a:rPr lang="en-US" sz="1300" b="1" dirty="0">
-                <a:solidFill>
-                  <a:schemeClr val="tx1"/>
-                </a:solidFill>
-              </a:rPr>
-              <a:t>이력 DB (SQLite 1파일, 공유)</a:t>
-            </a:r>
-            <a:endParaRPr lang="en-US" sz="1300" dirty="0"/>
-          </a:p>
-        </p:txBody>
-      </p:sp>
-      <p:sp>
-        <p:nvSpPr>
-          <p:cNvPr id="22" name="arch-b-이력 DB (SQLite 1파일, 공유)"/>
-          <p:cNvSpPr txBox="1"/>
-          <p:nvPr/>
-        </p:nvSpPr>
-        <p:spPr>
-          <a:xfrm>
-            <a:off x="5806440" y="3931920"/>
-            <a:ext cx="2103120" cy="822960"/>
-          </a:xfrm>
-          <a:prstGeom prst="rect">
-            <a:avLst/>
-          </a:prstGeom>
-          <a:noFill/>
-          <a:ln/>
-        </p:spPr>
-        <p:txBody>
-          <a:bodyPr wrap="square" lIns="0" tIns="0" rIns="0" bIns="0" rtlCol="0" anchor="t"/>
-          <a:lstStyle/>
-          <a:p>
-            <a:pPr indent="0" marL="0">
-              <a:buNone/>
-            </a:pPr>
-            <a:r>
-              <a:rPr lang="en-US" sz="1050" dirty="0">
-                <a:solidFill>
-                  <a:schemeClr val="tx1"/>
-                </a:solidFill>
-              </a:rPr>
-              <a:t>requests · items · submissions</a:t>
-            </a:r>
-            <a:endParaRPr lang="en-US" sz="1050" dirty="0"/>
-          </a:p>
-          <a:p>
-            <a:pPr indent="0" marL="0">
-              <a:buNone/>
-            </a:pPr>
-            <a:r>
-              <a:rPr lang="en-US" sz="1050" dirty="0">
-                <a:solidFill>
-                  <a:schemeClr val="tx1"/>
-                </a:solidFill>
-              </a:rPr>
-              <a:t>submission_values(출처) · diff_reasons · drafts · reviews</a:t>
-            </a:r>
-            <a:endParaRPr lang="en-US" sz="1050" dirty="0"/>
-          </a:p>
-          <a:p>
-            <a:pPr indent="0" marL="0">
-              <a:buNone/>
-            </a:pPr>
-            <a:r>
-              <a:rPr lang="en-US" sz="1050" dirty="0">
-                <a:solidFill>
-                  <a:schemeClr val="tx1"/>
-                </a:solidFill>
-              </a:rPr>
-              <a:t>WAL 모드(동시 접속)</a:t>
-            </a:r>
-            <a:endParaRPr lang="en-US" sz="1050" dirty="0"/>
-          </a:p>
-        </p:txBody>
-      </p:sp>
-      <p:sp>
-        <p:nvSpPr>
-          <p:cNvPr id="23" name="arch-점검 도구"/>
-          <p:cNvSpPr/>
-          <p:nvPr/>
-        </p:nvSpPr>
-        <p:spPr>
-          <a:xfrm>
-            <a:off x="731520" y="5029200"/>
-            <a:ext cx="7315200" cy="960120"/>
-          </a:xfrm>
-          <a:prstGeom prst="roundRect">
-            <a:avLst>
-              <a:gd name="adj" fmla="val 9524"/>
-            </a:avLst>
-          </a:prstGeom>
-          <a:solidFill>
-            <a:schemeClr val="bg2"/>
-          </a:solidFill>
-          <a:ln w="12700">
-            <a:solidFill>
-              <a:schemeClr val="bg2"/>
-            </a:solidFill>
-            <a:prstDash val="solid"/>
-          </a:ln>
-        </p:spPr>
-      </p:sp>
-      <p:sp>
-        <p:nvSpPr>
-          <p:cNvPr id="24" name="arch-t-점검 도구"/>
-          <p:cNvSpPr txBox="1"/>
-          <p:nvPr/>
-        </p:nvSpPr>
-        <p:spPr>
-          <a:xfrm>
-            <a:off x="868680" y="5120640"/>
-            <a:ext cx="7040880" cy="365760"/>
-          </a:xfrm>
-          <a:prstGeom prst="rect">
-            <a:avLst/>
-          </a:prstGeom>
-          <a:noFill/>
-          <a:ln/>
-        </p:spPr>
-        <p:txBody>
-          <a:bodyPr wrap="square" lIns="0" tIns="0" rIns="0" bIns="0" rtlCol="0" anchor="ctr"/>
-          <a:lstStyle/>
-          <a:p>
-            <a:pPr indent="0" marL="0">
-              <a:buNone/>
-            </a:pPr>
-            <a:r>
-              <a:rPr lang="en-US" sz="1300" b="1" dirty="0">
-                <a:solidFill>
-                  <a:schemeClr val="tx1"/>
-                </a:solidFill>
-              </a:rPr>
-              <a:t>점검 도구</a:t>
-            </a:r>
-            <a:endParaRPr lang="en-US" sz="1300" dirty="0"/>
-          </a:p>
-        </p:txBody>
-      </p:sp>
-      <p:sp>
-        <p:nvSpPr>
-          <p:cNvPr id="25" name="arch-b-점검 도구"/>
-          <p:cNvSpPr txBox="1"/>
-          <p:nvPr/>
-        </p:nvSpPr>
-        <p:spPr>
-          <a:xfrm>
-            <a:off x="868680" y="5486400"/>
-            <a:ext cx="7040880" cy="411480"/>
-          </a:xfrm>
-          <a:prstGeom prst="rect">
-            <a:avLst/>
-          </a:prstGeom>
-          <a:noFill/>
-          <a:ln/>
-        </p:spPr>
-        <p:txBody>
-          <a:bodyPr wrap="square" lIns="0" tIns="0" rIns="0" bIns="0" rtlCol="0" anchor="t"/>
-          <a:lstStyle/>
-          <a:p>
-            <a:pPr indent="0" marL="0">
-              <a:buNone/>
-            </a:pPr>
-            <a:r>
-              <a:rPr lang="en-US" sz="1050" dirty="0">
-                <a:solidFill>
-                  <a:schemeClr val="tx1"/>
-                </a:solidFill>
-              </a:rPr>
-              <a:t>run_checks.py: ruff → pytest 64건 → 추출 품질 점검(규칙/Claude) → 화면 흐름 ①~⑧  ·  make_submission_zip.py  ·  capture_screens.py</a:t>
-            </a:r>
-            <a:endParaRPr lang="en-US" sz="1050" dirty="0"/>
-          </a:p>
-        </p:txBody>
-      </p:sp>
-      <p:sp>
-        <p:nvSpPr>
-          <p:cNvPr id="26" name="arch-LLM 공급자 모듈 (선택)"/>
-          <p:cNvSpPr/>
-          <p:nvPr/>
-        </p:nvSpPr>
-        <p:spPr>
-          <a:xfrm>
-            <a:off x="8503920" y="1371600"/>
-            <a:ext cx="3154680" cy="2103120"/>
-          </a:xfrm>
-          <a:prstGeom prst="roundRect">
-            <a:avLst>
-              <a:gd name="adj" fmla="val 4348"/>
-            </a:avLst>
-          </a:prstGeom>
-          <a:solidFill>
-            <a:schemeClr val="accent1"/>
-          </a:solidFill>
-          <a:ln w="12700">
-            <a:solidFill>
-              <a:schemeClr val="accent1"/>
-            </a:solidFill>
-            <a:prstDash val="solid"/>
-          </a:ln>
-        </p:spPr>
-      </p:sp>
-      <p:sp>
-        <p:nvSpPr>
-          <p:cNvPr id="27" name="arch-t-LLM 공급자 모듈 (선택)"/>
-          <p:cNvSpPr txBox="1"/>
-          <p:nvPr/>
-        </p:nvSpPr>
-        <p:spPr>
-          <a:xfrm>
-            <a:off x="8641080" y="1463040"/>
-            <a:ext cx="2880360" cy="365760"/>
-          </a:xfrm>
-          <a:prstGeom prst="rect">
-            <a:avLst/>
-          </a:prstGeom>
-          <a:noFill/>
-          <a:ln/>
-        </p:spPr>
-        <p:txBody>
-          <a:bodyPr wrap="square" lIns="0" tIns="0" rIns="0" bIns="0" rtlCol="0" anchor="ctr"/>
-          <a:lstStyle/>
-          <a:p>
-            <a:pPr indent="0" marL="0">
-              <a:buNone/>
-            </a:pPr>
-            <a:r>
-              <a:rPr lang="en-US" sz="1300" b="1" dirty="0">
-                <a:solidFill>
-                  <a:schemeClr val="bg1"/>
-                </a:solidFill>
-              </a:rPr>
-              <a:t>LLM 공급자 모듈 (선택)</a:t>
-            </a:r>
-            <a:endParaRPr lang="en-US" sz="1300" dirty="0"/>
-          </a:p>
-        </p:txBody>
-      </p:sp>
-      <p:sp>
-        <p:nvSpPr>
-          <p:cNvPr id="28" name="arch-b-LLM 공급자 모듈 (선택)"/>
-          <p:cNvSpPr txBox="1"/>
-          <p:nvPr/>
-        </p:nvSpPr>
-        <p:spPr>
-          <a:xfrm>
-            <a:off x="8641080" y="1828800"/>
-            <a:ext cx="2880360" cy="1554480"/>
-          </a:xfrm>
-          <a:prstGeom prst="rect">
-            <a:avLst/>
-          </a:prstGeom>
-          <a:noFill/>
-          <a:ln/>
-        </p:spPr>
-        <p:txBody>
-          <a:bodyPr wrap="square" lIns="0" tIns="0" rIns="0" bIns="0" rtlCol="0" anchor="t"/>
-          <a:lstStyle/>
-          <a:p>
-            <a:pPr indent="0" marL="0">
-              <a:buNone/>
-            </a:pPr>
-            <a:r>
-              <a:rPr lang="en-US" sz="1050" dirty="0">
-                <a:solidFill>
-                  <a:schemeClr val="bg1"/>
-                </a:solidFill>
-              </a:rPr>
-              <a:t>llm.py 공통 호출 → providers.py 플러그인</a:t>
-            </a:r>
-            <a:endParaRPr lang="en-US" sz="1050" dirty="0"/>
-          </a:p>
-          <a:p>
-            <a:pPr indent="0" marL="0">
-              <a:buNone/>
-            </a:pPr>
-            <a:r>
-              <a:rPr lang="en-US" sz="1050" dirty="0">
-                <a:solidFill>
-                  <a:schemeClr val="bg1"/>
-                </a:solidFill>
-              </a:rPr>
-              <a:t>· 기본 Anthropic Claude, provider_*.py 파일 하나로 사내 게이트웨이 등 교체</a:t>
-            </a:r>
-            <a:endParaRPr lang="en-US" sz="1050" dirty="0"/>
-          </a:p>
-          <a:p>
-            <a:pPr indent="0" marL="0">
-              <a:buNone/>
-            </a:pPr>
-            <a:r>
-              <a:rPr lang="en-US" sz="1050" dirty="0">
-                <a:solidFill>
-                  <a:schemeClr val="bg1"/>
-                </a:solidFill>
-              </a:rPr>
-              <a:t>· 모델 자동 대체, 구조화 출력 + 텍스트 파싱 대체</a:t>
-            </a:r>
-            <a:endParaRPr lang="en-US" sz="1050" dirty="0"/>
-          </a:p>
-          <a:p>
-            <a:pPr indent="0" marL="0">
-              <a:buNone/>
-            </a:pPr>
-            <a:r>
-              <a:rPr lang="en-US" sz="1050" dirty="0">
-                <a:solidFill>
-                  <a:schemeClr val="bg1"/>
-                </a:solidFill>
-              </a:rPr>
-              <a:t>· 도구 호출 루프(⑧), 재시도·타임아웃</a:t>
-            </a:r>
-            <a:endParaRPr lang="en-US" sz="1050" dirty="0"/>
-          </a:p>
-          <a:p>
-            <a:pPr indent="0" marL="0">
-              <a:buNone/>
-            </a:pPr>
-            <a:r>
-              <a:rPr lang="en-US" sz="1050" dirty="0">
-                <a:solidFill>
-                  <a:schemeClr val="bg1"/>
-                </a:solidFill>
-              </a:rPr>
-              <a:t>· 호출별 모델·지연·토큰·추정 비용(세션별)</a:t>
-            </a:r>
-            <a:endParaRPr lang="en-US" sz="1050" dirty="0"/>
-          </a:p>
-        </p:txBody>
-      </p:sp>
-      <p:sp>
-        <p:nvSpPr>
-          <p:cNvPr id="29" name="arch-밖으로 나가는 것"/>
-          <p:cNvSpPr/>
-          <p:nvPr/>
-        </p:nvSpPr>
-        <p:spPr>
-          <a:xfrm>
-            <a:off x="8503920" y="3657600"/>
-            <a:ext cx="3154680" cy="1371600"/>
-          </a:xfrm>
-          <a:prstGeom prst="roundRect">
-            <a:avLst>
-              <a:gd name="adj" fmla="val 6667"/>
-            </a:avLst>
-          </a:prstGeom>
-          <a:solidFill>
-            <a:schemeClr val="bg2"/>
-          </a:solidFill>
-          <a:ln w="12700">
-            <a:solidFill>
-              <a:schemeClr val="bg2"/>
-            </a:solidFill>
-            <a:prstDash val="solid"/>
-          </a:ln>
-        </p:spPr>
-      </p:sp>
-      <p:sp>
-        <p:nvSpPr>
-          <p:cNvPr id="30" name="arch-t-밖으로 나가는 것"/>
-          <p:cNvSpPr txBox="1"/>
-          <p:nvPr/>
-        </p:nvSpPr>
-        <p:spPr>
-          <a:xfrm>
-            <a:off x="8641080" y="3749040"/>
-            <a:ext cx="2880360" cy="365760"/>
-          </a:xfrm>
-          <a:prstGeom prst="rect">
-            <a:avLst/>
-          </a:prstGeom>
-          <a:noFill/>
-          <a:ln/>
-        </p:spPr>
-        <p:txBody>
-          <a:bodyPr wrap="square" lIns="0" tIns="0" rIns="0" bIns="0" rtlCol="0" anchor="ctr"/>
-          <a:lstStyle/>
-          <a:p>
-            <a:pPr indent="0" marL="0">
-              <a:buNone/>
-            </a:pPr>
-            <a:r>
-              <a:rPr lang="en-US" sz="1300" b="1" dirty="0">
-                <a:solidFill>
-                  <a:schemeClr val="tx1"/>
-                </a:solidFill>
-              </a:rPr>
-              <a:t>밖으로 나가는 것</a:t>
-            </a:r>
-            <a:endParaRPr lang="en-US" sz="1300" dirty="0"/>
-          </a:p>
-        </p:txBody>
-      </p:sp>
-      <p:sp>
-        <p:nvSpPr>
-          <p:cNvPr id="31" name="arch-b-밖으로 나가는 것"/>
-          <p:cNvSpPr txBox="1"/>
-          <p:nvPr/>
-        </p:nvSpPr>
-        <p:spPr>
-          <a:xfrm>
-            <a:off x="8641080" y="4114800"/>
-            <a:ext cx="2880360" cy="822960"/>
-          </a:xfrm>
-          <a:prstGeom prst="rect">
-            <a:avLst/>
-          </a:prstGeom>
-          <a:noFill/>
-          <a:ln/>
-        </p:spPr>
-        <p:txBody>
-          <a:bodyPr wrap="square" lIns="0" tIns="0" rIns="0" bIns="0" rtlCol="0" anchor="t"/>
-          <a:lstStyle/>
-          <a:p>
-            <a:pPr indent="0" marL="0">
-              <a:buNone/>
-            </a:pPr>
-            <a:r>
-              <a:rPr lang="en-US" sz="1050" dirty="0">
-                <a:solidFill>
-                  <a:schemeClr val="tx1"/>
-                </a:solidFill>
-              </a:rPr>
-              <a:t>요구서 문안 · 센터 단위 확정 집계값 · 담당자 입력 사유 · 산출 근거 메타</a:t>
-            </a:r>
-            <a:endParaRPr lang="en-US" sz="1050" dirty="0"/>
-          </a:p>
-          <a:p>
-            <a:pPr indent="0" marL="0">
-              <a:buNone/>
-            </a:pPr>
-            <a:r>
-              <a:rPr lang="en-US" sz="1050" dirty="0">
-                <a:solidFill>
-                  <a:schemeClr val="tx1"/>
-                </a:solidFill>
-              </a:rPr>
-              <a:t>(개인 단위 원자료는 전달하지 않음)</a:t>
-            </a:r>
-            <a:endParaRPr lang="en-US" sz="1050" dirty="0"/>
-          </a:p>
-        </p:txBody>
-      </p:sp>
-      <p:sp>
-        <p:nvSpPr>
-          <p:cNvPr id="32" name="arch-키가 없으면"/>
-          <p:cNvSpPr/>
-          <p:nvPr/>
-        </p:nvSpPr>
-        <p:spPr>
-          <a:xfrm>
-            <a:off x="8503920" y="5212080"/>
-            <a:ext cx="3154680" cy="914400"/>
-          </a:xfrm>
-          <a:prstGeom prst="roundRect">
-            <a:avLst>
-              <a:gd name="adj" fmla="val 10000"/>
-            </a:avLst>
-          </a:prstGeom>
-          <a:solidFill>
-            <a:schemeClr val="bg2"/>
-          </a:solidFill>
-          <a:ln w="12700">
-            <a:solidFill>
-              <a:schemeClr val="bg2"/>
-            </a:solidFill>
-            <a:prstDash val="solid"/>
-          </a:ln>
-        </p:spPr>
-      </p:sp>
-      <p:sp>
-        <p:nvSpPr>
-          <p:cNvPr id="33" name="arch-t-키가 없으면"/>
-          <p:cNvSpPr txBox="1"/>
-          <p:nvPr/>
-        </p:nvSpPr>
-        <p:spPr>
-          <a:xfrm>
-            <a:off x="8641080" y="5303520"/>
-            <a:ext cx="2880360" cy="365760"/>
-          </a:xfrm>
-          <a:prstGeom prst="rect">
-            <a:avLst/>
-          </a:prstGeom>
-          <a:noFill/>
-          <a:ln/>
-        </p:spPr>
-        <p:txBody>
-          <a:bodyPr wrap="square" lIns="0" tIns="0" rIns="0" bIns="0" rtlCol="0" anchor="ctr"/>
-          <a:lstStyle/>
-          <a:p>
-            <a:pPr indent="0" marL="0">
-              <a:buNone/>
-            </a:pPr>
-            <a:r>
-              <a:rPr lang="en-US" sz="1300" b="1" dirty="0">
-                <a:solidFill>
-                  <a:schemeClr val="tx1"/>
-                </a:solidFill>
-              </a:rPr>
-              <a:t>키가 없으면</a:t>
-            </a:r>
-            <a:endParaRPr lang="en-US" sz="1300" dirty="0"/>
-          </a:p>
-        </p:txBody>
-      </p:sp>
-      <p:sp>
-        <p:nvSpPr>
-          <p:cNvPr id="34" name="arch-b-키가 없으면"/>
-          <p:cNvSpPr txBox="1"/>
-          <p:nvPr/>
-        </p:nvSpPr>
-        <p:spPr>
-          <a:xfrm>
-            <a:off x="8641080" y="5669280"/>
-            <a:ext cx="2880360" cy="365760"/>
-          </a:xfrm>
-          <a:prstGeom prst="rect">
-            <a:avLst/>
-          </a:prstGeom>
-          <a:noFill/>
-          <a:ln/>
-        </p:spPr>
-        <p:txBody>
-          <a:bodyPr wrap="square" lIns="0" tIns="0" rIns="0" bIns="0" rtlCol="0" anchor="t"/>
-          <a:lstStyle/>
-          <a:p>
-            <a:pPr indent="0" marL="0">
-              <a:buNone/>
-            </a:pPr>
-            <a:r>
-              <a:rPr lang="en-US" sz="1050" dirty="0">
-                <a:solidFill>
-                  <a:schemeClr val="tx1"/>
-                </a:solidFill>
-              </a:rPr>
-              <a:t>규칙 기반으로 전 기능 동작(추출은 정형 서식 한정)</a:t>
-            </a:r>
-            <a:endParaRPr lang="en-US" sz="1050" dirty="0"/>
-          </a:p>
-        </p:txBody>
-      </p:sp>
-      <p:sp>
-        <p:nvSpPr>
-          <p:cNvPr id="35" name="arch-link"/>
-          <p:cNvSpPr/>
-          <p:nvPr/>
-        </p:nvSpPr>
-        <p:spPr>
-          <a:xfrm>
-            <a:off x="8229600" y="2423160"/>
-            <a:ext cx="274320" cy="0"/>
-          </a:xfrm>
-          <a:prstGeom prst="line">
-            <a:avLst/>
-          </a:prstGeom>
-          <a:noFill/>
-          <a:ln w="19050">
-            <a:solidFill>
-              <a:schemeClr val="accent5"/>
-            </a:solidFill>
-            <a:prstDash val="dash"/>
-          </a:ln>
-        </p:spPr>
+              <a:t>실호출: '감사실' 이력이 없음을 먼저 밝히고, 두 제출본 값을 나란히 보여 주며 차이 사유 기록을 인용(차이값 계산·추정 표현 없음)</a:t>
+            </a:r>
+            <a:endParaRPr lang="en-US" sz="1250" dirty="0"/>
+          </a:p>
+        </p:txBody>
       </p:sp>
       <p:sp>
         <p:nvSpPr>
@@ -8718,6 +8430,1372 @@
                   <a:schemeClr val="tx1"/>
                 </a:solidFill>
               </a:rPr>
+              <a:t>구조 — 부서 PC 한 대에서 끝나고, AI는 갈아끼우는 모듈</a:t>
+            </a:r>
+            <a:endParaRPr lang="en-US" sz="2800" dirty="0"/>
+          </a:p>
+        </p:txBody>
+      </p:sp>
+      <p:sp>
+        <p:nvSpPr>
+          <p:cNvPr id="3" name="arch-pc"/>
+          <p:cNvSpPr/>
+          <p:nvPr/>
+        </p:nvSpPr>
+        <p:spPr>
+          <a:xfrm>
+            <a:off x="548640" y="1371600"/>
+            <a:ext cx="7680960" cy="4754880"/>
+          </a:xfrm>
+          <a:prstGeom prst="roundRect">
+            <a:avLst>
+              <a:gd name="adj" fmla="val 2885"/>
+            </a:avLst>
+          </a:prstGeom>
+          <a:solidFill>
+            <a:schemeClr val="bg1"/>
+          </a:solidFill>
+          <a:ln w="25400">
+            <a:solidFill>
+              <a:schemeClr val="accent6"/>
+            </a:solidFill>
+            <a:prstDash val="solid"/>
+          </a:ln>
+        </p:spPr>
+      </p:sp>
+      <p:sp>
+        <p:nvSpPr>
+          <p:cNvPr id="4" name="arch-pc-title"/>
+          <p:cNvSpPr txBox="1"/>
+          <p:nvPr/>
+        </p:nvSpPr>
+        <p:spPr>
+          <a:xfrm>
+            <a:off x="731520" y="1463040"/>
+            <a:ext cx="7315200" cy="365760"/>
+          </a:xfrm>
+          <a:prstGeom prst="rect">
+            <a:avLst/>
+          </a:prstGeom>
+          <a:noFill/>
+          <a:ln/>
+        </p:spPr>
+        <p:txBody>
+          <a:bodyPr wrap="square" lIns="0" tIns="0" rIns="0" bIns="0" rtlCol="0" anchor="ctr"/>
+          <a:lstStyle/>
+          <a:p>
+            <a:pPr indent="0" marL="0">
+              <a:buNone/>
+            </a:pPr>
+            <a:r>
+              <a:rPr lang="en-US" sz="1300" b="1" dirty="0">
+                <a:solidFill>
+                  <a:schemeClr val="tx2"/>
+                </a:solidFill>
+              </a:rPr>
+              <a:t>담당자 PC 또는 부서 공용 PC — run.bat(혼자) / run_server.bat(여럿)</a:t>
+            </a:r>
+            <a:endParaRPr lang="en-US" sz="1300" dirty="0"/>
+          </a:p>
+        </p:txBody>
+      </p:sp>
+      <p:sp>
+        <p:nvSpPr>
+          <p:cNvPr id="5" name="arch-화면 (Streamlit)"/>
+          <p:cNvSpPr/>
+          <p:nvPr/>
+        </p:nvSpPr>
+        <p:spPr>
+          <a:xfrm>
+            <a:off x="731520" y="1920240"/>
+            <a:ext cx="2286000" cy="1371600"/>
+          </a:xfrm>
+          <a:prstGeom prst="roundRect">
+            <a:avLst>
+              <a:gd name="adj" fmla="val 6667"/>
+            </a:avLst>
+          </a:prstGeom>
+          <a:solidFill>
+            <a:schemeClr val="bg2"/>
+          </a:solidFill>
+          <a:ln w="12700">
+            <a:solidFill>
+              <a:schemeClr val="bg2"/>
+            </a:solidFill>
+            <a:prstDash val="solid"/>
+          </a:ln>
+        </p:spPr>
+      </p:sp>
+      <p:sp>
+        <p:nvSpPr>
+          <p:cNvPr id="6" name="arch-t-화면 (Streamlit)"/>
+          <p:cNvSpPr txBox="1"/>
+          <p:nvPr/>
+        </p:nvSpPr>
+        <p:spPr>
+          <a:xfrm>
+            <a:off x="868680" y="2011680"/>
+            <a:ext cx="2011680" cy="365760"/>
+          </a:xfrm>
+          <a:prstGeom prst="rect">
+            <a:avLst/>
+          </a:prstGeom>
+          <a:noFill/>
+          <a:ln/>
+        </p:spPr>
+        <p:txBody>
+          <a:bodyPr wrap="square" lIns="0" tIns="0" rIns="0" bIns="0" rtlCol="0" anchor="ctr"/>
+          <a:lstStyle/>
+          <a:p>
+            <a:pPr indent="0" marL="0">
+              <a:buNone/>
+            </a:pPr>
+            <a:r>
+              <a:rPr lang="en-US" sz="1300" b="1" dirty="0">
+                <a:solidFill>
+                  <a:schemeClr val="tx1"/>
+                </a:solidFill>
+              </a:rPr>
+              <a:t>화면 (Streamlit)</a:t>
+            </a:r>
+            <a:endParaRPr lang="en-US" sz="1300" dirty="0"/>
+          </a:p>
+        </p:txBody>
+      </p:sp>
+      <p:sp>
+        <p:nvSpPr>
+          <p:cNvPr id="7" name="arch-b-화면 (Streamlit)"/>
+          <p:cNvSpPr txBox="1"/>
+          <p:nvPr/>
+        </p:nvSpPr>
+        <p:spPr>
+          <a:xfrm>
+            <a:off x="868680" y="2377440"/>
+            <a:ext cx="2011680" cy="822960"/>
+          </a:xfrm>
+          <a:prstGeom prst="rect">
+            <a:avLst/>
+          </a:prstGeom>
+          <a:noFill/>
+          <a:ln/>
+        </p:spPr>
+        <p:txBody>
+          <a:bodyPr wrap="square" lIns="0" tIns="0" rIns="0" bIns="0" rtlCol="0" anchor="t"/>
+          <a:lstStyle/>
+          <a:p>
+            <a:pPr indent="0" marL="0">
+              <a:buNone/>
+            </a:pPr>
+            <a:r>
+              <a:rPr lang="en-US" sz="1050" dirty="0">
+                <a:solidFill>
+                  <a:schemeClr val="tx1"/>
+                </a:solidFill>
+              </a:rPr>
+              <a:t>8개 화면 + 설정</a:t>
+            </a:r>
+            <a:endParaRPr lang="en-US" sz="1050" dirty="0"/>
+          </a:p>
+          <a:p>
+            <a:pPr indent="0" marL="0">
+              <a:buNone/>
+            </a:pPr>
+            <a:r>
+              <a:rPr lang="en-US" sz="1050" dirty="0">
+                <a:solidFill>
+                  <a:schemeClr val="tx1"/>
+                </a:solidFill>
+              </a:rPr>
+              <a:t>접속자(브라우저 세션)별 키·모델·호출 기록</a:t>
+            </a:r>
+            <a:endParaRPr lang="en-US" sz="1050" dirty="0"/>
+          </a:p>
+        </p:txBody>
+      </p:sp>
+      <p:sp>
+        <p:nvSpPr>
+          <p:cNvPr id="8" name="arch-추출·정규화·표 읽기"/>
+          <p:cNvSpPr/>
+          <p:nvPr/>
+        </p:nvSpPr>
+        <p:spPr>
+          <a:xfrm>
+            <a:off x="3200400" y="1920240"/>
+            <a:ext cx="2286000" cy="1371600"/>
+          </a:xfrm>
+          <a:prstGeom prst="roundRect">
+            <a:avLst>
+              <a:gd name="adj" fmla="val 6667"/>
+            </a:avLst>
+          </a:prstGeom>
+          <a:solidFill>
+            <a:schemeClr val="bg2"/>
+          </a:solidFill>
+          <a:ln w="12700">
+            <a:solidFill>
+              <a:schemeClr val="bg2"/>
+            </a:solidFill>
+            <a:prstDash val="solid"/>
+          </a:ln>
+        </p:spPr>
+      </p:sp>
+      <p:sp>
+        <p:nvSpPr>
+          <p:cNvPr id="9" name="arch-t-추출·정규화·표 읽기"/>
+          <p:cNvSpPr txBox="1"/>
+          <p:nvPr/>
+        </p:nvSpPr>
+        <p:spPr>
+          <a:xfrm>
+            <a:off x="3337560" y="2011680"/>
+            <a:ext cx="2011680" cy="365760"/>
+          </a:xfrm>
+          <a:prstGeom prst="rect">
+            <a:avLst/>
+          </a:prstGeom>
+          <a:noFill/>
+          <a:ln/>
+        </p:spPr>
+        <p:txBody>
+          <a:bodyPr wrap="square" lIns="0" tIns="0" rIns="0" bIns="0" rtlCol="0" anchor="ctr"/>
+          <a:lstStyle/>
+          <a:p>
+            <a:pPr indent="0" marL="0">
+              <a:buNone/>
+            </a:pPr>
+            <a:r>
+              <a:rPr lang="en-US" sz="1300" b="1" dirty="0">
+                <a:solidFill>
+                  <a:schemeClr val="tx1"/>
+                </a:solidFill>
+              </a:rPr>
+              <a:t>추출·정규화·표 읽기</a:t>
+            </a:r>
+            <a:endParaRPr lang="en-US" sz="1300" dirty="0"/>
+          </a:p>
+        </p:txBody>
+      </p:sp>
+      <p:sp>
+        <p:nvSpPr>
+          <p:cNvPr id="10" name="arch-b-추출·정규화·표 읽기"/>
+          <p:cNvSpPr txBox="1"/>
+          <p:nvPr/>
+        </p:nvSpPr>
+        <p:spPr>
+          <a:xfrm>
+            <a:off x="3337560" y="2377440"/>
+            <a:ext cx="2011680" cy="822960"/>
+          </a:xfrm>
+          <a:prstGeom prst="rect">
+            <a:avLst/>
+          </a:prstGeom>
+          <a:noFill/>
+          <a:ln/>
+        </p:spPr>
+        <p:txBody>
+          <a:bodyPr wrap="square" lIns="0" tIns="0" rIns="0" bIns="0" rtlCol="0" anchor="t"/>
+          <a:lstStyle/>
+          <a:p>
+            <a:pPr indent="0" marL="0">
+              <a:buNone/>
+            </a:pPr>
+            <a:r>
+              <a:rPr lang="en-US" sz="1050" dirty="0">
+                <a:solidFill>
+                  <a:schemeClr val="tx1"/>
+                </a:solidFill>
+              </a:rPr>
+              <a:t>extract · normalize(지표 사전)</a:t>
+            </a:r>
+            <a:endParaRPr lang="en-US" sz="1050" dirty="0"/>
+          </a:p>
+          <a:p>
+            <a:pPr indent="0" marL="0">
+              <a:buNone/>
+            </a:pPr>
+            <a:r>
+              <a:rPr lang="en-US" sz="1050" dirty="0">
+                <a:solidFill>
+                  <a:schemeClr val="tx1"/>
+                </a:solidFill>
+              </a:rPr>
+              <a:t>docread(txt·HWPX·PDF·DOCX)</a:t>
+            </a:r>
+            <a:endParaRPr lang="en-US" sz="1050" dirty="0"/>
+          </a:p>
+          <a:p>
+            <a:pPr indent="0" marL="0">
+              <a:buNone/>
+            </a:pPr>
+            <a:r>
+              <a:rPr lang="en-US" sz="1050" dirty="0">
+                <a:solidFill>
+                  <a:schemeClr val="tx1"/>
+                </a:solidFill>
+              </a:rPr>
+              <a:t>tabular(제목·병합 머리글·가로 펼침 표)</a:t>
+            </a:r>
+            <a:endParaRPr lang="en-US" sz="1050" dirty="0"/>
+          </a:p>
+        </p:txBody>
+      </p:sp>
+      <p:sp>
+        <p:nvSpPr>
+          <p:cNvPr id="11" name="arch-검색·제안"/>
+          <p:cNvSpPr/>
+          <p:nvPr/>
+        </p:nvSpPr>
+        <p:spPr>
+          <a:xfrm>
+            <a:off x="5669280" y="1920240"/>
+            <a:ext cx="2377440" cy="1371600"/>
+          </a:xfrm>
+          <a:prstGeom prst="roundRect">
+            <a:avLst>
+              <a:gd name="adj" fmla="val 6667"/>
+            </a:avLst>
+          </a:prstGeom>
+          <a:solidFill>
+            <a:schemeClr val="bg2"/>
+          </a:solidFill>
+          <a:ln w="12700">
+            <a:solidFill>
+              <a:schemeClr val="bg2"/>
+            </a:solidFill>
+            <a:prstDash val="solid"/>
+          </a:ln>
+        </p:spPr>
+      </p:sp>
+      <p:sp>
+        <p:nvSpPr>
+          <p:cNvPr id="12" name="arch-t-검색·제안"/>
+          <p:cNvSpPr txBox="1"/>
+          <p:nvPr/>
+        </p:nvSpPr>
+        <p:spPr>
+          <a:xfrm>
+            <a:off x="5806440" y="2011680"/>
+            <a:ext cx="2103120" cy="365760"/>
+          </a:xfrm>
+          <a:prstGeom prst="rect">
+            <a:avLst/>
+          </a:prstGeom>
+          <a:noFill/>
+          <a:ln/>
+        </p:spPr>
+        <p:txBody>
+          <a:bodyPr wrap="square" lIns="0" tIns="0" rIns="0" bIns="0" rtlCol="0" anchor="ctr"/>
+          <a:lstStyle/>
+          <a:p>
+            <a:pPr indent="0" marL="0">
+              <a:buNone/>
+            </a:pPr>
+            <a:r>
+              <a:rPr lang="en-US" sz="1300" b="1" dirty="0">
+                <a:solidFill>
+                  <a:schemeClr val="tx1"/>
+                </a:solidFill>
+              </a:rPr>
+              <a:t>검색·제안</a:t>
+            </a:r>
+            <a:endParaRPr lang="en-US" sz="1300" dirty="0"/>
+          </a:p>
+        </p:txBody>
+      </p:sp>
+      <p:sp>
+        <p:nvSpPr>
+          <p:cNvPr id="13" name="arch-b-검색·제안"/>
+          <p:cNvSpPr txBox="1"/>
+          <p:nvPr/>
+        </p:nvSpPr>
+        <p:spPr>
+          <a:xfrm>
+            <a:off x="5806440" y="2377440"/>
+            <a:ext cx="2103120" cy="822960"/>
+          </a:xfrm>
+          <a:prstGeom prst="rect">
+            <a:avLst/>
+          </a:prstGeom>
+          <a:noFill/>
+          <a:ln/>
+        </p:spPr>
+        <p:txBody>
+          <a:bodyPr wrap="square" lIns="0" tIns="0" rIns="0" bIns="0" rtlCol="0" anchor="t"/>
+          <a:lstStyle/>
+          <a:p>
+            <a:pPr indent="0" marL="0">
+              <a:buNone/>
+            </a:pPr>
+            <a:r>
+              <a:rPr lang="en-US" sz="1050" dirty="0">
+                <a:solidFill>
+                  <a:schemeClr val="tx1"/>
+                </a:solidFill>
+              </a:rPr>
+              <a:t>search(문자 n-gram, 외부 API 없음)</a:t>
+            </a:r>
+            <a:endParaRPr lang="en-US" sz="1050" dirty="0"/>
+          </a:p>
+          <a:p>
+            <a:pPr indent="0" marL="0">
+              <a:buNone/>
+            </a:pPr>
+            <a:r>
+              <a:rPr lang="en-US" sz="1050" dirty="0">
+                <a:solidFill>
+                  <a:schemeClr val="tx1"/>
+                </a:solidFill>
+              </a:rPr>
+              <a:t>suggest(데이터 카탈로그)</a:t>
+            </a:r>
+            <a:endParaRPr lang="en-US" sz="1050" dirty="0"/>
+          </a:p>
+        </p:txBody>
+      </p:sp>
+      <p:sp>
+        <p:nvSpPr>
+          <p:cNvPr id="14" name="arch-대조·점검 (코드)"/>
+          <p:cNvSpPr/>
+          <p:nvPr/>
+        </p:nvSpPr>
+        <p:spPr>
+          <a:xfrm>
+            <a:off x="731520" y="3474720"/>
+            <a:ext cx="2286000" cy="1371600"/>
+          </a:xfrm>
+          <a:prstGeom prst="roundRect">
+            <a:avLst>
+              <a:gd name="adj" fmla="val 6667"/>
+            </a:avLst>
+          </a:prstGeom>
+          <a:solidFill>
+            <a:schemeClr val="bg2"/>
+          </a:solidFill>
+          <a:ln w="12700">
+            <a:solidFill>
+              <a:schemeClr val="bg2"/>
+            </a:solidFill>
+            <a:prstDash val="solid"/>
+          </a:ln>
+        </p:spPr>
+      </p:sp>
+      <p:sp>
+        <p:nvSpPr>
+          <p:cNvPr id="15" name="arch-t-대조·점검 (코드)"/>
+          <p:cNvSpPr txBox="1"/>
+          <p:nvPr/>
+        </p:nvSpPr>
+        <p:spPr>
+          <a:xfrm>
+            <a:off x="868680" y="3566160"/>
+            <a:ext cx="2011680" cy="365760"/>
+          </a:xfrm>
+          <a:prstGeom prst="rect">
+            <a:avLst/>
+          </a:prstGeom>
+          <a:noFill/>
+          <a:ln/>
+        </p:spPr>
+        <p:txBody>
+          <a:bodyPr wrap="square" lIns="0" tIns="0" rIns="0" bIns="0" rtlCol="0" anchor="ctr"/>
+          <a:lstStyle/>
+          <a:p>
+            <a:pPr indent="0" marL="0">
+              <a:buNone/>
+            </a:pPr>
+            <a:r>
+              <a:rPr lang="en-US" sz="1300" b="1" dirty="0">
+                <a:solidFill>
+                  <a:schemeClr val="tx1"/>
+                </a:solidFill>
+              </a:rPr>
+              <a:t>대조·점검 (코드)</a:t>
+            </a:r>
+            <a:endParaRPr lang="en-US" sz="1300" dirty="0"/>
+          </a:p>
+        </p:txBody>
+      </p:sp>
+      <p:sp>
+        <p:nvSpPr>
+          <p:cNvPr id="16" name="arch-b-대조·점검 (코드)"/>
+          <p:cNvSpPr txBox="1"/>
+          <p:nvPr/>
+        </p:nvSpPr>
+        <p:spPr>
+          <a:xfrm>
+            <a:off x="868680" y="3931920"/>
+            <a:ext cx="2011680" cy="822960"/>
+          </a:xfrm>
+          <a:prstGeom prst="rect">
+            <a:avLst/>
+          </a:prstGeom>
+          <a:noFill/>
+          <a:ln/>
+        </p:spPr>
+        <p:txBody>
+          <a:bodyPr wrap="square" lIns="0" tIns="0" rIns="0" bIns="0" rtlCol="0" anchor="t"/>
+          <a:lstStyle/>
+          <a:p>
+            <a:pPr indent="0" marL="0">
+              <a:buNone/>
+            </a:pPr>
+            <a:r>
+              <a:rPr lang="en-US" sz="1050" dirty="0">
+                <a:solidFill>
+                  <a:schemeClr val="tx1"/>
+                </a:solidFill>
+              </a:rPr>
+              <a:t>compare(pandas) · pii</a:t>
+            </a:r>
+            <a:endParaRPr lang="en-US" sz="1050" dirty="0"/>
+          </a:p>
+          <a:p>
+            <a:pPr indent="0" marL="0">
+              <a:buNone/>
+            </a:pPr>
+            <a:r>
+              <a:rPr lang="en-US" sz="1050" dirty="0">
+                <a:solidFill>
+                  <a:schemeClr val="tx1"/>
+                </a:solidFill>
+              </a:rPr>
+              <a:t>차이·단서·점검표·출처</a:t>
+            </a:r>
+            <a:endParaRPr lang="en-US" sz="1050" dirty="0"/>
+          </a:p>
+        </p:txBody>
+      </p:sp>
+      <p:sp>
+        <p:nvSpPr>
+          <p:cNvPr id="17" name="arch-초안·출력·보조"/>
+          <p:cNvSpPr/>
+          <p:nvPr/>
+        </p:nvSpPr>
+        <p:spPr>
+          <a:xfrm>
+            <a:off x="3200400" y="3474720"/>
+            <a:ext cx="2286000" cy="1371600"/>
+          </a:xfrm>
+          <a:prstGeom prst="roundRect">
+            <a:avLst>
+              <a:gd name="adj" fmla="val 6667"/>
+            </a:avLst>
+          </a:prstGeom>
+          <a:solidFill>
+            <a:schemeClr val="bg2"/>
+          </a:solidFill>
+          <a:ln w="12700">
+            <a:solidFill>
+              <a:schemeClr val="bg2"/>
+            </a:solidFill>
+            <a:prstDash val="solid"/>
+          </a:ln>
+        </p:spPr>
+      </p:sp>
+      <p:sp>
+        <p:nvSpPr>
+          <p:cNvPr id="18" name="arch-t-초안·출력·보조"/>
+          <p:cNvSpPr txBox="1"/>
+          <p:nvPr/>
+        </p:nvSpPr>
+        <p:spPr>
+          <a:xfrm>
+            <a:off x="3337560" y="3566160"/>
+            <a:ext cx="2011680" cy="365760"/>
+          </a:xfrm>
+          <a:prstGeom prst="rect">
+            <a:avLst/>
+          </a:prstGeom>
+          <a:noFill/>
+          <a:ln/>
+        </p:spPr>
+        <p:txBody>
+          <a:bodyPr wrap="square" lIns="0" tIns="0" rIns="0" bIns="0" rtlCol="0" anchor="ctr"/>
+          <a:lstStyle/>
+          <a:p>
+            <a:pPr indent="0" marL="0">
+              <a:buNone/>
+            </a:pPr>
+            <a:r>
+              <a:rPr lang="en-US" sz="1300" b="1" dirty="0">
+                <a:solidFill>
+                  <a:schemeClr val="tx1"/>
+                </a:solidFill>
+              </a:rPr>
+              <a:t>초안·출력·보조</a:t>
+            </a:r>
+            <a:endParaRPr lang="en-US" sz="1300" dirty="0"/>
+          </a:p>
+        </p:txBody>
+      </p:sp>
+      <p:sp>
+        <p:nvSpPr>
+          <p:cNvPr id="19" name="arch-b-초안·출력·보조"/>
+          <p:cNvSpPr txBox="1"/>
+          <p:nvPr/>
+        </p:nvSpPr>
+        <p:spPr>
+          <a:xfrm>
+            <a:off x="3337560" y="3931920"/>
+            <a:ext cx="2011680" cy="822960"/>
+          </a:xfrm>
+          <a:prstGeom prst="rect">
+            <a:avLst/>
+          </a:prstGeom>
+          <a:noFill/>
+          <a:ln/>
+        </p:spPr>
+        <p:txBody>
+          <a:bodyPr wrap="square" lIns="0" tIns="0" rIns="0" bIns="0" rtlCol="0" anchor="t"/>
+          <a:lstStyle/>
+          <a:p>
+            <a:pPr indent="0" marL="0">
+              <a:buNone/>
+            </a:pPr>
+            <a:r>
+              <a:rPr lang="en-US" sz="1050" dirty="0">
+                <a:solidFill>
+                  <a:schemeClr val="tx1"/>
+                </a:solidFill>
+              </a:rPr>
+              <a:t>draft · hwpx_out</a:t>
+            </a:r>
+            <a:endParaRPr lang="en-US" sz="1050" dirty="0"/>
+          </a:p>
+          <a:p>
+            <a:pPr indent="0" marL="0">
+              <a:buNone/>
+            </a:pPr>
+            <a:r>
+              <a:rPr lang="en-US" sz="1050" dirty="0">
+                <a:solidFill>
+                  <a:schemeClr val="tx1"/>
+                </a:solidFill>
+              </a:rPr>
+              <a:t>assist(사유 후보·후속 질문) · history_qa(조회 도구 7종)</a:t>
+            </a:r>
+            <a:endParaRPr lang="en-US" sz="1050" dirty="0"/>
+          </a:p>
+        </p:txBody>
+      </p:sp>
+      <p:sp>
+        <p:nvSpPr>
+          <p:cNvPr id="20" name="arch-이력 DB (SQLite 1파일, 공유)"/>
+          <p:cNvSpPr/>
+          <p:nvPr/>
+        </p:nvSpPr>
+        <p:spPr>
+          <a:xfrm>
+            <a:off x="5669280" y="3474720"/>
+            <a:ext cx="2377440" cy="1371600"/>
+          </a:xfrm>
+          <a:prstGeom prst="roundRect">
+            <a:avLst>
+              <a:gd name="adj" fmla="val 6667"/>
+            </a:avLst>
+          </a:prstGeom>
+          <a:solidFill>
+            <a:schemeClr val="bg2"/>
+          </a:solidFill>
+          <a:ln w="12700">
+            <a:solidFill>
+              <a:schemeClr val="bg2"/>
+            </a:solidFill>
+            <a:prstDash val="solid"/>
+          </a:ln>
+        </p:spPr>
+      </p:sp>
+      <p:sp>
+        <p:nvSpPr>
+          <p:cNvPr id="21" name="arch-t-이력 DB (SQLite 1파일, 공유)"/>
+          <p:cNvSpPr txBox="1"/>
+          <p:nvPr/>
+        </p:nvSpPr>
+        <p:spPr>
+          <a:xfrm>
+            <a:off x="5806440" y="3566160"/>
+            <a:ext cx="2103120" cy="365760"/>
+          </a:xfrm>
+          <a:prstGeom prst="rect">
+            <a:avLst/>
+          </a:prstGeom>
+          <a:noFill/>
+          <a:ln/>
+        </p:spPr>
+        <p:txBody>
+          <a:bodyPr wrap="square" lIns="0" tIns="0" rIns="0" bIns="0" rtlCol="0" anchor="ctr"/>
+          <a:lstStyle/>
+          <a:p>
+            <a:pPr indent="0" marL="0">
+              <a:buNone/>
+            </a:pPr>
+            <a:r>
+              <a:rPr lang="en-US" sz="1300" b="1" dirty="0">
+                <a:solidFill>
+                  <a:schemeClr val="tx1"/>
+                </a:solidFill>
+              </a:rPr>
+              <a:t>이력 DB (SQLite 1파일, 공유)</a:t>
+            </a:r>
+            <a:endParaRPr lang="en-US" sz="1300" dirty="0"/>
+          </a:p>
+        </p:txBody>
+      </p:sp>
+      <p:sp>
+        <p:nvSpPr>
+          <p:cNvPr id="22" name="arch-b-이력 DB (SQLite 1파일, 공유)"/>
+          <p:cNvSpPr txBox="1"/>
+          <p:nvPr/>
+        </p:nvSpPr>
+        <p:spPr>
+          <a:xfrm>
+            <a:off x="5806440" y="3931920"/>
+            <a:ext cx="2103120" cy="822960"/>
+          </a:xfrm>
+          <a:prstGeom prst="rect">
+            <a:avLst/>
+          </a:prstGeom>
+          <a:noFill/>
+          <a:ln/>
+        </p:spPr>
+        <p:txBody>
+          <a:bodyPr wrap="square" lIns="0" tIns="0" rIns="0" bIns="0" rtlCol="0" anchor="t"/>
+          <a:lstStyle/>
+          <a:p>
+            <a:pPr indent="0" marL="0">
+              <a:buNone/>
+            </a:pPr>
+            <a:r>
+              <a:rPr lang="en-US" sz="1050" dirty="0">
+                <a:solidFill>
+                  <a:schemeClr val="tx1"/>
+                </a:solidFill>
+              </a:rPr>
+              <a:t>requests · items · submissions</a:t>
+            </a:r>
+            <a:endParaRPr lang="en-US" sz="1050" dirty="0"/>
+          </a:p>
+          <a:p>
+            <a:pPr indent="0" marL="0">
+              <a:buNone/>
+            </a:pPr>
+            <a:r>
+              <a:rPr lang="en-US" sz="1050" dirty="0">
+                <a:solidFill>
+                  <a:schemeClr val="tx1"/>
+                </a:solidFill>
+              </a:rPr>
+              <a:t>submission_values(출처) · diff_reasons · drafts · reviews</a:t>
+            </a:r>
+            <a:endParaRPr lang="en-US" sz="1050" dirty="0"/>
+          </a:p>
+          <a:p>
+            <a:pPr indent="0" marL="0">
+              <a:buNone/>
+            </a:pPr>
+            <a:r>
+              <a:rPr lang="en-US" sz="1050" dirty="0">
+                <a:solidFill>
+                  <a:schemeClr val="tx1"/>
+                </a:solidFill>
+              </a:rPr>
+              <a:t>WAL 모드(동시 접속)</a:t>
+            </a:r>
+            <a:endParaRPr lang="en-US" sz="1050" dirty="0"/>
+          </a:p>
+        </p:txBody>
+      </p:sp>
+      <p:sp>
+        <p:nvSpPr>
+          <p:cNvPr id="23" name="arch-점검 도구"/>
+          <p:cNvSpPr/>
+          <p:nvPr/>
+        </p:nvSpPr>
+        <p:spPr>
+          <a:xfrm>
+            <a:off x="731520" y="5029200"/>
+            <a:ext cx="7315200" cy="960120"/>
+          </a:xfrm>
+          <a:prstGeom prst="roundRect">
+            <a:avLst>
+              <a:gd name="adj" fmla="val 9524"/>
+            </a:avLst>
+          </a:prstGeom>
+          <a:solidFill>
+            <a:schemeClr val="bg2"/>
+          </a:solidFill>
+          <a:ln w="12700">
+            <a:solidFill>
+              <a:schemeClr val="bg2"/>
+            </a:solidFill>
+            <a:prstDash val="solid"/>
+          </a:ln>
+        </p:spPr>
+      </p:sp>
+      <p:sp>
+        <p:nvSpPr>
+          <p:cNvPr id="24" name="arch-t-점검 도구"/>
+          <p:cNvSpPr txBox="1"/>
+          <p:nvPr/>
+        </p:nvSpPr>
+        <p:spPr>
+          <a:xfrm>
+            <a:off x="868680" y="5120640"/>
+            <a:ext cx="7040880" cy="365760"/>
+          </a:xfrm>
+          <a:prstGeom prst="rect">
+            <a:avLst/>
+          </a:prstGeom>
+          <a:noFill/>
+          <a:ln/>
+        </p:spPr>
+        <p:txBody>
+          <a:bodyPr wrap="square" lIns="0" tIns="0" rIns="0" bIns="0" rtlCol="0" anchor="ctr"/>
+          <a:lstStyle/>
+          <a:p>
+            <a:pPr indent="0" marL="0">
+              <a:buNone/>
+            </a:pPr>
+            <a:r>
+              <a:rPr lang="en-US" sz="1300" b="1" dirty="0">
+                <a:solidFill>
+                  <a:schemeClr val="tx1"/>
+                </a:solidFill>
+              </a:rPr>
+              <a:t>점검 도구</a:t>
+            </a:r>
+            <a:endParaRPr lang="en-US" sz="1300" dirty="0"/>
+          </a:p>
+        </p:txBody>
+      </p:sp>
+      <p:sp>
+        <p:nvSpPr>
+          <p:cNvPr id="25" name="arch-b-점검 도구"/>
+          <p:cNvSpPr txBox="1"/>
+          <p:nvPr/>
+        </p:nvSpPr>
+        <p:spPr>
+          <a:xfrm>
+            <a:off x="868680" y="5486400"/>
+            <a:ext cx="7040880" cy="411480"/>
+          </a:xfrm>
+          <a:prstGeom prst="rect">
+            <a:avLst/>
+          </a:prstGeom>
+          <a:noFill/>
+          <a:ln/>
+        </p:spPr>
+        <p:txBody>
+          <a:bodyPr wrap="square" lIns="0" tIns="0" rIns="0" bIns="0" rtlCol="0" anchor="t"/>
+          <a:lstStyle/>
+          <a:p>
+            <a:pPr indent="0" marL="0">
+              <a:buNone/>
+            </a:pPr>
+            <a:r>
+              <a:rPr lang="en-US" sz="1050" dirty="0">
+                <a:solidFill>
+                  <a:schemeClr val="tx1"/>
+                </a:solidFill>
+              </a:rPr>
+              <a:t>run_checks.py: ruff → pytest 72건 → 추출 품질 점검(규칙/Claude) → 화면 흐름 ①~⑧  ·  make_submission_zip.py  ·  capture_screens.py</a:t>
+            </a:r>
+            <a:endParaRPr lang="en-US" sz="1050" dirty="0"/>
+          </a:p>
+        </p:txBody>
+      </p:sp>
+      <p:sp>
+        <p:nvSpPr>
+          <p:cNvPr id="26" name="arch-LLM 공급자 모듈 (선택)"/>
+          <p:cNvSpPr/>
+          <p:nvPr/>
+        </p:nvSpPr>
+        <p:spPr>
+          <a:xfrm>
+            <a:off x="8503920" y="1371600"/>
+            <a:ext cx="3154680" cy="2103120"/>
+          </a:xfrm>
+          <a:prstGeom prst="roundRect">
+            <a:avLst>
+              <a:gd name="adj" fmla="val 4348"/>
+            </a:avLst>
+          </a:prstGeom>
+          <a:solidFill>
+            <a:schemeClr val="accent1"/>
+          </a:solidFill>
+          <a:ln w="12700">
+            <a:solidFill>
+              <a:schemeClr val="accent1"/>
+            </a:solidFill>
+            <a:prstDash val="solid"/>
+          </a:ln>
+        </p:spPr>
+      </p:sp>
+      <p:sp>
+        <p:nvSpPr>
+          <p:cNvPr id="27" name="arch-t-LLM 공급자 모듈 (선택)"/>
+          <p:cNvSpPr txBox="1"/>
+          <p:nvPr/>
+        </p:nvSpPr>
+        <p:spPr>
+          <a:xfrm>
+            <a:off x="8641080" y="1463040"/>
+            <a:ext cx="2880360" cy="365760"/>
+          </a:xfrm>
+          <a:prstGeom prst="rect">
+            <a:avLst/>
+          </a:prstGeom>
+          <a:noFill/>
+          <a:ln/>
+        </p:spPr>
+        <p:txBody>
+          <a:bodyPr wrap="square" lIns="0" tIns="0" rIns="0" bIns="0" rtlCol="0" anchor="ctr"/>
+          <a:lstStyle/>
+          <a:p>
+            <a:pPr indent="0" marL="0">
+              <a:buNone/>
+            </a:pPr>
+            <a:r>
+              <a:rPr lang="en-US" sz="1300" b="1" dirty="0">
+                <a:solidFill>
+                  <a:schemeClr val="bg1"/>
+                </a:solidFill>
+              </a:rPr>
+              <a:t>LLM 공급자 모듈 (선택)</a:t>
+            </a:r>
+            <a:endParaRPr lang="en-US" sz="1300" dirty="0"/>
+          </a:p>
+        </p:txBody>
+      </p:sp>
+      <p:sp>
+        <p:nvSpPr>
+          <p:cNvPr id="28" name="arch-b-LLM 공급자 모듈 (선택)"/>
+          <p:cNvSpPr txBox="1"/>
+          <p:nvPr/>
+        </p:nvSpPr>
+        <p:spPr>
+          <a:xfrm>
+            <a:off x="8641080" y="1828800"/>
+            <a:ext cx="2880360" cy="1554480"/>
+          </a:xfrm>
+          <a:prstGeom prst="rect">
+            <a:avLst/>
+          </a:prstGeom>
+          <a:noFill/>
+          <a:ln/>
+        </p:spPr>
+        <p:txBody>
+          <a:bodyPr wrap="square" lIns="0" tIns="0" rIns="0" bIns="0" rtlCol="0" anchor="t"/>
+          <a:lstStyle/>
+          <a:p>
+            <a:pPr indent="0" marL="0">
+              <a:buNone/>
+            </a:pPr>
+            <a:r>
+              <a:rPr lang="en-US" sz="1050" dirty="0">
+                <a:solidFill>
+                  <a:schemeClr val="bg1"/>
+                </a:solidFill>
+              </a:rPr>
+              <a:t>llm.py 공통 호출 → providers.py 플러그인</a:t>
+            </a:r>
+            <a:endParaRPr lang="en-US" sz="1050" dirty="0"/>
+          </a:p>
+          <a:p>
+            <a:pPr indent="0" marL="0">
+              <a:buNone/>
+            </a:pPr>
+            <a:r>
+              <a:rPr lang="en-US" sz="1050" dirty="0">
+                <a:solidFill>
+                  <a:schemeClr val="bg1"/>
+                </a:solidFill>
+              </a:rPr>
+              <a:t>· 기본 Anthropic Claude, provider_*.py 파일 하나로 사내 게이트웨이 등 교체</a:t>
+            </a:r>
+            <a:endParaRPr lang="en-US" sz="1050" dirty="0"/>
+          </a:p>
+          <a:p>
+            <a:pPr indent="0" marL="0">
+              <a:buNone/>
+            </a:pPr>
+            <a:r>
+              <a:rPr lang="en-US" sz="1050" dirty="0">
+                <a:solidFill>
+                  <a:schemeClr val="bg1"/>
+                </a:solidFill>
+              </a:rPr>
+              <a:t>· 모델 자동 대체, 구조화 출력 + 텍스트 파싱 대체</a:t>
+            </a:r>
+            <a:endParaRPr lang="en-US" sz="1050" dirty="0"/>
+          </a:p>
+          <a:p>
+            <a:pPr indent="0" marL="0">
+              <a:buNone/>
+            </a:pPr>
+            <a:r>
+              <a:rPr lang="en-US" sz="1050" dirty="0">
+                <a:solidFill>
+                  <a:schemeClr val="bg1"/>
+                </a:solidFill>
+              </a:rPr>
+              <a:t>· 도구 호출 루프(⑧), 재시도·타임아웃</a:t>
+            </a:r>
+            <a:endParaRPr lang="en-US" sz="1050" dirty="0"/>
+          </a:p>
+          <a:p>
+            <a:pPr indent="0" marL="0">
+              <a:buNone/>
+            </a:pPr>
+            <a:r>
+              <a:rPr lang="en-US" sz="1050" dirty="0">
+                <a:solidFill>
+                  <a:schemeClr val="bg1"/>
+                </a:solidFill>
+              </a:rPr>
+              <a:t>· 호출별 모델·지연·토큰·추정 비용(세션별)</a:t>
+            </a:r>
+            <a:endParaRPr lang="en-US" sz="1050" dirty="0"/>
+          </a:p>
+        </p:txBody>
+      </p:sp>
+      <p:sp>
+        <p:nvSpPr>
+          <p:cNvPr id="29" name="arch-밖으로 나가는 것"/>
+          <p:cNvSpPr/>
+          <p:nvPr/>
+        </p:nvSpPr>
+        <p:spPr>
+          <a:xfrm>
+            <a:off x="8503920" y="3657600"/>
+            <a:ext cx="3154680" cy="1371600"/>
+          </a:xfrm>
+          <a:prstGeom prst="roundRect">
+            <a:avLst>
+              <a:gd name="adj" fmla="val 6667"/>
+            </a:avLst>
+          </a:prstGeom>
+          <a:solidFill>
+            <a:schemeClr val="bg2"/>
+          </a:solidFill>
+          <a:ln w="12700">
+            <a:solidFill>
+              <a:schemeClr val="bg2"/>
+            </a:solidFill>
+            <a:prstDash val="solid"/>
+          </a:ln>
+        </p:spPr>
+      </p:sp>
+      <p:sp>
+        <p:nvSpPr>
+          <p:cNvPr id="30" name="arch-t-밖으로 나가는 것"/>
+          <p:cNvSpPr txBox="1"/>
+          <p:nvPr/>
+        </p:nvSpPr>
+        <p:spPr>
+          <a:xfrm>
+            <a:off x="8641080" y="3749040"/>
+            <a:ext cx="2880360" cy="365760"/>
+          </a:xfrm>
+          <a:prstGeom prst="rect">
+            <a:avLst/>
+          </a:prstGeom>
+          <a:noFill/>
+          <a:ln/>
+        </p:spPr>
+        <p:txBody>
+          <a:bodyPr wrap="square" lIns="0" tIns="0" rIns="0" bIns="0" rtlCol="0" anchor="ctr"/>
+          <a:lstStyle/>
+          <a:p>
+            <a:pPr indent="0" marL="0">
+              <a:buNone/>
+            </a:pPr>
+            <a:r>
+              <a:rPr lang="en-US" sz="1300" b="1" dirty="0">
+                <a:solidFill>
+                  <a:schemeClr val="tx1"/>
+                </a:solidFill>
+              </a:rPr>
+              <a:t>밖으로 나가는 것</a:t>
+            </a:r>
+            <a:endParaRPr lang="en-US" sz="1300" dirty="0"/>
+          </a:p>
+        </p:txBody>
+      </p:sp>
+      <p:sp>
+        <p:nvSpPr>
+          <p:cNvPr id="31" name="arch-b-밖으로 나가는 것"/>
+          <p:cNvSpPr txBox="1"/>
+          <p:nvPr/>
+        </p:nvSpPr>
+        <p:spPr>
+          <a:xfrm>
+            <a:off x="8641080" y="4114800"/>
+            <a:ext cx="2880360" cy="822960"/>
+          </a:xfrm>
+          <a:prstGeom prst="rect">
+            <a:avLst/>
+          </a:prstGeom>
+          <a:noFill/>
+          <a:ln/>
+        </p:spPr>
+        <p:txBody>
+          <a:bodyPr wrap="square" lIns="0" tIns="0" rIns="0" bIns="0" rtlCol="0" anchor="t"/>
+          <a:lstStyle/>
+          <a:p>
+            <a:pPr indent="0" marL="0">
+              <a:buNone/>
+            </a:pPr>
+            <a:r>
+              <a:rPr lang="en-US" sz="1050" dirty="0">
+                <a:solidFill>
+                  <a:schemeClr val="tx1"/>
+                </a:solidFill>
+              </a:rPr>
+              <a:t>요구서 문안 · 센터 단위 확정 집계값 · 담당자 입력 사유 · 산출 근거 메타</a:t>
+            </a:r>
+            <a:endParaRPr lang="en-US" sz="1050" dirty="0"/>
+          </a:p>
+          <a:p>
+            <a:pPr indent="0" marL="0">
+              <a:buNone/>
+            </a:pPr>
+            <a:r>
+              <a:rPr lang="en-US" sz="1050" dirty="0">
+                <a:solidFill>
+                  <a:schemeClr val="tx1"/>
+                </a:solidFill>
+              </a:rPr>
+              <a:t>(개인 단위 원자료는 전달하지 않음)</a:t>
+            </a:r>
+            <a:endParaRPr lang="en-US" sz="1050" dirty="0"/>
+          </a:p>
+        </p:txBody>
+      </p:sp>
+      <p:sp>
+        <p:nvSpPr>
+          <p:cNvPr id="32" name="arch-키가 없으면"/>
+          <p:cNvSpPr/>
+          <p:nvPr/>
+        </p:nvSpPr>
+        <p:spPr>
+          <a:xfrm>
+            <a:off x="8503920" y="5212080"/>
+            <a:ext cx="3154680" cy="914400"/>
+          </a:xfrm>
+          <a:prstGeom prst="roundRect">
+            <a:avLst>
+              <a:gd name="adj" fmla="val 10000"/>
+            </a:avLst>
+          </a:prstGeom>
+          <a:solidFill>
+            <a:schemeClr val="bg2"/>
+          </a:solidFill>
+          <a:ln w="12700">
+            <a:solidFill>
+              <a:schemeClr val="bg2"/>
+            </a:solidFill>
+            <a:prstDash val="solid"/>
+          </a:ln>
+        </p:spPr>
+      </p:sp>
+      <p:sp>
+        <p:nvSpPr>
+          <p:cNvPr id="33" name="arch-t-키가 없으면"/>
+          <p:cNvSpPr txBox="1"/>
+          <p:nvPr/>
+        </p:nvSpPr>
+        <p:spPr>
+          <a:xfrm>
+            <a:off x="8641080" y="5303520"/>
+            <a:ext cx="2880360" cy="365760"/>
+          </a:xfrm>
+          <a:prstGeom prst="rect">
+            <a:avLst/>
+          </a:prstGeom>
+          <a:noFill/>
+          <a:ln/>
+        </p:spPr>
+        <p:txBody>
+          <a:bodyPr wrap="square" lIns="0" tIns="0" rIns="0" bIns="0" rtlCol="0" anchor="ctr"/>
+          <a:lstStyle/>
+          <a:p>
+            <a:pPr indent="0" marL="0">
+              <a:buNone/>
+            </a:pPr>
+            <a:r>
+              <a:rPr lang="en-US" sz="1300" b="1" dirty="0">
+                <a:solidFill>
+                  <a:schemeClr val="tx1"/>
+                </a:solidFill>
+              </a:rPr>
+              <a:t>키가 없으면</a:t>
+            </a:r>
+            <a:endParaRPr lang="en-US" sz="1300" dirty="0"/>
+          </a:p>
+        </p:txBody>
+      </p:sp>
+      <p:sp>
+        <p:nvSpPr>
+          <p:cNvPr id="34" name="arch-b-키가 없으면"/>
+          <p:cNvSpPr txBox="1"/>
+          <p:nvPr/>
+        </p:nvSpPr>
+        <p:spPr>
+          <a:xfrm>
+            <a:off x="8641080" y="5669280"/>
+            <a:ext cx="2880360" cy="365760"/>
+          </a:xfrm>
+          <a:prstGeom prst="rect">
+            <a:avLst/>
+          </a:prstGeom>
+          <a:noFill/>
+          <a:ln/>
+        </p:spPr>
+        <p:txBody>
+          <a:bodyPr wrap="square" lIns="0" tIns="0" rIns="0" bIns="0" rtlCol="0" anchor="t"/>
+          <a:lstStyle/>
+          <a:p>
+            <a:pPr indent="0" marL="0">
+              <a:buNone/>
+            </a:pPr>
+            <a:r>
+              <a:rPr lang="en-US" sz="1050" dirty="0">
+                <a:solidFill>
+                  <a:schemeClr val="tx1"/>
+                </a:solidFill>
+              </a:rPr>
+              <a:t>규칙 기반으로 전 기능 동작(추출은 정형 서식 한정)</a:t>
+            </a:r>
+            <a:endParaRPr lang="en-US" sz="1050" dirty="0"/>
+          </a:p>
+        </p:txBody>
+      </p:sp>
+      <p:sp>
+        <p:nvSpPr>
+          <p:cNvPr id="35" name="arch-link"/>
+          <p:cNvSpPr/>
+          <p:nvPr/>
+        </p:nvSpPr>
+        <p:spPr>
+          <a:xfrm>
+            <a:off x="8229600" y="2423160"/>
+            <a:ext cx="274320" cy="0"/>
+          </a:xfrm>
+          <a:prstGeom prst="line">
+            <a:avLst/>
+          </a:prstGeom>
+          <a:noFill/>
+          <a:ln w="19050">
+            <a:solidFill>
+              <a:schemeClr val="accent5"/>
+            </a:solidFill>
+            <a:prstDash val="dash"/>
+          </a:ln>
+        </p:spPr>
+      </p:sp>
+      <p:sp>
+        <p:nvSpPr>
+          <p:cNvPr id="25" name="Slide Number Placeholder 0"/>
+          <p:cNvSpPr>
+            <a:spLocks noGrp="1"/>
+          </p:cNvSpPr>
+          <p:nvPr>
+            <p:ph type="sldNum" sz="quarter" idx="4294967295"/>
+          </p:nvPr>
+        </p:nvSpPr>
+        <p:spPr>
+          <a:xfrm>
+            <a:off x="11247120" y="6400800"/>
+            <a:ext cx="548640" cy="274320"/>
+          </a:xfrm>
+          <a:prstGeom prst="rect">
+            <a:avLst/>
+          </a:prstGeom>
+          <a:extLst>
+            <a:ext uri="{C572A759-6A51-4108-AA02-DFA0A04FC94B}">
+              <ma14:wrappingTextBoxFlag xmlns:ma14="http://schemas.microsoft.com/office/mac/drawingml/2011/main" val="0"/>
+            </a:ext>
+          </a:extLst>
+        </p:spPr>
+        <p:txBody>
+          <a:bodyPr/>
+          <a:lstStyle>
+            <a:lvl1pPr>
+              <a:defRPr sz="900">
+                <a:solidFill>
+                  <a:srgbClr val="6B7A8F"/>
+                </a:solidFill>
+              </a:defRPr>
+            </a:lvl1pPr>
+          </a:lstStyle>
+          <a:p>
+            <a:pPr algn="l"/>
+            <a:fld id="{F7021451-1387-4CA6-816F-3879F97B5CBC}" type="slidenum">
+              <a:rPr b="0" lang="en-US"/>
+              <a:t>15</a:t>
+            </a:fld>
+            <a:endParaRPr lang="en-US"/>
+          </a:p>
+        </p:txBody>
+      </p:sp>
+    </p:spTree>
+  </p:cSld>
+  <p:clrMapOvr>
+    <a:masterClrMapping/>
+  </p:clrMapOvr>
+</p:sld>
+</file>
+
+<file path=ppt/slides/slide16.xml><?xml version="1.0" encoding="utf-8"?>
+<p:sld xmlns:a="http://schemas.openxmlformats.org/drawingml/2006/main" xmlns:r="http://schemas.openxmlformats.org/officeDocument/2006/relationships" xmlns:p="http://schemas.openxmlformats.org/presentationml/2006/main">
+  <p:cSld name="Slide 16">
+    <p:spTree>
+      <p:nvGrpSpPr>
+        <p:cNvPr id="1" name=""/>
+        <p:cNvGrpSpPr/>
+        <p:nvPr/>
+      </p:nvGrpSpPr>
+      <p:grpSpPr>
+        <a:xfrm>
+          <a:off x="0" y="0"/>
+          <a:ext cx="0" cy="0"/>
+          <a:chOff x="0" y="0"/>
+          <a:chExt cx="0" cy="0"/>
+        </a:xfrm>
+      </p:grpSpPr>
+      <p:sp>
+        <p:nvSpPr>
+          <p:cNvPr id="2" name="Text 0"/>
+          <p:cNvSpPr/>
+          <p:nvPr>
+            <p:ph idx="100" type="title" hasCustomPrompt="1"/>
+          </p:nvPr>
+        </p:nvSpPr>
+        <p:spPr>
+          <a:xfrm>
+            <a:off x="548640" y="365760"/>
+            <a:ext cx="11064240" cy="731520"/>
+          </a:xfrm>
+          <a:prstGeom prst="rect">
+            <a:avLst/>
+          </a:prstGeom>
+          <a:noFill/>
+          <a:ln/>
+        </p:spPr>
+        <p:txBody>
+          <a:bodyPr wrap="square" lIns="0" tIns="0" rIns="0" bIns="0" rtlCol="0"/>
+          <a:lstStyle/>
+          <a:p>
+            <a:pPr algn="l" indent="0" marL="0">
+              <a:buNone/>
+            </a:pPr>
+            <a:r>
+              <a:rPr lang="en-US" sz="2800" b="1" dirty="0">
+                <a:solidFill>
+                  <a:schemeClr val="tx1"/>
+                </a:solidFill>
+              </a:rPr>
               <a:t>검증 결과 — 실측치</a:t>
             </a:r>
             <a:endParaRPr lang="en-US" sz="2800" dirty="0"/>
@@ -8912,7 +9990,7 @@
       </p:sp>
       <p:sp>
         <p:nvSpPr>
-          <p:cNvPr id="7" name="stat-pytest 단위 테스트 통과 (모듈 45 + 리뷰 회귀 10 + 보안 3 + 세션·공급자 6)"/>
+          <p:cNvPr id="7" name="stat-pytest 단위 테스트 통과 (모듈 45 + 리뷰 회귀 10 + 보안 3 + 세션·공급자 6 + 표 구조 8)"/>
           <p:cNvSpPr txBox="1"/>
           <p:nvPr/>
         </p:nvSpPr>
@@ -8940,7 +10018,7 @@
                   <a:schemeClr val="accent1"/>
                 </a:solidFill>
               </a:rPr>
-              <a:t>64</a:t>
+              <a:t>72</a:t>
             </a:r>
             <a:endParaRPr lang="en-US" sz="4000" dirty="0"/>
           </a:p>
@@ -8948,7 +10026,7 @@
       </p:sp>
       <p:sp>
         <p:nvSpPr>
-          <p:cNvPr id="8" name="stat-label-pytest 단위 테스트 통과 (모듈 45 + 리뷰 회귀 10 + 보안 3 + 세션·공급자 6)"/>
+          <p:cNvPr id="8" name="stat-label-pytest 단위 테스트 통과 (모듈 45 + 리뷰 회귀 10 + 보안 3 + 세션·공급자 6 + 표 구조 8)"/>
           <p:cNvSpPr txBox="1"/>
           <p:nvPr/>
         </p:nvSpPr>
@@ -8990,7 +10068,7 @@
                   <a:schemeClr val="accent5"/>
                 </a:solidFill>
               </a:rPr>
-              <a:t>(모듈 45 + 리뷰 회귀 10 + 보안 3 + 세션·공급자 6)</a:t>
+              <a:t>(모듈 45 + 리뷰 회귀 10 + 보안 3 + 세션·공급자 6 + 표 구조 8)</a:t>
             </a:r>
             <a:endParaRPr lang="en-US" sz="1200" dirty="0"/>
           </a:p>
@@ -9084,7 +10162,7 @@
       </p:sp>
       <p:graphicFrame>
         <p:nvGraphicFramePr>
-          <p:cNvPr id="16" name="verify-table"/>
+          <p:cNvPr id="17" name="verify-table"/>
           <p:cNvGraphicFramePr>
             <a:graphicFrameLocks noGrp="1"/>
           </p:cNvGraphicFramePr>
@@ -10632,600 +11710,6 @@
             <a:pPr algn="l"/>
             <a:fld id="{F7021451-1387-4CA6-816F-3879F97B5CBC}" type="slidenum">
               <a:rPr b="0" lang="en-US"/>
-              <a:t>15</a:t>
-            </a:fld>
-            <a:endParaRPr lang="en-US"/>
-          </a:p>
-        </p:txBody>
-      </p:sp>
-    </p:spTree>
-  </p:cSld>
-  <p:clrMapOvr>
-    <a:masterClrMapping/>
-  </p:clrMapOvr>
-</p:sld>
-</file>
-
-<file path=ppt/slides/slide16.xml><?xml version="1.0" encoding="utf-8"?>
-<p:sld xmlns:a="http://schemas.openxmlformats.org/drawingml/2006/main" xmlns:r="http://schemas.openxmlformats.org/officeDocument/2006/relationships" xmlns:p="http://schemas.openxmlformats.org/presentationml/2006/main">
-  <p:cSld name="Slide 16">
-    <p:spTree>
-      <p:nvGrpSpPr>
-        <p:cNvPr id="1" name=""/>
-        <p:cNvGrpSpPr/>
-        <p:nvPr/>
-      </p:nvGrpSpPr>
-      <p:grpSpPr>
-        <a:xfrm>
-          <a:off x="0" y="0"/>
-          <a:ext cx="0" cy="0"/>
-          <a:chOff x="0" y="0"/>
-          <a:chExt cx="0" cy="0"/>
-        </a:xfrm>
-      </p:grpSpPr>
-      <p:sp>
-        <p:nvSpPr>
-          <p:cNvPr id="2" name="Text 0"/>
-          <p:cNvSpPr/>
-          <p:nvPr>
-            <p:ph idx="100" type="title" hasCustomPrompt="1"/>
-          </p:nvPr>
-        </p:nvSpPr>
-        <p:spPr>
-          <a:xfrm>
-            <a:off x="548640" y="365760"/>
-            <a:ext cx="11064240" cy="731520"/>
-          </a:xfrm>
-          <a:prstGeom prst="rect">
-            <a:avLst/>
-          </a:prstGeom>
-          <a:noFill/>
-          <a:ln/>
-        </p:spPr>
-        <p:txBody>
-          <a:bodyPr wrap="square" lIns="0" tIns="0" rIns="0" bIns="0" rtlCol="0"/>
-          <a:lstStyle/>
-          <a:p>
-            <a:pPr algn="l" indent="0" marL="0">
-              <a:buNone/>
-            </a:pPr>
-            <a:r>
-              <a:rPr lang="en-US" sz="2800" b="1" dirty="0">
-                <a:solidFill>
-                  <a:schemeClr val="tx1"/>
-                </a:solidFill>
-              </a:rPr>
-              <a:t>보안과 비용</a:t>
-            </a:r>
-            <a:endParaRPr lang="en-US" sz="2800" dirty="0"/>
-          </a:p>
-        </p:txBody>
-      </p:sp>
-      <p:sp>
-        <p:nvSpPr>
-          <p:cNvPr id="3" name="card-보안 설계"/>
-          <p:cNvSpPr/>
-          <p:nvPr/>
-        </p:nvSpPr>
-        <p:spPr>
-          <a:xfrm>
-            <a:off x="548640" y="1371600"/>
-            <a:ext cx="5440680" cy="4572000"/>
-          </a:xfrm>
-          <a:prstGeom prst="roundRect">
-            <a:avLst>
-              <a:gd name="adj" fmla="val 2400"/>
-            </a:avLst>
-          </a:prstGeom>
-          <a:solidFill>
-            <a:schemeClr val="bg2"/>
-          </a:solidFill>
-          <a:ln w="12700">
-            <a:solidFill>
-              <a:schemeClr val="bg2"/>
-            </a:solidFill>
-            <a:prstDash val="solid"/>
-          </a:ln>
-        </p:spPr>
-      </p:sp>
-      <p:sp>
-        <p:nvSpPr>
-          <p:cNvPr id="4" name="card-title-보안 설계"/>
-          <p:cNvSpPr txBox="1"/>
-          <p:nvPr/>
-        </p:nvSpPr>
-        <p:spPr>
-          <a:xfrm>
-            <a:off x="777240" y="1554480"/>
-            <a:ext cx="5029200" cy="411480"/>
-          </a:xfrm>
-          <a:prstGeom prst="rect">
-            <a:avLst/>
-          </a:prstGeom>
-          <a:noFill/>
-          <a:ln/>
-        </p:spPr>
-        <p:txBody>
-          <a:bodyPr wrap="square" lIns="0" tIns="0" rIns="0" bIns="0" rtlCol="0" anchor="ctr"/>
-          <a:lstStyle/>
-          <a:p>
-            <a:pPr indent="0" marL="0">
-              <a:buNone/>
-            </a:pPr>
-            <a:r>
-              <a:rPr lang="en-US" sz="1700" b="1" dirty="0">
-                <a:solidFill>
-                  <a:schemeClr val="tx2"/>
-                </a:solidFill>
-              </a:rPr>
-              <a:t>보안 설계</a:t>
-            </a:r>
-            <a:endParaRPr lang="en-US" sz="1700" dirty="0"/>
-          </a:p>
-        </p:txBody>
-      </p:sp>
-      <p:sp>
-        <p:nvSpPr>
-          <p:cNvPr id="5" name="bullets"/>
-          <p:cNvSpPr txBox="1"/>
-          <p:nvPr/>
-        </p:nvSpPr>
-        <p:spPr>
-          <a:xfrm>
-            <a:off x="777240" y="2011680"/>
-            <a:ext cx="4983480" cy="3749040"/>
-          </a:xfrm>
-          <a:prstGeom prst="rect">
-            <a:avLst/>
-          </a:prstGeom>
-          <a:noFill/>
-          <a:ln/>
-        </p:spPr>
-        <p:txBody>
-          <a:bodyPr wrap="square" lIns="0" tIns="0" rIns="0" bIns="0" rtlCol="0" anchor="t"/>
-          <a:lstStyle/>
-          <a:p>
-            <a:pPr marL="342900" indent="-342900">
-              <a:spcAft>
-                <a:spcPts val="800"/>
-              </a:spcAft>
-              <a:buSzPct val="100000"/>
-              <a:buChar char="•"/>
-            </a:pPr>
-            <a:r>
-              <a:rPr lang="en-US" sz="1250" dirty="0">
-                <a:solidFill>
-                  <a:schemeClr val="tx1"/>
-                </a:solidFill>
-              </a:rPr>
-              <a:t>API 키는 접속자가 설정 화면에 입력, 그 브라우저 세션에만 보관 — 서버 파일 저장·다른 접속자 공유 없음(운영자 공통 키는 서버 환경변수)</a:t>
-            </a:r>
-            <a:endParaRPr lang="en-US" sz="1250" dirty="0"/>
-          </a:p>
-          <a:p>
-            <a:pPr marL="342900" indent="-342900">
-              <a:spcAft>
-                <a:spcPts val="800"/>
-              </a:spcAft>
-              <a:buSzPct val="100000"/>
-              <a:buChar char="•"/>
-            </a:pPr>
-            <a:r>
-              <a:rPr lang="en-US" sz="1250" dirty="0">
-                <a:solidFill>
-                  <a:schemeClr val="tx1"/>
-                </a:solidFill>
-              </a:rPr>
-              <a:t>이력 DB는 사내 PC의 SQLite. 외부로는 요구서 문안·센터 단위 확정값·입력 사유·근거 메타, ⑧은 질문과 조회된 레코드만 전송. 조회 도구는 읽기 전용</a:t>
-            </a:r>
-            <a:endParaRPr lang="en-US" sz="1250" dirty="0"/>
-          </a:p>
-          <a:p>
-            <a:pPr marL="342900" indent="-342900">
-              <a:spcAft>
-                <a:spcPts val="800"/>
-              </a:spcAft>
-              <a:buSzPct val="100000"/>
-              <a:buChar char="•"/>
-            </a:pPr>
-            <a:r>
-              <a:rPr lang="en-US" sz="1250" dirty="0">
-                <a:solidFill>
-                  <a:schemeClr val="tx1"/>
-                </a:solidFill>
-              </a:rPr>
-              <a:t>요구서 원문의 전화·이메일·주민번호·계좌 패턴은 Claude 전송 전 자동 마스킹. ⑧ 도구 결과에서 직원 이름 제거. ③ 집계값·④ 초안도 개인정보 패턴 검사</a:t>
-            </a:r>
-            <a:endParaRPr lang="en-US" sz="1250" dirty="0"/>
-          </a:p>
-          <a:p>
-            <a:pPr marL="342900" indent="-342900">
-              <a:spcAft>
-                <a:spcPts val="800"/>
-              </a:spcAft>
-              <a:buSzPct val="100000"/>
-              <a:buChar char="•"/>
-            </a:pPr>
-            <a:r>
-              <a:rPr lang="en-US" sz="1250" dirty="0">
-                <a:solidFill>
-                  <a:schemeClr val="tx1"/>
-                </a:solidFill>
-              </a:rPr>
-              <a:t>국정원 생성형 AI 보안 가이드라인의 '비공개·개인정보 입력 금지, 생성물 재검증' 원칙과 정렬</a:t>
-            </a:r>
-            <a:endParaRPr lang="en-US" sz="1250" dirty="0"/>
-          </a:p>
-          <a:p>
-            <a:pPr marL="342900" indent="-342900">
-              <a:spcAft>
-                <a:spcPts val="800"/>
-              </a:spcAft>
-              <a:buSzPct val="100000"/>
-              <a:buChar char="•"/>
-            </a:pPr>
-            <a:r>
-              <a:rPr lang="en-US" sz="1250" dirty="0">
-                <a:solidFill>
-                  <a:schemeClr val="tx1"/>
-                </a:solidFill>
-              </a:rPr>
-              <a:t>API가 막힌 망에서도 규칙 경로로 전 기능 동작. 공급자 모듈로 사내 LLM 게이트웨이 교체 가능</a:t>
-            </a:r>
-            <a:endParaRPr lang="en-US" sz="1250" dirty="0"/>
-          </a:p>
-        </p:txBody>
-      </p:sp>
-      <p:sp>
-        <p:nvSpPr>
-          <p:cNvPr id="6" name="card-비용 (추정)"/>
-          <p:cNvSpPr/>
-          <p:nvPr/>
-        </p:nvSpPr>
-        <p:spPr>
-          <a:xfrm>
-            <a:off x="6172200" y="1371600"/>
-            <a:ext cx="5440680" cy="4572000"/>
-          </a:xfrm>
-          <a:prstGeom prst="roundRect">
-            <a:avLst>
-              <a:gd name="adj" fmla="val 2400"/>
-            </a:avLst>
-          </a:prstGeom>
-          <a:solidFill>
-            <a:schemeClr val="bg2"/>
-          </a:solidFill>
-          <a:ln w="12700">
-            <a:solidFill>
-              <a:schemeClr val="bg2"/>
-            </a:solidFill>
-            <a:prstDash val="solid"/>
-          </a:ln>
-        </p:spPr>
-      </p:sp>
-      <p:sp>
-        <p:nvSpPr>
-          <p:cNvPr id="7" name="card-title-비용 (추정)"/>
-          <p:cNvSpPr txBox="1"/>
-          <p:nvPr/>
-        </p:nvSpPr>
-        <p:spPr>
-          <a:xfrm>
-            <a:off x="6400800" y="1554480"/>
-            <a:ext cx="5029200" cy="411480"/>
-          </a:xfrm>
-          <a:prstGeom prst="rect">
-            <a:avLst/>
-          </a:prstGeom>
-          <a:noFill/>
-          <a:ln/>
-        </p:spPr>
-        <p:txBody>
-          <a:bodyPr wrap="square" lIns="0" tIns="0" rIns="0" bIns="0" rtlCol="0" anchor="ctr"/>
-          <a:lstStyle/>
-          <a:p>
-            <a:pPr indent="0" marL="0">
-              <a:buNone/>
-            </a:pPr>
-            <a:r>
-              <a:rPr lang="en-US" sz="1700" b="1" dirty="0">
-                <a:solidFill>
-                  <a:schemeClr val="tx2"/>
-                </a:solidFill>
-              </a:rPr>
-              <a:t>비용 (추정)</a:t>
-            </a:r>
-            <a:endParaRPr lang="en-US" sz="1700" dirty="0"/>
-          </a:p>
-        </p:txBody>
-      </p:sp>
-      <p:sp>
-        <p:nvSpPr>
-          <p:cNvPr id="8" name="stat-요구서 1건 추출 (입력 2.0k · 출력 0.3k 토큰, 스키마 포함)"/>
-          <p:cNvSpPr txBox="1"/>
-          <p:nvPr/>
-        </p:nvSpPr>
-        <p:spPr>
-          <a:xfrm>
-            <a:off x="6400800" y="2011680"/>
-            <a:ext cx="2468880" cy="822960"/>
-          </a:xfrm>
-          <a:prstGeom prst="rect">
-            <a:avLst/>
-          </a:prstGeom>
-          <a:noFill/>
-          <a:ln/>
-        </p:spPr>
-        <p:txBody>
-          <a:bodyPr wrap="square" lIns="0" tIns="0" rIns="0" bIns="0" rtlCol="0" anchor="ctr"/>
-          <a:lstStyle/>
-          <a:p>
-            <a:pPr algn="l" indent="0" marL="0">
-              <a:buNone/>
-            </a:pPr>
-            <a:r>
-              <a:rPr lang="en-US" sz="3000" b="1" dirty="0">
-                <a:solidFill>
-                  <a:schemeClr val="accent1"/>
-                </a:solidFill>
-              </a:rPr>
-              <a:t>≈ $0.011</a:t>
-            </a:r>
-            <a:endParaRPr lang="en-US" sz="3000" dirty="0"/>
-          </a:p>
-        </p:txBody>
-      </p:sp>
-      <p:sp>
-        <p:nvSpPr>
-          <p:cNvPr id="9" name="stat-label-요구서 1건 추출 (입력 2.0k · 출력 0.3k 토큰, 스키마 포함)"/>
-          <p:cNvSpPr txBox="1"/>
-          <p:nvPr/>
-        </p:nvSpPr>
-        <p:spPr>
-          <a:xfrm>
-            <a:off x="6400800" y="2834640"/>
-            <a:ext cx="2468880" cy="548640"/>
-          </a:xfrm>
-          <a:prstGeom prst="rect">
-            <a:avLst/>
-          </a:prstGeom>
-          <a:noFill/>
-          <a:ln/>
-        </p:spPr>
-        <p:txBody>
-          <a:bodyPr wrap="square" lIns="0" tIns="0" rIns="0" bIns="0" rtlCol="0" anchor="t"/>
-          <a:lstStyle/>
-          <a:p>
-            <a:pPr algn="l" indent="0" marL="0">
-              <a:buNone/>
-            </a:pPr>
-            <a:r>
-              <a:rPr lang="en-US" sz="1200" dirty="0">
-                <a:solidFill>
-                  <a:schemeClr val="accent5"/>
-                </a:solidFill>
-              </a:rPr>
-              <a:t>요구서 1건 추출</a:t>
-            </a:r>
-            <a:endParaRPr lang="en-US" sz="1200" dirty="0"/>
-          </a:p>
-          <a:p>
-            <a:pPr algn="l" indent="0" marL="0">
-              <a:buNone/>
-            </a:pPr>
-            <a:r>
-              <a:rPr lang="en-US" sz="1200" dirty="0">
-                <a:solidFill>
-                  <a:schemeClr val="accent5"/>
-                </a:solidFill>
-              </a:rPr>
-              <a:t>(입력 2.0k · 출력 0.3k 토큰, 스키마 포함)</a:t>
-            </a:r>
-            <a:endParaRPr lang="en-US" sz="1200" dirty="0"/>
-          </a:p>
-        </p:txBody>
-      </p:sp>
-      <p:sp>
-        <p:nvSpPr>
-          <p:cNvPr id="10" name="stat-시연 1회(14회 호출, 입력 37.5k · 출력 6.7k 토큰 실측)"/>
-          <p:cNvSpPr txBox="1"/>
-          <p:nvPr/>
-        </p:nvSpPr>
-        <p:spPr>
-          <a:xfrm>
-            <a:off x="9052560" y="2011680"/>
-            <a:ext cx="2468880" cy="822960"/>
-          </a:xfrm>
-          <a:prstGeom prst="rect">
-            <a:avLst/>
-          </a:prstGeom>
-          <a:noFill/>
-          <a:ln/>
-        </p:spPr>
-        <p:txBody>
-          <a:bodyPr wrap="square" lIns="0" tIns="0" rIns="0" bIns="0" rtlCol="0" anchor="ctr"/>
-          <a:lstStyle/>
-          <a:p>
-            <a:pPr algn="l" indent="0" marL="0">
-              <a:buNone/>
-            </a:pPr>
-            <a:r>
-              <a:rPr lang="en-US" sz="3000" b="1" dirty="0">
-                <a:solidFill>
-                  <a:schemeClr val="accent1"/>
-                </a:solidFill>
-              </a:rPr>
-              <a:t>≈ $0.21</a:t>
-            </a:r>
-            <a:endParaRPr lang="en-US" sz="3000" dirty="0"/>
-          </a:p>
-        </p:txBody>
-      </p:sp>
-      <p:sp>
-        <p:nvSpPr>
-          <p:cNvPr id="11" name="stat-label-시연 1회(14회 호출, 입력 37.5k · 출력 6.7k 토큰 실측)"/>
-          <p:cNvSpPr txBox="1"/>
-          <p:nvPr/>
-        </p:nvSpPr>
-        <p:spPr>
-          <a:xfrm>
-            <a:off x="9052560" y="2834640"/>
-            <a:ext cx="2468880" cy="548640"/>
-          </a:xfrm>
-          <a:prstGeom prst="rect">
-            <a:avLst/>
-          </a:prstGeom>
-          <a:noFill/>
-          <a:ln/>
-        </p:spPr>
-        <p:txBody>
-          <a:bodyPr wrap="square" lIns="0" tIns="0" rIns="0" bIns="0" rtlCol="0" anchor="t"/>
-          <a:lstStyle/>
-          <a:p>
-            <a:pPr algn="l" indent="0" marL="0">
-              <a:buNone/>
-            </a:pPr>
-            <a:r>
-              <a:rPr lang="en-US" sz="1200" dirty="0">
-                <a:solidFill>
-                  <a:schemeClr val="accent5"/>
-                </a:solidFill>
-              </a:rPr>
-              <a:t>시연 1회(14회 호출,</a:t>
-            </a:r>
-            <a:endParaRPr lang="en-US" sz="1200" dirty="0"/>
-          </a:p>
-          <a:p>
-            <a:pPr algn="l" indent="0" marL="0">
-              <a:buNone/>
-            </a:pPr>
-            <a:r>
-              <a:rPr lang="en-US" sz="1200" dirty="0">
-                <a:solidFill>
-                  <a:schemeClr val="accent5"/>
-                </a:solidFill>
-              </a:rPr>
-              <a:t>입력 37.5k · 출력 6.7k 토큰 실측)</a:t>
-            </a:r>
-            <a:endParaRPr lang="en-US" sz="1200" dirty="0"/>
-          </a:p>
-        </p:txBody>
-      </p:sp>
-      <p:sp>
-        <p:nvSpPr>
-          <p:cNvPr id="12" name="bullets"/>
-          <p:cNvSpPr txBox="1"/>
-          <p:nvPr/>
-        </p:nvSpPr>
-        <p:spPr>
-          <a:xfrm>
-            <a:off x="6400800" y="3749040"/>
-            <a:ext cx="4983480" cy="2103120"/>
-          </a:xfrm>
-          <a:prstGeom prst="rect">
-            <a:avLst/>
-          </a:prstGeom>
-          <a:noFill/>
-          <a:ln/>
-        </p:spPr>
-        <p:txBody>
-          <a:bodyPr wrap="square" lIns="0" tIns="0" rIns="0" bIns="0" rtlCol="0" anchor="t"/>
-          <a:lstStyle/>
-          <a:p>
-            <a:pPr marL="342900" indent="-342900">
-              <a:spcAft>
-                <a:spcPts val="800"/>
-              </a:spcAft>
-              <a:buSzPct val="100000"/>
-              <a:buChar char="•"/>
-            </a:pPr>
-            <a:r>
-              <a:rPr lang="en-US" sz="1150" dirty="0">
-                <a:solidFill>
-                  <a:schemeClr val="tx1"/>
-                </a:solidFill>
-              </a:rPr>
-              <a:t>단가: claude-sonnet-4-6 입력 $3 · 출력 $15 / 100만 토큰(공개 가격표 2026-09-25 기준)</a:t>
-            </a:r>
-            <a:endParaRPr lang="en-US" sz="1150" dirty="0"/>
-          </a:p>
-          <a:p>
-            <a:pPr marL="342900" indent="-342900">
-              <a:spcAft>
-                <a:spcPts val="800"/>
-              </a:spcAft>
-              <a:buSzPct val="100000"/>
-              <a:buChar char="•"/>
-            </a:pPr>
-            <a:r>
-              <a:rPr lang="en-US" sz="1150" dirty="0">
-                <a:solidFill>
-                  <a:schemeClr val="tx1"/>
-                </a:solidFill>
-              </a:rPr>
-              <a:t>설정 화면에서 모델별 단가·호출별 추정 비용 확인. sonnet-5-5도 25/25였으나 지연·출력 토큰이 커서 기본은 sonnet-4-6</a:t>
-            </a:r>
-            <a:endParaRPr lang="en-US" sz="1150" dirty="0"/>
-          </a:p>
-          <a:p>
-            <a:pPr marL="342900" indent="-342900">
-              <a:spcAft>
-                <a:spcPts val="800"/>
-              </a:spcAft>
-              <a:buSzPct val="100000"/>
-              <a:buChar char="•"/>
-            </a:pPr>
-            <a:r>
-              <a:rPr lang="en-US" sz="1150" dirty="0">
-                <a:solidFill>
-                  <a:schemeClr val="tx1"/>
-                </a:solidFill>
-              </a:rPr>
-              <a:t>실제 청구액·월 호출량은 [확인 필요] — 콘솔 Usage 기준으로 확정</a:t>
-            </a:r>
-            <a:endParaRPr lang="en-US" sz="1150" dirty="0"/>
-          </a:p>
-        </p:txBody>
-      </p:sp>
-      <p:sp>
-        <p:nvSpPr>
-          <p:cNvPr id="25" name="Slide Number Placeholder 0"/>
-          <p:cNvSpPr>
-            <a:spLocks noGrp="1"/>
-          </p:cNvSpPr>
-          <p:nvPr>
-            <p:ph type="sldNum" sz="quarter" idx="4294967295"/>
-          </p:nvPr>
-        </p:nvSpPr>
-        <p:spPr>
-          <a:xfrm>
-            <a:off x="11247120" y="6400800"/>
-            <a:ext cx="548640" cy="274320"/>
-          </a:xfrm>
-          <a:prstGeom prst="rect">
-            <a:avLst/>
-          </a:prstGeom>
-          <a:extLst>
-            <a:ext uri="{C572A759-6A51-4108-AA02-DFA0A04FC94B}">
-              <ma14:wrappingTextBoxFlag xmlns:ma14="http://schemas.microsoft.com/office/mac/drawingml/2011/main" val="0"/>
-            </a:ext>
-          </a:extLst>
-        </p:spPr>
-        <p:txBody>
-          <a:bodyPr/>
-          <a:lstStyle>
-            <a:lvl1pPr>
-              <a:defRPr sz="900">
-                <a:solidFill>
-                  <a:srgbClr val="6B7A8F"/>
-                </a:solidFill>
-              </a:defRPr>
-            </a:lvl1pPr>
-          </a:lstStyle>
-          <a:p>
-            <a:pPr algn="l"/>
-            <a:fld id="{F7021451-1387-4CA6-816F-3879F97B5CBC}" type="slidenum">
-              <a:rPr b="0" lang="en-US"/>
               <a:t>16</a:t>
             </a:fld>
             <a:endParaRPr lang="en-US"/>
@@ -11289,7 +11773,7 @@
                   <a:schemeClr val="tx1"/>
                 </a:solidFill>
               </a:rPr>
-              <a:t>한계와 다음 단계</a:t>
+              <a:t>보안과 비용</a:t>
             </a:r>
             <a:endParaRPr lang="en-US" sz="2800" dirty="0"/>
           </a:p>
@@ -11297,90 +11781,18 @@
       </p:sp>
       <p:sp>
         <p:nvSpPr>
-          <p:cNvPr id="3" name="lim-h"/>
-          <p:cNvSpPr txBox="1"/>
-          <p:nvPr/>
-        </p:nvSpPr>
-        <p:spPr>
-          <a:xfrm>
-            <a:off x="548640" y="1325880"/>
-            <a:ext cx="5120640" cy="365760"/>
-          </a:xfrm>
-          <a:prstGeom prst="rect">
-            <a:avLst/>
-          </a:prstGeom>
-          <a:noFill/>
-          <a:ln/>
-        </p:spPr>
-        <p:txBody>
-          <a:bodyPr wrap="square" lIns="0" tIns="0" rIns="0" bIns="0" rtlCol="0" anchor="ctr"/>
-          <a:lstStyle/>
-          <a:p>
-            <a:pPr indent="0" marL="0">
-              <a:buNone/>
-            </a:pPr>
-            <a:r>
-              <a:rPr lang="en-US" sz="1400" b="1" dirty="0">
-                <a:solidFill>
-                  <a:schemeClr val="accent4"/>
-                </a:solidFill>
-              </a:rPr>
-              <a:t>한계</a:t>
-            </a:r>
-            <a:endParaRPr lang="en-US" sz="1400" dirty="0"/>
-          </a:p>
-        </p:txBody>
-      </p:sp>
-      <p:sp>
-        <p:nvSpPr>
-          <p:cNvPr id="4" name="plan-h"/>
-          <p:cNvSpPr txBox="1"/>
-          <p:nvPr/>
-        </p:nvSpPr>
-        <p:spPr>
-          <a:xfrm>
-            <a:off x="6126480" y="1325880"/>
-            <a:ext cx="5486400" cy="365760"/>
-          </a:xfrm>
-          <a:prstGeom prst="rect">
-            <a:avLst/>
-          </a:prstGeom>
-          <a:noFill/>
-          <a:ln/>
-        </p:spPr>
-        <p:txBody>
-          <a:bodyPr wrap="square" lIns="0" tIns="0" rIns="0" bIns="0" rtlCol="0" anchor="ctr"/>
-          <a:lstStyle/>
-          <a:p>
-            <a:pPr indent="0" marL="0">
-              <a:buNone/>
-            </a:pPr>
-            <a:r>
-              <a:rPr lang="en-US" sz="1400" b="1" dirty="0">
-                <a:solidFill>
-                  <a:schemeClr val="accent3"/>
-                </a:solidFill>
-              </a:rPr>
-              <a:t>다음 단계</a:t>
-            </a:r>
-            <a:endParaRPr lang="en-US" sz="1400" dirty="0"/>
-          </a:p>
-        </p:txBody>
-      </p:sp>
-      <p:sp>
-        <p:nvSpPr>
-          <p:cNvPr id="5" name="lim-0"/>
+          <p:cNvPr id="3" name="card-보안 설계"/>
           <p:cNvSpPr/>
           <p:nvPr/>
         </p:nvSpPr>
         <p:spPr>
           <a:xfrm>
-            <a:off x="548640" y="1783080"/>
-            <a:ext cx="5120640" cy="603504"/>
+            <a:off x="548640" y="1371600"/>
+            <a:ext cx="5440680" cy="4572000"/>
           </a:xfrm>
           <a:prstGeom prst="roundRect">
             <a:avLst>
-              <a:gd name="adj" fmla="val 12121"/>
+              <a:gd name="adj" fmla="val 2400"/>
             </a:avLst>
           </a:prstGeom>
           <a:solidFill>
@@ -11396,14 +11808,14 @@
       </p:sp>
       <p:sp>
         <p:nvSpPr>
-          <p:cNvPr id="6" name="lim-t-0"/>
+          <p:cNvPr id="4" name="card-title-보안 설계"/>
           <p:cNvSpPr txBox="1"/>
           <p:nvPr/>
         </p:nvSpPr>
         <p:spPr>
           <a:xfrm>
-            <a:off x="731520" y="1783080"/>
-            <a:ext cx="4754880" cy="603504"/>
+            <a:off x="777240" y="1554480"/>
+            <a:ext cx="5029200" cy="411480"/>
           </a:xfrm>
           <a:prstGeom prst="rect">
             <a:avLst/>
@@ -11419,56 +11831,143 @@
               <a:buNone/>
             </a:pPr>
             <a:r>
-              <a:rPr lang="en-US" sz="1200" dirty="0">
+              <a:rPr lang="en-US" sz="1700" b="1" dirty="0">
+                <a:solidFill>
+                  <a:schemeClr val="tx2"/>
+                </a:solidFill>
+              </a:rPr>
+              <a:t>보안 설계</a:t>
+            </a:r>
+            <a:endParaRPr lang="en-US" sz="1700" dirty="0"/>
+          </a:p>
+        </p:txBody>
+      </p:sp>
+      <p:sp>
+        <p:nvSpPr>
+          <p:cNvPr id="5" name="bullets"/>
+          <p:cNvSpPr txBox="1"/>
+          <p:nvPr/>
+        </p:nvSpPr>
+        <p:spPr>
+          <a:xfrm>
+            <a:off x="777240" y="2011680"/>
+            <a:ext cx="4983480" cy="3749040"/>
+          </a:xfrm>
+          <a:prstGeom prst="rect">
+            <a:avLst/>
+          </a:prstGeom>
+          <a:noFill/>
+          <a:ln/>
+        </p:spPr>
+        <p:txBody>
+          <a:bodyPr wrap="square" lIns="0" tIns="0" rIns="0" bIns="0" rtlCol="0" anchor="t"/>
+          <a:lstStyle/>
+          <a:p>
+            <a:pPr marL="342900" indent="-342900">
+              <a:spcAft>
+                <a:spcPts val="800"/>
+              </a:spcAft>
+              <a:buSzPct val="100000"/>
+              <a:buChar char="•"/>
+            </a:pPr>
+            <a:r>
+              <a:rPr lang="en-US" sz="1250" dirty="0">
                 <a:solidFill>
                   <a:schemeClr val="tx1"/>
                 </a:solidFill>
               </a:rPr>
-              <a:t>규칙 경로는 정형 서식에 의존</a:t>
-            </a:r>
-            <a:endParaRPr lang="en-US" sz="1200" dirty="0"/>
-          </a:p>
-        </p:txBody>
-      </p:sp>
-      <p:sp>
-        <p:nvSpPr>
-          <p:cNvPr id="7" name="lim-arrow-0"/>
+              <a:t>API 키는 접속자가 설정 화면에 입력, 그 브라우저 세션에만 보관 — 서버 파일 저장·다른 접속자 공유 없음(운영자 공통 키는 서버 환경변수)</a:t>
+            </a:r>
+            <a:endParaRPr lang="en-US" sz="1250" dirty="0"/>
+          </a:p>
+          <a:p>
+            <a:pPr marL="342900" indent="-342900">
+              <a:spcAft>
+                <a:spcPts val="800"/>
+              </a:spcAft>
+              <a:buSzPct val="100000"/>
+              <a:buChar char="•"/>
+            </a:pPr>
+            <a:r>
+              <a:rPr lang="en-US" sz="1250" dirty="0">
+                <a:solidFill>
+                  <a:schemeClr val="tx1"/>
+                </a:solidFill>
+              </a:rPr>
+              <a:t>이력 DB는 사내 PC의 SQLite. 외부로는 요구서 문안·센터 단위 확정값·입력 사유·근거 메타, ⑧은 질문과 조회된 레코드만 전송. 조회 도구는 읽기 전용</a:t>
+            </a:r>
+            <a:endParaRPr lang="en-US" sz="1250" dirty="0"/>
+          </a:p>
+          <a:p>
+            <a:pPr marL="342900" indent="-342900">
+              <a:spcAft>
+                <a:spcPts val="800"/>
+              </a:spcAft>
+              <a:buSzPct val="100000"/>
+              <a:buChar char="•"/>
+            </a:pPr>
+            <a:r>
+              <a:rPr lang="en-US" sz="1250" dirty="0">
+                <a:solidFill>
+                  <a:schemeClr val="tx1"/>
+                </a:solidFill>
+              </a:rPr>
+              <a:t>요구서 원문의 전화·이메일·주민번호·계좌 패턴은 Claude 전송 전 자동 마스킹. ⑧ 도구 결과에서 직원 이름 제거. ③ 집계값·④ 초안도 개인정보 패턴 검사</a:t>
+            </a:r>
+            <a:endParaRPr lang="en-US" sz="1250" dirty="0"/>
+          </a:p>
+          <a:p>
+            <a:pPr marL="342900" indent="-342900">
+              <a:spcAft>
+                <a:spcPts val="800"/>
+              </a:spcAft>
+              <a:buSzPct val="100000"/>
+              <a:buChar char="•"/>
+            </a:pPr>
+            <a:r>
+              <a:rPr lang="en-US" sz="1250" dirty="0">
+                <a:solidFill>
+                  <a:schemeClr val="tx1"/>
+                </a:solidFill>
+              </a:rPr>
+              <a:t>국정원 생성형 AI 보안 가이드라인의 '비공개·개인정보 입력 금지, 생성물 재검증' 원칙과 정렬</a:t>
+            </a:r>
+            <a:endParaRPr lang="en-US" sz="1250" dirty="0"/>
+          </a:p>
+          <a:p>
+            <a:pPr marL="342900" indent="-342900">
+              <a:spcAft>
+                <a:spcPts val="800"/>
+              </a:spcAft>
+              <a:buSzPct val="100000"/>
+              <a:buChar char="•"/>
+            </a:pPr>
+            <a:r>
+              <a:rPr lang="en-US" sz="1250" dirty="0">
+                <a:solidFill>
+                  <a:schemeClr val="tx1"/>
+                </a:solidFill>
+              </a:rPr>
+              <a:t>API가 막힌 망에서도 규칙 경로로 전 기능 동작. 공급자 모듈로 사내 LLM 게이트웨이 교체 가능</a:t>
+            </a:r>
+            <a:endParaRPr lang="en-US" sz="1250" dirty="0"/>
+          </a:p>
+        </p:txBody>
+      </p:sp>
+      <p:sp>
+        <p:nvSpPr>
+          <p:cNvPr id="6" name="card-비용 (추정)"/>
           <p:cNvSpPr/>
           <p:nvPr/>
         </p:nvSpPr>
         <p:spPr>
           <a:xfrm>
-            <a:off x="5760720" y="1975104"/>
-            <a:ext cx="274320" cy="219456"/>
-          </a:xfrm>
-          <a:prstGeom prst="rightArrow">
-            <a:avLst/>
-          </a:prstGeom>
-          <a:solidFill>
-            <a:schemeClr val="accent5"/>
-          </a:solidFill>
-          <a:ln w="12700">
-            <a:solidFill>
-              <a:schemeClr val="accent5"/>
-            </a:solidFill>
-            <a:prstDash val="solid"/>
-          </a:ln>
-        </p:spPr>
-      </p:sp>
-      <p:sp>
-        <p:nvSpPr>
-          <p:cNvPr id="8" name="plan-0"/>
-          <p:cNvSpPr/>
-          <p:nvPr/>
-        </p:nvSpPr>
-        <p:spPr>
-          <a:xfrm>
-            <a:off x="6126480" y="1783080"/>
-            <a:ext cx="5486400" cy="603504"/>
+            <a:off x="6172200" y="1371600"/>
+            <a:ext cx="5440680" cy="4572000"/>
           </a:xfrm>
           <a:prstGeom prst="roundRect">
             <a:avLst>
-              <a:gd name="adj" fmla="val 12121"/>
+              <a:gd name="adj" fmla="val 2400"/>
             </a:avLst>
           </a:prstGeom>
           <a:solidFill>
@@ -11484,14 +11983,14 @@
       </p:sp>
       <p:sp>
         <p:nvSpPr>
-          <p:cNvPr id="9" name="plan-t-0"/>
+          <p:cNvPr id="7" name="card-title-비용 (추정)"/>
           <p:cNvSpPr txBox="1"/>
           <p:nvPr/>
         </p:nvSpPr>
         <p:spPr>
           <a:xfrm>
-            <a:off x="6309360" y="1783080"/>
-            <a:ext cx="5120640" cy="603504"/>
+            <a:off x="6400800" y="1554480"/>
+            <a:ext cx="5029200" cy="411480"/>
           </a:xfrm>
           <a:prstGeom prst="rect">
             <a:avLst/>
@@ -11507,54 +12006,27 @@
               <a:buNone/>
             </a:pPr>
             <a:r>
-              <a:rPr lang="en-US" sz="1200" dirty="0">
-                <a:solidFill>
-                  <a:schemeClr val="tx1"/>
-                </a:solidFill>
-              </a:rPr>
-              <a:t>실제 운영은 Claude 경로. 실제 요구서를 점검 사례에 추가해 재채점</a:t>
-            </a:r>
-            <a:endParaRPr lang="en-US" sz="1200" dirty="0"/>
-          </a:p>
-        </p:txBody>
-      </p:sp>
-      <p:sp>
-        <p:nvSpPr>
-          <p:cNvPr id="10" name="lim-1"/>
-          <p:cNvSpPr/>
-          <p:nvPr/>
-        </p:nvSpPr>
-        <p:spPr>
-          <a:xfrm>
-            <a:off x="548640" y="2496312"/>
-            <a:ext cx="5120640" cy="603504"/>
-          </a:xfrm>
-          <a:prstGeom prst="roundRect">
-            <a:avLst>
-              <a:gd name="adj" fmla="val 12121"/>
-            </a:avLst>
-          </a:prstGeom>
-          <a:solidFill>
-            <a:schemeClr val="bg2"/>
-          </a:solidFill>
-          <a:ln w="12700">
-            <a:solidFill>
-              <a:schemeClr val="bg2"/>
-            </a:solidFill>
-            <a:prstDash val="solid"/>
-          </a:ln>
-        </p:spPr>
-      </p:sp>
-      <p:sp>
-        <p:nvSpPr>
-          <p:cNvPr id="11" name="lim-t-1"/>
+              <a:rPr lang="en-US" sz="1700" b="1" dirty="0">
+                <a:solidFill>
+                  <a:schemeClr val="tx2"/>
+                </a:solidFill>
+              </a:rPr>
+              <a:t>비용 (추정)</a:t>
+            </a:r>
+            <a:endParaRPr lang="en-US" sz="1700" dirty="0"/>
+          </a:p>
+        </p:txBody>
+      </p:sp>
+      <p:sp>
+        <p:nvSpPr>
+          <p:cNvPr id="8" name="stat-요구서 1건 추출 (입력 2.0k · 출력 0.3k 토큰, 스키마 포함)"/>
           <p:cNvSpPr txBox="1"/>
           <p:nvPr/>
         </p:nvSpPr>
         <p:spPr>
           <a:xfrm>
-            <a:off x="731520" y="2496312"/>
-            <a:ext cx="4754880" cy="603504"/>
+            <a:off x="6400800" y="2011680"/>
+            <a:ext cx="2468880" cy="822960"/>
           </a:xfrm>
           <a:prstGeom prst="rect">
             <a:avLst/>
@@ -11566,83 +12038,31 @@
           <a:bodyPr wrap="square" lIns="0" tIns="0" rIns="0" bIns="0" rtlCol="0" anchor="ctr"/>
           <a:lstStyle/>
           <a:p>
-            <a:pPr indent="0" marL="0">
+            <a:pPr algn="l" indent="0" marL="0">
               <a:buNone/>
             </a:pPr>
             <a:r>
-              <a:rPr lang="en-US" sz="1200" dirty="0">
-                <a:solidFill>
-                  <a:schemeClr val="tx1"/>
-                </a:solidFill>
-              </a:rPr>
-              <a:t>유사 검색은 문자 n-gram(임베딩 아님)</a:t>
-            </a:r>
-            <a:endParaRPr lang="en-US" sz="1200" dirty="0"/>
-          </a:p>
-        </p:txBody>
-      </p:sp>
-      <p:sp>
-        <p:nvSpPr>
-          <p:cNvPr id="12" name="lim-arrow-1"/>
-          <p:cNvSpPr/>
-          <p:nvPr/>
-        </p:nvSpPr>
-        <p:spPr>
-          <a:xfrm>
-            <a:off x="5760720" y="2688336"/>
-            <a:ext cx="274320" cy="219456"/>
-          </a:xfrm>
-          <a:prstGeom prst="rightArrow">
-            <a:avLst/>
-          </a:prstGeom>
-          <a:solidFill>
-            <a:schemeClr val="accent5"/>
-          </a:solidFill>
-          <a:ln w="12700">
-            <a:solidFill>
-              <a:schemeClr val="accent5"/>
-            </a:solidFill>
-            <a:prstDash val="solid"/>
-          </a:ln>
-        </p:spPr>
-      </p:sp>
-      <p:sp>
-        <p:nvSpPr>
-          <p:cNvPr id="13" name="plan-1"/>
-          <p:cNvSpPr/>
-          <p:nvPr/>
-        </p:nvSpPr>
-        <p:spPr>
-          <a:xfrm>
-            <a:off x="6126480" y="2496312"/>
-            <a:ext cx="5486400" cy="603504"/>
-          </a:xfrm>
-          <a:prstGeom prst="roundRect">
-            <a:avLst>
-              <a:gd name="adj" fmla="val 12121"/>
-            </a:avLst>
-          </a:prstGeom>
-          <a:solidFill>
-            <a:schemeClr val="bg2"/>
-          </a:solidFill>
-          <a:ln w="12700">
-            <a:solidFill>
-              <a:schemeClr val="bg2"/>
-            </a:solidFill>
-            <a:prstDash val="solid"/>
-          </a:ln>
-        </p:spPr>
-      </p:sp>
-      <p:sp>
-        <p:nvSpPr>
-          <p:cNvPr id="14" name="plan-t-1"/>
+              <a:rPr lang="en-US" sz="3000" b="1" dirty="0">
+                <a:solidFill>
+                  <a:schemeClr val="accent1"/>
+                </a:solidFill>
+              </a:rPr>
+              <a:t>≈ $0.011</a:t>
+            </a:r>
+            <a:endParaRPr lang="en-US" sz="3000" dirty="0"/>
+          </a:p>
+        </p:txBody>
+      </p:sp>
+      <p:sp>
+        <p:nvSpPr>
+          <p:cNvPr id="9" name="stat-label-요구서 1건 추출 (입력 2.0k · 출력 0.3k 토큰, 스키마 포함)"/>
           <p:cNvSpPr txBox="1"/>
           <p:nvPr/>
         </p:nvSpPr>
         <p:spPr>
           <a:xfrm>
-            <a:off x="6309360" y="2496312"/>
-            <a:ext cx="5120640" cy="603504"/>
+            <a:off x="6400800" y="2834640"/>
+            <a:ext cx="2468880" cy="548640"/>
           </a:xfrm>
           <a:prstGeom prst="rect">
             <a:avLst/>
@@ -11651,61 +12071,48 @@
           <a:ln/>
         </p:spPr>
         <p:txBody>
-          <a:bodyPr wrap="square" lIns="0" tIns="0" rIns="0" bIns="0" rtlCol="0" anchor="ctr"/>
-          <a:lstStyle/>
-          <a:p>
-            <a:pPr indent="0" marL="0">
+          <a:bodyPr wrap="square" lIns="0" tIns="0" rIns="0" bIns="0" rtlCol="0" anchor="t"/>
+          <a:lstStyle/>
+          <a:p>
+            <a:pPr algn="l" indent="0" marL="0">
               <a:buNone/>
             </a:pPr>
             <a:r>
               <a:rPr lang="en-US" sz="1200" dirty="0">
                 <a:solidFill>
-                  <a:schemeClr val="tx1"/>
-                </a:solidFill>
-              </a:rPr>
-              <a:t>이력이 쌓이면 사내 임베딩 또는 API 임베딩 검토</a:t>
+                  <a:schemeClr val="accent5"/>
+                </a:solidFill>
+              </a:rPr>
+              <a:t>요구서 1건 추출</a:t>
             </a:r>
             <a:endParaRPr lang="en-US" sz="1200" dirty="0"/>
           </a:p>
-        </p:txBody>
-      </p:sp>
-      <p:sp>
-        <p:nvSpPr>
-          <p:cNvPr id="15" name="lim-2"/>
-          <p:cNvSpPr/>
-          <p:nvPr/>
-        </p:nvSpPr>
-        <p:spPr>
-          <a:xfrm>
-            <a:off x="548640" y="3209544"/>
-            <a:ext cx="5120640" cy="603504"/>
-          </a:xfrm>
-          <a:prstGeom prst="roundRect">
-            <a:avLst>
-              <a:gd name="adj" fmla="val 12121"/>
-            </a:avLst>
-          </a:prstGeom>
-          <a:solidFill>
-            <a:schemeClr val="bg2"/>
-          </a:solidFill>
-          <a:ln w="12700">
-            <a:solidFill>
-              <a:schemeClr val="bg2"/>
-            </a:solidFill>
-            <a:prstDash val="solid"/>
-          </a:ln>
-        </p:spPr>
-      </p:sp>
-      <p:sp>
-        <p:nvSpPr>
-          <p:cNvPr id="16" name="lim-t-2"/>
+          <a:p>
+            <a:pPr algn="l" indent="0" marL="0">
+              <a:buNone/>
+            </a:pPr>
+            <a:r>
+              <a:rPr lang="en-US" sz="1200" dirty="0">
+                <a:solidFill>
+                  <a:schemeClr val="accent5"/>
+                </a:solidFill>
+              </a:rPr>
+              <a:t>(입력 2.0k · 출력 0.3k 토큰, 스키마 포함)</a:t>
+            </a:r>
+            <a:endParaRPr lang="en-US" sz="1200" dirty="0"/>
+          </a:p>
+        </p:txBody>
+      </p:sp>
+      <p:sp>
+        <p:nvSpPr>
+          <p:cNvPr id="10" name="stat-시연 1회(14회 호출, 입력 37.5k · 출력 6.7k 토큰 실측)"/>
           <p:cNvSpPr txBox="1"/>
           <p:nvPr/>
         </p:nvSpPr>
         <p:spPr>
           <a:xfrm>
-            <a:off x="731520" y="3209544"/>
-            <a:ext cx="4754880" cy="603504"/>
+            <a:off x="9052560" y="2011680"/>
+            <a:ext cx="2468880" cy="822960"/>
           </a:xfrm>
           <a:prstGeom prst="rect">
             <a:avLst/>
@@ -11717,83 +12124,31 @@
           <a:bodyPr wrap="square" lIns="0" tIns="0" rIns="0" bIns="0" rtlCol="0" anchor="ctr"/>
           <a:lstStyle/>
           <a:p>
-            <a:pPr indent="0" marL="0">
+            <a:pPr algn="l" indent="0" marL="0">
               <a:buNone/>
             </a:pPr>
             <a:r>
-              <a:rPr lang="en-US" sz="1200" dirty="0">
-                <a:solidFill>
-                  <a:schemeClr val="tx1"/>
-                </a:solidFill>
-              </a:rPr>
-              <a:t>HWP(구형식) 미지원, 자리표시자는 한글에서 삽입</a:t>
-            </a:r>
-            <a:endParaRPr lang="en-US" sz="1200" dirty="0"/>
-          </a:p>
-        </p:txBody>
-      </p:sp>
-      <p:sp>
-        <p:nvSpPr>
-          <p:cNvPr id="17" name="lim-arrow-2"/>
-          <p:cNvSpPr/>
-          <p:nvPr/>
-        </p:nvSpPr>
-        <p:spPr>
-          <a:xfrm>
-            <a:off x="5760720" y="3401568"/>
-            <a:ext cx="274320" cy="219456"/>
-          </a:xfrm>
-          <a:prstGeom prst="rightArrow">
-            <a:avLst/>
-          </a:prstGeom>
-          <a:solidFill>
-            <a:schemeClr val="accent5"/>
-          </a:solidFill>
-          <a:ln w="12700">
-            <a:solidFill>
-              <a:schemeClr val="accent5"/>
-            </a:solidFill>
-            <a:prstDash val="solid"/>
-          </a:ln>
-        </p:spPr>
-      </p:sp>
-      <p:sp>
-        <p:nvSpPr>
-          <p:cNvPr id="18" name="plan-2"/>
-          <p:cNvSpPr/>
-          <p:nvPr/>
-        </p:nvSpPr>
-        <p:spPr>
-          <a:xfrm>
-            <a:off x="6126480" y="3209544"/>
-            <a:ext cx="5486400" cy="603504"/>
-          </a:xfrm>
-          <a:prstGeom prst="roundRect">
-            <a:avLst>
-              <a:gd name="adj" fmla="val 12121"/>
-            </a:avLst>
-          </a:prstGeom>
-          <a:solidFill>
-            <a:schemeClr val="bg2"/>
-          </a:solidFill>
-          <a:ln w="12700">
-            <a:solidFill>
-              <a:schemeClr val="bg2"/>
-            </a:solidFill>
-            <a:prstDash val="solid"/>
-          </a:ln>
-        </p:spPr>
-      </p:sp>
-      <p:sp>
-        <p:nvSpPr>
-          <p:cNvPr id="19" name="plan-t-2"/>
+              <a:rPr lang="en-US" sz="3000" b="1" dirty="0">
+                <a:solidFill>
+                  <a:schemeClr val="accent1"/>
+                </a:solidFill>
+              </a:rPr>
+              <a:t>≈ $0.21</a:t>
+            </a:r>
+            <a:endParaRPr lang="en-US" sz="3000" dirty="0"/>
+          </a:p>
+        </p:txBody>
+      </p:sp>
+      <p:sp>
+        <p:nvSpPr>
+          <p:cNvPr id="11" name="stat-label-시연 1회(14회 호출, 입력 37.5k · 출력 6.7k 토큰 실측)"/>
           <p:cNvSpPr txBox="1"/>
           <p:nvPr/>
         </p:nvSpPr>
         <p:spPr>
           <a:xfrm>
-            <a:off x="6309360" y="3209544"/>
-            <a:ext cx="5120640" cy="603504"/>
+            <a:off x="9052560" y="2834640"/>
+            <a:ext cx="2468880" cy="548640"/>
           </a:xfrm>
           <a:prstGeom prst="rect">
             <a:avLst/>
@@ -11802,61 +12157,48 @@
           <a:ln/>
         </p:spPr>
         <p:txBody>
-          <a:bodyPr wrap="square" lIns="0" tIns="0" rIns="0" bIns="0" rtlCol="0" anchor="ctr"/>
-          <a:lstStyle/>
-          <a:p>
-            <a:pPr indent="0" marL="0">
+          <a:bodyPr wrap="square" lIns="0" tIns="0" rIns="0" bIns="0" rtlCol="0" anchor="t"/>
+          <a:lstStyle/>
+          <a:p>
+            <a:pPr algn="l" indent="0" marL="0">
               <a:buNone/>
             </a:pPr>
             <a:r>
               <a:rPr lang="en-US" sz="1200" dirty="0">
                 <a:solidFill>
-                  <a:schemeClr val="tx1"/>
-                </a:solidFill>
-              </a:rPr>
-              <a:t>부서 회신 서식 HWPX 1종 템플릿화(2주 내)</a:t>
+                  <a:schemeClr val="accent5"/>
+                </a:solidFill>
+              </a:rPr>
+              <a:t>시연 1회(14회 호출,</a:t>
             </a:r>
             <a:endParaRPr lang="en-US" sz="1200" dirty="0"/>
           </a:p>
-        </p:txBody>
-      </p:sp>
-      <p:sp>
-        <p:nvSpPr>
-          <p:cNvPr id="20" name="lim-3"/>
-          <p:cNvSpPr/>
-          <p:nvPr/>
-        </p:nvSpPr>
-        <p:spPr>
-          <a:xfrm>
-            <a:off x="548640" y="3922776"/>
-            <a:ext cx="5120640" cy="603504"/>
-          </a:xfrm>
-          <a:prstGeom prst="roundRect">
-            <a:avLst>
-              <a:gd name="adj" fmla="val 12121"/>
-            </a:avLst>
-          </a:prstGeom>
-          <a:solidFill>
-            <a:schemeClr val="bg2"/>
-          </a:solidFill>
-          <a:ln w="12700">
-            <a:solidFill>
-              <a:schemeClr val="bg2"/>
-            </a:solidFill>
-            <a:prstDash val="solid"/>
-          </a:ln>
-        </p:spPr>
-      </p:sp>
-      <p:sp>
-        <p:nvSpPr>
-          <p:cNvPr id="21" name="lim-t-3"/>
+          <a:p>
+            <a:pPr algn="l" indent="0" marL="0">
+              <a:buNone/>
+            </a:pPr>
+            <a:r>
+              <a:rPr lang="en-US" sz="1200" dirty="0">
+                <a:solidFill>
+                  <a:schemeClr val="accent5"/>
+                </a:solidFill>
+              </a:rPr>
+              <a:t>입력 37.5k · 출력 6.7k 토큰 실측)</a:t>
+            </a:r>
+            <a:endParaRPr lang="en-US" sz="1200" dirty="0"/>
+          </a:p>
+        </p:txBody>
+      </p:sp>
+      <p:sp>
+        <p:nvSpPr>
+          <p:cNvPr id="12" name="bullets"/>
           <p:cNvSpPr txBox="1"/>
           <p:nvPr/>
         </p:nvSpPr>
         <p:spPr>
           <a:xfrm>
-            <a:off x="731520" y="3922776"/>
-            <a:ext cx="4754880" cy="603504"/>
+            <a:off x="6400800" y="3749040"/>
+            <a:ext cx="4983480" cy="2103120"/>
           </a:xfrm>
           <a:prstGeom prst="rect">
             <a:avLst/>
@@ -11865,411 +12207,61 @@
           <a:ln/>
         </p:spPr>
         <p:txBody>
-          <a:bodyPr wrap="square" lIns="0" tIns="0" rIns="0" bIns="0" rtlCol="0" anchor="ctr"/>
-          <a:lstStyle/>
-          <a:p>
-            <a:pPr indent="0" marL="0">
-              <a:buNone/>
-            </a:pPr>
-            <a:r>
-              <a:rPr lang="en-US" sz="1200" dirty="0">
+          <a:bodyPr wrap="square" lIns="0" tIns="0" rIns="0" bIns="0" rtlCol="0" anchor="t"/>
+          <a:lstStyle/>
+          <a:p>
+            <a:pPr marL="342900" indent="-342900">
+              <a:spcAft>
+                <a:spcPts val="800"/>
+              </a:spcAft>
+              <a:buSzPct val="100000"/>
+              <a:buChar char="•"/>
+            </a:pPr>
+            <a:r>
+              <a:rPr lang="en-US" sz="1150" dirty="0">
                 <a:solidFill>
                   <a:schemeClr val="tx1"/>
                 </a:solidFill>
               </a:rPr>
-              <a:t>충족 검사(코드)는 지표명 언급 수준</a:t>
-            </a:r>
-            <a:endParaRPr lang="en-US" sz="1200" dirty="0"/>
-          </a:p>
-        </p:txBody>
-      </p:sp>
-      <p:sp>
-        <p:nvSpPr>
-          <p:cNvPr id="22" name="lim-arrow-3"/>
-          <p:cNvSpPr/>
-          <p:nvPr/>
-        </p:nvSpPr>
-        <p:spPr>
-          <a:xfrm>
-            <a:off x="5760720" y="4114800"/>
-            <a:ext cx="274320" cy="219456"/>
-          </a:xfrm>
-          <a:prstGeom prst="rightArrow">
-            <a:avLst/>
-          </a:prstGeom>
-          <a:solidFill>
-            <a:schemeClr val="accent5"/>
-          </a:solidFill>
-          <a:ln w="12700">
-            <a:solidFill>
-              <a:schemeClr val="accent5"/>
-            </a:solidFill>
-            <a:prstDash val="solid"/>
-          </a:ln>
-        </p:spPr>
-      </p:sp>
-      <p:sp>
-        <p:nvSpPr>
-          <p:cNvPr id="23" name="plan-3"/>
-          <p:cNvSpPr/>
-          <p:nvPr/>
-        </p:nvSpPr>
-        <p:spPr>
-          <a:xfrm>
-            <a:off x="6126480" y="3922776"/>
-            <a:ext cx="5486400" cy="603504"/>
-          </a:xfrm>
-          <a:prstGeom prst="roundRect">
-            <a:avLst>
-              <a:gd name="adj" fmla="val 12121"/>
-            </a:avLst>
-          </a:prstGeom>
-          <a:solidFill>
-            <a:schemeClr val="bg2"/>
-          </a:solidFill>
-          <a:ln w="12700">
-            <a:solidFill>
-              <a:schemeClr val="bg2"/>
-            </a:solidFill>
-            <a:prstDash val="solid"/>
-          </a:ln>
-        </p:spPr>
-      </p:sp>
-      <p:sp>
-        <p:nvSpPr>
-          <p:cNvPr id="24" name="plan-t-3"/>
-          <p:cNvSpPr txBox="1"/>
-          <p:nvPr/>
-        </p:nvSpPr>
-        <p:spPr>
-          <a:xfrm>
-            <a:off x="6309360" y="3922776"/>
-            <a:ext cx="5120640" cy="603504"/>
-          </a:xfrm>
-          <a:prstGeom prst="rect">
-            <a:avLst/>
-          </a:prstGeom>
-          <a:noFill/>
-          <a:ln/>
-        </p:spPr>
-        <p:txBody>
-          <a:bodyPr wrap="square" lIns="0" tIns="0" rIns="0" bIns="0" rtlCol="0" anchor="ctr"/>
-          <a:lstStyle/>
-          <a:p>
-            <a:pPr indent="0" marL="0">
-              <a:buNone/>
-            </a:pPr>
-            <a:r>
-              <a:rPr lang="en-US" sz="1200" dirty="0">
+              <a:t>단가: claude-sonnet-4-6 입력 $3 · 출력 $15 / 100만 토큰(공개 가격표 2026-09-25 기준)</a:t>
+            </a:r>
+            <a:endParaRPr lang="en-US" sz="1150" dirty="0"/>
+          </a:p>
+          <a:p>
+            <a:pPr marL="342900" indent="-342900">
+              <a:spcAft>
+                <a:spcPts val="800"/>
+              </a:spcAft>
+              <a:buSzPct val="100000"/>
+              <a:buChar char="•"/>
+            </a:pPr>
+            <a:r>
+              <a:rPr lang="en-US" sz="1150" dirty="0">
                 <a:solidFill>
                   <a:schemeClr val="tx1"/>
                 </a:solidFill>
               </a:rPr>
-              <a:t>Claude 추가 점검과 병행, 판정 규칙 보강</a:t>
-            </a:r>
-            <a:endParaRPr lang="en-US" sz="1200" dirty="0"/>
-          </a:p>
-        </p:txBody>
-      </p:sp>
-      <p:sp>
-        <p:nvSpPr>
-          <p:cNvPr id="25" name="lim-4"/>
-          <p:cNvSpPr/>
-          <p:nvPr/>
-        </p:nvSpPr>
-        <p:spPr>
-          <a:xfrm>
-            <a:off x="548640" y="4636008"/>
-            <a:ext cx="5120640" cy="603504"/>
-          </a:xfrm>
-          <a:prstGeom prst="roundRect">
-            <a:avLst>
-              <a:gd name="adj" fmla="val 12121"/>
-            </a:avLst>
-          </a:prstGeom>
-          <a:solidFill>
-            <a:schemeClr val="bg2"/>
-          </a:solidFill>
-          <a:ln w="12700">
-            <a:solidFill>
-              <a:schemeClr val="bg2"/>
-            </a:solidFill>
-            <a:prstDash val="solid"/>
-          </a:ln>
-        </p:spPr>
-      </p:sp>
-      <p:sp>
-        <p:nvSpPr>
-          <p:cNvPr id="26" name="lim-t-4"/>
-          <p:cNvSpPr txBox="1"/>
-          <p:nvPr/>
-        </p:nvSpPr>
-        <p:spPr>
-          <a:xfrm>
-            <a:off x="731520" y="4636008"/>
-            <a:ext cx="4754880" cy="603504"/>
-          </a:xfrm>
-          <a:prstGeom prst="rect">
-            <a:avLst/>
-          </a:prstGeom>
-          <a:noFill/>
-          <a:ln/>
-        </p:spPr>
-        <p:txBody>
-          <a:bodyPr wrap="square" lIns="0" tIns="0" rIns="0" bIns="0" rtlCol="0" anchor="ctr"/>
-          <a:lstStyle/>
-          <a:p>
-            <a:pPr indent="0" marL="0">
-              <a:buNone/>
-            </a:pPr>
-            <a:r>
-              <a:rPr lang="en-US" sz="1200" dirty="0">
+              <a:t>설정 화면에서 모델별 단가·호출별 추정 비용 확인. sonnet-5-5도 25/25였으나 지연·출력 토큰이 커서 기본은 sonnet-4-6</a:t>
+            </a:r>
+            <a:endParaRPr lang="en-US" sz="1150" dirty="0"/>
+          </a:p>
+          <a:p>
+            <a:pPr marL="342900" indent="-342900">
+              <a:spcAft>
+                <a:spcPts val="800"/>
+              </a:spcAft>
+              <a:buSzPct val="100000"/>
+              <a:buChar char="•"/>
+            </a:pPr>
+            <a:r>
+              <a:rPr lang="en-US" sz="1150" dirty="0">
                 <a:solidFill>
                   <a:schemeClr val="tx1"/>
                 </a:solidFill>
               </a:rPr>
-              <a:t>샘플 데이터·지표 사전 7개</a:t>
-            </a:r>
-            <a:endParaRPr lang="en-US" sz="1200" dirty="0"/>
-          </a:p>
-        </p:txBody>
-      </p:sp>
-      <p:sp>
-        <p:nvSpPr>
-          <p:cNvPr id="27" name="lim-arrow-4"/>
-          <p:cNvSpPr/>
-          <p:nvPr/>
-        </p:nvSpPr>
-        <p:spPr>
-          <a:xfrm>
-            <a:off x="5760720" y="4828032"/>
-            <a:ext cx="274320" cy="219456"/>
-          </a:xfrm>
-          <a:prstGeom prst="rightArrow">
-            <a:avLst/>
-          </a:prstGeom>
-          <a:solidFill>
-            <a:schemeClr val="accent5"/>
-          </a:solidFill>
-          <a:ln w="12700">
-            <a:solidFill>
-              <a:schemeClr val="accent5"/>
-            </a:solidFill>
-            <a:prstDash val="solid"/>
-          </a:ln>
-        </p:spPr>
-      </p:sp>
-      <p:sp>
-        <p:nvSpPr>
-          <p:cNvPr id="28" name="plan-4"/>
-          <p:cNvSpPr/>
-          <p:nvPr/>
-        </p:nvSpPr>
-        <p:spPr>
-          <a:xfrm>
-            <a:off x="6126480" y="4636008"/>
-            <a:ext cx="5486400" cy="603504"/>
-          </a:xfrm>
-          <a:prstGeom prst="roundRect">
-            <a:avLst>
-              <a:gd name="adj" fmla="val 12121"/>
-            </a:avLst>
-          </a:prstGeom>
-          <a:solidFill>
-            <a:schemeClr val="bg2"/>
-          </a:solidFill>
-          <a:ln w="12700">
-            <a:solidFill>
-              <a:schemeClr val="bg2"/>
-            </a:solidFill>
-            <a:prstDash val="solid"/>
-          </a:ln>
-        </p:spPr>
-      </p:sp>
-      <p:sp>
-        <p:nvSpPr>
-          <p:cNvPr id="29" name="plan-t-4"/>
-          <p:cNvSpPr txBox="1"/>
-          <p:nvPr/>
-        </p:nvSpPr>
-        <p:spPr>
-          <a:xfrm>
-            <a:off x="6309360" y="4636008"/>
-            <a:ext cx="5120640" cy="603504"/>
-          </a:xfrm>
-          <a:prstGeom prst="rect">
-            <a:avLst/>
-          </a:prstGeom>
-          <a:noFill/>
-          <a:ln/>
-        </p:spPr>
-        <p:txBody>
-          <a:bodyPr wrap="square" lIns="0" tIns="0" rIns="0" bIns="0" rtlCol="0" anchor="ctr"/>
-          <a:lstStyle/>
-          <a:p>
-            <a:pPr indent="0" marL="0">
-              <a:buNone/>
-            </a:pPr>
-            <a:r>
-              <a:rPr lang="en-US" sz="1200" dirty="0">
-                <a:solidFill>
-                  <a:schemeClr val="tx1"/>
-                </a:solidFill>
-              </a:rPr>
-              <a:t>실데이터 컬럼 맞춤, 지표 사전·데이터 카탈로그 확장</a:t>
-            </a:r>
-            <a:endParaRPr lang="en-US" sz="1200" dirty="0"/>
-          </a:p>
-        </p:txBody>
-      </p:sp>
-      <p:sp>
-        <p:nvSpPr>
-          <p:cNvPr id="30" name="lim-5"/>
-          <p:cNvSpPr/>
-          <p:nvPr/>
-        </p:nvSpPr>
-        <p:spPr>
-          <a:xfrm>
-            <a:off x="548640" y="5349240"/>
-            <a:ext cx="5120640" cy="603504"/>
-          </a:xfrm>
-          <a:prstGeom prst="roundRect">
-            <a:avLst>
-              <a:gd name="adj" fmla="val 12121"/>
-            </a:avLst>
-          </a:prstGeom>
-          <a:solidFill>
-            <a:schemeClr val="bg2"/>
-          </a:solidFill>
-          <a:ln w="12700">
-            <a:solidFill>
-              <a:schemeClr val="bg2"/>
-            </a:solidFill>
-            <a:prstDash val="solid"/>
-          </a:ln>
-        </p:spPr>
-      </p:sp>
-      <p:sp>
-        <p:nvSpPr>
-          <p:cNvPr id="31" name="lim-t-5"/>
-          <p:cNvSpPr txBox="1"/>
-          <p:nvPr/>
-        </p:nvSpPr>
-        <p:spPr>
-          <a:xfrm>
-            <a:off x="731520" y="5349240"/>
-            <a:ext cx="4754880" cy="603504"/>
-          </a:xfrm>
-          <a:prstGeom prst="rect">
-            <a:avLst/>
-          </a:prstGeom>
-          <a:noFill/>
-          <a:ln/>
-        </p:spPr>
-        <p:txBody>
-          <a:bodyPr wrap="square" lIns="0" tIns="0" rIns="0" bIns="0" rtlCol="0" anchor="ctr"/>
-          <a:lstStyle/>
-          <a:p>
-            <a:pPr indent="0" marL="0">
-              <a:buNone/>
-            </a:pPr>
-            <a:r>
-              <a:rPr lang="en-US" sz="1200" dirty="0">
-                <a:solidFill>
-                  <a:schemeClr val="tx1"/>
-                </a:solidFill>
-              </a:rPr>
-              <a:t>서버 모드에 접속자 인증 없음</a:t>
-            </a:r>
-            <a:endParaRPr lang="en-US" sz="1200" dirty="0"/>
-          </a:p>
-        </p:txBody>
-      </p:sp>
-      <p:sp>
-        <p:nvSpPr>
-          <p:cNvPr id="32" name="lim-arrow-5"/>
-          <p:cNvSpPr/>
-          <p:nvPr/>
-        </p:nvSpPr>
-        <p:spPr>
-          <a:xfrm>
-            <a:off x="5760720" y="5541264"/>
-            <a:ext cx="274320" cy="219456"/>
-          </a:xfrm>
-          <a:prstGeom prst="rightArrow">
-            <a:avLst/>
-          </a:prstGeom>
-          <a:solidFill>
-            <a:schemeClr val="accent5"/>
-          </a:solidFill>
-          <a:ln w="12700">
-            <a:solidFill>
-              <a:schemeClr val="accent5"/>
-            </a:solidFill>
-            <a:prstDash val="solid"/>
-          </a:ln>
-        </p:spPr>
-      </p:sp>
-      <p:sp>
-        <p:nvSpPr>
-          <p:cNvPr id="33" name="plan-5"/>
-          <p:cNvSpPr/>
-          <p:nvPr/>
-        </p:nvSpPr>
-        <p:spPr>
-          <a:xfrm>
-            <a:off x="6126480" y="5349240"/>
-            <a:ext cx="5486400" cy="603504"/>
-          </a:xfrm>
-          <a:prstGeom prst="roundRect">
-            <a:avLst>
-              <a:gd name="adj" fmla="val 12121"/>
-            </a:avLst>
-          </a:prstGeom>
-          <a:solidFill>
-            <a:schemeClr val="bg2"/>
-          </a:solidFill>
-          <a:ln w="12700">
-            <a:solidFill>
-              <a:schemeClr val="bg2"/>
-            </a:solidFill>
-            <a:prstDash val="solid"/>
-          </a:ln>
-        </p:spPr>
-      </p:sp>
-      <p:sp>
-        <p:nvSpPr>
-          <p:cNvPr id="34" name="plan-t-5"/>
-          <p:cNvSpPr txBox="1"/>
-          <p:nvPr/>
-        </p:nvSpPr>
-        <p:spPr>
-          <a:xfrm>
-            <a:off x="6309360" y="5349240"/>
-            <a:ext cx="5120640" cy="603504"/>
-          </a:xfrm>
-          <a:prstGeom prst="rect">
-            <a:avLst/>
-          </a:prstGeom>
-          <a:noFill/>
-          <a:ln/>
-        </p:spPr>
-        <p:txBody>
-          <a:bodyPr wrap="square" lIns="0" tIns="0" rIns="0" bIns="0" rtlCol="0" anchor="ctr"/>
-          <a:lstStyle/>
-          <a:p>
-            <a:pPr indent="0" marL="0">
-              <a:buNone/>
-            </a:pPr>
-            <a:r>
-              <a:rPr lang="en-US" sz="1200" dirty="0">
-                <a:solidFill>
-                  <a:schemeClr val="tx1"/>
-                </a:solidFill>
-              </a:rPr>
-              <a:t>사내망 안에서만 운영. 필요 시 사내 SSO·역방향 프록시 인증 앞단 검토</a:t>
-            </a:r>
-            <a:endParaRPr lang="en-US" sz="1200" dirty="0"/>
+              <a:t>실제 청구액·월 호출량은 [확인 필요] — 콘솔 Usage 기준으로 확정</a:t>
+            </a:r>
+            <a:endParaRPr lang="en-US" sz="1150" dirty="0"/>
           </a:p>
         </p:txBody>
       </p:sp>
@@ -12353,6 +12345,1092 @@
         </p:nvSpPr>
         <p:spPr>
           <a:xfrm>
+            <a:off x="548640" y="365760"/>
+            <a:ext cx="11064240" cy="731520"/>
+          </a:xfrm>
+          <a:prstGeom prst="rect">
+            <a:avLst/>
+          </a:prstGeom>
+          <a:noFill/>
+          <a:ln/>
+        </p:spPr>
+        <p:txBody>
+          <a:bodyPr wrap="square" lIns="0" tIns="0" rIns="0" bIns="0" rtlCol="0"/>
+          <a:lstStyle/>
+          <a:p>
+            <a:pPr algn="l" indent="0" marL="0">
+              <a:buNone/>
+            </a:pPr>
+            <a:r>
+              <a:rPr lang="en-US" sz="2800" b="1" dirty="0">
+                <a:solidFill>
+                  <a:schemeClr val="tx1"/>
+                </a:solidFill>
+              </a:rPr>
+              <a:t>한계와 다음 단계</a:t>
+            </a:r>
+            <a:endParaRPr lang="en-US" sz="2800" dirty="0"/>
+          </a:p>
+        </p:txBody>
+      </p:sp>
+      <p:sp>
+        <p:nvSpPr>
+          <p:cNvPr id="3" name="lim-h"/>
+          <p:cNvSpPr txBox="1"/>
+          <p:nvPr/>
+        </p:nvSpPr>
+        <p:spPr>
+          <a:xfrm>
+            <a:off x="548640" y="1325880"/>
+            <a:ext cx="5120640" cy="365760"/>
+          </a:xfrm>
+          <a:prstGeom prst="rect">
+            <a:avLst/>
+          </a:prstGeom>
+          <a:noFill/>
+          <a:ln/>
+        </p:spPr>
+        <p:txBody>
+          <a:bodyPr wrap="square" lIns="0" tIns="0" rIns="0" bIns="0" rtlCol="0" anchor="ctr"/>
+          <a:lstStyle/>
+          <a:p>
+            <a:pPr indent="0" marL="0">
+              <a:buNone/>
+            </a:pPr>
+            <a:r>
+              <a:rPr lang="en-US" sz="1400" b="1" dirty="0">
+                <a:solidFill>
+                  <a:schemeClr val="accent4"/>
+                </a:solidFill>
+              </a:rPr>
+              <a:t>한계</a:t>
+            </a:r>
+            <a:endParaRPr lang="en-US" sz="1400" dirty="0"/>
+          </a:p>
+        </p:txBody>
+      </p:sp>
+      <p:sp>
+        <p:nvSpPr>
+          <p:cNvPr id="4" name="plan-h"/>
+          <p:cNvSpPr txBox="1"/>
+          <p:nvPr/>
+        </p:nvSpPr>
+        <p:spPr>
+          <a:xfrm>
+            <a:off x="6126480" y="1325880"/>
+            <a:ext cx="5486400" cy="365760"/>
+          </a:xfrm>
+          <a:prstGeom prst="rect">
+            <a:avLst/>
+          </a:prstGeom>
+          <a:noFill/>
+          <a:ln/>
+        </p:spPr>
+        <p:txBody>
+          <a:bodyPr wrap="square" lIns="0" tIns="0" rIns="0" bIns="0" rtlCol="0" anchor="ctr"/>
+          <a:lstStyle/>
+          <a:p>
+            <a:pPr indent="0" marL="0">
+              <a:buNone/>
+            </a:pPr>
+            <a:r>
+              <a:rPr lang="en-US" sz="1400" b="1" dirty="0">
+                <a:solidFill>
+                  <a:schemeClr val="accent3"/>
+                </a:solidFill>
+              </a:rPr>
+              <a:t>다음 단계</a:t>
+            </a:r>
+            <a:endParaRPr lang="en-US" sz="1400" dirty="0"/>
+          </a:p>
+        </p:txBody>
+      </p:sp>
+      <p:sp>
+        <p:nvSpPr>
+          <p:cNvPr id="5" name="lim-0"/>
+          <p:cNvSpPr/>
+          <p:nvPr/>
+        </p:nvSpPr>
+        <p:spPr>
+          <a:xfrm>
+            <a:off x="548640" y="1783080"/>
+            <a:ext cx="5120640" cy="603504"/>
+          </a:xfrm>
+          <a:prstGeom prst="roundRect">
+            <a:avLst>
+              <a:gd name="adj" fmla="val 12121"/>
+            </a:avLst>
+          </a:prstGeom>
+          <a:solidFill>
+            <a:schemeClr val="bg2"/>
+          </a:solidFill>
+          <a:ln w="12700">
+            <a:solidFill>
+              <a:schemeClr val="bg2"/>
+            </a:solidFill>
+            <a:prstDash val="solid"/>
+          </a:ln>
+        </p:spPr>
+      </p:sp>
+      <p:sp>
+        <p:nvSpPr>
+          <p:cNvPr id="6" name="lim-t-0"/>
+          <p:cNvSpPr txBox="1"/>
+          <p:nvPr/>
+        </p:nvSpPr>
+        <p:spPr>
+          <a:xfrm>
+            <a:off x="731520" y="1783080"/>
+            <a:ext cx="4754880" cy="603504"/>
+          </a:xfrm>
+          <a:prstGeom prst="rect">
+            <a:avLst/>
+          </a:prstGeom>
+          <a:noFill/>
+          <a:ln/>
+        </p:spPr>
+        <p:txBody>
+          <a:bodyPr wrap="square" lIns="0" tIns="0" rIns="0" bIns="0" rtlCol="0" anchor="ctr"/>
+          <a:lstStyle/>
+          <a:p>
+            <a:pPr indent="0" marL="0">
+              <a:buNone/>
+            </a:pPr>
+            <a:r>
+              <a:rPr lang="en-US" sz="1200" dirty="0">
+                <a:solidFill>
+                  <a:schemeClr val="tx1"/>
+                </a:solidFill>
+              </a:rPr>
+              <a:t>규칙 경로는 정형 서식에 의존</a:t>
+            </a:r>
+            <a:endParaRPr lang="en-US" sz="1200" dirty="0"/>
+          </a:p>
+        </p:txBody>
+      </p:sp>
+      <p:sp>
+        <p:nvSpPr>
+          <p:cNvPr id="7" name="lim-arrow-0"/>
+          <p:cNvSpPr/>
+          <p:nvPr/>
+        </p:nvSpPr>
+        <p:spPr>
+          <a:xfrm>
+            <a:off x="5760720" y="1975104"/>
+            <a:ext cx="274320" cy="219456"/>
+          </a:xfrm>
+          <a:prstGeom prst="rightArrow">
+            <a:avLst/>
+          </a:prstGeom>
+          <a:solidFill>
+            <a:schemeClr val="accent5"/>
+          </a:solidFill>
+          <a:ln w="12700">
+            <a:solidFill>
+              <a:schemeClr val="accent5"/>
+            </a:solidFill>
+            <a:prstDash val="solid"/>
+          </a:ln>
+        </p:spPr>
+      </p:sp>
+      <p:sp>
+        <p:nvSpPr>
+          <p:cNvPr id="8" name="plan-0"/>
+          <p:cNvSpPr/>
+          <p:nvPr/>
+        </p:nvSpPr>
+        <p:spPr>
+          <a:xfrm>
+            <a:off x="6126480" y="1783080"/>
+            <a:ext cx="5486400" cy="603504"/>
+          </a:xfrm>
+          <a:prstGeom prst="roundRect">
+            <a:avLst>
+              <a:gd name="adj" fmla="val 12121"/>
+            </a:avLst>
+          </a:prstGeom>
+          <a:solidFill>
+            <a:schemeClr val="bg2"/>
+          </a:solidFill>
+          <a:ln w="12700">
+            <a:solidFill>
+              <a:schemeClr val="bg2"/>
+            </a:solidFill>
+            <a:prstDash val="solid"/>
+          </a:ln>
+        </p:spPr>
+      </p:sp>
+      <p:sp>
+        <p:nvSpPr>
+          <p:cNvPr id="9" name="plan-t-0"/>
+          <p:cNvSpPr txBox="1"/>
+          <p:nvPr/>
+        </p:nvSpPr>
+        <p:spPr>
+          <a:xfrm>
+            <a:off x="6309360" y="1783080"/>
+            <a:ext cx="5120640" cy="603504"/>
+          </a:xfrm>
+          <a:prstGeom prst="rect">
+            <a:avLst/>
+          </a:prstGeom>
+          <a:noFill/>
+          <a:ln/>
+        </p:spPr>
+        <p:txBody>
+          <a:bodyPr wrap="square" lIns="0" tIns="0" rIns="0" bIns="0" rtlCol="0" anchor="ctr"/>
+          <a:lstStyle/>
+          <a:p>
+            <a:pPr indent="0" marL="0">
+              <a:buNone/>
+            </a:pPr>
+            <a:r>
+              <a:rPr lang="en-US" sz="1200" dirty="0">
+                <a:solidFill>
+                  <a:schemeClr val="tx1"/>
+                </a:solidFill>
+              </a:rPr>
+              <a:t>실제 운영은 Claude 경로. 실제 요구서를 점검 사례에 추가해 재채점</a:t>
+            </a:r>
+            <a:endParaRPr lang="en-US" sz="1200" dirty="0"/>
+          </a:p>
+        </p:txBody>
+      </p:sp>
+      <p:sp>
+        <p:nvSpPr>
+          <p:cNvPr id="10" name="lim-1"/>
+          <p:cNvSpPr/>
+          <p:nvPr/>
+        </p:nvSpPr>
+        <p:spPr>
+          <a:xfrm>
+            <a:off x="548640" y="2496312"/>
+            <a:ext cx="5120640" cy="603504"/>
+          </a:xfrm>
+          <a:prstGeom prst="roundRect">
+            <a:avLst>
+              <a:gd name="adj" fmla="val 12121"/>
+            </a:avLst>
+          </a:prstGeom>
+          <a:solidFill>
+            <a:schemeClr val="bg2"/>
+          </a:solidFill>
+          <a:ln w="12700">
+            <a:solidFill>
+              <a:schemeClr val="bg2"/>
+            </a:solidFill>
+            <a:prstDash val="solid"/>
+          </a:ln>
+        </p:spPr>
+      </p:sp>
+      <p:sp>
+        <p:nvSpPr>
+          <p:cNvPr id="11" name="lim-t-1"/>
+          <p:cNvSpPr txBox="1"/>
+          <p:nvPr/>
+        </p:nvSpPr>
+        <p:spPr>
+          <a:xfrm>
+            <a:off x="731520" y="2496312"/>
+            <a:ext cx="4754880" cy="603504"/>
+          </a:xfrm>
+          <a:prstGeom prst="rect">
+            <a:avLst/>
+          </a:prstGeom>
+          <a:noFill/>
+          <a:ln/>
+        </p:spPr>
+        <p:txBody>
+          <a:bodyPr wrap="square" lIns="0" tIns="0" rIns="0" bIns="0" rtlCol="0" anchor="ctr"/>
+          <a:lstStyle/>
+          <a:p>
+            <a:pPr indent="0" marL="0">
+              <a:buNone/>
+            </a:pPr>
+            <a:r>
+              <a:rPr lang="en-US" sz="1200" dirty="0">
+                <a:solidFill>
+                  <a:schemeClr val="tx1"/>
+                </a:solidFill>
+              </a:rPr>
+              <a:t>유사 검색은 문자 n-gram(임베딩 아님)</a:t>
+            </a:r>
+            <a:endParaRPr lang="en-US" sz="1200" dirty="0"/>
+          </a:p>
+        </p:txBody>
+      </p:sp>
+      <p:sp>
+        <p:nvSpPr>
+          <p:cNvPr id="12" name="lim-arrow-1"/>
+          <p:cNvSpPr/>
+          <p:nvPr/>
+        </p:nvSpPr>
+        <p:spPr>
+          <a:xfrm>
+            <a:off x="5760720" y="2688336"/>
+            <a:ext cx="274320" cy="219456"/>
+          </a:xfrm>
+          <a:prstGeom prst="rightArrow">
+            <a:avLst/>
+          </a:prstGeom>
+          <a:solidFill>
+            <a:schemeClr val="accent5"/>
+          </a:solidFill>
+          <a:ln w="12700">
+            <a:solidFill>
+              <a:schemeClr val="accent5"/>
+            </a:solidFill>
+            <a:prstDash val="solid"/>
+          </a:ln>
+        </p:spPr>
+      </p:sp>
+      <p:sp>
+        <p:nvSpPr>
+          <p:cNvPr id="13" name="plan-1"/>
+          <p:cNvSpPr/>
+          <p:nvPr/>
+        </p:nvSpPr>
+        <p:spPr>
+          <a:xfrm>
+            <a:off x="6126480" y="2496312"/>
+            <a:ext cx="5486400" cy="603504"/>
+          </a:xfrm>
+          <a:prstGeom prst="roundRect">
+            <a:avLst>
+              <a:gd name="adj" fmla="val 12121"/>
+            </a:avLst>
+          </a:prstGeom>
+          <a:solidFill>
+            <a:schemeClr val="bg2"/>
+          </a:solidFill>
+          <a:ln w="12700">
+            <a:solidFill>
+              <a:schemeClr val="bg2"/>
+            </a:solidFill>
+            <a:prstDash val="solid"/>
+          </a:ln>
+        </p:spPr>
+      </p:sp>
+      <p:sp>
+        <p:nvSpPr>
+          <p:cNvPr id="14" name="plan-t-1"/>
+          <p:cNvSpPr txBox="1"/>
+          <p:nvPr/>
+        </p:nvSpPr>
+        <p:spPr>
+          <a:xfrm>
+            <a:off x="6309360" y="2496312"/>
+            <a:ext cx="5120640" cy="603504"/>
+          </a:xfrm>
+          <a:prstGeom prst="rect">
+            <a:avLst/>
+          </a:prstGeom>
+          <a:noFill/>
+          <a:ln/>
+        </p:spPr>
+        <p:txBody>
+          <a:bodyPr wrap="square" lIns="0" tIns="0" rIns="0" bIns="0" rtlCol="0" anchor="ctr"/>
+          <a:lstStyle/>
+          <a:p>
+            <a:pPr indent="0" marL="0">
+              <a:buNone/>
+            </a:pPr>
+            <a:r>
+              <a:rPr lang="en-US" sz="1200" dirty="0">
+                <a:solidFill>
+                  <a:schemeClr val="tx1"/>
+                </a:solidFill>
+              </a:rPr>
+              <a:t>이력이 쌓이면 사내 임베딩 또는 API 임베딩 검토</a:t>
+            </a:r>
+            <a:endParaRPr lang="en-US" sz="1200" dirty="0"/>
+          </a:p>
+        </p:txBody>
+      </p:sp>
+      <p:sp>
+        <p:nvSpPr>
+          <p:cNvPr id="15" name="lim-2"/>
+          <p:cNvSpPr/>
+          <p:nvPr/>
+        </p:nvSpPr>
+        <p:spPr>
+          <a:xfrm>
+            <a:off x="548640" y="3209544"/>
+            <a:ext cx="5120640" cy="603504"/>
+          </a:xfrm>
+          <a:prstGeom prst="roundRect">
+            <a:avLst>
+              <a:gd name="adj" fmla="val 12121"/>
+            </a:avLst>
+          </a:prstGeom>
+          <a:solidFill>
+            <a:schemeClr val="bg2"/>
+          </a:solidFill>
+          <a:ln w="12700">
+            <a:solidFill>
+              <a:schemeClr val="bg2"/>
+            </a:solidFill>
+            <a:prstDash val="solid"/>
+          </a:ln>
+        </p:spPr>
+      </p:sp>
+      <p:sp>
+        <p:nvSpPr>
+          <p:cNvPr id="16" name="lim-t-2"/>
+          <p:cNvSpPr txBox="1"/>
+          <p:nvPr/>
+        </p:nvSpPr>
+        <p:spPr>
+          <a:xfrm>
+            <a:off x="731520" y="3209544"/>
+            <a:ext cx="4754880" cy="603504"/>
+          </a:xfrm>
+          <a:prstGeom prst="rect">
+            <a:avLst/>
+          </a:prstGeom>
+          <a:noFill/>
+          <a:ln/>
+        </p:spPr>
+        <p:txBody>
+          <a:bodyPr wrap="square" lIns="0" tIns="0" rIns="0" bIns="0" rtlCol="0" anchor="ctr"/>
+          <a:lstStyle/>
+          <a:p>
+            <a:pPr indent="0" marL="0">
+              <a:buNone/>
+            </a:pPr>
+            <a:r>
+              <a:rPr lang="en-US" sz="1200" dirty="0">
+                <a:solidFill>
+                  <a:schemeClr val="tx1"/>
+                </a:solidFill>
+              </a:rPr>
+              <a:t>HWP(구형식) 미지원, 자리표시자는 한글에서 삽입</a:t>
+            </a:r>
+            <a:endParaRPr lang="en-US" sz="1200" dirty="0"/>
+          </a:p>
+        </p:txBody>
+      </p:sp>
+      <p:sp>
+        <p:nvSpPr>
+          <p:cNvPr id="17" name="lim-arrow-2"/>
+          <p:cNvSpPr/>
+          <p:nvPr/>
+        </p:nvSpPr>
+        <p:spPr>
+          <a:xfrm>
+            <a:off x="5760720" y="3401568"/>
+            <a:ext cx="274320" cy="219456"/>
+          </a:xfrm>
+          <a:prstGeom prst="rightArrow">
+            <a:avLst/>
+          </a:prstGeom>
+          <a:solidFill>
+            <a:schemeClr val="accent5"/>
+          </a:solidFill>
+          <a:ln w="12700">
+            <a:solidFill>
+              <a:schemeClr val="accent5"/>
+            </a:solidFill>
+            <a:prstDash val="solid"/>
+          </a:ln>
+        </p:spPr>
+      </p:sp>
+      <p:sp>
+        <p:nvSpPr>
+          <p:cNvPr id="18" name="plan-2"/>
+          <p:cNvSpPr/>
+          <p:nvPr/>
+        </p:nvSpPr>
+        <p:spPr>
+          <a:xfrm>
+            <a:off x="6126480" y="3209544"/>
+            <a:ext cx="5486400" cy="603504"/>
+          </a:xfrm>
+          <a:prstGeom prst="roundRect">
+            <a:avLst>
+              <a:gd name="adj" fmla="val 12121"/>
+            </a:avLst>
+          </a:prstGeom>
+          <a:solidFill>
+            <a:schemeClr val="bg2"/>
+          </a:solidFill>
+          <a:ln w="12700">
+            <a:solidFill>
+              <a:schemeClr val="bg2"/>
+            </a:solidFill>
+            <a:prstDash val="solid"/>
+          </a:ln>
+        </p:spPr>
+      </p:sp>
+      <p:sp>
+        <p:nvSpPr>
+          <p:cNvPr id="19" name="plan-t-2"/>
+          <p:cNvSpPr txBox="1"/>
+          <p:nvPr/>
+        </p:nvSpPr>
+        <p:spPr>
+          <a:xfrm>
+            <a:off x="6309360" y="3209544"/>
+            <a:ext cx="5120640" cy="603504"/>
+          </a:xfrm>
+          <a:prstGeom prst="rect">
+            <a:avLst/>
+          </a:prstGeom>
+          <a:noFill/>
+          <a:ln/>
+        </p:spPr>
+        <p:txBody>
+          <a:bodyPr wrap="square" lIns="0" tIns="0" rIns="0" bIns="0" rtlCol="0" anchor="ctr"/>
+          <a:lstStyle/>
+          <a:p>
+            <a:pPr indent="0" marL="0">
+              <a:buNone/>
+            </a:pPr>
+            <a:r>
+              <a:rPr lang="en-US" sz="1200" dirty="0">
+                <a:solidFill>
+                  <a:schemeClr val="tx1"/>
+                </a:solidFill>
+              </a:rPr>
+              <a:t>부서 회신 서식 HWPX 1종 템플릿화(2주 내)</a:t>
+            </a:r>
+            <a:endParaRPr lang="en-US" sz="1200" dirty="0"/>
+          </a:p>
+        </p:txBody>
+      </p:sp>
+      <p:sp>
+        <p:nvSpPr>
+          <p:cNvPr id="20" name="lim-3"/>
+          <p:cNvSpPr/>
+          <p:nvPr/>
+        </p:nvSpPr>
+        <p:spPr>
+          <a:xfrm>
+            <a:off x="548640" y="3922776"/>
+            <a:ext cx="5120640" cy="603504"/>
+          </a:xfrm>
+          <a:prstGeom prst="roundRect">
+            <a:avLst>
+              <a:gd name="adj" fmla="val 12121"/>
+            </a:avLst>
+          </a:prstGeom>
+          <a:solidFill>
+            <a:schemeClr val="bg2"/>
+          </a:solidFill>
+          <a:ln w="12700">
+            <a:solidFill>
+              <a:schemeClr val="bg2"/>
+            </a:solidFill>
+            <a:prstDash val="solid"/>
+          </a:ln>
+        </p:spPr>
+      </p:sp>
+      <p:sp>
+        <p:nvSpPr>
+          <p:cNvPr id="21" name="lim-t-3"/>
+          <p:cNvSpPr txBox="1"/>
+          <p:nvPr/>
+        </p:nvSpPr>
+        <p:spPr>
+          <a:xfrm>
+            <a:off x="731520" y="3922776"/>
+            <a:ext cx="4754880" cy="603504"/>
+          </a:xfrm>
+          <a:prstGeom prst="rect">
+            <a:avLst/>
+          </a:prstGeom>
+          <a:noFill/>
+          <a:ln/>
+        </p:spPr>
+        <p:txBody>
+          <a:bodyPr wrap="square" lIns="0" tIns="0" rIns="0" bIns="0" rtlCol="0" anchor="ctr"/>
+          <a:lstStyle/>
+          <a:p>
+            <a:pPr indent="0" marL="0">
+              <a:buNone/>
+            </a:pPr>
+            <a:r>
+              <a:rPr lang="en-US" sz="1200" dirty="0">
+                <a:solidFill>
+                  <a:schemeClr val="tx1"/>
+                </a:solidFill>
+              </a:rPr>
+              <a:t>충족 검사(코드)는 지표명 언급 수준</a:t>
+            </a:r>
+            <a:endParaRPr lang="en-US" sz="1200" dirty="0"/>
+          </a:p>
+        </p:txBody>
+      </p:sp>
+      <p:sp>
+        <p:nvSpPr>
+          <p:cNvPr id="22" name="lim-arrow-3"/>
+          <p:cNvSpPr/>
+          <p:nvPr/>
+        </p:nvSpPr>
+        <p:spPr>
+          <a:xfrm>
+            <a:off x="5760720" y="4114800"/>
+            <a:ext cx="274320" cy="219456"/>
+          </a:xfrm>
+          <a:prstGeom prst="rightArrow">
+            <a:avLst/>
+          </a:prstGeom>
+          <a:solidFill>
+            <a:schemeClr val="accent5"/>
+          </a:solidFill>
+          <a:ln w="12700">
+            <a:solidFill>
+              <a:schemeClr val="accent5"/>
+            </a:solidFill>
+            <a:prstDash val="solid"/>
+          </a:ln>
+        </p:spPr>
+      </p:sp>
+      <p:sp>
+        <p:nvSpPr>
+          <p:cNvPr id="23" name="plan-3"/>
+          <p:cNvSpPr/>
+          <p:nvPr/>
+        </p:nvSpPr>
+        <p:spPr>
+          <a:xfrm>
+            <a:off x="6126480" y="3922776"/>
+            <a:ext cx="5486400" cy="603504"/>
+          </a:xfrm>
+          <a:prstGeom prst="roundRect">
+            <a:avLst>
+              <a:gd name="adj" fmla="val 12121"/>
+            </a:avLst>
+          </a:prstGeom>
+          <a:solidFill>
+            <a:schemeClr val="bg2"/>
+          </a:solidFill>
+          <a:ln w="12700">
+            <a:solidFill>
+              <a:schemeClr val="bg2"/>
+            </a:solidFill>
+            <a:prstDash val="solid"/>
+          </a:ln>
+        </p:spPr>
+      </p:sp>
+      <p:sp>
+        <p:nvSpPr>
+          <p:cNvPr id="24" name="plan-t-3"/>
+          <p:cNvSpPr txBox="1"/>
+          <p:nvPr/>
+        </p:nvSpPr>
+        <p:spPr>
+          <a:xfrm>
+            <a:off x="6309360" y="3922776"/>
+            <a:ext cx="5120640" cy="603504"/>
+          </a:xfrm>
+          <a:prstGeom prst="rect">
+            <a:avLst/>
+          </a:prstGeom>
+          <a:noFill/>
+          <a:ln/>
+        </p:spPr>
+        <p:txBody>
+          <a:bodyPr wrap="square" lIns="0" tIns="0" rIns="0" bIns="0" rtlCol="0" anchor="ctr"/>
+          <a:lstStyle/>
+          <a:p>
+            <a:pPr indent="0" marL="0">
+              <a:buNone/>
+            </a:pPr>
+            <a:r>
+              <a:rPr lang="en-US" sz="1200" dirty="0">
+                <a:solidFill>
+                  <a:schemeClr val="tx1"/>
+                </a:solidFill>
+              </a:rPr>
+              <a:t>Claude 추가 점검과 병행, 판정 규칙 보강</a:t>
+            </a:r>
+            <a:endParaRPr lang="en-US" sz="1200" dirty="0"/>
+          </a:p>
+        </p:txBody>
+      </p:sp>
+      <p:sp>
+        <p:nvSpPr>
+          <p:cNvPr id="25" name="lim-4"/>
+          <p:cNvSpPr/>
+          <p:nvPr/>
+        </p:nvSpPr>
+        <p:spPr>
+          <a:xfrm>
+            <a:off x="548640" y="4636008"/>
+            <a:ext cx="5120640" cy="603504"/>
+          </a:xfrm>
+          <a:prstGeom prst="roundRect">
+            <a:avLst>
+              <a:gd name="adj" fmla="val 12121"/>
+            </a:avLst>
+          </a:prstGeom>
+          <a:solidFill>
+            <a:schemeClr val="bg2"/>
+          </a:solidFill>
+          <a:ln w="12700">
+            <a:solidFill>
+              <a:schemeClr val="bg2"/>
+            </a:solidFill>
+            <a:prstDash val="solid"/>
+          </a:ln>
+        </p:spPr>
+      </p:sp>
+      <p:sp>
+        <p:nvSpPr>
+          <p:cNvPr id="26" name="lim-t-4"/>
+          <p:cNvSpPr txBox="1"/>
+          <p:nvPr/>
+        </p:nvSpPr>
+        <p:spPr>
+          <a:xfrm>
+            <a:off x="731520" y="4636008"/>
+            <a:ext cx="4754880" cy="603504"/>
+          </a:xfrm>
+          <a:prstGeom prst="rect">
+            <a:avLst/>
+          </a:prstGeom>
+          <a:noFill/>
+          <a:ln/>
+        </p:spPr>
+        <p:txBody>
+          <a:bodyPr wrap="square" lIns="0" tIns="0" rIns="0" bIns="0" rtlCol="0" anchor="ctr"/>
+          <a:lstStyle/>
+          <a:p>
+            <a:pPr indent="0" marL="0">
+              <a:buNone/>
+            </a:pPr>
+            <a:r>
+              <a:rPr lang="en-US" sz="1200" dirty="0">
+                <a:solidFill>
+                  <a:schemeClr val="tx1"/>
+                </a:solidFill>
+              </a:rPr>
+              <a:t>샘플 데이터·지표 사전 7개</a:t>
+            </a:r>
+            <a:endParaRPr lang="en-US" sz="1200" dirty="0"/>
+          </a:p>
+        </p:txBody>
+      </p:sp>
+      <p:sp>
+        <p:nvSpPr>
+          <p:cNvPr id="27" name="lim-arrow-4"/>
+          <p:cNvSpPr/>
+          <p:nvPr/>
+        </p:nvSpPr>
+        <p:spPr>
+          <a:xfrm>
+            <a:off x="5760720" y="4828032"/>
+            <a:ext cx="274320" cy="219456"/>
+          </a:xfrm>
+          <a:prstGeom prst="rightArrow">
+            <a:avLst/>
+          </a:prstGeom>
+          <a:solidFill>
+            <a:schemeClr val="accent5"/>
+          </a:solidFill>
+          <a:ln w="12700">
+            <a:solidFill>
+              <a:schemeClr val="accent5"/>
+            </a:solidFill>
+            <a:prstDash val="solid"/>
+          </a:ln>
+        </p:spPr>
+      </p:sp>
+      <p:sp>
+        <p:nvSpPr>
+          <p:cNvPr id="28" name="plan-4"/>
+          <p:cNvSpPr/>
+          <p:nvPr/>
+        </p:nvSpPr>
+        <p:spPr>
+          <a:xfrm>
+            <a:off x="6126480" y="4636008"/>
+            <a:ext cx="5486400" cy="603504"/>
+          </a:xfrm>
+          <a:prstGeom prst="roundRect">
+            <a:avLst>
+              <a:gd name="adj" fmla="val 12121"/>
+            </a:avLst>
+          </a:prstGeom>
+          <a:solidFill>
+            <a:schemeClr val="bg2"/>
+          </a:solidFill>
+          <a:ln w="12700">
+            <a:solidFill>
+              <a:schemeClr val="bg2"/>
+            </a:solidFill>
+            <a:prstDash val="solid"/>
+          </a:ln>
+        </p:spPr>
+      </p:sp>
+      <p:sp>
+        <p:nvSpPr>
+          <p:cNvPr id="29" name="plan-t-4"/>
+          <p:cNvSpPr txBox="1"/>
+          <p:nvPr/>
+        </p:nvSpPr>
+        <p:spPr>
+          <a:xfrm>
+            <a:off x="6309360" y="4636008"/>
+            <a:ext cx="5120640" cy="603504"/>
+          </a:xfrm>
+          <a:prstGeom prst="rect">
+            <a:avLst/>
+          </a:prstGeom>
+          <a:noFill/>
+          <a:ln/>
+        </p:spPr>
+        <p:txBody>
+          <a:bodyPr wrap="square" lIns="0" tIns="0" rIns="0" bIns="0" rtlCol="0" anchor="ctr"/>
+          <a:lstStyle/>
+          <a:p>
+            <a:pPr indent="0" marL="0">
+              <a:buNone/>
+            </a:pPr>
+            <a:r>
+              <a:rPr lang="en-US" sz="1200" dirty="0">
+                <a:solidFill>
+                  <a:schemeClr val="tx1"/>
+                </a:solidFill>
+              </a:rPr>
+              <a:t>실데이터 컬럼 맞춤, 지표 사전·데이터 카탈로그 확장</a:t>
+            </a:r>
+            <a:endParaRPr lang="en-US" sz="1200" dirty="0"/>
+          </a:p>
+        </p:txBody>
+      </p:sp>
+      <p:sp>
+        <p:nvSpPr>
+          <p:cNvPr id="30" name="lim-5"/>
+          <p:cNvSpPr/>
+          <p:nvPr/>
+        </p:nvSpPr>
+        <p:spPr>
+          <a:xfrm>
+            <a:off x="548640" y="5349240"/>
+            <a:ext cx="5120640" cy="603504"/>
+          </a:xfrm>
+          <a:prstGeom prst="roundRect">
+            <a:avLst>
+              <a:gd name="adj" fmla="val 12121"/>
+            </a:avLst>
+          </a:prstGeom>
+          <a:solidFill>
+            <a:schemeClr val="bg2"/>
+          </a:solidFill>
+          <a:ln w="12700">
+            <a:solidFill>
+              <a:schemeClr val="bg2"/>
+            </a:solidFill>
+            <a:prstDash val="solid"/>
+          </a:ln>
+        </p:spPr>
+      </p:sp>
+      <p:sp>
+        <p:nvSpPr>
+          <p:cNvPr id="31" name="lim-t-5"/>
+          <p:cNvSpPr txBox="1"/>
+          <p:nvPr/>
+        </p:nvSpPr>
+        <p:spPr>
+          <a:xfrm>
+            <a:off x="731520" y="5349240"/>
+            <a:ext cx="4754880" cy="603504"/>
+          </a:xfrm>
+          <a:prstGeom prst="rect">
+            <a:avLst/>
+          </a:prstGeom>
+          <a:noFill/>
+          <a:ln/>
+        </p:spPr>
+        <p:txBody>
+          <a:bodyPr wrap="square" lIns="0" tIns="0" rIns="0" bIns="0" rtlCol="0" anchor="ctr"/>
+          <a:lstStyle/>
+          <a:p>
+            <a:pPr indent="0" marL="0">
+              <a:buNone/>
+            </a:pPr>
+            <a:r>
+              <a:rPr lang="en-US" sz="1200" dirty="0">
+                <a:solidFill>
+                  <a:schemeClr val="tx1"/>
+                </a:solidFill>
+              </a:rPr>
+              <a:t>서버 모드에 접속자 인증 없음</a:t>
+            </a:r>
+            <a:endParaRPr lang="en-US" sz="1200" dirty="0"/>
+          </a:p>
+        </p:txBody>
+      </p:sp>
+      <p:sp>
+        <p:nvSpPr>
+          <p:cNvPr id="32" name="lim-arrow-5"/>
+          <p:cNvSpPr/>
+          <p:nvPr/>
+        </p:nvSpPr>
+        <p:spPr>
+          <a:xfrm>
+            <a:off x="5760720" y="5541264"/>
+            <a:ext cx="274320" cy="219456"/>
+          </a:xfrm>
+          <a:prstGeom prst="rightArrow">
+            <a:avLst/>
+          </a:prstGeom>
+          <a:solidFill>
+            <a:schemeClr val="accent5"/>
+          </a:solidFill>
+          <a:ln w="12700">
+            <a:solidFill>
+              <a:schemeClr val="accent5"/>
+            </a:solidFill>
+            <a:prstDash val="solid"/>
+          </a:ln>
+        </p:spPr>
+      </p:sp>
+      <p:sp>
+        <p:nvSpPr>
+          <p:cNvPr id="33" name="plan-5"/>
+          <p:cNvSpPr/>
+          <p:nvPr/>
+        </p:nvSpPr>
+        <p:spPr>
+          <a:xfrm>
+            <a:off x="6126480" y="5349240"/>
+            <a:ext cx="5486400" cy="603504"/>
+          </a:xfrm>
+          <a:prstGeom prst="roundRect">
+            <a:avLst>
+              <a:gd name="adj" fmla="val 12121"/>
+            </a:avLst>
+          </a:prstGeom>
+          <a:solidFill>
+            <a:schemeClr val="bg2"/>
+          </a:solidFill>
+          <a:ln w="12700">
+            <a:solidFill>
+              <a:schemeClr val="bg2"/>
+            </a:solidFill>
+            <a:prstDash val="solid"/>
+          </a:ln>
+        </p:spPr>
+      </p:sp>
+      <p:sp>
+        <p:nvSpPr>
+          <p:cNvPr id="34" name="plan-t-5"/>
+          <p:cNvSpPr txBox="1"/>
+          <p:nvPr/>
+        </p:nvSpPr>
+        <p:spPr>
+          <a:xfrm>
+            <a:off x="6309360" y="5349240"/>
+            <a:ext cx="5120640" cy="603504"/>
+          </a:xfrm>
+          <a:prstGeom prst="rect">
+            <a:avLst/>
+          </a:prstGeom>
+          <a:noFill/>
+          <a:ln/>
+        </p:spPr>
+        <p:txBody>
+          <a:bodyPr wrap="square" lIns="0" tIns="0" rIns="0" bIns="0" rtlCol="0" anchor="ctr"/>
+          <a:lstStyle/>
+          <a:p>
+            <a:pPr indent="0" marL="0">
+              <a:buNone/>
+            </a:pPr>
+            <a:r>
+              <a:rPr lang="en-US" sz="1200" dirty="0">
+                <a:solidFill>
+                  <a:schemeClr val="tx1"/>
+                </a:solidFill>
+              </a:rPr>
+              <a:t>사내망 안에서만 운영. 필요 시 사내 SSO·역방향 프록시 인증 앞단 검토</a:t>
+            </a:r>
+            <a:endParaRPr lang="en-US" sz="1200" dirty="0"/>
+          </a:p>
+        </p:txBody>
+      </p:sp>
+      <p:sp>
+        <p:nvSpPr>
+          <p:cNvPr id="25" name="Slide Number Placeholder 0"/>
+          <p:cNvSpPr>
+            <a:spLocks noGrp="1"/>
+          </p:cNvSpPr>
+          <p:nvPr>
+            <p:ph type="sldNum" sz="quarter" idx="4294967295"/>
+          </p:nvPr>
+        </p:nvSpPr>
+        <p:spPr>
+          <a:xfrm>
+            <a:off x="11247120" y="6400800"/>
+            <a:ext cx="548640" cy="274320"/>
+          </a:xfrm>
+          <a:prstGeom prst="rect">
+            <a:avLst/>
+          </a:prstGeom>
+          <a:extLst>
+            <a:ext uri="{C572A759-6A51-4108-AA02-DFA0A04FC94B}">
+              <ma14:wrappingTextBoxFlag xmlns:ma14="http://schemas.microsoft.com/office/mac/drawingml/2011/main" val="0"/>
+            </a:ext>
+          </a:extLst>
+        </p:spPr>
+        <p:txBody>
+          <a:bodyPr/>
+          <a:lstStyle>
+            <a:lvl1pPr>
+              <a:defRPr sz="900">
+                <a:solidFill>
+                  <a:srgbClr val="6B7A8F"/>
+                </a:solidFill>
+              </a:defRPr>
+            </a:lvl1pPr>
+          </a:lstStyle>
+          <a:p>
+            <a:pPr algn="l"/>
+            <a:fld id="{F7021451-1387-4CA6-816F-3879F97B5CBC}" type="slidenum">
+              <a:rPr b="0" lang="en-US"/>
+              <a:t>18</a:t>
+            </a:fld>
+            <a:endParaRPr lang="en-US"/>
+          </a:p>
+        </p:txBody>
+      </p:sp>
+    </p:spTree>
+  </p:cSld>
+  <p:clrMapOvr>
+    <a:masterClrMapping/>
+  </p:clrMapOvr>
+</p:sld>
+</file>
+
+<file path=ppt/slides/slide19.xml><?xml version="1.0" encoding="utf-8"?>
+<p:sld xmlns:a="http://schemas.openxmlformats.org/drawingml/2006/main" xmlns:r="http://schemas.openxmlformats.org/officeDocument/2006/relationships" xmlns:p="http://schemas.openxmlformats.org/presentationml/2006/main">
+  <p:cSld name="Slide 19">
+    <p:spTree>
+      <p:nvGrpSpPr>
+        <p:cNvPr id="1" name=""/>
+        <p:cNvGrpSpPr/>
+        <p:nvPr/>
+      </p:nvGrpSpPr>
+      <p:grpSpPr>
+        <a:xfrm>
+          <a:off x="0" y="0"/>
+          <a:ext cx="0" cy="0"/>
+          <a:chOff x="0" y="0"/>
+          <a:chExt cx="0" cy="0"/>
+        </a:xfrm>
+      </p:grpSpPr>
+      <p:sp>
+        <p:nvSpPr>
+          <p:cNvPr id="2" name="Text 0"/>
+          <p:cNvSpPr/>
+          <p:nvPr>
+            <p:ph idx="100" type="title" hasCustomPrompt="1"/>
+          </p:nvPr>
+        </p:nvSpPr>
+        <p:spPr>
+          <a:xfrm>
             <a:off x="731520" y="2103120"/>
             <a:ext cx="10698480" cy="1280160"/>
           </a:xfrm>
@@ -16775,7 +17853,7 @@
                   <a:schemeClr val="tx1"/>
                 </a:solidFill>
               </a:rPr>
-              <a:t>② 새 요구서 분석 — '7월에 의원실에 이 값으로 답했다'가 붙는다</a:t>
+              <a:t>① 과거 자료 등록 — 그때 낸 실적표·회신 공문의 표를 그대로 넣는다</a:t>
             </a:r>
             <a:endParaRPr lang="en-US" sz="2800" dirty="0"/>
           </a:p>
@@ -16783,18 +17861,18 @@
       </p:sp>
       <p:sp>
         <p:nvSpPr>
-          <p:cNvPr id="3" name="frame-02_새요구서분석.png"/>
+          <p:cNvPr id="3" name="frame-01b_열매핑.png"/>
           <p:cNvSpPr/>
           <p:nvPr/>
         </p:nvSpPr>
         <p:spPr>
           <a:xfrm>
             <a:off x="475488" y="1298448"/>
-            <a:ext cx="7095744" cy="4581144"/>
+            <a:ext cx="2432304" cy="4626864"/>
           </a:xfrm>
           <a:prstGeom prst="roundRect">
             <a:avLst>
-              <a:gd name="adj" fmla="val 1996"/>
+              <a:gd name="adj" fmla="val 3759"/>
             </a:avLst>
           </a:prstGeom>
           <a:solidFill>
@@ -16810,7 +17888,7 @@
       </p:sp>
       <p:pic>
         <p:nvPicPr>
-          <p:cNvPr id="4" name="shot-02_새요구서분석.png" descr="/tmp/claude-0/-home-user-ebsjajucenter/339b2177-8504-5831-abfe-1ed2cf264c84/scratchpad/deck/img/02_새요구서분석.png">    </p:cNvPr>
+          <p:cNvPr id="4" name="shot-01b_열매핑.png" descr="/tmp/claude-0/-home-user-ebsjajucenter/339b2177-8504-5831-abfe-1ed2cf264c84/scratchpad/deck/img/01b_열매핑.png">    </p:cNvPr>
           <p:cNvPicPr>
             <a:picLocks noChangeAspect="1"/>
           </p:cNvPicPr>
@@ -16824,7 +17902,7 @@
         <p:spPr>
           <a:xfrm>
             <a:off x="548640" y="1371600"/>
-            <a:ext cx="6949440" cy="4434840"/>
+            <a:ext cx="2286000" cy="4480560"/>
           </a:xfrm>
           <a:prstGeom prst="rect">
             <a:avLst/>
@@ -16833,14 +17911,14 @@
       </p:pic>
       <p:sp>
         <p:nvSpPr>
-          <p:cNvPr id="5" name="cap-02_새요구서분석.png"/>
+          <p:cNvPr id="5" name="cap-01b_열매핑.png"/>
           <p:cNvSpPr txBox="1"/>
           <p:nvPr/>
         </p:nvSpPr>
         <p:spPr>
           <a:xfrm>
-            <a:off x="548640" y="5916168"/>
-            <a:ext cx="6949440" cy="274320"/>
+            <a:off x="548640" y="5961888"/>
+            <a:ext cx="2286000" cy="274320"/>
           </a:xfrm>
           <a:prstGeom prst="rect">
             <a:avLst/>
@@ -16861,7 +17939,7 @@
                   <a:schemeClr val="accent5"/>
                 </a:solidFill>
               </a:rPr>
-              <a:t>화면 캡처(Claude 경로 · claude-sonnet-4-6, 2026-10-04)</a:t>
+              <a:t>가로 펼침 실적표 → 열 매핑 → 48건 변환</a:t>
             </a:r>
             <a:endParaRPr lang="en-US" sz="1000" dirty="0"/>
           </a:p>
@@ -16875,8 +17953,8 @@
         </p:nvSpPr>
         <p:spPr>
           <a:xfrm>
-            <a:off x="7863840" y="1371600"/>
-            <a:ext cx="3794760" cy="2651760"/>
+            <a:off x="3108960" y="1371600"/>
+            <a:ext cx="8503920" cy="2743200"/>
           </a:xfrm>
           <a:prstGeom prst="rect">
             <a:avLst/>
@@ -16901,7 +17979,7 @@
                   <a:schemeClr val="tx1"/>
                 </a:solidFill>
               </a:rPr>
-              <a:t>접수일·기한·제목·항목을 구조화하고 유사한 과거 요구서(#1, 유사도 0.81)를 찾음</a:t>
+              <a:t>실무 서식 그대로 읽음: 제목 행('… 2026. 6. 30. 기준'), 병합 머리글('개소'+'운영' → '개소 운영'), 행=센터·열=지표인 가로 펼침, 합계·주석 행</a:t>
             </a:r>
             <a:endParaRPr lang="en-US" sz="1250" dirty="0"/>
           </a:p>
@@ -16919,7 +17997,7 @@
                   <a:schemeClr val="tx1"/>
                 </a:solidFill>
               </a:rPr>
-              <a:t>'6/30 기준 등원율' 항목에 2026-07-08 제출 12건과 산출 근거(정의·집계기간·추출시점·원자료 v1)가 붙음</a:t>
+              <a:t>화면에서 센터 열·값 열·기준일(제목 날짜가 기본값)·값 열별 지표명(사전에 있으면 정규 지표명)을 확인해 변환. 값은 옮기기만 하고 계산하지 않음</a:t>
             </a:r>
             <a:endParaRPr lang="en-US" sz="1250" dirty="0"/>
           </a:p>
@@ -16937,7 +18015,7 @@
                   <a:schemeClr val="tx1"/>
                 </a:solidFill>
               </a:rPr>
-              <a:t>'등록 학생 수'는 같은 기준일 이력 없음 → 신규 산출·근거 기록 필요로 제안</a:t>
+              <a:t>그때 보낸 회신 공문(hwpx·docx·pdf)을 올리면 문서 안의 표를 찾아 같은 방식으로 읽고, 출처에 '회신 문서 표에서 추출'이 남음</a:t>
             </a:r>
             <a:endParaRPr lang="en-US" sz="1250" dirty="0"/>
           </a:p>
@@ -16955,7 +18033,7 @@
                   <a:schemeClr val="tx1"/>
                 </a:solidFill>
               </a:rPr>
-              <a:t>'최근 3년 운영 예산·집행률'은 지표 2개로 분리, 기준일 없음 → 확인 필요</a:t>
+              <a:t>표 파일이 없으면 직접 입력. 키가 있으면 Claude가 열 매핑을 제안하되 확정은 담당자</a:t>
             </a:r>
             <a:endParaRPr lang="en-US" sz="1250" dirty="0"/>
           </a:p>
@@ -16963,14 +18041,14 @@
       </p:sp>
       <p:sp>
         <p:nvSpPr>
-          <p:cNvPr id="7" name="tbl-title-항목별 데이터 제안 판단(코드)"/>
+          <p:cNvPr id="7" name="tbl-title-input"/>
           <p:cNvSpPr txBox="1"/>
           <p:nvPr/>
         </p:nvSpPr>
         <p:spPr>
           <a:xfrm>
-            <a:off x="7863840" y="4069080"/>
-            <a:ext cx="3794760" cy="274320"/>
+            <a:off x="3108960" y="4160520"/>
+            <a:ext cx="8503920" cy="274320"/>
           </a:xfrm>
           <a:prstGeom prst="rect">
             <a:avLst/>
@@ -16991,7 +18069,7 @@
                   <a:schemeClr val="tx2"/>
                 </a:solidFill>
               </a:rPr>
-              <a:t>항목별 데이터 제안 판단(코드)</a:t>
+              <a:t>제출값 입력 방식 3가지 (①·③ 공통)</a:t>
             </a:r>
             <a:endParaRPr lang="en-US" sz="1100" dirty="0"/>
           </a:p>
@@ -16999,7 +18077,7 @@
       </p:sp>
       <p:graphicFrame>
         <p:nvGraphicFramePr>
-          <p:cNvPr id="10" name="tbl-항목별 데이터 제안 판단(코드)"/>
+          <p:cNvPr id="10" name="tbl-input"/>
           <p:cNvGraphicFramePr>
             <a:graphicFrameLocks noGrp="1"/>
           </p:cNvGraphicFramePr>
@@ -17012,16 +18090,17 @@
           </p:nvPr>
         </p:nvGraphicFramePr>
         <p:xfrm>
-          <a:off x="7863840" y="4389120"/>
-          <a:ext cx="3794760" cy="914400"/>
+          <a:off x="3108960" y="4480560"/>
+          <a:ext cx="8503920" cy="914400"/>
         </p:xfrm>
         <a:graphic>
           <a:graphicData uri="http://schemas.openxmlformats.org/drawingml/2006/table">
             <a:tbl>
               <a:tblPr/>
               <a:tblGrid>
-                <a:gridCol w="1737360"/>
-                <a:gridCol w="2057400"/>
+                <a:gridCol w="1554480"/>
+                <a:gridCol w="4206240"/>
+                <a:gridCol w="2743200"/>
               </a:tblGrid>
               <a:tr h="0">
                 <a:tc>
@@ -17038,12 +18117,12 @@
                             <a:srgbClr val="FFFFFF"/>
                           </a:solidFill>
                         </a:rPr>
-                        <a:t>상황</a:t>
+                        <a:t>방식</a:t>
                       </a:r>
                       <a:endParaRPr lang="en-US" sz="950" dirty="0"/>
                     </a:p>
                   </a:txBody>
-                  <a:tcPr marL="36576" marR="36576" marT="36576" marB="36576" anchor="ctr">
+                  <a:tcPr marL="45720" marR="45720" marT="45720" marB="45720" anchor="ctr">
                     <a:lnL w="9525" cap="flat" cmpd="sng" algn="ctr">
                       <a:solidFill>
                         <a:srgbClr val="D5E6EA"/>
@@ -17099,12 +18178,73 @@
                             <a:srgbClr val="FFFFFF"/>
                           </a:solidFill>
                         </a:rPr>
-                        <a:t>제안</a:t>
+                        <a:t>받는 서식</a:t>
                       </a:r>
                       <a:endParaRPr lang="en-US" sz="950" dirty="0"/>
                     </a:p>
                   </a:txBody>
-                  <a:tcPr marL="36576" marR="36576" marT="36576" marB="36576" anchor="ctr">
+                  <a:tcPr marL="45720" marR="45720" marT="45720" marB="45720" anchor="ctr">
+                    <a:lnL w="9525" cap="flat" cmpd="sng" algn="ctr">
+                      <a:solidFill>
+                        <a:srgbClr val="D5E6EA"/>
+                      </a:solidFill>
+                      <a:prstDash val="solid"/>
+                      <a:round/>
+                      <a:headEnd type="none" w="med" len="med"/>
+                      <a:tailEnd type="none" w="med" len="med"/>
+                    </a:lnL>
+                    <a:lnR w="9525" cap="flat" cmpd="sng" algn="ctr">
+                      <a:solidFill>
+                        <a:srgbClr val="D5E6EA"/>
+                      </a:solidFill>
+                      <a:prstDash val="solid"/>
+                      <a:round/>
+                      <a:headEnd type="none" w="med" len="med"/>
+                      <a:tailEnd type="none" w="med" len="med"/>
+                    </a:lnR>
+                    <a:lnT w="9525" cap="flat" cmpd="sng" algn="ctr">
+                      <a:solidFill>
+                        <a:srgbClr val="D5E6EA"/>
+                      </a:solidFill>
+                      <a:prstDash val="solid"/>
+                      <a:round/>
+                      <a:headEnd type="none" w="med" len="med"/>
+                      <a:tailEnd type="none" w="med" len="med"/>
+                    </a:lnT>
+                    <a:lnB w="9525" cap="flat" cmpd="sng" algn="ctr">
+                      <a:solidFill>
+                        <a:srgbClr val="D5E6EA"/>
+                      </a:solidFill>
+                      <a:prstDash val="solid"/>
+                      <a:round/>
+                      <a:headEnd type="none" w="med" len="med"/>
+                      <a:tailEnd type="none" w="med" len="med"/>
+                    </a:lnB>
+                    <a:solidFill>
+                      <a:srgbClr val="0F5C6E"/>
+                    </a:solidFill>
+                  </a:tcPr>
+                </a:tc>
+                <a:tc>
+                  <a:txBody>
+                    <a:bodyPr/>
+                    <a:lstStyle/>
+                    <a:p>
+                      <a:pPr indent="0" marL="0">
+                        <a:buNone/>
+                      </a:pPr>
+                      <a:r>
+                        <a:rPr lang="en-US" sz="950" b="1" dirty="0">
+                          <a:solidFill>
+                            <a:srgbClr val="FFFFFF"/>
+                          </a:solidFill>
+                        </a:rPr>
+                        <a:t>비고</a:t>
+                      </a:r>
+                      <a:endParaRPr lang="en-US" sz="950" dirty="0"/>
+                    </a:p>
+                  </a:txBody>
+                  <a:tcPr marL="45720" marR="45720" marT="45720" marB="45720" anchor="ctr">
                     <a:lnL w="9525" cap="flat" cmpd="sng" algn="ctr">
                       <a:solidFill>
                         <a:srgbClr val="D5E6EA"/>
@@ -17162,12 +18302,12 @@
                             <a:srgbClr val="1B2A41"/>
                           </a:solidFill>
                         </a:rPr>
-                        <a:t>같은 지표·기준일 제출 이력 있음</a:t>
+                        <a:t>집계 엑셀/CSV</a:t>
                       </a:r>
                       <a:endParaRPr lang="en-US" sz="950" dirty="0"/>
                     </a:p>
                   </a:txBody>
-                  <a:tcPr marL="36576" marR="36576" marT="36576" marB="36576" anchor="ctr">
+                  <a:tcPr marL="45720" marR="45720" marT="45720" marB="45720" anchor="ctr">
                     <a:lnL w="9525" cap="flat" cmpd="sng" algn="ctr">
                       <a:solidFill>
                         <a:srgbClr val="D5E6EA"/>
@@ -17223,12 +18363,73 @@
                             <a:srgbClr val="1B2A41"/>
                           </a:solidFill>
                         </a:rPr>
-                        <a:t>새 집계값과 대조 후 재사용</a:t>
+                        <a:t>긴 형식(지표명·센터명·기준일·값) 또는 실적표 그대로(제목·병합 머리글·가로 펼침)</a:t>
                       </a:r>
                       <a:endParaRPr lang="en-US" sz="950" dirty="0"/>
                     </a:p>
                   </a:txBody>
-                  <a:tcPr marL="36576" marR="36576" marT="36576" marB="36576" anchor="ctr">
+                  <a:tcPr marL="45720" marR="45720" marT="45720" marB="45720" anchor="ctr">
+                    <a:lnL w="9525" cap="flat" cmpd="sng" algn="ctr">
+                      <a:solidFill>
+                        <a:srgbClr val="D5E6EA"/>
+                      </a:solidFill>
+                      <a:prstDash val="solid"/>
+                      <a:round/>
+                      <a:headEnd type="none" w="med" len="med"/>
+                      <a:tailEnd type="none" w="med" len="med"/>
+                    </a:lnL>
+                    <a:lnR w="9525" cap="flat" cmpd="sng" algn="ctr">
+                      <a:solidFill>
+                        <a:srgbClr val="D5E6EA"/>
+                      </a:solidFill>
+                      <a:prstDash val="solid"/>
+                      <a:round/>
+                      <a:headEnd type="none" w="med" len="med"/>
+                      <a:tailEnd type="none" w="med" len="med"/>
+                    </a:lnR>
+                    <a:lnT w="9525" cap="flat" cmpd="sng" algn="ctr">
+                      <a:solidFill>
+                        <a:srgbClr val="D5E6EA"/>
+                      </a:solidFill>
+                      <a:prstDash val="solid"/>
+                      <a:round/>
+                      <a:headEnd type="none" w="med" len="med"/>
+                      <a:tailEnd type="none" w="med" len="med"/>
+                    </a:lnT>
+                    <a:lnB w="9525" cap="flat" cmpd="sng" algn="ctr">
+                      <a:solidFill>
+                        <a:srgbClr val="D5E6EA"/>
+                      </a:solidFill>
+                      <a:prstDash val="solid"/>
+                      <a:round/>
+                      <a:headEnd type="none" w="med" len="med"/>
+                      <a:tailEnd type="none" w="med" len="med"/>
+                    </a:lnB>
+                    <a:solidFill>
+                      <a:srgbClr val="FFFFFF"/>
+                    </a:solidFill>
+                  </a:tcPr>
+                </a:tc>
+                <a:tc>
+                  <a:txBody>
+                    <a:bodyPr/>
+                    <a:lstStyle/>
+                    <a:p>
+                      <a:pPr indent="0" marL="0">
+                        <a:buNone/>
+                      </a:pPr>
+                      <a:r>
+                        <a:rPr lang="en-US" sz="950" dirty="0">
+                          <a:solidFill>
+                            <a:srgbClr val="1B2A41"/>
+                          </a:solidFill>
+                        </a:rPr>
+                        <a:t>cp949 CSV, '67.8%', '2026. 6. 30.' 허용 · 시트 선택</a:t>
+                      </a:r>
+                      <a:endParaRPr lang="en-US" sz="950" dirty="0"/>
+                    </a:p>
+                  </a:txBody>
+                  <a:tcPr marL="45720" marR="45720" marT="45720" marB="45720" anchor="ctr">
                     <a:lnL w="9525" cap="flat" cmpd="sng" algn="ctr">
                       <a:solidFill>
                         <a:srgbClr val="D5E6EA"/>
@@ -17286,12 +18487,12 @@
                             <a:srgbClr val="1B2A41"/>
                           </a:solidFill>
                         </a:rPr>
-                        <a:t>같은 기준일 이력 없음</a:t>
+                        <a:t>회신 문서의 표</a:t>
                       </a:r>
                       <a:endParaRPr lang="en-US" sz="950" dirty="0"/>
                     </a:p>
                   </a:txBody>
-                  <a:tcPr marL="36576" marR="36576" marT="36576" marB="36576" anchor="ctr">
+                  <a:tcPr marL="45720" marR="45720" marT="45720" marB="45720" anchor="ctr">
                     <a:lnL w="9525" cap="flat" cmpd="sng" algn="ctr">
                       <a:solidFill>
                         <a:srgbClr val="D5E6EA"/>
@@ -17347,12 +18548,73 @@
                             <a:srgbClr val="1B2A41"/>
                           </a:solidFill>
                         </a:rPr>
-                        <a:t>신규 산출, 산출 근거 기록 필요</a:t>
+                        <a:t>hwpx · docx · pdf(글자 추출 가능한 것)</a:t>
                       </a:r>
                       <a:endParaRPr lang="en-US" sz="950" dirty="0"/>
                     </a:p>
                   </a:txBody>
-                  <a:tcPr marL="36576" marR="36576" marT="36576" marB="36576" anchor="ctr">
+                  <a:tcPr marL="45720" marR="45720" marT="45720" marB="45720" anchor="ctr">
+                    <a:lnL w="9525" cap="flat" cmpd="sng" algn="ctr">
+                      <a:solidFill>
+                        <a:srgbClr val="D5E6EA"/>
+                      </a:solidFill>
+                      <a:prstDash val="solid"/>
+                      <a:round/>
+                      <a:headEnd type="none" w="med" len="med"/>
+                      <a:tailEnd type="none" w="med" len="med"/>
+                    </a:lnL>
+                    <a:lnR w="9525" cap="flat" cmpd="sng" algn="ctr">
+                      <a:solidFill>
+                        <a:srgbClr val="D5E6EA"/>
+                      </a:solidFill>
+                      <a:prstDash val="solid"/>
+                      <a:round/>
+                      <a:headEnd type="none" w="med" len="med"/>
+                      <a:tailEnd type="none" w="med" len="med"/>
+                    </a:lnR>
+                    <a:lnT w="9525" cap="flat" cmpd="sng" algn="ctr">
+                      <a:solidFill>
+                        <a:srgbClr val="D5E6EA"/>
+                      </a:solidFill>
+                      <a:prstDash val="solid"/>
+                      <a:round/>
+                      <a:headEnd type="none" w="med" len="med"/>
+                      <a:tailEnd type="none" w="med" len="med"/>
+                    </a:lnT>
+                    <a:lnB w="9525" cap="flat" cmpd="sng" algn="ctr">
+                      <a:solidFill>
+                        <a:srgbClr val="D5E6EA"/>
+                      </a:solidFill>
+                      <a:prstDash val="solid"/>
+                      <a:round/>
+                      <a:headEnd type="none" w="med" len="med"/>
+                      <a:tailEnd type="none" w="med" len="med"/>
+                    </a:lnB>
+                    <a:solidFill>
+                      <a:srgbClr val="FFFFFF"/>
+                    </a:solidFill>
+                  </a:tcPr>
+                </a:tc>
+                <a:tc>
+                  <a:txBody>
+                    <a:bodyPr/>
+                    <a:lstStyle/>
+                    <a:p>
+                      <a:pPr indent="0" marL="0">
+                        <a:buNone/>
+                      </a:pPr>
+                      <a:r>
+                        <a:rPr lang="en-US" sz="950" dirty="0">
+                          <a:solidFill>
+                            <a:srgbClr val="1B2A41"/>
+                          </a:solidFill>
+                        </a:rPr>
+                        <a:t>HWP 구형식은 HWPX로 저장 후 · 스캔본 불가</a:t>
+                      </a:r>
+                      <a:endParaRPr lang="en-US" sz="950" dirty="0"/>
+                    </a:p>
+                  </a:txBody>
+                  <a:tcPr marL="45720" marR="45720" marT="45720" marB="45720" anchor="ctr">
                     <a:lnL w="9525" cap="flat" cmpd="sng" algn="ctr">
                       <a:solidFill>
                         <a:srgbClr val="D5E6EA"/>
@@ -17410,12 +18672,12 @@
                             <a:srgbClr val="1B2A41"/>
                           </a:solidFill>
                         </a:rPr>
-                        <a:t>기준일 없음</a:t>
+                        <a:t>직접 입력</a:t>
                       </a:r>
                       <a:endParaRPr lang="en-US" sz="950" dirty="0"/>
                     </a:p>
                   </a:txBody>
-                  <a:tcPr marL="36576" marR="36576" marT="36576" marB="36576" anchor="ctr">
+                  <a:tcPr marL="45720" marR="45720" marT="45720" marB="45720" anchor="ctr">
                     <a:lnL w="9525" cap="flat" cmpd="sng" algn="ctr">
                       <a:solidFill>
                         <a:srgbClr val="D5E6EA"/>
@@ -17471,75 +18733,12 @@
                             <a:srgbClr val="1B2A41"/>
                           </a:solidFill>
                         </a:rPr>
-                        <a:t>요구서에서 기준일 확인 필요</a:t>
+                        <a:t>화면에서 행 추가</a:t>
                       </a:r>
                       <a:endParaRPr lang="en-US" sz="950" dirty="0"/>
                     </a:p>
                   </a:txBody>
-                  <a:tcPr marL="36576" marR="36576" marT="36576" marB="36576" anchor="ctr">
-                    <a:lnL w="9525" cap="flat" cmpd="sng" algn="ctr">
-                      <a:solidFill>
-                        <a:srgbClr val="D5E6EA"/>
-                      </a:solidFill>
-                      <a:prstDash val="solid"/>
-                      <a:round/>
-                      <a:headEnd type="none" w="med" len="med"/>
-                      <a:tailEnd type="none" w="med" len="med"/>
-                    </a:lnL>
-                    <a:lnR w="9525" cap="flat" cmpd="sng" algn="ctr">
-                      <a:solidFill>
-                        <a:srgbClr val="D5E6EA"/>
-                      </a:solidFill>
-                      <a:prstDash val="solid"/>
-                      <a:round/>
-                      <a:headEnd type="none" w="med" len="med"/>
-                      <a:tailEnd type="none" w="med" len="med"/>
-                    </a:lnR>
-                    <a:lnT w="9525" cap="flat" cmpd="sng" algn="ctr">
-                      <a:solidFill>
-                        <a:srgbClr val="D5E6EA"/>
-                      </a:solidFill>
-                      <a:prstDash val="solid"/>
-                      <a:round/>
-                      <a:headEnd type="none" w="med" len="med"/>
-                      <a:tailEnd type="none" w="med" len="med"/>
-                    </a:lnT>
-                    <a:lnB w="9525" cap="flat" cmpd="sng" algn="ctr">
-                      <a:solidFill>
-                        <a:srgbClr val="D5E6EA"/>
-                      </a:solidFill>
-                      <a:prstDash val="solid"/>
-                      <a:round/>
-                      <a:headEnd type="none" w="med" len="med"/>
-                      <a:tailEnd type="none" w="med" len="med"/>
-                    </a:lnB>
-                    <a:solidFill>
-                      <a:srgbClr val="FFFFFF"/>
-                    </a:solidFill>
-                  </a:tcPr>
-                </a:tc>
-              </a:tr>
-              <a:tr h="0">
-                <a:tc>
-                  <a:txBody>
-                    <a:bodyPr/>
-                    <a:lstStyle/>
-                    <a:p>
-                      <a:pPr indent="0" marL="0">
-                        <a:buNone/>
-                      </a:pPr>
-                      <a:r>
-                        <a:rPr lang="en-US" sz="950" dirty="0">
-                          <a:solidFill>
-                            <a:srgbClr val="1B2A41"/>
-                          </a:solidFill>
-                        </a:rPr>
-                        <a:t>지표 미인식(사전에 없음)</a:t>
-                      </a:r>
-                      <a:endParaRPr lang="en-US" sz="950" dirty="0"/>
-                    </a:p>
-                  </a:txBody>
-                  <a:tcPr marL="36576" marR="36576" marT="36576" marB="36576" anchor="ctr">
+                  <a:tcPr marL="45720" marR="45720" marT="45720" marB="45720" anchor="ctr">
                     <a:lnL w="9525" cap="flat" cmpd="sng" algn="ctr">
                       <a:solidFill>
                         <a:srgbClr val="D5E6EA"/>
@@ -17595,12 +18794,12 @@
                             <a:srgbClr val="1B2A41"/>
                           </a:solidFill>
                         </a:rPr>
-                        <a:t>항목 문구 확인 또는 지표 사전 추가</a:t>
+                        <a:t>건수가 적은 과거 건</a:t>
                       </a:r>
                       <a:endParaRPr lang="en-US" sz="950" dirty="0"/>
                     </a:p>
                   </a:txBody>
-                  <a:tcPr marL="36576" marR="36576" marT="36576" marB="36576" anchor="ctr">
+                  <a:tcPr marL="45720" marR="45720" marT="45720" marB="45720" anchor="ctr">
                     <a:lnL w="9525" cap="flat" cmpd="sng" algn="ctr">
                       <a:solidFill>
                         <a:srgbClr val="D5E6EA"/>

--- a/app/docs/발표자료_EBS_요구자료대응에이전트.pptx
+++ b/app/docs/발표자료_EBS_요구자료대응에이전트.pptx
@@ -125,14 +125,14 @@
   <p:extLst>
     <p:ext uri="{521415D9-36F7-43E2-AB2F-B90AF26B5E84}">
       <p14:sectionLst xmlns:p14="http://schemas.microsoft.com/office/powerpoint/2010/main">
-        <p14:section name="개요" id="{3d9ae879-01e7-d6a9-962e-84be895a243b}">
+        <p14:section name="개요" id="{db76a856-1ea5-20b7-dee4-18711239333e}">
           <p14:sldIdLst>
             <p14:sldId id="256"/>
             <p14:sldId id="257"/>
             <p14:sldId id="258"/>
           </p14:sldIdLst>
         </p14:section>
-        <p14:section name="해결" id="{623200e1-0b8f-aa1c-f3d5-94547fe88a6f}">
+        <p14:section name="해결" id="{079ea4cb-005b-996c-c0b7-a3c9eeed19f0}">
           <p14:sldIdLst>
             <p14:sldId id="259"/>
             <p14:sldId id="260"/>
@@ -140,7 +140,7 @@
             <p14:sldId id="262"/>
           </p14:sldIdLst>
         </p14:section>
-        <p14:section name="시연" id="{24b49c87-ffdb-3f7d-61e3-19cdfcb0e640}">
+        <p14:section name="시연" id="{b1681315-614c-fdf3-6b8a-8294f40e96cd}">
           <p14:sldIdLst>
             <p14:sldId id="263"/>
             <p14:sldId id="264"/>
@@ -151,14 +151,14 @@
             <p14:sldId id="269"/>
           </p14:sldIdLst>
         </p14:section>
-        <p14:section name="구현" id="{46ce627f-43c9-2b96-c228-3394a94f0cee}">
+        <p14:section name="구현" id="{47805a48-8a96-093d-d9da-fb57cbb29735}">
           <p14:sldIdLst>
             <p14:sldId id="270"/>
             <p14:sldId id="271"/>
             <p14:sldId id="272"/>
           </p14:sldIdLst>
         </p14:section>
-        <p14:section name="마무리" id="{ed54d5d0-7035-03e0-9008-82a1c56a3bac}">
+        <p14:section name="마무리" id="{302fb3dc-f390-1389-50b8-fa1ad211c1bd}">
           <p14:sldIdLst>
             <p14:sldId id="273"/>
             <p14:sldId id="274"/>
@@ -9298,7 +9298,7 @@
                   <a:schemeClr val="tx1"/>
                 </a:solidFill>
               </a:rPr>
-              <a:t>run_checks.py: ruff → pytest 72건 → 추출 품질 점검(규칙/Claude) → 화면 흐름 ①~⑧  ·  make_submission_zip.py  ·  capture_screens.py</a:t>
+              <a:t>run_checks.py: ruff → pytest 76건 → 추출 품질 점검(규칙/Claude) → 화면 흐름 ①~⑧  ·  make_submission_zip.py  ·  capture_screens.py</a:t>
             </a:r>
             <a:endParaRPr lang="en-US" sz="1050" dirty="0"/>
           </a:p>
@@ -9990,7 +9990,7 @@
       </p:sp>
       <p:sp>
         <p:nvSpPr>
-          <p:cNvPr id="7" name="stat-pytest 단위 테스트 통과 (모듈 45 + 리뷰 회귀 10 + 보안 3 + 세션·공급자 6 + 표 구조 8)"/>
+          <p:cNvPr id="7" name="stat-pytest 단위 테스트 통과 (모듈 45 + 리뷰 회귀 10 + 보안 3 + 세션·공급자 6 + 표 구조·문서 표 12)"/>
           <p:cNvSpPr txBox="1"/>
           <p:nvPr/>
         </p:nvSpPr>
@@ -10018,7 +10018,7 @@
                   <a:schemeClr val="accent1"/>
                 </a:solidFill>
               </a:rPr>
-              <a:t>72</a:t>
+              <a:t>76</a:t>
             </a:r>
             <a:endParaRPr lang="en-US" sz="4000" dirty="0"/>
           </a:p>
@@ -10026,7 +10026,7 @@
       </p:sp>
       <p:sp>
         <p:nvSpPr>
-          <p:cNvPr id="8" name="stat-label-pytest 단위 테스트 통과 (모듈 45 + 리뷰 회귀 10 + 보안 3 + 세션·공급자 6 + 표 구조 8)"/>
+          <p:cNvPr id="8" name="stat-label-pytest 단위 테스트 통과 (모듈 45 + 리뷰 회귀 10 + 보안 3 + 세션·공급자 6 + 표 구조·문서 표 12)"/>
           <p:cNvSpPr txBox="1"/>
           <p:nvPr/>
         </p:nvSpPr>
@@ -10068,7 +10068,7 @@
                   <a:schemeClr val="accent5"/>
                 </a:solidFill>
               </a:rPr>
-              <a:t>(모듈 45 + 리뷰 회귀 10 + 보안 3 + 세션·공급자 6 + 표 구조 8)</a:t>
+              <a:t>(모듈 45 + 리뷰 회귀 10 + 보안 3 + 세션·공급자 6 + 표 구조·문서 표 12)</a:t>
             </a:r>
             <a:endParaRPr lang="en-US" sz="1200" dirty="0"/>
           </a:p>

--- a/app/docs/발표자료_EBS_요구자료대응에이전트.pptx
+++ b/app/docs/발표자료_EBS_요구자료대응에이전트.pptx
@@ -125,14 +125,14 @@
   <p:extLst>
     <p:ext uri="{521415D9-36F7-43E2-AB2F-B90AF26B5E84}">
       <p14:sectionLst xmlns:p14="http://schemas.microsoft.com/office/powerpoint/2010/main">
-        <p14:section name="개요" id="{db76a856-1ea5-20b7-dee4-18711239333e}">
+        <p14:section name="개요" id="{3ab3a8f1-bc37-0906-e1e9-baec658acce5}">
           <p14:sldIdLst>
             <p14:sldId id="256"/>
             <p14:sldId id="257"/>
             <p14:sldId id="258"/>
           </p14:sldIdLst>
         </p14:section>
-        <p14:section name="해결" id="{079ea4cb-005b-996c-c0b7-a3c9eeed19f0}">
+        <p14:section name="해결" id="{890e85d2-d73b-a466-45c8-c2301311e32d}">
           <p14:sldIdLst>
             <p14:sldId id="259"/>
             <p14:sldId id="260"/>
@@ -140,7 +140,7 @@
             <p14:sldId id="262"/>
           </p14:sldIdLst>
         </p14:section>
-        <p14:section name="시연" id="{b1681315-614c-fdf3-6b8a-8294f40e96cd}">
+        <p14:section name="시연" id="{d61b6957-aa62-c62b-8235-fb93270e9198}">
           <p14:sldIdLst>
             <p14:sldId id="263"/>
             <p14:sldId id="264"/>
@@ -151,14 +151,14 @@
             <p14:sldId id="269"/>
           </p14:sldIdLst>
         </p14:section>
-        <p14:section name="구현" id="{47805a48-8a96-093d-d9da-fb57cbb29735}">
+        <p14:section name="구현" id="{1c14e4c6-9ff9-2166-98ef-5fb14efd4782}">
           <p14:sldIdLst>
             <p14:sldId id="270"/>
             <p14:sldId id="271"/>
             <p14:sldId id="272"/>
           </p14:sldIdLst>
         </p14:section>
-        <p14:section name="마무리" id="{302fb3dc-f390-1389-50b8-fa1ad211c1bd}">
+        <p14:section name="마무리" id="{baf21825-5326-ad7f-1412-f56875c94392}">
           <p14:sldIdLst>
             <p14:sldId id="273"/>
             <p14:sldId id="274"/>
@@ -9298,7 +9298,7 @@
                   <a:schemeClr val="tx1"/>
                 </a:solidFill>
               </a:rPr>
-              <a:t>run_checks.py: ruff → pytest 76건 → 추출 품질 점검(규칙/Claude) → 화면 흐름 ①~⑧  ·  make_submission_zip.py  ·  capture_screens.py</a:t>
+              <a:t>run_checks.py: ruff → pytest 80건 → 추출 품질 점검(규칙/Claude) → 화면 흐름 ①~⑧  ·  make_submission_zip.py  ·  capture_screens.py</a:t>
             </a:r>
             <a:endParaRPr lang="en-US" sz="1050" dirty="0"/>
           </a:p>
@@ -9990,7 +9990,7 @@
       </p:sp>
       <p:sp>
         <p:nvSpPr>
-          <p:cNvPr id="7" name="stat-pytest 단위 테스트 통과 (모듈 45 + 리뷰 회귀 10 + 보안 3 + 세션·공급자 6 + 표 구조·문서 표 12)"/>
+          <p:cNvPr id="7" name="stat-pytest 단위 테스트 통과 (모듈 45 + 리뷰 회귀 10 + 보안 3 + 세션·공급자 6 + 표·문서 12 + 잘림 재시도 4)"/>
           <p:cNvSpPr txBox="1"/>
           <p:nvPr/>
         </p:nvSpPr>
@@ -10018,7 +10018,7 @@
                   <a:schemeClr val="accent1"/>
                 </a:solidFill>
               </a:rPr>
-              <a:t>76</a:t>
+              <a:t>80</a:t>
             </a:r>
             <a:endParaRPr lang="en-US" sz="4000" dirty="0"/>
           </a:p>
@@ -10026,7 +10026,7 @@
       </p:sp>
       <p:sp>
         <p:nvSpPr>
-          <p:cNvPr id="8" name="stat-label-pytest 단위 테스트 통과 (모듈 45 + 리뷰 회귀 10 + 보안 3 + 세션·공급자 6 + 표 구조·문서 표 12)"/>
+          <p:cNvPr id="8" name="stat-label-pytest 단위 테스트 통과 (모듈 45 + 리뷰 회귀 10 + 보안 3 + 세션·공급자 6 + 표·문서 12 + 잘림 재시도 4)"/>
           <p:cNvSpPr txBox="1"/>
           <p:nvPr/>
         </p:nvSpPr>
@@ -10068,7 +10068,7 @@
                   <a:schemeClr val="accent5"/>
                 </a:solidFill>
               </a:rPr>
-              <a:t>(모듈 45 + 리뷰 회귀 10 + 보안 3 + 세션·공급자 6 + 표 구조·문서 표 12)</a:t>
+              <a:t>(모듈 45 + 리뷰 회귀 10 + 보안 3 + 세션·공급자 6 + 표·문서 12 + 잘림 재시도 4)</a:t>
             </a:r>
             <a:endParaRPr lang="en-US" sz="1200" dirty="0"/>
           </a:p>

--- a/app/docs/발표자료_EBS_요구자료대응에이전트.pptx
+++ b/app/docs/발표자료_EBS_요구자료대응에이전트.pptx
@@ -125,14 +125,14 @@
   <p:extLst>
     <p:ext uri="{521415D9-36F7-43E2-AB2F-B90AF26B5E84}">
       <p14:sectionLst xmlns:p14="http://schemas.microsoft.com/office/powerpoint/2010/main">
-        <p14:section name="개요" id="{3ab3a8f1-bc37-0906-e1e9-baec658acce5}">
+        <p14:section name="개요" id="{2f2aae81-408b-1a08-511d-2dfe04af175e}">
           <p14:sldIdLst>
             <p14:sldId id="256"/>
             <p14:sldId id="257"/>
             <p14:sldId id="258"/>
           </p14:sldIdLst>
         </p14:section>
-        <p14:section name="해결" id="{890e85d2-d73b-a466-45c8-c2301311e32d}">
+        <p14:section name="해결" id="{6e0ed8b3-131c-64df-075d-507b01a7a30a}">
           <p14:sldIdLst>
             <p14:sldId id="259"/>
             <p14:sldId id="260"/>
@@ -140,7 +140,7 @@
             <p14:sldId id="262"/>
           </p14:sldIdLst>
         </p14:section>
-        <p14:section name="시연" id="{d61b6957-aa62-c62b-8235-fb93270e9198}">
+        <p14:section name="시연" id="{9424c562-f6a3-5500-5696-9dbe2311ad8b}">
           <p14:sldIdLst>
             <p14:sldId id="263"/>
             <p14:sldId id="264"/>
@@ -151,14 +151,14 @@
             <p14:sldId id="269"/>
           </p14:sldIdLst>
         </p14:section>
-        <p14:section name="구현" id="{1c14e4c6-9ff9-2166-98ef-5fb14efd4782}">
+        <p14:section name="구현" id="{5206c45b-053c-074d-2d94-1f3d10d72bdd}">
           <p14:sldIdLst>
             <p14:sldId id="270"/>
             <p14:sldId id="271"/>
             <p14:sldId id="272"/>
           </p14:sldIdLst>
         </p14:section>
-        <p14:section name="마무리" id="{baf21825-5326-ad7f-1412-f56875c94392}">
+        <p14:section name="마무리" id="{17cd13b0-c54b-8758-5b82-8bfd646d669d}">
           <p14:sldIdLst>
             <p14:sldId id="273"/>
             <p14:sldId id="274"/>
@@ -8719,7 +8719,7 @@
                   <a:schemeClr val="tx1"/>
                 </a:solidFill>
               </a:rPr>
-              <a:t>docread(txt·HWPX·PDF·DOCX)</a:t>
+              <a:t>docread(txt·HWP·HWPX·PDF·DOCX)</a:t>
             </a:r>
             <a:endParaRPr lang="en-US" sz="1050" dirty="0"/>
           </a:p>
@@ -9298,7 +9298,7 @@
                   <a:schemeClr val="tx1"/>
                 </a:solidFill>
               </a:rPr>
-              <a:t>run_checks.py: ruff → pytest 80건 → 추출 품질 점검(규칙/Claude) → 화면 흐름 ①~⑧  ·  make_submission_zip.py  ·  capture_screens.py</a:t>
+              <a:t>run_checks.py: ruff → pytest 85건 → 추출 품질 점검(규칙/Claude) → 화면 흐름 ①~⑧  ·  make_submission_zip.py  ·  capture_screens.py</a:t>
             </a:r>
             <a:endParaRPr lang="en-US" sz="1050" dirty="0"/>
           </a:p>
@@ -9990,7 +9990,7 @@
       </p:sp>
       <p:sp>
         <p:nvSpPr>
-          <p:cNvPr id="7" name="stat-pytest 단위 테스트 통과 (모듈 45 + 리뷰 회귀 10 + 보안 3 + 세션·공급자 6 + 표·문서 12 + 잘림 재시도 4)"/>
+          <p:cNvPr id="7" name="stat-pytest 단위 테스트 통과 (모듈 45 + 리뷰 회귀 10 + 보안 3 + 세션·공급자 6 + 표·문서·HWP 17 + 잘림 재시도 4)"/>
           <p:cNvSpPr txBox="1"/>
           <p:nvPr/>
         </p:nvSpPr>
@@ -10018,7 +10018,7 @@
                   <a:schemeClr val="accent1"/>
                 </a:solidFill>
               </a:rPr>
-              <a:t>80</a:t>
+              <a:t>85</a:t>
             </a:r>
             <a:endParaRPr lang="en-US" sz="4000" dirty="0"/>
           </a:p>
@@ -10026,7 +10026,7 @@
       </p:sp>
       <p:sp>
         <p:nvSpPr>
-          <p:cNvPr id="8" name="stat-label-pytest 단위 테스트 통과 (모듈 45 + 리뷰 회귀 10 + 보안 3 + 세션·공급자 6 + 표·문서 12 + 잘림 재시도 4)"/>
+          <p:cNvPr id="8" name="stat-label-pytest 단위 테스트 통과 (모듈 45 + 리뷰 회귀 10 + 보안 3 + 세션·공급자 6 + 표·문서·HWP 17 + 잘림 재시도 4)"/>
           <p:cNvSpPr txBox="1"/>
           <p:nvPr/>
         </p:nvSpPr>
@@ -10068,7 +10068,7 @@
                   <a:schemeClr val="accent5"/>
                 </a:solidFill>
               </a:rPr>
-              <a:t>(모듈 45 + 리뷰 회귀 10 + 보안 3 + 세션·공급자 6 + 표·문서 12 + 잘림 재시도 4)</a:t>
+              <a:t>(모듈 45 + 리뷰 회귀 10 + 보안 3 + 세션·공급자 6 + 표·문서·HWP 17 + 잘림 재시도 4)</a:t>
             </a:r>
             <a:endParaRPr lang="en-US" sz="1200" dirty="0"/>
           </a:p>
@@ -12804,7 +12804,7 @@
                   <a:schemeClr val="tx1"/>
                 </a:solidFill>
               </a:rPr>
-              <a:t>HWP(구형식) 미지원, 자리표시자는 한글에서 삽입</a:t>
+              <a:t>HWP(구형식)는 읽기만, 회신 출력은 HWPX. 자리표시자는 한글에서 삽입</a:t>
             </a:r>
             <a:endParaRPr lang="en-US" sz="1200" dirty="0"/>
           </a:p>
@@ -18015,7 +18015,7 @@
                   <a:schemeClr val="tx1"/>
                 </a:solidFill>
               </a:rPr>
-              <a:t>그때 보낸 회신 공문(hwpx·docx·pdf)을 올리면 문서 안의 표를 찾아 같은 방식으로 읽고, 출처에 '회신 문서 표에서 추출'이 남음</a:t>
+              <a:t>그때 보낸 회신 공문(hwp·hwpx·docx·pdf)을 올리면 문서 안의 표를 찾아 같은 방식으로 읽고(HWP 5.0은 자동 변환), 출처에 '회신 문서 표에서 추출'이 남음</a:t>
             </a:r>
             <a:endParaRPr lang="en-US" sz="1250" dirty="0"/>
           </a:p>
@@ -18548,7 +18548,7 @@
                             <a:srgbClr val="1B2A41"/>
                           </a:solidFill>
                         </a:rPr>
-                        <a:t>hwpx · docx · pdf(글자 추출 가능한 것)</a:t>
+                        <a:t>hwp · hwpx · docx · pdf(글자 추출 가능한 것)</a:t>
                       </a:r>
                       <a:endParaRPr lang="en-US" sz="950" dirty="0"/>
                     </a:p>
@@ -18609,7 +18609,7 @@
                             <a:srgbClr val="1B2A41"/>
                           </a:solidFill>
                         </a:rPr>
-                        <a:t>HWP 구형식은 HWPX로 저장 후 · 스캔본 불가</a:t>
+                        <a:t>HWP 5.0은 PC 안에서 자동 변환 · 암호·배포용 문서와 스캔본은 불가</a:t>
                       </a:r>
                       <a:endParaRPr lang="en-US" sz="950" dirty="0"/>
                     </a:p>

--- a/app/docs/발표자료_EBS_요구자료대응에이전트.pptx
+++ b/app/docs/발표자료_EBS_요구자료대응에이전트.pptx
@@ -125,14 +125,14 @@
   <p:extLst>
     <p:ext uri="{521415D9-36F7-43E2-AB2F-B90AF26B5E84}">
       <p14:sectionLst xmlns:p14="http://schemas.microsoft.com/office/powerpoint/2010/main">
-        <p14:section name="개요" id="{2f2aae81-408b-1a08-511d-2dfe04af175e}">
+        <p14:section name="개요" id="{d45b5ef4-27c9-f29b-5c54-d23ddbbfd5df}">
           <p14:sldIdLst>
             <p14:sldId id="256"/>
             <p14:sldId id="257"/>
             <p14:sldId id="258"/>
           </p14:sldIdLst>
         </p14:section>
-        <p14:section name="해결" id="{6e0ed8b3-131c-64df-075d-507b01a7a30a}">
+        <p14:section name="해결" id="{30aa8b69-c6ca-4f6c-5c9d-125ab711da25}">
           <p14:sldIdLst>
             <p14:sldId id="259"/>
             <p14:sldId id="260"/>
@@ -140,7 +140,7 @@
             <p14:sldId id="262"/>
           </p14:sldIdLst>
         </p14:section>
-        <p14:section name="시연" id="{9424c562-f6a3-5500-5696-9dbe2311ad8b}">
+        <p14:section name="시연" id="{39d1bbe9-2605-4166-6e73-43477f591061}">
           <p14:sldIdLst>
             <p14:sldId id="263"/>
             <p14:sldId id="264"/>
@@ -151,14 +151,14 @@
             <p14:sldId id="269"/>
           </p14:sldIdLst>
         </p14:section>
-        <p14:section name="구현" id="{5206c45b-053c-074d-2d94-1f3d10d72bdd}">
+        <p14:section name="구현" id="{bb027657-f87a-4174-b7b3-178070029095}">
           <p14:sldIdLst>
             <p14:sldId id="270"/>
             <p14:sldId id="271"/>
             <p14:sldId id="272"/>
           </p14:sldIdLst>
         </p14:section>
-        <p14:section name="마무리" id="{17cd13b0-c54b-8758-5b82-8bfd646d669d}">
+        <p14:section name="마무리" id="{e9831b21-d89c-0159-192a-1044ffbb3b24}">
           <p14:sldIdLst>
             <p14:sldId id="273"/>
             <p14:sldId id="274"/>
@@ -568,7 +568,7 @@
           <a:p>
             <a:r>
               <a:rPr lang="en-US" dirty="0"/>
-              <a:t>가상 데이터 기반 프로토타입입니다. 시연 순서는 ①→⑦이며 약 12분입니다.</a:t>
+              <a:t>가상 데이터 기반 프로토타입입니다. 시연은 새 요구서 처리 3단계를 중심으로 약 12분입니다.</a:t>
             </a:r>
             <a:endParaRPr lang="en-US" dirty="0"/>
           </a:p>
@@ -3052,7 +3052,7 @@
       </p:sp>
       <p:sp>
         <p:nvSpPr>
-          <p:cNvPr id="4" name="circle-①"/>
+          <p:cNvPr id="4" name="circle-1"/>
           <p:cNvSpPr/>
           <p:nvPr/>
         </p:nvSpPr>
@@ -3077,7 +3077,7 @@
       </p:sp>
       <p:sp>
         <p:nvSpPr>
-          <p:cNvPr id="5" name="circle-label-①"/>
+          <p:cNvPr id="5" name="circle-label-1"/>
           <p:cNvSpPr txBox="1"/>
           <p:nvPr/>
         </p:nvSpPr>
@@ -3105,7 +3105,7 @@
                   <a:schemeClr val="bg1"/>
                 </a:solidFill>
               </a:rPr>
-              <a:t>①</a:t>
+              <a:t>1</a:t>
             </a:r>
             <a:endParaRPr lang="en-US" sz="1600" dirty="0"/>
           </a:p>
@@ -3113,74 +3113,13 @@
       </p:sp>
       <p:sp>
         <p:nvSpPr>
-          <p:cNvPr id="6" name="circle-②"/>
+          <p:cNvPr id="6" name="circle-2"/>
           <p:cNvSpPr/>
           <p:nvPr/>
         </p:nvSpPr>
         <p:spPr>
           <a:xfrm>
             <a:off x="1417320" y="1188720"/>
-            <a:ext cx="502920" cy="502920"/>
-          </a:xfrm>
-          <a:prstGeom prst="ellipse">
-            <a:avLst/>
-          </a:prstGeom>
-          <a:solidFill>
-            <a:schemeClr val="accent1"/>
-          </a:solidFill>
-          <a:ln w="12700">
-            <a:solidFill>
-              <a:schemeClr val="accent1"/>
-            </a:solidFill>
-            <a:prstDash val="solid"/>
-          </a:ln>
-        </p:spPr>
-      </p:sp>
-      <p:sp>
-        <p:nvSpPr>
-          <p:cNvPr id="7" name="circle-label-②"/>
-          <p:cNvSpPr txBox="1"/>
-          <p:nvPr/>
-        </p:nvSpPr>
-        <p:spPr>
-          <a:xfrm>
-            <a:off x="1417320" y="1188720"/>
-            <a:ext cx="502920" cy="502920"/>
-          </a:xfrm>
-          <a:prstGeom prst="rect">
-            <a:avLst/>
-          </a:prstGeom>
-          <a:noFill/>
-          <a:ln/>
-        </p:spPr>
-        <p:txBody>
-          <a:bodyPr wrap="square" lIns="0" tIns="0" rIns="0" bIns="0" rtlCol="0" anchor="ctr"/>
-          <a:lstStyle/>
-          <a:p>
-            <a:pPr algn="ctr" indent="0" marL="0">
-              <a:buNone/>
-            </a:pPr>
-            <a:r>
-              <a:rPr lang="en-US" sz="1600" b="1" dirty="0">
-                <a:solidFill>
-                  <a:schemeClr val="bg1"/>
-                </a:solidFill>
-              </a:rPr>
-              <a:t>②</a:t>
-            </a:r>
-            <a:endParaRPr lang="en-US" sz="1600" dirty="0"/>
-          </a:p>
-        </p:txBody>
-      </p:sp>
-      <p:sp>
-        <p:nvSpPr>
-          <p:cNvPr id="8" name="circle-③"/>
-          <p:cNvSpPr/>
-          <p:nvPr/>
-        </p:nvSpPr>
-        <p:spPr>
-          <a:xfrm>
-            <a:off x="2103120" y="1188720"/>
             <a:ext cx="502920" cy="502920"/>
           </a:xfrm>
           <a:prstGeom prst="ellipse">
@@ -3199,13 +3138,13 @@
       </p:sp>
       <p:sp>
         <p:nvSpPr>
-          <p:cNvPr id="9" name="circle-label-③"/>
+          <p:cNvPr id="7" name="circle-label-2"/>
           <p:cNvSpPr txBox="1"/>
           <p:nvPr/>
         </p:nvSpPr>
         <p:spPr>
           <a:xfrm>
-            <a:off x="2103120" y="1188720"/>
+            <a:off x="1417320" y="1188720"/>
             <a:ext cx="502920" cy="502920"/>
           </a:xfrm>
           <a:prstGeom prst="rect">
@@ -3227,7 +3166,7 @@
                   <a:schemeClr val="bg1"/>
                 </a:solidFill>
               </a:rPr>
-              <a:t>③</a:t>
+              <a:t>2</a:t>
             </a:r>
             <a:endParaRPr lang="en-US" sz="1600" dirty="0"/>
           </a:p>
@@ -3235,13 +3174,13 @@
       </p:sp>
       <p:sp>
         <p:nvSpPr>
-          <p:cNvPr id="10" name="circle-④"/>
+          <p:cNvPr id="8" name="circle-3"/>
           <p:cNvSpPr/>
           <p:nvPr/>
         </p:nvSpPr>
         <p:spPr>
           <a:xfrm>
-            <a:off x="2788920" y="1188720"/>
+            <a:off x="2103120" y="1188720"/>
             <a:ext cx="502920" cy="502920"/>
           </a:xfrm>
           <a:prstGeom prst="ellipse">
@@ -3260,13 +3199,13 @@
       </p:sp>
       <p:sp>
         <p:nvSpPr>
-          <p:cNvPr id="11" name="circle-label-④"/>
+          <p:cNvPr id="9" name="circle-label-3"/>
           <p:cNvSpPr txBox="1"/>
           <p:nvPr/>
         </p:nvSpPr>
         <p:spPr>
           <a:xfrm>
-            <a:off x="2788920" y="1188720"/>
+            <a:off x="2103120" y="1188720"/>
             <a:ext cx="502920" cy="502920"/>
           </a:xfrm>
           <a:prstGeom prst="rect">
@@ -3288,251 +3227,7 @@
                   <a:schemeClr val="bg1"/>
                 </a:solidFill>
               </a:rPr>
-              <a:t>④</a:t>
-            </a:r>
-            <a:endParaRPr lang="en-US" sz="1600" dirty="0"/>
-          </a:p>
-        </p:txBody>
-      </p:sp>
-      <p:sp>
-        <p:nvSpPr>
-          <p:cNvPr id="12" name="circle-⑤"/>
-          <p:cNvSpPr/>
-          <p:nvPr/>
-        </p:nvSpPr>
-        <p:spPr>
-          <a:xfrm>
-            <a:off x="3474720" y="1188720"/>
-            <a:ext cx="502920" cy="502920"/>
-          </a:xfrm>
-          <a:prstGeom prst="ellipse">
-            <a:avLst/>
-          </a:prstGeom>
-          <a:solidFill>
-            <a:schemeClr val="accent1"/>
-          </a:solidFill>
-          <a:ln w="12700">
-            <a:solidFill>
-              <a:schemeClr val="accent1"/>
-            </a:solidFill>
-            <a:prstDash val="solid"/>
-          </a:ln>
-        </p:spPr>
-      </p:sp>
-      <p:sp>
-        <p:nvSpPr>
-          <p:cNvPr id="13" name="circle-label-⑤"/>
-          <p:cNvSpPr txBox="1"/>
-          <p:nvPr/>
-        </p:nvSpPr>
-        <p:spPr>
-          <a:xfrm>
-            <a:off x="3474720" y="1188720"/>
-            <a:ext cx="502920" cy="502920"/>
-          </a:xfrm>
-          <a:prstGeom prst="rect">
-            <a:avLst/>
-          </a:prstGeom>
-          <a:noFill/>
-          <a:ln/>
-        </p:spPr>
-        <p:txBody>
-          <a:bodyPr wrap="square" lIns="0" tIns="0" rIns="0" bIns="0" rtlCol="0" anchor="ctr"/>
-          <a:lstStyle/>
-          <a:p>
-            <a:pPr algn="ctr" indent="0" marL="0">
-              <a:buNone/>
-            </a:pPr>
-            <a:r>
-              <a:rPr lang="en-US" sz="1600" b="1" dirty="0">
-                <a:solidFill>
-                  <a:schemeClr val="bg1"/>
-                </a:solidFill>
-              </a:rPr>
-              <a:t>⑤</a:t>
-            </a:r>
-            <a:endParaRPr lang="en-US" sz="1600" dirty="0"/>
-          </a:p>
-        </p:txBody>
-      </p:sp>
-      <p:sp>
-        <p:nvSpPr>
-          <p:cNvPr id="14" name="circle-⑥"/>
-          <p:cNvSpPr/>
-          <p:nvPr/>
-        </p:nvSpPr>
-        <p:spPr>
-          <a:xfrm>
-            <a:off x="4160520" y="1188720"/>
-            <a:ext cx="502920" cy="502920"/>
-          </a:xfrm>
-          <a:prstGeom prst="ellipse">
-            <a:avLst/>
-          </a:prstGeom>
-          <a:solidFill>
-            <a:schemeClr val="accent1"/>
-          </a:solidFill>
-          <a:ln w="12700">
-            <a:solidFill>
-              <a:schemeClr val="accent1"/>
-            </a:solidFill>
-            <a:prstDash val="solid"/>
-          </a:ln>
-        </p:spPr>
-      </p:sp>
-      <p:sp>
-        <p:nvSpPr>
-          <p:cNvPr id="15" name="circle-label-⑥"/>
-          <p:cNvSpPr txBox="1"/>
-          <p:nvPr/>
-        </p:nvSpPr>
-        <p:spPr>
-          <a:xfrm>
-            <a:off x="4160520" y="1188720"/>
-            <a:ext cx="502920" cy="502920"/>
-          </a:xfrm>
-          <a:prstGeom prst="rect">
-            <a:avLst/>
-          </a:prstGeom>
-          <a:noFill/>
-          <a:ln/>
-        </p:spPr>
-        <p:txBody>
-          <a:bodyPr wrap="square" lIns="0" tIns="0" rIns="0" bIns="0" rtlCol="0" anchor="ctr"/>
-          <a:lstStyle/>
-          <a:p>
-            <a:pPr algn="ctr" indent="0" marL="0">
-              <a:buNone/>
-            </a:pPr>
-            <a:r>
-              <a:rPr lang="en-US" sz="1600" b="1" dirty="0">
-                <a:solidFill>
-                  <a:schemeClr val="bg1"/>
-                </a:solidFill>
-              </a:rPr>
-              <a:t>⑥</a:t>
-            </a:r>
-            <a:endParaRPr lang="en-US" sz="1600" dirty="0"/>
-          </a:p>
-        </p:txBody>
-      </p:sp>
-      <p:sp>
-        <p:nvSpPr>
-          <p:cNvPr id="16" name="circle-⑦"/>
-          <p:cNvSpPr/>
-          <p:nvPr/>
-        </p:nvSpPr>
-        <p:spPr>
-          <a:xfrm>
-            <a:off x="4846320" y="1188720"/>
-            <a:ext cx="502920" cy="502920"/>
-          </a:xfrm>
-          <a:prstGeom prst="ellipse">
-            <a:avLst/>
-          </a:prstGeom>
-          <a:solidFill>
-            <a:schemeClr val="accent1"/>
-          </a:solidFill>
-          <a:ln w="12700">
-            <a:solidFill>
-              <a:schemeClr val="accent1"/>
-            </a:solidFill>
-            <a:prstDash val="solid"/>
-          </a:ln>
-        </p:spPr>
-      </p:sp>
-      <p:sp>
-        <p:nvSpPr>
-          <p:cNvPr id="17" name="circle-label-⑦"/>
-          <p:cNvSpPr txBox="1"/>
-          <p:nvPr/>
-        </p:nvSpPr>
-        <p:spPr>
-          <a:xfrm>
-            <a:off x="4846320" y="1188720"/>
-            <a:ext cx="502920" cy="502920"/>
-          </a:xfrm>
-          <a:prstGeom prst="rect">
-            <a:avLst/>
-          </a:prstGeom>
-          <a:noFill/>
-          <a:ln/>
-        </p:spPr>
-        <p:txBody>
-          <a:bodyPr wrap="square" lIns="0" tIns="0" rIns="0" bIns="0" rtlCol="0" anchor="ctr"/>
-          <a:lstStyle/>
-          <a:p>
-            <a:pPr algn="ctr" indent="0" marL="0">
-              <a:buNone/>
-            </a:pPr>
-            <a:r>
-              <a:rPr lang="en-US" sz="1600" b="1" dirty="0">
-                <a:solidFill>
-                  <a:schemeClr val="bg1"/>
-                </a:solidFill>
-              </a:rPr>
-              <a:t>⑦</a:t>
-            </a:r>
-            <a:endParaRPr lang="en-US" sz="1600" dirty="0"/>
-          </a:p>
-        </p:txBody>
-      </p:sp>
-      <p:sp>
-        <p:nvSpPr>
-          <p:cNvPr id="18" name="circle-⑧"/>
-          <p:cNvSpPr/>
-          <p:nvPr/>
-        </p:nvSpPr>
-        <p:spPr>
-          <a:xfrm>
-            <a:off x="5532120" y="1188720"/>
-            <a:ext cx="502920" cy="502920"/>
-          </a:xfrm>
-          <a:prstGeom prst="ellipse">
-            <a:avLst/>
-          </a:prstGeom>
-          <a:solidFill>
-            <a:schemeClr val="accent2"/>
-          </a:solidFill>
-          <a:ln w="12700">
-            <a:solidFill>
-              <a:schemeClr val="accent2"/>
-            </a:solidFill>
-            <a:prstDash val="solid"/>
-          </a:ln>
-        </p:spPr>
-      </p:sp>
-      <p:sp>
-        <p:nvSpPr>
-          <p:cNvPr id="19" name="circle-label-⑧"/>
-          <p:cNvSpPr txBox="1"/>
-          <p:nvPr/>
-        </p:nvSpPr>
-        <p:spPr>
-          <a:xfrm>
-            <a:off x="5532120" y="1188720"/>
-            <a:ext cx="502920" cy="502920"/>
-          </a:xfrm>
-          <a:prstGeom prst="rect">
-            <a:avLst/>
-          </a:prstGeom>
-          <a:noFill/>
-          <a:ln/>
-        </p:spPr>
-        <p:txBody>
-          <a:bodyPr wrap="square" lIns="0" tIns="0" rIns="0" bIns="0" rtlCol="0" anchor="ctr"/>
-          <a:lstStyle/>
-          <a:p>
-            <a:pPr algn="ctr" indent="0" marL="0">
-              <a:buNone/>
-            </a:pPr>
-            <a:r>
-              <a:rPr lang="en-US" sz="1600" b="1" dirty="0">
-                <a:solidFill>
-                  <a:schemeClr val="bg1"/>
-                </a:solidFill>
-              </a:rPr>
-              <a:t>⑧</a:t>
+              <a:t>3</a:t>
             </a:r>
             <a:endParaRPr lang="en-US" sz="1600" dirty="0"/>
           </a:p>
@@ -3595,7 +3290,7 @@
                   <a:schemeClr val="tx1"/>
                 </a:solidFill>
               </a:rPr>
-              <a:t>② 새 요구서 분석 — '7월에 의원실에 이 값으로 답했다'가 붙는다</a:t>
+              <a:t>1단계 요구서 읽기 — '7월에 의원실에 이 값으로 답했다'가 붙는다</a:t>
             </a:r>
             <a:endParaRPr lang="en-US" sz="2800" dirty="0"/>
           </a:p>
@@ -3681,7 +3376,7 @@
                   <a:schemeClr val="accent5"/>
                 </a:solidFill>
               </a:rPr>
-              <a:t>화면 캡처(Claude 경로 · claude-sonnet-4-6, 2026-10-04)</a:t>
+              <a:t>화면 캡처(2026-10-06 · 규칙 경로)</a:t>
             </a:r>
             <a:endParaRPr lang="en-US" sz="1000" dirty="0"/>
           </a:p>
@@ -4569,7 +4264,7 @@
                   <a:schemeClr val="tx1"/>
                 </a:solidFill>
               </a:rPr>
-              <a:t>③ 수치 대조 — 12개 센터 중 3곳이 다르고, 단서가 보인다</a:t>
+              <a:t>2단계 수치 맞춰 보기 — 12개 센터 중 3곳이 다르고, 단서가 보인다</a:t>
             </a:r>
             <a:endParaRPr lang="en-US" sz="2800" dirty="0"/>
           </a:p>
@@ -4655,7 +4350,7 @@
                   <a:schemeClr val="accent5"/>
                 </a:solidFill>
               </a:rPr>
-              <a:t>화면 캡처(Claude 경로 · claude-sonnet-4-6, 2026-10-04)</a:t>
+              <a:t>화면 캡처(2026-10-06 · 규칙 경로)</a:t>
             </a:r>
             <a:endParaRPr lang="en-US" sz="1000" dirty="0"/>
           </a:p>
@@ -6154,7 +5849,7 @@
                   <a:schemeClr val="tx1"/>
                 </a:solidFill>
               </a:rPr>
-              <a:t>④ 회신 초안 — 확정 수치·입력 사유만 쓰고, 빠진 건 [확인 필요]</a:t>
+              <a:t>3단계 회신 초안 — 확정 수치·입력 사유만 쓰고, 빠진 건 [확인 필요]</a:t>
             </a:r>
             <a:endParaRPr lang="en-US" sz="2800" dirty="0"/>
           </a:p>
@@ -6240,7 +5935,7 @@
                   <a:schemeClr val="accent5"/>
                 </a:solidFill>
               </a:rPr>
-              <a:t>화면 캡처(Claude 경로 · claude-sonnet-4-6, 2026-10-04)</a:t>
+              <a:t>화면 캡처(2026-10-06 · 규칙 경로)</a:t>
             </a:r>
             <a:endParaRPr lang="en-US" sz="1000" dirty="0"/>
           </a:p>
@@ -7740,7 +7435,7 @@
                   <a:schemeClr val="tx1"/>
                 </a:solidFill>
               </a:rPr>
-              <a:t>⑤ 승인 → ⑥ 이력 → ⑦ 현황: 한 줄로 이어지는 기록</a:t>
+              <a:t>승인 → 이력 → 현황: 한 줄로 이어지는 기록</a:t>
             </a:r>
             <a:endParaRPr lang="en-US" sz="2800" dirty="0"/>
           </a:p>
@@ -7755,11 +7450,11 @@
         <p:spPr>
           <a:xfrm>
             <a:off x="475488" y="1344168"/>
-            <a:ext cx="3758184" cy="3386869"/>
+            <a:ext cx="3758184" cy="3796204"/>
           </a:xfrm>
           <a:prstGeom prst="roundRect">
             <a:avLst>
-              <a:gd name="adj" fmla="val 2700"/>
+              <a:gd name="adj" fmla="val 2433"/>
             </a:avLst>
           </a:prstGeom>
           <a:solidFill>
@@ -7789,7 +7484,7 @@
         <p:spPr>
           <a:xfrm>
             <a:off x="548640" y="1417320"/>
-            <a:ext cx="3611880" cy="3240565"/>
+            <a:ext cx="3611880" cy="3649900"/>
           </a:xfrm>
           <a:prstGeom prst="rect">
             <a:avLst/>
@@ -7804,7 +7499,7 @@
         </p:nvSpPr>
         <p:spPr>
           <a:xfrm>
-            <a:off x="548640" y="4767613"/>
+            <a:off x="548640" y="5176948"/>
             <a:ext cx="3611880" cy="274320"/>
           </a:xfrm>
           <a:prstGeom prst="rect">
@@ -7826,7 +7521,7 @@
                   <a:schemeClr val="accent5"/>
                 </a:solidFill>
               </a:rPr>
-              <a:t>⑤ 팀장 검토·승인(의견 기록)</a:t>
+              <a:t>검토·승인 — 팀장 승인(의견 기록)</a:t>
             </a:r>
             <a:endParaRPr lang="en-US" sz="1000" dirty="0"/>
           </a:p>
@@ -7841,11 +7536,11 @@
         <p:spPr>
           <a:xfrm>
             <a:off x="4224528" y="1344168"/>
-            <a:ext cx="3758184" cy="2576728"/>
+            <a:ext cx="3758184" cy="2997788"/>
           </a:xfrm>
           <a:prstGeom prst="roundRect">
             <a:avLst>
-              <a:gd name="adj" fmla="val 3549"/>
+              <a:gd name="adj" fmla="val 3050"/>
             </a:avLst>
           </a:prstGeom>
           <a:solidFill>
@@ -7875,7 +7570,7 @@
         <p:spPr>
           <a:xfrm>
             <a:off x="4297680" y="1417320"/>
-            <a:ext cx="3611880" cy="2430424"/>
+            <a:ext cx="3611880" cy="2851484"/>
           </a:xfrm>
           <a:prstGeom prst="rect">
             <a:avLst/>
@@ -7890,7 +7585,7 @@
         </p:nvSpPr>
         <p:spPr>
           <a:xfrm>
-            <a:off x="4297680" y="3957472"/>
+            <a:off x="4297680" y="4378532"/>
             <a:ext cx="3611880" cy="274320"/>
           </a:xfrm>
           <a:prstGeom prst="rect">
@@ -7912,7 +7607,7 @@
                   <a:schemeClr val="accent5"/>
                 </a:solidFill>
               </a:rPr>
-              <a:t>⑥ 요구→항목→제출본→초안→승인</a:t>
+              <a:t>이력 조회 — 요구→항목→값→초안→승인</a:t>
             </a:r>
             <a:endParaRPr lang="en-US" sz="1000" dirty="0"/>
           </a:p>
@@ -7927,11 +7622,11 @@
         <p:spPr>
           <a:xfrm>
             <a:off x="7973568" y="1344168"/>
-            <a:ext cx="3758184" cy="3116822"/>
+            <a:ext cx="3758184" cy="3054818"/>
           </a:xfrm>
           <a:prstGeom prst="roundRect">
             <a:avLst>
-              <a:gd name="adj" fmla="val 2934"/>
+              <a:gd name="adj" fmla="val 2993"/>
             </a:avLst>
           </a:prstGeom>
           <a:solidFill>
@@ -7961,7 +7656,7 @@
         <p:spPr>
           <a:xfrm>
             <a:off x="8046720" y="1417320"/>
-            <a:ext cx="3611880" cy="2970518"/>
+            <a:ext cx="3611880" cy="2908514"/>
           </a:xfrm>
           <a:prstGeom prst="rect">
             <a:avLst/>
@@ -7976,7 +7671,7 @@
         </p:nvSpPr>
         <p:spPr>
           <a:xfrm>
-            <a:off x="8046720" y="4497566"/>
+            <a:off x="8046720" y="4435562"/>
             <a:ext cx="3611880" cy="274320"/>
           </a:xfrm>
           <a:prstGeom prst="rect">
@@ -7998,7 +7693,7 @@
                   <a:schemeClr val="accent5"/>
                 </a:solidFill>
               </a:rPr>
-              <a:t>⑦ D-day·기한 임박·반복 요구 지표</a:t>
+              <a:t>현황 — D-day·기한 임박·반복 요구 지표</a:t>
             </a:r>
             <a:endParaRPr lang="en-US" sz="1000" dirty="0"/>
           </a:p>
@@ -8142,7 +7837,7 @@
                   <a:schemeClr val="tx1"/>
                 </a:solidFill>
               </a:rPr>
-              <a:t>⑧ 이력에 묻기 — 7개 화면을 돌아다니지 않아도 된다</a:t>
+              <a:t>이력에 묻기 — 화면을 돌아다니지 않아도 된다</a:t>
             </a:r>
             <a:endParaRPr lang="en-US" sz="2800" dirty="0"/>
           </a:p>
@@ -8228,7 +7923,7 @@
                   <a:schemeClr val="accent5"/>
                 </a:solidFill>
               </a:rPr>
-              <a:t>화면 캡처(Claude 경로 · claude-sonnet-4-6, 2026-10-04)</a:t>
+              <a:t>화면 캡처(2026-10-06 · 규칙 경로)</a:t>
             </a:r>
             <a:endParaRPr lang="en-US" sz="1000" dirty="0"/>
           </a:p>
@@ -9298,7 +8993,7 @@
                   <a:schemeClr val="tx1"/>
                 </a:solidFill>
               </a:rPr>
-              <a:t>run_checks.py: ruff → pytest 85건 → 추출 품질 점검(규칙/Claude) → 화면 흐름 ①~⑧  ·  make_submission_zip.py  ·  capture_screens.py</a:t>
+              <a:t>run_checks.py: ruff → pytest 85건 → 추출 품질 점검(규칙/Claude) → 화면 흐름(홈→등록→3단계→승인→조회)  ·  make_submission_zip.py  ·  capture_screens.py</a:t>
             </a:r>
             <a:endParaRPr lang="en-US" sz="1050" dirty="0"/>
           </a:p>
@@ -9439,7 +9134,7 @@
                   <a:schemeClr val="bg1"/>
                 </a:solidFill>
               </a:rPr>
-              <a:t>· 도구 호출 루프(⑧), 재시도·타임아웃</a:t>
+              <a:t>· 도구 호출 루프(이력에 묻기), 재시도·타임아웃</a:t>
             </a:r>
             <a:endParaRPr lang="en-US" sz="1050" dirty="0"/>
           </a:p>
@@ -10076,7 +9771,7 @@
       </p:sp>
       <p:sp>
         <p:nvSpPr>
-          <p:cNvPr id="9" name="stat-화면 ①~⑧+설정 흐름 구동 AppTest + 실제 브라우저, 오류 0"/>
+          <p:cNvPr id="9" name="stat-홈·등록·3단계·승인·조회·현황·묻기·설정 구동 AppTest + 실제 브라우저, 오류 0"/>
           <p:cNvSpPr txBox="1"/>
           <p:nvPr/>
         </p:nvSpPr>
@@ -10112,7 +9807,7 @@
       </p:sp>
       <p:sp>
         <p:nvSpPr>
-          <p:cNvPr id="10" name="stat-label-화면 ①~⑧+설정 흐름 구동 AppTest + 실제 브라우저, 오류 0"/>
+          <p:cNvPr id="10" name="stat-label-홈·등록·3단계·승인·조회·현황·묻기·설정 구동 AppTest + 실제 브라우저, 오류 0"/>
           <p:cNvSpPr txBox="1"/>
           <p:nvPr/>
         </p:nvSpPr>
@@ -10140,7 +9835,7 @@
                   <a:schemeClr val="accent5"/>
                 </a:solidFill>
               </a:rPr>
-              <a:t>화면 ①~⑧+설정 흐름 구동</a:t>
+              <a:t>홈·등록·3단계·승인·조회·현황·묻기·설정 구동</a:t>
             </a:r>
             <a:endParaRPr lang="en-US" sz="1200" dirty="0"/>
           </a:p>
@@ -11373,7 +11068,7 @@
                             <a:srgbClr val="1B2A41"/>
                           </a:solidFill>
                         </a:rPr>
-                        <a:t>③ 후보 전부 단서·과거 사유 인용 · ④ 1순위 질문 '타 기관 제출값과의 차이' · ⑧ 요구번호·제출일 명시, 없는 이력은 '없음'</a:t>
+                        <a:t>2단계 후보 전부 단서·과거 사유 인용 · 3단계 1순위 질문 '타 기관 제출값과의 차이' · 이력에 묻기는 요구번호·제출일 명시, 없는 이력은 '없음'</a:t>
                       </a:r>
                       <a:endParaRPr lang="en-US" sz="950" dirty="0"/>
                     </a:p>
@@ -11894,7 +11589,7 @@
                   <a:schemeClr val="tx1"/>
                 </a:solidFill>
               </a:rPr>
-              <a:t>이력 DB는 사내 PC의 SQLite. 외부로는 요구서 문안·센터 단위 확정값·입력 사유·근거 메타, ⑧은 질문과 조회된 레코드만 전송. 조회 도구는 읽기 전용</a:t>
+              <a:t>이력 DB는 사내 PC의 SQLite. 외부로는 요구서 문안·센터 단위 확정값·입력 사유·근거 메타, 이력에 묻기는 질문과 조회된 레코드만 전송. 조회 도구는 읽기 전용</a:t>
             </a:r>
             <a:endParaRPr lang="en-US" sz="1250" dirty="0"/>
           </a:p>
@@ -11912,7 +11607,7 @@
                   <a:schemeClr val="tx1"/>
                 </a:solidFill>
               </a:rPr>
-              <a:t>요구서 원문의 전화·이메일·주민번호·계좌 패턴은 Claude 전송 전 자동 마스킹. ⑧ 도구 결과에서 직원 이름 제거. ③ 집계값·④ 초안도 개인정보 패턴 검사</a:t>
+              <a:t>요구서 원문의 전화·이메일·주민번호·계좌 패턴은 Claude 전송 전 자동 마스킹. 이력 질의 도구 결과에서 직원 이름 제거. 2단계 수치·3단계 초안도 개인정보 패턴 검사</a:t>
             </a:r>
             <a:endParaRPr lang="en-US" sz="1250" dirty="0"/>
           </a:p>
@@ -15181,7 +14876,7 @@
                   <a:schemeClr val="tx1"/>
                 </a:solidFill>
               </a:rPr>
-              <a:t>기억: 과거에 같은 차이를 어떻게 설명했는지 끌어와 사유 문구 후보 제시(③)</a:t>
+              <a:t>기억: 과거에 같은 차이를 어떻게 설명했는지 끌어와 사유 문구 후보 제시(2단계)</a:t>
             </a:r>
             <a:endParaRPr lang="en-US" sz="1150" dirty="0"/>
           </a:p>
@@ -15199,7 +14894,7 @@
                   <a:schemeClr val="tx1"/>
                 </a:solidFill>
               </a:rPr>
-              <a:t>예측: 이 회신을 받은 요구 주체의 후속 질문과 준비할 자료(④)</a:t>
+              <a:t>예측: 이 회신을 받은 요구 주체의 후속 질문과 준비할 자료(3단계)</a:t>
             </a:r>
             <a:endParaRPr lang="en-US" sz="1150" dirty="0"/>
           </a:p>
@@ -15217,7 +14912,7 @@
                   <a:schemeClr val="tx1"/>
                 </a:solidFill>
               </a:rPr>
-              <a:t>연결: 자연어 질문을 조회 도구 호출로 바꿔 이력에서 답하고 근거 레코드 제시(⑧)</a:t>
+              <a:t>연결: 자연어 질문을 조회 도구 호출로 바꿔 이력에서 답하고 근거 레코드 제시(이력에 묻기)</a:t>
             </a:r>
             <a:endParaRPr lang="en-US" sz="1150" dirty="0"/>
           </a:p>
@@ -15779,7 +15474,7 @@
                   <a:schemeClr val="tx1"/>
                 </a:solidFill>
               </a:rPr>
-              <a:t>8개 화면, 한 번의 흐름</a:t>
+              <a:t>담당자가 하는 일 셋, 새 요구서는 3단계로</a:t>
             </a:r>
             <a:endParaRPr lang="en-US" sz="2800" dirty="0"/>
           </a:p>
@@ -15903,7 +15598,7 @@
                   <a:schemeClr val="tx1"/>
                 </a:solidFill>
               </a:rPr>
-              <a:t>과거 자료 등록</a:t>
+              <a:t>1단계 요구서 읽기</a:t>
             </a:r>
             <a:endParaRPr lang="en-US" sz="1400" dirty="0"/>
           </a:p>
@@ -15939,7 +15634,7 @@
                   <a:schemeClr val="tx1"/>
                 </a:solidFill>
               </a:rPr>
-              <a:t>요구서+제출본 → 항목·지표·기준일 구조화, 산출 근거·출처 저장</a:t>
+              <a:t>요구서(hwp·hwpx·pdf·docx) → 항목·지표·기준일. 같은 수치를 전에 낸 적이 있는지 기록에서 찾아 붙임</a:t>
             </a:r>
             <a:endParaRPr lang="en-US" sz="1150" dirty="0"/>
           </a:p>
@@ -16012,11 +15707,11 @@
             <a:avLst/>
           </a:prstGeom>
           <a:solidFill>
-            <a:schemeClr val="accent1"/>
+            <a:schemeClr val="accent2"/>
           </a:solidFill>
           <a:ln w="12700">
             <a:solidFill>
-              <a:schemeClr val="accent1"/>
+              <a:schemeClr val="accent2"/>
             </a:solidFill>
             <a:prstDash val="solid"/>
           </a:ln>
@@ -16088,7 +15783,7 @@
                   <a:schemeClr val="tx1"/>
                 </a:solidFill>
               </a:rPr>
-              <a:t>새 요구서 분석</a:t>
+              <a:t>2단계 수치 맞춰 보기</a:t>
             </a:r>
             <a:endParaRPr lang="en-US" sz="1400" dirty="0"/>
           </a:p>
@@ -16124,7 +15819,7 @@
                   <a:schemeClr val="tx1"/>
                 </a:solidFill>
               </a:rPr>
-              <a:t>같은 기준일·지표의 과거 제출 이력, 유사 요구서, 데이터 출처 제안</a:t>
+              <a:t>이번 수치(엑셀·회신 공문의 표) vs 지난번 값 — 차이 센터·단서 → 사유 문구 후보(AI) → 담당자 확정</a:t>
             </a:r>
             <a:endParaRPr lang="en-US" sz="1150" dirty="0"/>
           </a:p>
@@ -16273,7 +15968,7 @@
                   <a:schemeClr val="tx1"/>
                 </a:solidFill>
               </a:rPr>
-              <a:t>수치 대조·점검표</a:t>
+              <a:t>3단계 회신 초안</a:t>
             </a:r>
             <a:endParaRPr lang="en-US" sz="1400" dirty="0"/>
           </a:p>
@@ -16309,7 +16004,7 @@
                   <a:schemeClr val="tx1"/>
                 </a:solidFill>
               </a:rPr>
-              <a:t>차이 센터·단서 → 사유 입력 → 정합성 점검표 → 개인정보 검사</a:t>
+              <a:t>공문체 초안 → 빠진 항목 검사 → 예상 후속 질문(AI) → HWPX·제출 묶음 → 팀장 검토 요청</a:t>
             </a:r>
             <a:endParaRPr lang="en-US" sz="1150" dirty="0"/>
           </a:p>
@@ -16317,32 +16012,7 @@
       </p:sp>
       <p:sp>
         <p:nvSpPr>
-          <p:cNvPr id="20" name="arrow-2"/>
-          <p:cNvSpPr/>
-          <p:nvPr/>
-        </p:nvSpPr>
-        <p:spPr>
-          <a:xfrm>
-            <a:off x="8887968" y="2313432"/>
-            <a:ext cx="146304" cy="219456"/>
-          </a:xfrm>
-          <a:prstGeom prst="rightArrow">
-            <a:avLst/>
-          </a:prstGeom>
-          <a:solidFill>
-            <a:schemeClr val="accent5"/>
-          </a:solidFill>
-          <a:ln w="12700">
-            <a:solidFill>
-              <a:schemeClr val="accent5"/>
-            </a:solidFill>
-            <a:prstDash val="solid"/>
-          </a:ln>
-        </p:spPr>
-      </p:sp>
-      <p:sp>
-        <p:nvSpPr>
-          <p:cNvPr id="21" name="step-3"/>
+          <p:cNvPr id="20" name="step-3"/>
           <p:cNvSpPr/>
           <p:nvPr/>
         </p:nvSpPr>
@@ -16369,13 +16039,653 @@
       </p:sp>
       <p:sp>
         <p:nvSpPr>
-          <p:cNvPr id="22" name="circle-4"/>
+          <p:cNvPr id="21" name="circle-·"/>
           <p:cNvSpPr/>
           <p:nvPr/>
         </p:nvSpPr>
         <p:spPr>
           <a:xfrm>
             <a:off x="9235440" y="1554480"/>
+            <a:ext cx="457200" cy="457200"/>
+          </a:xfrm>
+          <a:prstGeom prst="ellipse">
+            <a:avLst/>
+          </a:prstGeom>
+          <a:solidFill>
+            <a:schemeClr val="accent1"/>
+          </a:solidFill>
+          <a:ln w="12700">
+            <a:solidFill>
+              <a:schemeClr val="accent1"/>
+            </a:solidFill>
+            <a:prstDash val="solid"/>
+          </a:ln>
+        </p:spPr>
+      </p:sp>
+      <p:sp>
+        <p:nvSpPr>
+          <p:cNvPr id="22" name="circle-label-·"/>
+          <p:cNvSpPr txBox="1"/>
+          <p:nvPr/>
+        </p:nvSpPr>
+        <p:spPr>
+          <a:xfrm>
+            <a:off x="9235440" y="1554480"/>
+            <a:ext cx="457200" cy="457200"/>
+          </a:xfrm>
+          <a:prstGeom prst="rect">
+            <a:avLst/>
+          </a:prstGeom>
+          <a:noFill/>
+          <a:ln/>
+        </p:spPr>
+        <p:txBody>
+          <a:bodyPr wrap="square" lIns="0" tIns="0" rIns="0" bIns="0" rtlCol="0" anchor="ctr"/>
+          <a:lstStyle/>
+          <a:p>
+            <a:pPr algn="ctr" indent="0" marL="0">
+              <a:buNone/>
+            </a:pPr>
+            <a:r>
+              <a:rPr lang="en-US" sz="1200" b="1" dirty="0">
+                <a:solidFill>
+                  <a:schemeClr val="bg1"/>
+                </a:solidFill>
+              </a:rPr>
+              <a:t>·</a:t>
+            </a:r>
+            <a:endParaRPr lang="en-US" sz="1200" dirty="0"/>
+          </a:p>
+        </p:txBody>
+      </p:sp>
+      <p:sp>
+        <p:nvSpPr>
+          <p:cNvPr id="23" name="step-title-3"/>
+          <p:cNvSpPr txBox="1"/>
+          <p:nvPr/>
+        </p:nvSpPr>
+        <p:spPr>
+          <a:xfrm>
+            <a:off x="9829800" y="1554480"/>
+            <a:ext cx="1737360" cy="457200"/>
+          </a:xfrm>
+          <a:prstGeom prst="rect">
+            <a:avLst/>
+          </a:prstGeom>
+          <a:noFill/>
+          <a:ln/>
+        </p:spPr>
+        <p:txBody>
+          <a:bodyPr wrap="square" lIns="0" tIns="0" rIns="0" bIns="0" rtlCol="0" anchor="ctr"/>
+          <a:lstStyle/>
+          <a:p>
+            <a:pPr indent="0" marL="0">
+              <a:buNone/>
+            </a:pPr>
+            <a:r>
+              <a:rPr lang="en-US" sz="1400" b="1" dirty="0">
+                <a:solidFill>
+                  <a:schemeClr val="tx1"/>
+                </a:solidFill>
+              </a:rPr>
+              <a:t>검토·승인</a:t>
+            </a:r>
+            <a:endParaRPr lang="en-US" sz="1400" dirty="0"/>
+          </a:p>
+        </p:txBody>
+      </p:sp>
+      <p:sp>
+        <p:nvSpPr>
+          <p:cNvPr id="24" name="step-body-3"/>
+          <p:cNvSpPr txBox="1"/>
+          <p:nvPr/>
+        </p:nvSpPr>
+        <p:spPr>
+          <a:xfrm>
+            <a:off x="9235440" y="2148840"/>
+            <a:ext cx="2286000" cy="1188720"/>
+          </a:xfrm>
+          <a:prstGeom prst="rect">
+            <a:avLst/>
+          </a:prstGeom>
+          <a:noFill/>
+          <a:ln/>
+        </p:spPr>
+        <p:txBody>
+          <a:bodyPr wrap="square" lIns="0" tIns="0" rIns="0" bIns="0" rtlCol="0" anchor="t"/>
+          <a:lstStyle/>
+          <a:p>
+            <a:pPr indent="0" marL="0">
+              <a:buNone/>
+            </a:pPr>
+            <a:r>
+              <a:rPr lang="en-US" sz="1150" dirty="0">
+                <a:solidFill>
+                  <a:schemeClr val="tx1"/>
+                </a:solidFill>
+              </a:rPr>
+              <a:t>팀장 승인·반려·의견 기록</a:t>
+            </a:r>
+            <a:endParaRPr lang="en-US" sz="1150" dirty="0"/>
+          </a:p>
+        </p:txBody>
+      </p:sp>
+      <p:sp>
+        <p:nvSpPr>
+          <p:cNvPr id="25" name="step-4"/>
+          <p:cNvSpPr/>
+          <p:nvPr/>
+        </p:nvSpPr>
+        <p:spPr>
+          <a:xfrm>
+            <a:off x="548640" y="3703320"/>
+            <a:ext cx="2651760" cy="2103120"/>
+          </a:xfrm>
+          <a:prstGeom prst="roundRect">
+            <a:avLst>
+              <a:gd name="adj" fmla="val 5217"/>
+            </a:avLst>
+          </a:prstGeom>
+          <a:solidFill>
+            <a:schemeClr val="bg2"/>
+          </a:solidFill>
+          <a:ln w="12700">
+            <a:solidFill>
+              <a:schemeClr val="bg2"/>
+            </a:solidFill>
+            <a:prstDash val="solid"/>
+          </a:ln>
+        </p:spPr>
+      </p:sp>
+      <p:sp>
+        <p:nvSpPr>
+          <p:cNvPr id="26" name="circle-·"/>
+          <p:cNvSpPr/>
+          <p:nvPr/>
+        </p:nvSpPr>
+        <p:spPr>
+          <a:xfrm>
+            <a:off x="731520" y="3886200"/>
+            <a:ext cx="457200" cy="457200"/>
+          </a:xfrm>
+          <a:prstGeom prst="ellipse">
+            <a:avLst/>
+          </a:prstGeom>
+          <a:solidFill>
+            <a:schemeClr val="accent1"/>
+          </a:solidFill>
+          <a:ln w="12700">
+            <a:solidFill>
+              <a:schemeClr val="accent1"/>
+            </a:solidFill>
+            <a:prstDash val="solid"/>
+          </a:ln>
+        </p:spPr>
+      </p:sp>
+      <p:sp>
+        <p:nvSpPr>
+          <p:cNvPr id="27" name="circle-label-·"/>
+          <p:cNvSpPr txBox="1"/>
+          <p:nvPr/>
+        </p:nvSpPr>
+        <p:spPr>
+          <a:xfrm>
+            <a:off x="731520" y="3886200"/>
+            <a:ext cx="457200" cy="457200"/>
+          </a:xfrm>
+          <a:prstGeom prst="rect">
+            <a:avLst/>
+          </a:prstGeom>
+          <a:noFill/>
+          <a:ln/>
+        </p:spPr>
+        <p:txBody>
+          <a:bodyPr wrap="square" lIns="0" tIns="0" rIns="0" bIns="0" rtlCol="0" anchor="ctr"/>
+          <a:lstStyle/>
+          <a:p>
+            <a:pPr algn="ctr" indent="0" marL="0">
+              <a:buNone/>
+            </a:pPr>
+            <a:r>
+              <a:rPr lang="en-US" sz="1200" b="1" dirty="0">
+                <a:solidFill>
+                  <a:schemeClr val="bg1"/>
+                </a:solidFill>
+              </a:rPr>
+              <a:t>·</a:t>
+            </a:r>
+            <a:endParaRPr lang="en-US" sz="1200" dirty="0"/>
+          </a:p>
+        </p:txBody>
+      </p:sp>
+      <p:sp>
+        <p:nvSpPr>
+          <p:cNvPr id="28" name="step-title-4"/>
+          <p:cNvSpPr txBox="1"/>
+          <p:nvPr/>
+        </p:nvSpPr>
+        <p:spPr>
+          <a:xfrm>
+            <a:off x="1325880" y="3886200"/>
+            <a:ext cx="1737360" cy="457200"/>
+          </a:xfrm>
+          <a:prstGeom prst="rect">
+            <a:avLst/>
+          </a:prstGeom>
+          <a:noFill/>
+          <a:ln/>
+        </p:spPr>
+        <p:txBody>
+          <a:bodyPr wrap="square" lIns="0" tIns="0" rIns="0" bIns="0" rtlCol="0" anchor="ctr"/>
+          <a:lstStyle/>
+          <a:p>
+            <a:pPr indent="0" marL="0">
+              <a:buNone/>
+            </a:pPr>
+            <a:r>
+              <a:rPr lang="en-US" sz="1400" b="1" dirty="0">
+                <a:solidFill>
+                  <a:schemeClr val="tx1"/>
+                </a:solidFill>
+              </a:rPr>
+              <a:t>과거 답변 등록</a:t>
+            </a:r>
+            <a:endParaRPr lang="en-US" sz="1400" dirty="0"/>
+          </a:p>
+        </p:txBody>
+      </p:sp>
+      <p:sp>
+        <p:nvSpPr>
+          <p:cNvPr id="29" name="step-body-4"/>
+          <p:cNvSpPr txBox="1"/>
+          <p:nvPr/>
+        </p:nvSpPr>
+        <p:spPr>
+          <a:xfrm>
+            <a:off x="731520" y="4480560"/>
+            <a:ext cx="2286000" cy="1188720"/>
+          </a:xfrm>
+          <a:prstGeom prst="rect">
+            <a:avLst/>
+          </a:prstGeom>
+          <a:noFill/>
+          <a:ln/>
+        </p:spPr>
+        <p:txBody>
+          <a:bodyPr wrap="square" lIns="0" tIns="0" rIns="0" bIns="0" rtlCol="0" anchor="t"/>
+          <a:lstStyle/>
+          <a:p>
+            <a:pPr indent="0" marL="0">
+              <a:buNone/>
+            </a:pPr>
+            <a:r>
+              <a:rPr lang="en-US" sz="1150" dirty="0">
+                <a:solidFill>
+                  <a:schemeClr val="tx1"/>
+                </a:solidFill>
+              </a:rPr>
+              <a:t>예전 요구서 + 그때 보낸 값(집계 엑셀·회신 공문 HWP의 표 그대로) → 기억에 저장</a:t>
+            </a:r>
+            <a:endParaRPr lang="en-US" sz="1150" dirty="0"/>
+          </a:p>
+        </p:txBody>
+      </p:sp>
+      <p:sp>
+        <p:nvSpPr>
+          <p:cNvPr id="30" name="step-5"/>
+          <p:cNvSpPr/>
+          <p:nvPr/>
+        </p:nvSpPr>
+        <p:spPr>
+          <a:xfrm>
+            <a:off x="3383280" y="3703320"/>
+            <a:ext cx="2651760" cy="2103120"/>
+          </a:xfrm>
+          <a:prstGeom prst="roundRect">
+            <a:avLst>
+              <a:gd name="adj" fmla="val 5217"/>
+            </a:avLst>
+          </a:prstGeom>
+          <a:solidFill>
+            <a:schemeClr val="bg2"/>
+          </a:solidFill>
+          <a:ln w="12700">
+            <a:solidFill>
+              <a:schemeClr val="bg2"/>
+            </a:solidFill>
+            <a:prstDash val="solid"/>
+          </a:ln>
+        </p:spPr>
+      </p:sp>
+      <p:sp>
+        <p:nvSpPr>
+          <p:cNvPr id="31" name="circle-·"/>
+          <p:cNvSpPr/>
+          <p:nvPr/>
+        </p:nvSpPr>
+        <p:spPr>
+          <a:xfrm>
+            <a:off x="3566160" y="3886200"/>
+            <a:ext cx="457200" cy="457200"/>
+          </a:xfrm>
+          <a:prstGeom prst="ellipse">
+            <a:avLst/>
+          </a:prstGeom>
+          <a:solidFill>
+            <a:schemeClr val="accent1"/>
+          </a:solidFill>
+          <a:ln w="12700">
+            <a:solidFill>
+              <a:schemeClr val="accent1"/>
+            </a:solidFill>
+            <a:prstDash val="solid"/>
+          </a:ln>
+        </p:spPr>
+      </p:sp>
+      <p:sp>
+        <p:nvSpPr>
+          <p:cNvPr id="32" name="circle-label-·"/>
+          <p:cNvSpPr txBox="1"/>
+          <p:nvPr/>
+        </p:nvSpPr>
+        <p:spPr>
+          <a:xfrm>
+            <a:off x="3566160" y="3886200"/>
+            <a:ext cx="457200" cy="457200"/>
+          </a:xfrm>
+          <a:prstGeom prst="rect">
+            <a:avLst/>
+          </a:prstGeom>
+          <a:noFill/>
+          <a:ln/>
+        </p:spPr>
+        <p:txBody>
+          <a:bodyPr wrap="square" lIns="0" tIns="0" rIns="0" bIns="0" rtlCol="0" anchor="ctr"/>
+          <a:lstStyle/>
+          <a:p>
+            <a:pPr algn="ctr" indent="0" marL="0">
+              <a:buNone/>
+            </a:pPr>
+            <a:r>
+              <a:rPr lang="en-US" sz="1200" b="1" dirty="0">
+                <a:solidFill>
+                  <a:schemeClr val="bg1"/>
+                </a:solidFill>
+              </a:rPr>
+              <a:t>·</a:t>
+            </a:r>
+            <a:endParaRPr lang="en-US" sz="1200" dirty="0"/>
+          </a:p>
+        </p:txBody>
+      </p:sp>
+      <p:sp>
+        <p:nvSpPr>
+          <p:cNvPr id="33" name="step-title-5"/>
+          <p:cNvSpPr txBox="1"/>
+          <p:nvPr/>
+        </p:nvSpPr>
+        <p:spPr>
+          <a:xfrm>
+            <a:off x="4160520" y="3886200"/>
+            <a:ext cx="1737360" cy="457200"/>
+          </a:xfrm>
+          <a:prstGeom prst="rect">
+            <a:avLst/>
+          </a:prstGeom>
+          <a:noFill/>
+          <a:ln/>
+        </p:spPr>
+        <p:txBody>
+          <a:bodyPr wrap="square" lIns="0" tIns="0" rIns="0" bIns="0" rtlCol="0" anchor="ctr"/>
+          <a:lstStyle/>
+          <a:p>
+            <a:pPr indent="0" marL="0">
+              <a:buNone/>
+            </a:pPr>
+            <a:r>
+              <a:rPr lang="en-US" sz="1400" b="1" dirty="0">
+                <a:solidFill>
+                  <a:schemeClr val="tx1"/>
+                </a:solidFill>
+              </a:rPr>
+              <a:t>이력 조회</a:t>
+            </a:r>
+            <a:endParaRPr lang="en-US" sz="1400" dirty="0"/>
+          </a:p>
+        </p:txBody>
+      </p:sp>
+      <p:sp>
+        <p:nvSpPr>
+          <p:cNvPr id="34" name="step-body-5"/>
+          <p:cNvSpPr txBox="1"/>
+          <p:nvPr/>
+        </p:nvSpPr>
+        <p:spPr>
+          <a:xfrm>
+            <a:off x="3566160" y="4480560"/>
+            <a:ext cx="2286000" cy="1188720"/>
+          </a:xfrm>
+          <a:prstGeom prst="rect">
+            <a:avLst/>
+          </a:prstGeom>
+          <a:noFill/>
+          <a:ln/>
+        </p:spPr>
+        <p:txBody>
+          <a:bodyPr wrap="square" lIns="0" tIns="0" rIns="0" bIns="0" rtlCol="0" anchor="t"/>
+          <a:lstStyle/>
+          <a:p>
+            <a:pPr indent="0" marL="0">
+              <a:buNone/>
+            </a:pPr>
+            <a:r>
+              <a:rPr lang="en-US" sz="1150" dirty="0">
+                <a:solidFill>
+                  <a:schemeClr val="tx1"/>
+                </a:solidFill>
+              </a:rPr>
+              <a:t>요구→항목→값→사유→초안→승인 한 줄, 키워드 검색</a:t>
+            </a:r>
+            <a:endParaRPr lang="en-US" sz="1150" dirty="0"/>
+          </a:p>
+        </p:txBody>
+      </p:sp>
+      <p:sp>
+        <p:nvSpPr>
+          <p:cNvPr id="35" name="step-6"/>
+          <p:cNvSpPr/>
+          <p:nvPr/>
+        </p:nvSpPr>
+        <p:spPr>
+          <a:xfrm>
+            <a:off x="6217920" y="3703320"/>
+            <a:ext cx="2651760" cy="2103120"/>
+          </a:xfrm>
+          <a:prstGeom prst="roundRect">
+            <a:avLst>
+              <a:gd name="adj" fmla="val 5217"/>
+            </a:avLst>
+          </a:prstGeom>
+          <a:solidFill>
+            <a:schemeClr val="bg2"/>
+          </a:solidFill>
+          <a:ln w="12700">
+            <a:solidFill>
+              <a:schemeClr val="bg2"/>
+            </a:solidFill>
+            <a:prstDash val="solid"/>
+          </a:ln>
+        </p:spPr>
+      </p:sp>
+      <p:sp>
+        <p:nvSpPr>
+          <p:cNvPr id="36" name="circle-·"/>
+          <p:cNvSpPr/>
+          <p:nvPr/>
+        </p:nvSpPr>
+        <p:spPr>
+          <a:xfrm>
+            <a:off x="6400800" y="3886200"/>
+            <a:ext cx="457200" cy="457200"/>
+          </a:xfrm>
+          <a:prstGeom prst="ellipse">
+            <a:avLst/>
+          </a:prstGeom>
+          <a:solidFill>
+            <a:schemeClr val="accent1"/>
+          </a:solidFill>
+          <a:ln w="12700">
+            <a:solidFill>
+              <a:schemeClr val="accent1"/>
+            </a:solidFill>
+            <a:prstDash val="solid"/>
+          </a:ln>
+        </p:spPr>
+      </p:sp>
+      <p:sp>
+        <p:nvSpPr>
+          <p:cNvPr id="37" name="circle-label-·"/>
+          <p:cNvSpPr txBox="1"/>
+          <p:nvPr/>
+        </p:nvSpPr>
+        <p:spPr>
+          <a:xfrm>
+            <a:off x="6400800" y="3886200"/>
+            <a:ext cx="457200" cy="457200"/>
+          </a:xfrm>
+          <a:prstGeom prst="rect">
+            <a:avLst/>
+          </a:prstGeom>
+          <a:noFill/>
+          <a:ln/>
+        </p:spPr>
+        <p:txBody>
+          <a:bodyPr wrap="square" lIns="0" tIns="0" rIns="0" bIns="0" rtlCol="0" anchor="ctr"/>
+          <a:lstStyle/>
+          <a:p>
+            <a:pPr algn="ctr" indent="0" marL="0">
+              <a:buNone/>
+            </a:pPr>
+            <a:r>
+              <a:rPr lang="en-US" sz="1200" b="1" dirty="0">
+                <a:solidFill>
+                  <a:schemeClr val="bg1"/>
+                </a:solidFill>
+              </a:rPr>
+              <a:t>·</a:t>
+            </a:r>
+            <a:endParaRPr lang="en-US" sz="1200" dirty="0"/>
+          </a:p>
+        </p:txBody>
+      </p:sp>
+      <p:sp>
+        <p:nvSpPr>
+          <p:cNvPr id="38" name="step-title-6"/>
+          <p:cNvSpPr txBox="1"/>
+          <p:nvPr/>
+        </p:nvSpPr>
+        <p:spPr>
+          <a:xfrm>
+            <a:off x="6995160" y="3886200"/>
+            <a:ext cx="1737360" cy="457200"/>
+          </a:xfrm>
+          <a:prstGeom prst="rect">
+            <a:avLst/>
+          </a:prstGeom>
+          <a:noFill/>
+          <a:ln/>
+        </p:spPr>
+        <p:txBody>
+          <a:bodyPr wrap="square" lIns="0" tIns="0" rIns="0" bIns="0" rtlCol="0" anchor="ctr"/>
+          <a:lstStyle/>
+          <a:p>
+            <a:pPr indent="0" marL="0">
+              <a:buNone/>
+            </a:pPr>
+            <a:r>
+              <a:rPr lang="en-US" sz="1400" b="1" dirty="0">
+                <a:solidFill>
+                  <a:schemeClr val="tx1"/>
+                </a:solidFill>
+              </a:rPr>
+              <a:t>현황</a:t>
+            </a:r>
+            <a:endParaRPr lang="en-US" sz="1400" dirty="0"/>
+          </a:p>
+        </p:txBody>
+      </p:sp>
+      <p:sp>
+        <p:nvSpPr>
+          <p:cNvPr id="39" name="step-body-6"/>
+          <p:cNvSpPr txBox="1"/>
+          <p:nvPr/>
+        </p:nvSpPr>
+        <p:spPr>
+          <a:xfrm>
+            <a:off x="6400800" y="4480560"/>
+            <a:ext cx="2286000" cy="1188720"/>
+          </a:xfrm>
+          <a:prstGeom prst="rect">
+            <a:avLst/>
+          </a:prstGeom>
+          <a:noFill/>
+          <a:ln/>
+        </p:spPr>
+        <p:txBody>
+          <a:bodyPr wrap="square" lIns="0" tIns="0" rIns="0" bIns="0" rtlCol="0" anchor="t"/>
+          <a:lstStyle/>
+          <a:p>
+            <a:pPr indent="0" marL="0">
+              <a:buNone/>
+            </a:pPr>
+            <a:r>
+              <a:rPr lang="en-US" sz="1150" dirty="0">
+                <a:solidFill>
+                  <a:schemeClr val="tx1"/>
+                </a:solidFill>
+              </a:rPr>
+              <a:t>D-day·기한 임박, 관리대장 엑셀, 반복 요구 지표</a:t>
+            </a:r>
+            <a:endParaRPr lang="en-US" sz="1150" dirty="0"/>
+          </a:p>
+        </p:txBody>
+      </p:sp>
+      <p:sp>
+        <p:nvSpPr>
+          <p:cNvPr id="40" name="step-7"/>
+          <p:cNvSpPr/>
+          <p:nvPr/>
+        </p:nvSpPr>
+        <p:spPr>
+          <a:xfrm>
+            <a:off x="9052560" y="3703320"/>
+            <a:ext cx="2651760" cy="2103120"/>
+          </a:xfrm>
+          <a:prstGeom prst="roundRect">
+            <a:avLst>
+              <a:gd name="adj" fmla="val 5217"/>
+            </a:avLst>
+          </a:prstGeom>
+          <a:solidFill>
+            <a:schemeClr val="bg2"/>
+          </a:solidFill>
+          <a:ln w="12700">
+            <a:solidFill>
+              <a:schemeClr val="bg2"/>
+            </a:solidFill>
+            <a:prstDash val="solid"/>
+          </a:ln>
+        </p:spPr>
+      </p:sp>
+      <p:sp>
+        <p:nvSpPr>
+          <p:cNvPr id="41" name="circle-·"/>
+          <p:cNvSpPr/>
+          <p:nvPr/>
+        </p:nvSpPr>
+        <p:spPr>
+          <a:xfrm>
+            <a:off x="9235440" y="3886200"/>
             <a:ext cx="457200" cy="457200"/>
           </a:xfrm>
           <a:prstGeom prst="ellipse">
@@ -16394,13 +16704,13 @@
       </p:sp>
       <p:sp>
         <p:nvSpPr>
-          <p:cNvPr id="23" name="circle-label-4"/>
+          <p:cNvPr id="42" name="circle-label-·"/>
           <p:cNvSpPr txBox="1"/>
           <p:nvPr/>
         </p:nvSpPr>
         <p:spPr>
           <a:xfrm>
-            <a:off x="9235440" y="1554480"/>
+            <a:off x="9235440" y="3886200"/>
             <a:ext cx="457200" cy="457200"/>
           </a:xfrm>
           <a:prstGeom prst="rect">
@@ -16422,7 +16732,7 @@
                   <a:schemeClr val="bg1"/>
                 </a:solidFill>
               </a:rPr>
-              <a:t>4</a:t>
+              <a:t>·</a:t>
             </a:r>
             <a:endParaRPr lang="en-US" sz="1200" dirty="0"/>
           </a:p>
@@ -16430,13 +16740,13 @@
       </p:sp>
       <p:sp>
         <p:nvSpPr>
-          <p:cNvPr id="24" name="step-title-3"/>
+          <p:cNvPr id="43" name="step-title-7"/>
           <p:cNvSpPr txBox="1"/>
           <p:nvPr/>
         </p:nvSpPr>
         <p:spPr>
           <a:xfrm>
-            <a:off x="9829800" y="1554480"/>
+            <a:off x="9829800" y="3886200"/>
             <a:ext cx="1737360" cy="457200"/>
           </a:xfrm>
           <a:prstGeom prst="rect">
@@ -16458,7 +16768,7 @@
                   <a:schemeClr val="tx1"/>
                 </a:solidFill>
               </a:rPr>
-              <a:t>회신 초안·HWPX</a:t>
+              <a:t>이력에 묻기</a:t>
             </a:r>
             <a:endParaRPr lang="en-US" sz="1400" dirty="0"/>
           </a:p>
@@ -16466,13 +16776,13 @@
       </p:sp>
       <p:sp>
         <p:nvSpPr>
-          <p:cNvPr id="25" name="step-body-3"/>
+          <p:cNvPr id="44" name="step-body-7"/>
           <p:cNvSpPr txBox="1"/>
           <p:nvPr/>
         </p:nvSpPr>
         <p:spPr>
           <a:xfrm>
-            <a:off x="9235440" y="2148840"/>
+            <a:off x="9235440" y="4480560"/>
             <a:ext cx="2286000" cy="1188720"/>
           </a:xfrm>
           <a:prstGeom prst="rect">
@@ -16494,7 +16804,7 @@
                   <a:schemeClr val="tx1"/>
                 </a:solidFill>
               </a:rPr>
-              <a:t>공문체 초안 → 충족 검사 → Claude 추가 점검 → HWPX·제출 묶음</a:t>
+              <a:t>말로 물으면 조회 도구를 골라 기록을 찾고 근거와 함께 답(AI)</a:t>
             </a:r>
             <a:endParaRPr lang="en-US" sz="1150" dirty="0"/>
           </a:p>
@@ -16502,66 +16812,14 @@
       </p:sp>
       <p:sp>
         <p:nvSpPr>
-          <p:cNvPr id="26" name="step-4"/>
-          <p:cNvSpPr/>
-          <p:nvPr/>
-        </p:nvSpPr>
-        <p:spPr>
-          <a:xfrm>
-            <a:off x="548640" y="3703320"/>
-            <a:ext cx="2651760" cy="2103120"/>
-          </a:xfrm>
-          <a:prstGeom prst="roundRect">
-            <a:avLst>
-              <a:gd name="adj" fmla="val 5217"/>
-            </a:avLst>
-          </a:prstGeom>
-          <a:solidFill>
-            <a:schemeClr val="bg2"/>
-          </a:solidFill>
-          <a:ln w="12700">
-            <a:solidFill>
-              <a:schemeClr val="bg2"/>
-            </a:solidFill>
-            <a:prstDash val="solid"/>
-          </a:ln>
-        </p:spPr>
-      </p:sp>
-      <p:sp>
-        <p:nvSpPr>
-          <p:cNvPr id="27" name="circle-5"/>
-          <p:cNvSpPr/>
-          <p:nvPr/>
-        </p:nvSpPr>
-        <p:spPr>
-          <a:xfrm>
-            <a:off x="731520" y="3886200"/>
-            <a:ext cx="457200" cy="457200"/>
-          </a:xfrm>
-          <a:prstGeom prst="ellipse">
-            <a:avLst/>
-          </a:prstGeom>
-          <a:solidFill>
-            <a:schemeClr val="accent1"/>
-          </a:solidFill>
-          <a:ln w="12700">
-            <a:solidFill>
-              <a:schemeClr val="accent1"/>
-            </a:solidFill>
-            <a:prstDash val="solid"/>
-          </a:ln>
-        </p:spPr>
-      </p:sp>
-      <p:sp>
-        <p:nvSpPr>
-          <p:cNvPr id="28" name="circle-label-5"/>
+          <p:cNvPr id="45" name="flow-note"/>
           <p:cNvSpPr txBox="1"/>
           <p:nvPr/>
         </p:nvSpPr>
         <p:spPr>
           <a:xfrm>
-            <a:off x="731520" y="3886200"/>
-            <a:ext cx="457200" cy="457200"/>
+            <a:off x="548640" y="5943600"/>
+            <a:ext cx="11064240" cy="320040"/>
           </a:xfrm>
           <a:prstGeom prst="rect">
             <a:avLst/>
@@ -16573,604 +16831,16 @@
           <a:bodyPr wrap="square" lIns="0" tIns="0" rIns="0" bIns="0" rtlCol="0" anchor="ctr"/>
           <a:lstStyle/>
           <a:p>
-            <a:pPr algn="ctr" indent="0" marL="0">
-              <a:buNone/>
-            </a:pPr>
-            <a:r>
-              <a:rPr lang="en-US" sz="1200" b="1" dirty="0">
-                <a:solidFill>
-                  <a:schemeClr val="bg1"/>
-                </a:solidFill>
-              </a:rPr>
-              <a:t>5</a:t>
-            </a:r>
-            <a:endParaRPr lang="en-US" sz="1200" dirty="0"/>
-          </a:p>
-        </p:txBody>
-      </p:sp>
-      <p:sp>
-        <p:nvSpPr>
-          <p:cNvPr id="29" name="step-title-4"/>
-          <p:cNvSpPr txBox="1"/>
-          <p:nvPr/>
-        </p:nvSpPr>
-        <p:spPr>
-          <a:xfrm>
-            <a:off x="1325880" y="3886200"/>
-            <a:ext cx="1737360" cy="457200"/>
-          </a:xfrm>
-          <a:prstGeom prst="rect">
-            <a:avLst/>
-          </a:prstGeom>
-          <a:noFill/>
-          <a:ln/>
-        </p:spPr>
-        <p:txBody>
-          <a:bodyPr wrap="square" lIns="0" tIns="0" rIns="0" bIns="0" rtlCol="0" anchor="ctr"/>
-          <a:lstStyle/>
-          <a:p>
             <a:pPr indent="0" marL="0">
               <a:buNone/>
             </a:pPr>
             <a:r>
-              <a:rPr lang="en-US" sz="1400" b="1" dirty="0">
-                <a:solidFill>
-                  <a:schemeClr val="tx1"/>
-                </a:solidFill>
-              </a:rPr>
-              <a:t>검토·승인</a:t>
-            </a:r>
-            <a:endParaRPr lang="en-US" sz="1400" dirty="0"/>
-          </a:p>
-        </p:txBody>
-      </p:sp>
-      <p:sp>
-        <p:nvSpPr>
-          <p:cNvPr id="30" name="step-body-4"/>
-          <p:cNvSpPr txBox="1"/>
-          <p:nvPr/>
-        </p:nvSpPr>
-        <p:spPr>
-          <a:xfrm>
-            <a:off x="731520" y="4480560"/>
-            <a:ext cx="2286000" cy="1188720"/>
-          </a:xfrm>
-          <a:prstGeom prst="rect">
-            <a:avLst/>
-          </a:prstGeom>
-          <a:noFill/>
-          <a:ln/>
-        </p:spPr>
-        <p:txBody>
-          <a:bodyPr wrap="square" lIns="0" tIns="0" rIns="0" bIns="0" rtlCol="0" anchor="t"/>
-          <a:lstStyle/>
-          <a:p>
-            <a:pPr indent="0" marL="0">
-              <a:buNone/>
-            </a:pPr>
-            <a:r>
-              <a:rPr lang="en-US" sz="1150" dirty="0">
-                <a:solidFill>
-                  <a:schemeClr val="tx1"/>
-                </a:solidFill>
-              </a:rPr>
-              <a:t>팀장 승인·반려·의견 기록</a:t>
-            </a:r>
-            <a:endParaRPr lang="en-US" sz="1150" dirty="0"/>
-          </a:p>
-        </p:txBody>
-      </p:sp>
-      <p:sp>
-        <p:nvSpPr>
-          <p:cNvPr id="31" name="step-5"/>
-          <p:cNvSpPr/>
-          <p:nvPr/>
-        </p:nvSpPr>
-        <p:spPr>
-          <a:xfrm>
-            <a:off x="3383280" y="3703320"/>
-            <a:ext cx="2651760" cy="2103120"/>
-          </a:xfrm>
-          <a:prstGeom prst="roundRect">
-            <a:avLst>
-              <a:gd name="adj" fmla="val 5217"/>
-            </a:avLst>
-          </a:prstGeom>
-          <a:solidFill>
-            <a:schemeClr val="bg2"/>
-          </a:solidFill>
-          <a:ln w="12700">
-            <a:solidFill>
-              <a:schemeClr val="bg2"/>
-            </a:solidFill>
-            <a:prstDash val="solid"/>
-          </a:ln>
-        </p:spPr>
-      </p:sp>
-      <p:sp>
-        <p:nvSpPr>
-          <p:cNvPr id="32" name="circle-6"/>
-          <p:cNvSpPr/>
-          <p:nvPr/>
-        </p:nvSpPr>
-        <p:spPr>
-          <a:xfrm>
-            <a:off x="3566160" y="3886200"/>
-            <a:ext cx="457200" cy="457200"/>
-          </a:xfrm>
-          <a:prstGeom prst="ellipse">
-            <a:avLst/>
-          </a:prstGeom>
-          <a:solidFill>
-            <a:schemeClr val="accent1"/>
-          </a:solidFill>
-          <a:ln w="12700">
-            <a:solidFill>
-              <a:schemeClr val="accent1"/>
-            </a:solidFill>
-            <a:prstDash val="solid"/>
-          </a:ln>
-        </p:spPr>
-      </p:sp>
-      <p:sp>
-        <p:nvSpPr>
-          <p:cNvPr id="33" name="circle-label-6"/>
-          <p:cNvSpPr txBox="1"/>
-          <p:nvPr/>
-        </p:nvSpPr>
-        <p:spPr>
-          <a:xfrm>
-            <a:off x="3566160" y="3886200"/>
-            <a:ext cx="457200" cy="457200"/>
-          </a:xfrm>
-          <a:prstGeom prst="rect">
-            <a:avLst/>
-          </a:prstGeom>
-          <a:noFill/>
-          <a:ln/>
-        </p:spPr>
-        <p:txBody>
-          <a:bodyPr wrap="square" lIns="0" tIns="0" rIns="0" bIns="0" rtlCol="0" anchor="ctr"/>
-          <a:lstStyle/>
-          <a:p>
-            <a:pPr algn="ctr" indent="0" marL="0">
-              <a:buNone/>
-            </a:pPr>
-            <a:r>
-              <a:rPr lang="en-US" sz="1200" b="1" dirty="0">
-                <a:solidFill>
-                  <a:schemeClr val="bg1"/>
-                </a:solidFill>
-              </a:rPr>
-              <a:t>6</a:t>
-            </a:r>
-            <a:endParaRPr lang="en-US" sz="1200" dirty="0"/>
-          </a:p>
-        </p:txBody>
-      </p:sp>
-      <p:sp>
-        <p:nvSpPr>
-          <p:cNvPr id="34" name="step-title-5"/>
-          <p:cNvSpPr txBox="1"/>
-          <p:nvPr/>
-        </p:nvSpPr>
-        <p:spPr>
-          <a:xfrm>
-            <a:off x="4160520" y="3886200"/>
-            <a:ext cx="1737360" cy="457200"/>
-          </a:xfrm>
-          <a:prstGeom prst="rect">
-            <a:avLst/>
-          </a:prstGeom>
-          <a:noFill/>
-          <a:ln/>
-        </p:spPr>
-        <p:txBody>
-          <a:bodyPr wrap="square" lIns="0" tIns="0" rIns="0" bIns="0" rtlCol="0" anchor="ctr"/>
-          <a:lstStyle/>
-          <a:p>
-            <a:pPr indent="0" marL="0">
-              <a:buNone/>
-            </a:pPr>
-            <a:r>
-              <a:rPr lang="en-US" sz="1400" b="1" dirty="0">
-                <a:solidFill>
-                  <a:schemeClr val="tx1"/>
-                </a:solidFill>
-              </a:rPr>
-              <a:t>이력 조회</a:t>
-            </a:r>
-            <a:endParaRPr lang="en-US" sz="1400" dirty="0"/>
-          </a:p>
-        </p:txBody>
-      </p:sp>
-      <p:sp>
-        <p:nvSpPr>
-          <p:cNvPr id="35" name="step-body-5"/>
-          <p:cNvSpPr txBox="1"/>
-          <p:nvPr/>
-        </p:nvSpPr>
-        <p:spPr>
-          <a:xfrm>
-            <a:off x="3566160" y="4480560"/>
-            <a:ext cx="2286000" cy="1188720"/>
-          </a:xfrm>
-          <a:prstGeom prst="rect">
-            <a:avLst/>
-          </a:prstGeom>
-          <a:noFill/>
-          <a:ln/>
-        </p:spPr>
-        <p:txBody>
-          <a:bodyPr wrap="square" lIns="0" tIns="0" rIns="0" bIns="0" rtlCol="0" anchor="t"/>
-          <a:lstStyle/>
-          <a:p>
-            <a:pPr indent="0" marL="0">
-              <a:buNone/>
-            </a:pPr>
-            <a:r>
-              <a:rPr lang="en-US" sz="1150" dirty="0">
-                <a:solidFill>
-                  <a:schemeClr val="tx1"/>
-                </a:solidFill>
-              </a:rPr>
-              <a:t>요구→항목→제출값→사유→초안→승인 한 줄, 키워드 검색</a:t>
-            </a:r>
-            <a:endParaRPr lang="en-US" sz="1150" dirty="0"/>
-          </a:p>
-        </p:txBody>
-      </p:sp>
-      <p:sp>
-        <p:nvSpPr>
-          <p:cNvPr id="36" name="step-6"/>
-          <p:cNvSpPr/>
-          <p:nvPr/>
-        </p:nvSpPr>
-        <p:spPr>
-          <a:xfrm>
-            <a:off x="6217920" y="3703320"/>
-            <a:ext cx="2651760" cy="2103120"/>
-          </a:xfrm>
-          <a:prstGeom prst="roundRect">
-            <a:avLst>
-              <a:gd name="adj" fmla="val 5217"/>
-            </a:avLst>
-          </a:prstGeom>
-          <a:solidFill>
-            <a:schemeClr val="bg2"/>
-          </a:solidFill>
-          <a:ln w="12700">
-            <a:solidFill>
-              <a:schemeClr val="bg2"/>
-            </a:solidFill>
-            <a:prstDash val="solid"/>
-          </a:ln>
-        </p:spPr>
-      </p:sp>
-      <p:sp>
-        <p:nvSpPr>
-          <p:cNvPr id="37" name="circle-7"/>
-          <p:cNvSpPr/>
-          <p:nvPr/>
-        </p:nvSpPr>
-        <p:spPr>
-          <a:xfrm>
-            <a:off x="6400800" y="3886200"/>
-            <a:ext cx="457200" cy="457200"/>
-          </a:xfrm>
-          <a:prstGeom prst="ellipse">
-            <a:avLst/>
-          </a:prstGeom>
-          <a:solidFill>
-            <a:schemeClr val="accent1"/>
-          </a:solidFill>
-          <a:ln w="12700">
-            <a:solidFill>
-              <a:schemeClr val="accent1"/>
-            </a:solidFill>
-            <a:prstDash val="solid"/>
-          </a:ln>
-        </p:spPr>
-      </p:sp>
-      <p:sp>
-        <p:nvSpPr>
-          <p:cNvPr id="38" name="circle-label-7"/>
-          <p:cNvSpPr txBox="1"/>
-          <p:nvPr/>
-        </p:nvSpPr>
-        <p:spPr>
-          <a:xfrm>
-            <a:off x="6400800" y="3886200"/>
-            <a:ext cx="457200" cy="457200"/>
-          </a:xfrm>
-          <a:prstGeom prst="rect">
-            <a:avLst/>
-          </a:prstGeom>
-          <a:noFill/>
-          <a:ln/>
-        </p:spPr>
-        <p:txBody>
-          <a:bodyPr wrap="square" lIns="0" tIns="0" rIns="0" bIns="0" rtlCol="0" anchor="ctr"/>
-          <a:lstStyle/>
-          <a:p>
-            <a:pPr algn="ctr" indent="0" marL="0">
-              <a:buNone/>
-            </a:pPr>
-            <a:r>
-              <a:rPr lang="en-US" sz="1200" b="1" dirty="0">
-                <a:solidFill>
-                  <a:schemeClr val="bg1"/>
-                </a:solidFill>
-              </a:rPr>
-              <a:t>7</a:t>
-            </a:r>
-            <a:endParaRPr lang="en-US" sz="1200" dirty="0"/>
-          </a:p>
-        </p:txBody>
-      </p:sp>
-      <p:sp>
-        <p:nvSpPr>
-          <p:cNvPr id="39" name="step-title-6"/>
-          <p:cNvSpPr txBox="1"/>
-          <p:nvPr/>
-        </p:nvSpPr>
-        <p:spPr>
-          <a:xfrm>
-            <a:off x="6995160" y="3886200"/>
-            <a:ext cx="1737360" cy="457200"/>
-          </a:xfrm>
-          <a:prstGeom prst="rect">
-            <a:avLst/>
-          </a:prstGeom>
-          <a:noFill/>
-          <a:ln/>
-        </p:spPr>
-        <p:txBody>
-          <a:bodyPr wrap="square" lIns="0" tIns="0" rIns="0" bIns="0" rtlCol="0" anchor="ctr"/>
-          <a:lstStyle/>
-          <a:p>
-            <a:pPr indent="0" marL="0">
-              <a:buNone/>
-            </a:pPr>
-            <a:r>
-              <a:rPr lang="en-US" sz="1400" b="1" dirty="0">
-                <a:solidFill>
-                  <a:schemeClr val="tx1"/>
-                </a:solidFill>
-              </a:rPr>
-              <a:t>현황·통계</a:t>
-            </a:r>
-            <a:endParaRPr lang="en-US" sz="1400" dirty="0"/>
-          </a:p>
-        </p:txBody>
-      </p:sp>
-      <p:sp>
-        <p:nvSpPr>
-          <p:cNvPr id="40" name="step-body-6"/>
-          <p:cNvSpPr txBox="1"/>
-          <p:nvPr/>
-        </p:nvSpPr>
-        <p:spPr>
-          <a:xfrm>
-            <a:off x="6400800" y="4480560"/>
-            <a:ext cx="2286000" cy="1188720"/>
-          </a:xfrm>
-          <a:prstGeom prst="rect">
-            <a:avLst/>
-          </a:prstGeom>
-          <a:noFill/>
-          <a:ln/>
-        </p:spPr>
-        <p:txBody>
-          <a:bodyPr wrap="square" lIns="0" tIns="0" rIns="0" bIns="0" rtlCol="0" anchor="t"/>
-          <a:lstStyle/>
-          <a:p>
-            <a:pPr indent="0" marL="0">
-              <a:buNone/>
-            </a:pPr>
-            <a:r>
-              <a:rPr lang="en-US" sz="1150" dirty="0">
-                <a:solidFill>
-                  <a:schemeClr val="tx1"/>
-                </a:solidFill>
-              </a:rPr>
-              <a:t>D-day·기한 임박, 관리대장 엑셀, 반복 요구 지표</a:t>
-            </a:r>
-            <a:endParaRPr lang="en-US" sz="1150" dirty="0"/>
-          </a:p>
-        </p:txBody>
-      </p:sp>
-      <p:sp>
-        <p:nvSpPr>
-          <p:cNvPr id="41" name="step-7"/>
-          <p:cNvSpPr/>
-          <p:nvPr/>
-        </p:nvSpPr>
-        <p:spPr>
-          <a:xfrm>
-            <a:off x="9052560" y="3703320"/>
-            <a:ext cx="2651760" cy="2103120"/>
-          </a:xfrm>
-          <a:prstGeom prst="roundRect">
-            <a:avLst>
-              <a:gd name="adj" fmla="val 5217"/>
-            </a:avLst>
-          </a:prstGeom>
-          <a:solidFill>
-            <a:schemeClr val="bg2"/>
-          </a:solidFill>
-          <a:ln w="12700">
-            <a:solidFill>
-              <a:schemeClr val="bg2"/>
-            </a:solidFill>
-            <a:prstDash val="solid"/>
-          </a:ln>
-        </p:spPr>
-      </p:sp>
-      <p:sp>
-        <p:nvSpPr>
-          <p:cNvPr id="42" name="circle-8"/>
-          <p:cNvSpPr/>
-          <p:nvPr/>
-        </p:nvSpPr>
-        <p:spPr>
-          <a:xfrm>
-            <a:off x="9235440" y="3886200"/>
-            <a:ext cx="457200" cy="457200"/>
-          </a:xfrm>
-          <a:prstGeom prst="ellipse">
-            <a:avLst/>
-          </a:prstGeom>
-          <a:solidFill>
-            <a:schemeClr val="accent2"/>
-          </a:solidFill>
-          <a:ln w="12700">
-            <a:solidFill>
-              <a:schemeClr val="accent2"/>
-            </a:solidFill>
-            <a:prstDash val="solid"/>
-          </a:ln>
-        </p:spPr>
-      </p:sp>
-      <p:sp>
-        <p:nvSpPr>
-          <p:cNvPr id="43" name="circle-label-8"/>
-          <p:cNvSpPr txBox="1"/>
-          <p:nvPr/>
-        </p:nvSpPr>
-        <p:spPr>
-          <a:xfrm>
-            <a:off x="9235440" y="3886200"/>
-            <a:ext cx="457200" cy="457200"/>
-          </a:xfrm>
-          <a:prstGeom prst="rect">
-            <a:avLst/>
-          </a:prstGeom>
-          <a:noFill/>
-          <a:ln/>
-        </p:spPr>
-        <p:txBody>
-          <a:bodyPr wrap="square" lIns="0" tIns="0" rIns="0" bIns="0" rtlCol="0" anchor="ctr"/>
-          <a:lstStyle/>
-          <a:p>
-            <a:pPr algn="ctr" indent="0" marL="0">
-              <a:buNone/>
-            </a:pPr>
-            <a:r>
-              <a:rPr lang="en-US" sz="1200" b="1" dirty="0">
-                <a:solidFill>
-                  <a:schemeClr val="bg1"/>
-                </a:solidFill>
-              </a:rPr>
-              <a:t>8</a:t>
-            </a:r>
-            <a:endParaRPr lang="en-US" sz="1200" dirty="0"/>
-          </a:p>
-        </p:txBody>
-      </p:sp>
-      <p:sp>
-        <p:nvSpPr>
-          <p:cNvPr id="44" name="step-title-7"/>
-          <p:cNvSpPr txBox="1"/>
-          <p:nvPr/>
-        </p:nvSpPr>
-        <p:spPr>
-          <a:xfrm>
-            <a:off x="9829800" y="3886200"/>
-            <a:ext cx="1737360" cy="457200"/>
-          </a:xfrm>
-          <a:prstGeom prst="rect">
-            <a:avLst/>
-          </a:prstGeom>
-          <a:noFill/>
-          <a:ln/>
-        </p:spPr>
-        <p:txBody>
-          <a:bodyPr wrap="square" lIns="0" tIns="0" rIns="0" bIns="0" rtlCol="0" anchor="ctr"/>
-          <a:lstStyle/>
-          <a:p>
-            <a:pPr indent="0" marL="0">
-              <a:buNone/>
-            </a:pPr>
-            <a:r>
-              <a:rPr lang="en-US" sz="1400" b="1" dirty="0">
-                <a:solidFill>
-                  <a:schemeClr val="tx1"/>
-                </a:solidFill>
-              </a:rPr>
-              <a:t>이력에 묻기</a:t>
-            </a:r>
-            <a:endParaRPr lang="en-US" sz="1400" dirty="0"/>
-          </a:p>
-        </p:txBody>
-      </p:sp>
-      <p:sp>
-        <p:nvSpPr>
-          <p:cNvPr id="45" name="step-body-7"/>
-          <p:cNvSpPr txBox="1"/>
-          <p:nvPr/>
-        </p:nvSpPr>
-        <p:spPr>
-          <a:xfrm>
-            <a:off x="9235440" y="4480560"/>
-            <a:ext cx="2286000" cy="1188720"/>
-          </a:xfrm>
-          <a:prstGeom prst="rect">
-            <a:avLst/>
-          </a:prstGeom>
-          <a:noFill/>
-          <a:ln/>
-        </p:spPr>
-        <p:txBody>
-          <a:bodyPr wrap="square" lIns="0" tIns="0" rIns="0" bIns="0" rtlCol="0" anchor="t"/>
-          <a:lstStyle/>
-          <a:p>
-            <a:pPr indent="0" marL="0">
-              <a:buNone/>
-            </a:pPr>
-            <a:r>
-              <a:rPr lang="en-US" sz="1150" dirty="0">
-                <a:solidFill>
-                  <a:schemeClr val="tx1"/>
-                </a:solidFill>
-              </a:rPr>
-              <a:t>자연어 질문 → 조회 도구 호출 → 근거 레코드와 함께 답(AI)</a:t>
-            </a:r>
-            <a:endParaRPr lang="en-US" sz="1150" dirty="0"/>
-          </a:p>
-        </p:txBody>
-      </p:sp>
-      <p:sp>
-        <p:nvSpPr>
-          <p:cNvPr id="46" name="flow-note"/>
-          <p:cNvSpPr txBox="1"/>
-          <p:nvPr/>
-        </p:nvSpPr>
-        <p:spPr>
-          <a:xfrm>
-            <a:off x="548640" y="5943600"/>
-            <a:ext cx="11064240" cy="320040"/>
-          </a:xfrm>
-          <a:prstGeom prst="rect">
-            <a:avLst/>
-          </a:prstGeom>
-          <a:noFill/>
-          <a:ln/>
-        </p:spPr>
-        <p:txBody>
-          <a:bodyPr wrap="square" lIns="0" tIns="0" rIns="0" bIns="0" rtlCol="0" anchor="ctr"/>
-          <a:lstStyle/>
-          <a:p>
-            <a:pPr indent="0" marL="0">
-              <a:buNone/>
-            </a:pPr>
-            <a:r>
               <a:rPr lang="en-US" sz="1100" i="1" dirty="0">
                 <a:solidFill>
                   <a:schemeClr val="tx2"/>
                 </a:solidFill>
               </a:rPr>
-              <a:t>주황 번호(③·④·⑧)가 AI가 기억·예측·연결을 맡는 화면입니다. 설정 화면에서 API 연결·모델·비용을 확인합니다.</a:t>
+              <a:t>윗줄 1→2→3이 '새 요구서 처리' 한 흐름(단계 표시·다음 버튼). 주황이 AI가 기억·예측·연결을 맡는 곳. 홈에서 세 가지 일로 바로 들어가며, 샘플 선택칸은 시연 모드에서만 보입니다.</a:t>
             </a:r>
             <a:endParaRPr lang="en-US" sz="1100" dirty="0"/>
           </a:p>
@@ -17341,7 +17011,7 @@
                   <a:schemeClr val="tx2"/>
                 </a:solidFill>
               </a:rPr>
-              <a:t>③ 사유 문구 후보</a:t>
+              <a:t>2단계 · 사유 문구 후보</a:t>
             </a:r>
             <a:endParaRPr lang="en-US" sz="1600" dirty="0"/>
           </a:p>
@@ -17463,7 +17133,7 @@
                   <a:schemeClr val="tx2"/>
                 </a:solidFill>
               </a:rPr>
-              <a:t>④ 예상 후속 질문</a:t>
+              <a:t>3단계 · 예상 후속 질문</a:t>
             </a:r>
             <a:endParaRPr lang="en-US" sz="1600" dirty="0"/>
           </a:p>
@@ -17585,7 +17255,7 @@
                   <a:schemeClr val="tx2"/>
                 </a:solidFill>
               </a:rPr>
-              <a:t>⑧ 이력에 묻기</a:t>
+              <a:t>이력에 묻기</a:t>
             </a:r>
             <a:endParaRPr lang="en-US" sz="1600" dirty="0"/>
           </a:p>
@@ -17853,7 +17523,7 @@
                   <a:schemeClr val="tx1"/>
                 </a:solidFill>
               </a:rPr>
-              <a:t>① 과거 자료 등록 — 그때 낸 실적표·회신 공문의 표를 그대로 넣는다</a:t>
+              <a:t>과거 답변 등록 — 그때 낸 실적표·회신 공문(HWP)의 표를 그대로 넣는다</a:t>
             </a:r>
             <a:endParaRPr lang="en-US" sz="2800" dirty="0"/>
           </a:p>
@@ -17868,11 +17538,11 @@
         <p:spPr>
           <a:xfrm>
             <a:off x="475488" y="1298448"/>
-            <a:ext cx="2432304" cy="4626864"/>
+            <a:ext cx="3163824" cy="4626864"/>
           </a:xfrm>
           <a:prstGeom prst="roundRect">
             <a:avLst>
-              <a:gd name="adj" fmla="val 3759"/>
+              <a:gd name="adj" fmla="val 2890"/>
             </a:avLst>
           </a:prstGeom>
           <a:solidFill>
@@ -17902,7 +17572,7 @@
         <p:spPr>
           <a:xfrm>
             <a:off x="548640" y="1371600"/>
-            <a:ext cx="2286000" cy="4480560"/>
+            <a:ext cx="3017520" cy="4480560"/>
           </a:xfrm>
           <a:prstGeom prst="rect">
             <a:avLst/>
@@ -17918,7 +17588,7 @@
         <p:spPr>
           <a:xfrm>
             <a:off x="548640" y="5961888"/>
-            <a:ext cx="2286000" cy="274320"/>
+            <a:ext cx="3017520" cy="274320"/>
           </a:xfrm>
           <a:prstGeom prst="rect">
             <a:avLst/>
@@ -17939,7 +17609,7 @@
                   <a:schemeClr val="accent5"/>
                 </a:solidFill>
               </a:rPr>
-              <a:t>가로 펼침 실적표 → 열 매핑 → 48건 변환</a:t>
+              <a:t>실적표 서식 그대로 → 표 읽는 법 확인 → 48건 변환</a:t>
             </a:r>
             <a:endParaRPr lang="en-US" sz="1000" dirty="0"/>
           </a:p>
@@ -18069,7 +17739,7 @@
                   <a:schemeClr val="tx2"/>
                 </a:solidFill>
               </a:rPr>
-              <a:t>제출값 입력 방식 3가지 (①·③ 공통)</a:t>
+              <a:t>값 입력 방식 3가지 (과거 답변 등록 · 2단계 공통)</a:t>
             </a:r>
             <a:endParaRPr lang="en-US" sz="1100" dirty="0"/>
           </a:p>

--- a/app/docs/발표자료_EBS_요구자료대응에이전트.pptx
+++ b/app/docs/발표자료_EBS_요구자료대응에이전트.pptx
@@ -125,14 +125,14 @@
   <p:extLst>
     <p:ext uri="{521415D9-36F7-43E2-AB2F-B90AF26B5E84}">
       <p14:sectionLst xmlns:p14="http://schemas.microsoft.com/office/powerpoint/2010/main">
-        <p14:section name="개요" id="{d45b5ef4-27c9-f29b-5c54-d23ddbbfd5df}">
+        <p14:section name="개요" id="{7e162524-ff84-2a65-62ec-493f5e41ee04}">
           <p14:sldIdLst>
             <p14:sldId id="256"/>
             <p14:sldId id="257"/>
             <p14:sldId id="258"/>
           </p14:sldIdLst>
         </p14:section>
-        <p14:section name="해결" id="{30aa8b69-c6ca-4f6c-5c9d-125ab711da25}">
+        <p14:section name="해결" id="{cc4bf690-346e-714d-e4fa-e03f77b1e29b}">
           <p14:sldIdLst>
             <p14:sldId id="259"/>
             <p14:sldId id="260"/>
@@ -140,7 +140,7 @@
             <p14:sldId id="262"/>
           </p14:sldIdLst>
         </p14:section>
-        <p14:section name="시연" id="{39d1bbe9-2605-4166-6e73-43477f591061}">
+        <p14:section name="시연" id="{3815e35a-d7cc-d481-44c8-75a1ea3e9a2a}">
           <p14:sldIdLst>
             <p14:sldId id="263"/>
             <p14:sldId id="264"/>
@@ -151,14 +151,14 @@
             <p14:sldId id="269"/>
           </p14:sldIdLst>
         </p14:section>
-        <p14:section name="구현" id="{bb027657-f87a-4174-b7b3-178070029095}">
+        <p14:section name="구현" id="{9fc09df8-a07d-bcbe-e41c-0f63f349eb14}">
           <p14:sldIdLst>
             <p14:sldId id="270"/>
             <p14:sldId id="271"/>
             <p14:sldId id="272"/>
           </p14:sldIdLst>
         </p14:section>
-        <p14:section name="마무리" id="{e9831b21-d89c-0159-192a-1044ffbb3b24}">
+        <p14:section name="마무리" id="{d44ada8c-6d07-737c-4c2c-67e31ed9f152}">
           <p14:sldIdLst>
             <p14:sldId id="273"/>
             <p14:sldId id="274"/>

--- a/app/docs/발표자료_EBS_요구자료대응에이전트.pptx
+++ b/app/docs/발표자료_EBS_요구자료대응에이전트.pptx
@@ -125,14 +125,14 @@
   <p:extLst>
     <p:ext uri="{521415D9-36F7-43E2-AB2F-B90AF26B5E84}">
       <p14:sectionLst xmlns:p14="http://schemas.microsoft.com/office/powerpoint/2010/main">
-        <p14:section name="개요" id="{7e162524-ff84-2a65-62ec-493f5e41ee04}">
+        <p14:section name="개요" id="{98fba5a9-fda9-a409-abf7-49f9e39a02de}">
           <p14:sldIdLst>
             <p14:sldId id="256"/>
             <p14:sldId id="257"/>
             <p14:sldId id="258"/>
           </p14:sldIdLst>
         </p14:section>
-        <p14:section name="해결" id="{cc4bf690-346e-714d-e4fa-e03f77b1e29b}">
+        <p14:section name="해결" id="{c4ca6ce8-f574-257e-819c-e9bdf89deadf}">
           <p14:sldIdLst>
             <p14:sldId id="259"/>
             <p14:sldId id="260"/>
@@ -140,7 +140,7 @@
             <p14:sldId id="262"/>
           </p14:sldIdLst>
         </p14:section>
-        <p14:section name="시연" id="{3815e35a-d7cc-d481-44c8-75a1ea3e9a2a}">
+        <p14:section name="시연" id="{2a4139e1-ae90-dccd-0936-ea9f56677f6d}">
           <p14:sldIdLst>
             <p14:sldId id="263"/>
             <p14:sldId id="264"/>
@@ -151,14 +151,14 @@
             <p14:sldId id="269"/>
           </p14:sldIdLst>
         </p14:section>
-        <p14:section name="구현" id="{9fc09df8-a07d-bcbe-e41c-0f63f349eb14}">
+        <p14:section name="구현" id="{984cb727-1c10-7355-89b8-a9264efb279d}">
           <p14:sldIdLst>
             <p14:sldId id="270"/>
             <p14:sldId id="271"/>
             <p14:sldId id="272"/>
           </p14:sldIdLst>
         </p14:section>
-        <p14:section name="마무리" id="{d44ada8c-6d07-737c-4c2c-67e31ed9f152}">
+        <p14:section name="마무리" id="{1a3637ea-5bbc-bba8-82b5-158bc8f5fcac}">
           <p14:sldIdLst>
             <p14:sldId id="273"/>
             <p14:sldId id="274"/>

--- a/app/docs/발표자료_EBS_요구자료대응에이전트.pptx
+++ b/app/docs/발표자료_EBS_요구자료대응에이전트.pptx
@@ -125,14 +125,14 @@
   <p:extLst>
     <p:ext uri="{521415D9-36F7-43E2-AB2F-B90AF26B5E84}">
       <p14:sectionLst xmlns:p14="http://schemas.microsoft.com/office/powerpoint/2010/main">
-        <p14:section name="개요" id="{98fba5a9-fda9-a409-abf7-49f9e39a02de}">
+        <p14:section name="개요" id="{36fc804d-51dd-a972-2476-93e118f69383}">
           <p14:sldIdLst>
             <p14:sldId id="256"/>
             <p14:sldId id="257"/>
             <p14:sldId id="258"/>
           </p14:sldIdLst>
         </p14:section>
-        <p14:section name="해결" id="{c4ca6ce8-f574-257e-819c-e9bdf89deadf}">
+        <p14:section name="해결" id="{89a067be-621d-2dcf-92e6-2f80aad40580}">
           <p14:sldIdLst>
             <p14:sldId id="259"/>
             <p14:sldId id="260"/>
@@ -140,7 +140,7 @@
             <p14:sldId id="262"/>
           </p14:sldIdLst>
         </p14:section>
-        <p14:section name="시연" id="{2a4139e1-ae90-dccd-0936-ea9f56677f6d}">
+        <p14:section name="시연" id="{99c408b5-c7c7-7fe9-2a90-1b45c5cd68a5}">
           <p14:sldIdLst>
             <p14:sldId id="263"/>
             <p14:sldId id="264"/>
@@ -151,14 +151,14 @@
             <p14:sldId id="269"/>
           </p14:sldIdLst>
         </p14:section>
-        <p14:section name="구현" id="{984cb727-1c10-7355-89b8-a9264efb279d}">
+        <p14:section name="구현" id="{70463c9f-a614-457f-cc8e-3936f428da6d}">
           <p14:sldIdLst>
             <p14:sldId id="270"/>
             <p14:sldId id="271"/>
             <p14:sldId id="272"/>
           </p14:sldIdLst>
         </p14:section>
-        <p14:section name="마무리" id="{1a3637ea-5bbc-bba8-82b5-158bc8f5fcac}">
+        <p14:section name="마무리" id="{13db36e4-71cb-eb77-bdc6-4fad9d34f749}">
           <p14:sldIdLst>
             <p14:sldId id="273"/>
             <p14:sldId id="274"/>
